--- a/docs/WeatheryApp_Presentation.pptx
+++ b/docs/WeatheryApp_Presentation.pptx
@@ -17,6 +17,7 @@
     <p:sldId id="265" r:id="rId16"/>
     <p:sldId id="266" r:id="rId17"/>
     <p:sldId id="267" r:id="rId18"/>
+    <p:sldId id="268" r:id="rId19"/>
   </p:sldIdLst>
   <p:sldSz cx="12188952" cy="6858000" type="screen4x3"/>
   <p:notesSz cx="6858000" cy="9144000"/>
@@ -3802,7 +3803,7 @@
                   <a:srgbClr val="993322"/>
                 </a:solidFill>
               </a:rPr>
-              <a:t>No native equivalent on Android</a:t>
+              <a:t>No native drawer equivalent on Android</a:t>
             </a:r>
           </a:p>
         </p:txBody>
@@ -4226,6 +4227,844 @@
 </file>
 
 <file path=ppt/slides/slide11.xml><?xml version="1.0" encoding="utf-8"?>
+<p:sld xmlns:a="http://schemas.openxmlformats.org/drawingml/2006/main" xmlns:p="http://schemas.openxmlformats.org/presentationml/2006/main" xmlns:r="http://schemas.openxmlformats.org/officeDocument/2006/relationships">
+  <p:cSld>
+    <p:bg>
+      <p:bgPr>
+        <a:solidFill>
+          <a:srgbClr val="0E1E38"/>
+        </a:solidFill>
+        <a:effectLst/>
+      </p:bgPr>
+    </p:bg>
+    <p:spTree>
+      <p:nvGrpSpPr>
+        <p:cNvPr id="1" name=""/>
+        <p:cNvGrpSpPr/>
+        <p:nvPr/>
+      </p:nvGrpSpPr>
+      <p:grpSpPr/>
+      <p:sp>
+        <p:nvSpPr>
+          <p:cNvPr id="2" name="Rectangle 1"/>
+          <p:cNvSpPr/>
+          <p:nvPr/>
+        </p:nvSpPr>
+        <p:spPr>
+          <a:xfrm>
+            <a:off x="0" y="0"/>
+            <a:ext cx="12188952" cy="1097280"/>
+          </a:xfrm>
+          <a:prstGeom prst="rect">
+            <a:avLst/>
+          </a:prstGeom>
+          <a:solidFill>
+            <a:srgbClr val="0E1E38"/>
+          </a:solidFill>
+          <a:ln>
+            <a:noFill/>
+          </a:ln>
+        </p:spPr>
+        <p:style>
+          <a:lnRef idx="1">
+            <a:schemeClr val="accent1"/>
+          </a:lnRef>
+          <a:fillRef idx="3">
+            <a:schemeClr val="accent1"/>
+          </a:fillRef>
+          <a:effectRef idx="2">
+            <a:schemeClr val="accent1"/>
+          </a:effectRef>
+          <a:fontRef idx="minor">
+            <a:schemeClr val="lt1"/>
+          </a:fontRef>
+        </p:style>
+        <p:txBody>
+          <a:bodyPr rtlCol="0" anchor="ctr"/>
+          <a:lstStyle/>
+          <a:p>
+            <a:pPr algn="ctr"/>
+          </a:p>
+        </p:txBody>
+      </p:sp>
+      <p:sp>
+        <p:nvSpPr>
+          <p:cNvPr id="3" name="TextBox 2"/>
+          <p:cNvSpPr txBox="1"/>
+          <p:nvPr/>
+        </p:nvSpPr>
+        <p:spPr>
+          <a:xfrm>
+            <a:off x="411480" y="201168"/>
+            <a:ext cx="11430000" cy="777240"/>
+          </a:xfrm>
+          <a:prstGeom prst="rect">
+            <a:avLst/>
+          </a:prstGeom>
+          <a:noFill/>
+        </p:spPr>
+        <p:txBody>
+          <a:bodyPr wrap="square">
+            <a:spAutoFit/>
+          </a:bodyPr>
+          <a:lstStyle/>
+          <a:p>
+            <a:pPr algn="l"/>
+            <a:r>
+              <a:rPr sz="3200" b="1" i="0">
+                <a:solidFill>
+                  <a:srgbClr val="FFFFFF"/>
+                </a:solidFill>
+              </a:rPr>
+              <a:t>Token Usage  --  Across All Sessions</a:t>
+            </a:r>
+          </a:p>
+        </p:txBody>
+      </p:sp>
+      <p:sp>
+        <p:nvSpPr>
+          <p:cNvPr id="4" name="TextBox 3"/>
+          <p:cNvSpPr txBox="1"/>
+          <p:nvPr/>
+        </p:nvSpPr>
+        <p:spPr>
+          <a:xfrm>
+            <a:off x="411480" y="1115568"/>
+            <a:ext cx="11338560" cy="365760"/>
+          </a:xfrm>
+          <a:prstGeom prst="rect">
+            <a:avLst/>
+          </a:prstGeom>
+          <a:noFill/>
+        </p:spPr>
+        <p:txBody>
+          <a:bodyPr wrap="square">
+            <a:spAutoFit/>
+          </a:bodyPr>
+          <a:lstStyle/>
+          <a:p>
+            <a:pPr algn="l"/>
+            <a:r>
+              <a:rPr sz="1500" b="0" i="1">
+                <a:solidFill>
+                  <a:srgbClr val="9999AA"/>
+                </a:solidFill>
+              </a:rPr>
+              <a:t>Real data from 4 Claude Code sessions  |  Measured from session logs</a:t>
+            </a:r>
+          </a:p>
+        </p:txBody>
+      </p:sp>
+      <p:sp>
+        <p:nvSpPr>
+          <p:cNvPr id="5" name="Rectangle 4"/>
+          <p:cNvSpPr/>
+          <p:nvPr/>
+        </p:nvSpPr>
+        <p:spPr>
+          <a:xfrm>
+            <a:off x="320040" y="1572768"/>
+            <a:ext cx="5029200" cy="3017520"/>
+          </a:xfrm>
+          <a:prstGeom prst="rect">
+            <a:avLst/>
+          </a:prstGeom>
+          <a:solidFill>
+            <a:srgbClr val="4A90E2"/>
+          </a:solidFill>
+          <a:ln>
+            <a:noFill/>
+          </a:ln>
+        </p:spPr>
+        <p:style>
+          <a:lnRef idx="1">
+            <a:schemeClr val="accent1"/>
+          </a:lnRef>
+          <a:fillRef idx="3">
+            <a:schemeClr val="accent1"/>
+          </a:fillRef>
+          <a:effectRef idx="2">
+            <a:schemeClr val="accent1"/>
+          </a:effectRef>
+          <a:fontRef idx="minor">
+            <a:schemeClr val="lt1"/>
+          </a:fontRef>
+        </p:style>
+        <p:txBody>
+          <a:bodyPr rtlCol="0" anchor="ctr"/>
+          <a:lstStyle/>
+          <a:p>
+            <a:pPr algn="ctr"/>
+          </a:p>
+        </p:txBody>
+      </p:sp>
+      <p:sp>
+        <p:nvSpPr>
+          <p:cNvPr id="6" name="TextBox 5"/>
+          <p:cNvSpPr txBox="1"/>
+          <p:nvPr/>
+        </p:nvSpPr>
+        <p:spPr>
+          <a:xfrm>
+            <a:off x="320040" y="1664208"/>
+            <a:ext cx="5029200" cy="1280160"/>
+          </a:xfrm>
+          <a:prstGeom prst="rect">
+            <a:avLst/>
+          </a:prstGeom>
+          <a:noFill/>
+        </p:spPr>
+        <p:txBody>
+          <a:bodyPr wrap="square">
+            <a:spAutoFit/>
+          </a:bodyPr>
+          <a:lstStyle/>
+          <a:p>
+            <a:pPr algn="ctr"/>
+            <a:r>
+              <a:rPr sz="5200" b="1" i="0">
+                <a:solidFill>
+                  <a:srgbClr val="FFFFFF"/>
+                </a:solidFill>
+              </a:rPr>
+              <a:t>10,022,333</a:t>
+            </a:r>
+          </a:p>
+        </p:txBody>
+      </p:sp>
+      <p:sp>
+        <p:nvSpPr>
+          <p:cNvPr id="7" name="TextBox 6"/>
+          <p:cNvSpPr txBox="1"/>
+          <p:nvPr/>
+        </p:nvSpPr>
+        <p:spPr>
+          <a:xfrm>
+            <a:off x="320040" y="2834640"/>
+            <a:ext cx="5029200" cy="457200"/>
+          </a:xfrm>
+          <a:prstGeom prst="rect">
+            <a:avLst/>
+          </a:prstGeom>
+          <a:noFill/>
+        </p:spPr>
+        <p:txBody>
+          <a:bodyPr wrap="square">
+            <a:spAutoFit/>
+          </a:bodyPr>
+          <a:lstStyle/>
+          <a:p>
+            <a:pPr algn="ctr"/>
+            <a:r>
+              <a:rPr sz="1800" b="0" i="0">
+                <a:solidFill>
+                  <a:srgbClr val="CCE5FF"/>
+                </a:solidFill>
+              </a:rPr>
+              <a:t>Total Tokens Processed</a:t>
+            </a:r>
+          </a:p>
+        </p:txBody>
+      </p:sp>
+      <p:sp>
+        <p:nvSpPr>
+          <p:cNvPr id="8" name="TextBox 7"/>
+          <p:cNvSpPr txBox="1"/>
+          <p:nvPr/>
+        </p:nvSpPr>
+        <p:spPr>
+          <a:xfrm>
+            <a:off x="320040" y="3273552"/>
+            <a:ext cx="5029200" cy="329184"/>
+          </a:xfrm>
+          <a:prstGeom prst="rect">
+            <a:avLst/>
+          </a:prstGeom>
+          <a:noFill/>
+        </p:spPr>
+        <p:txBody>
+          <a:bodyPr wrap="square">
+            <a:spAutoFit/>
+          </a:bodyPr>
+          <a:lstStyle/>
+          <a:p>
+            <a:pPr algn="ctr"/>
+            <a:r>
+              <a:rPr sz="1400" b="0" i="1">
+                <a:solidFill>
+                  <a:srgbClr val="AACCFF"/>
+                </a:solidFill>
+              </a:rPr>
+              <a:t>(including cache)</a:t>
+            </a:r>
+          </a:p>
+        </p:txBody>
+      </p:sp>
+      <p:sp>
+        <p:nvSpPr>
+          <p:cNvPr id="9" name="Rectangle 8"/>
+          <p:cNvSpPr/>
+          <p:nvPr/>
+        </p:nvSpPr>
+        <p:spPr>
+          <a:xfrm>
+            <a:off x="5577840" y="1572768"/>
+            <a:ext cx="3246120" cy="1298448"/>
+          </a:xfrm>
+          <a:prstGeom prst="rect">
+            <a:avLst/>
+          </a:prstGeom>
+          <a:solidFill>
+            <a:srgbClr val="1A6B3C"/>
+          </a:solidFill>
+          <a:ln>
+            <a:noFill/>
+          </a:ln>
+        </p:spPr>
+        <p:style>
+          <a:lnRef idx="1">
+            <a:schemeClr val="accent1"/>
+          </a:lnRef>
+          <a:fillRef idx="3">
+            <a:schemeClr val="accent1"/>
+          </a:fillRef>
+          <a:effectRef idx="2">
+            <a:schemeClr val="accent1"/>
+          </a:effectRef>
+          <a:fontRef idx="minor">
+            <a:schemeClr val="lt1"/>
+          </a:fontRef>
+        </p:style>
+        <p:txBody>
+          <a:bodyPr rtlCol="0" anchor="ctr"/>
+          <a:lstStyle/>
+          <a:p>
+            <a:pPr algn="ctr"/>
+          </a:p>
+        </p:txBody>
+      </p:sp>
+      <p:sp>
+        <p:nvSpPr>
+          <p:cNvPr id="10" name="TextBox 9"/>
+          <p:cNvSpPr txBox="1"/>
+          <p:nvPr/>
+        </p:nvSpPr>
+        <p:spPr>
+          <a:xfrm>
+            <a:off x="5577840" y="1682496"/>
+            <a:ext cx="3246120" cy="685800"/>
+          </a:xfrm>
+          <a:prstGeom prst="rect">
+            <a:avLst/>
+          </a:prstGeom>
+          <a:noFill/>
+        </p:spPr>
+        <p:txBody>
+          <a:bodyPr wrap="square">
+            <a:spAutoFit/>
+          </a:bodyPr>
+          <a:lstStyle/>
+          <a:p>
+            <a:pPr algn="ctr"/>
+            <a:r>
+              <a:rPr sz="3000" b="1" i="0">
+                <a:solidFill>
+                  <a:srgbClr val="A8FFC8"/>
+                </a:solidFill>
+              </a:rPr>
+              <a:t>9,094,592</a:t>
+            </a:r>
+          </a:p>
+        </p:txBody>
+      </p:sp>
+      <p:sp>
+        <p:nvSpPr>
+          <p:cNvPr id="11" name="TextBox 10"/>
+          <p:cNvSpPr txBox="1"/>
+          <p:nvPr/>
+        </p:nvSpPr>
+        <p:spPr>
+          <a:xfrm>
+            <a:off x="5577840" y="2377440"/>
+            <a:ext cx="3246120" cy="420624"/>
+          </a:xfrm>
+          <a:prstGeom prst="rect">
+            <a:avLst/>
+          </a:prstGeom>
+          <a:noFill/>
+        </p:spPr>
+        <p:txBody>
+          <a:bodyPr wrap="square">
+            <a:spAutoFit/>
+          </a:bodyPr>
+          <a:lstStyle/>
+          <a:p>
+            <a:pPr algn="ctr"/>
+            <a:r>
+              <a:rPr sz="1400" b="0" i="0">
+                <a:solidFill>
+                  <a:srgbClr val="FFFFFF"/>
+                </a:solidFill>
+              </a:rPr>
+              <a:t>Cache Read Tokens</a:t>
+            </a:r>
+          </a:p>
+        </p:txBody>
+      </p:sp>
+      <p:sp>
+        <p:nvSpPr>
+          <p:cNvPr id="12" name="Rectangle 11"/>
+          <p:cNvSpPr/>
+          <p:nvPr/>
+        </p:nvSpPr>
+        <p:spPr>
+          <a:xfrm>
+            <a:off x="9025128" y="1572768"/>
+            <a:ext cx="3246120" cy="1298448"/>
+          </a:xfrm>
+          <a:prstGeom prst="rect">
+            <a:avLst/>
+          </a:prstGeom>
+          <a:solidFill>
+            <a:srgbClr val="5B2D8E"/>
+          </a:solidFill>
+          <a:ln>
+            <a:noFill/>
+          </a:ln>
+        </p:spPr>
+        <p:style>
+          <a:lnRef idx="1">
+            <a:schemeClr val="accent1"/>
+          </a:lnRef>
+          <a:fillRef idx="3">
+            <a:schemeClr val="accent1"/>
+          </a:fillRef>
+          <a:effectRef idx="2">
+            <a:schemeClr val="accent1"/>
+          </a:effectRef>
+          <a:fontRef idx="minor">
+            <a:schemeClr val="lt1"/>
+          </a:fontRef>
+        </p:style>
+        <p:txBody>
+          <a:bodyPr rtlCol="0" anchor="ctr"/>
+          <a:lstStyle/>
+          <a:p>
+            <a:pPr algn="ctr"/>
+          </a:p>
+        </p:txBody>
+      </p:sp>
+      <p:sp>
+        <p:nvSpPr>
+          <p:cNvPr id="13" name="TextBox 12"/>
+          <p:cNvSpPr txBox="1"/>
+          <p:nvPr/>
+        </p:nvSpPr>
+        <p:spPr>
+          <a:xfrm>
+            <a:off x="9025128" y="1682496"/>
+            <a:ext cx="3246120" cy="685800"/>
+          </a:xfrm>
+          <a:prstGeom prst="rect">
+            <a:avLst/>
+          </a:prstGeom>
+          <a:noFill/>
+        </p:spPr>
+        <p:txBody>
+          <a:bodyPr wrap="square">
+            <a:spAutoFit/>
+          </a:bodyPr>
+          <a:lstStyle/>
+          <a:p>
+            <a:pPr algn="ctr"/>
+            <a:r>
+              <a:rPr sz="3000" b="1" i="0">
+                <a:solidFill>
+                  <a:srgbClr val="DDBBFF"/>
+                </a:solidFill>
+              </a:rPr>
+              <a:t>584,219</a:t>
+            </a:r>
+          </a:p>
+        </p:txBody>
+      </p:sp>
+      <p:sp>
+        <p:nvSpPr>
+          <p:cNvPr id="14" name="TextBox 13"/>
+          <p:cNvSpPr txBox="1"/>
+          <p:nvPr/>
+        </p:nvSpPr>
+        <p:spPr>
+          <a:xfrm>
+            <a:off x="9025128" y="2377440"/>
+            <a:ext cx="3246120" cy="420624"/>
+          </a:xfrm>
+          <a:prstGeom prst="rect">
+            <a:avLst/>
+          </a:prstGeom>
+          <a:noFill/>
+        </p:spPr>
+        <p:txBody>
+          <a:bodyPr wrap="square">
+            <a:spAutoFit/>
+          </a:bodyPr>
+          <a:lstStyle/>
+          <a:p>
+            <a:pPr algn="ctr"/>
+            <a:r>
+              <a:rPr sz="1400" b="0" i="0">
+                <a:solidFill>
+                  <a:srgbClr val="FFFFFF"/>
+                </a:solidFill>
+              </a:rPr>
+              <a:t>Cache Write Tokens</a:t>
+            </a:r>
+          </a:p>
+        </p:txBody>
+      </p:sp>
+      <p:sp>
+        <p:nvSpPr>
+          <p:cNvPr id="15" name="Rectangle 14"/>
+          <p:cNvSpPr/>
+          <p:nvPr/>
+        </p:nvSpPr>
+        <p:spPr>
+          <a:xfrm>
+            <a:off x="5577840" y="3017520"/>
+            <a:ext cx="3246120" cy="1298448"/>
+          </a:xfrm>
+          <a:prstGeom prst="rect">
+            <a:avLst/>
+          </a:prstGeom>
+          <a:solidFill>
+            <a:srgbClr val="B84600"/>
+          </a:solidFill>
+          <a:ln>
+            <a:noFill/>
+          </a:ln>
+        </p:spPr>
+        <p:style>
+          <a:lnRef idx="1">
+            <a:schemeClr val="accent1"/>
+          </a:lnRef>
+          <a:fillRef idx="3">
+            <a:schemeClr val="accent1"/>
+          </a:fillRef>
+          <a:effectRef idx="2">
+            <a:schemeClr val="accent1"/>
+          </a:effectRef>
+          <a:fontRef idx="minor">
+            <a:schemeClr val="lt1"/>
+          </a:fontRef>
+        </p:style>
+        <p:txBody>
+          <a:bodyPr rtlCol="0" anchor="ctr"/>
+          <a:lstStyle/>
+          <a:p>
+            <a:pPr algn="ctr"/>
+          </a:p>
+        </p:txBody>
+      </p:sp>
+      <p:sp>
+        <p:nvSpPr>
+          <p:cNvPr id="16" name="TextBox 15"/>
+          <p:cNvSpPr txBox="1"/>
+          <p:nvPr/>
+        </p:nvSpPr>
+        <p:spPr>
+          <a:xfrm>
+            <a:off x="5577840" y="3127248"/>
+            <a:ext cx="3246120" cy="685800"/>
+          </a:xfrm>
+          <a:prstGeom prst="rect">
+            <a:avLst/>
+          </a:prstGeom>
+          <a:noFill/>
+        </p:spPr>
+        <p:txBody>
+          <a:bodyPr wrap="square">
+            <a:spAutoFit/>
+          </a:bodyPr>
+          <a:lstStyle/>
+          <a:p>
+            <a:pPr algn="ctr"/>
+            <a:r>
+              <a:rPr sz="3000" b="1" i="0">
+                <a:solidFill>
+                  <a:srgbClr val="FFCC88"/>
+                </a:solidFill>
+              </a:rPr>
+              <a:t>343,087</a:t>
+            </a:r>
+          </a:p>
+        </p:txBody>
+      </p:sp>
+      <p:sp>
+        <p:nvSpPr>
+          <p:cNvPr id="17" name="TextBox 16"/>
+          <p:cNvSpPr txBox="1"/>
+          <p:nvPr/>
+        </p:nvSpPr>
+        <p:spPr>
+          <a:xfrm>
+            <a:off x="5577840" y="3822192"/>
+            <a:ext cx="3246120" cy="420624"/>
+          </a:xfrm>
+          <a:prstGeom prst="rect">
+            <a:avLst/>
+          </a:prstGeom>
+          <a:noFill/>
+        </p:spPr>
+        <p:txBody>
+          <a:bodyPr wrap="square">
+            <a:spAutoFit/>
+          </a:bodyPr>
+          <a:lstStyle/>
+          <a:p>
+            <a:pPr algn="ctr"/>
+            <a:r>
+              <a:rPr sz="1400" b="0" i="0">
+                <a:solidFill>
+                  <a:srgbClr val="FFFFFF"/>
+                </a:solidFill>
+              </a:rPr>
+              <a:t>Output Tokens
+(Claude responses)</a:t>
+            </a:r>
+          </a:p>
+        </p:txBody>
+      </p:sp>
+      <p:sp>
+        <p:nvSpPr>
+          <p:cNvPr id="18" name="Rectangle 17"/>
+          <p:cNvSpPr/>
+          <p:nvPr/>
+        </p:nvSpPr>
+        <p:spPr>
+          <a:xfrm>
+            <a:off x="9025128" y="3017520"/>
+            <a:ext cx="3246120" cy="1298448"/>
+          </a:xfrm>
+          <a:prstGeom prst="rect">
+            <a:avLst/>
+          </a:prstGeom>
+          <a:solidFill>
+            <a:srgbClr val="1C3557"/>
+          </a:solidFill>
+          <a:ln>
+            <a:noFill/>
+          </a:ln>
+        </p:spPr>
+        <p:style>
+          <a:lnRef idx="1">
+            <a:schemeClr val="accent1"/>
+          </a:lnRef>
+          <a:fillRef idx="3">
+            <a:schemeClr val="accent1"/>
+          </a:fillRef>
+          <a:effectRef idx="2">
+            <a:schemeClr val="accent1"/>
+          </a:effectRef>
+          <a:fontRef idx="minor">
+            <a:schemeClr val="lt1"/>
+          </a:fontRef>
+        </p:style>
+        <p:txBody>
+          <a:bodyPr rtlCol="0" anchor="ctr"/>
+          <a:lstStyle/>
+          <a:p>
+            <a:pPr algn="ctr"/>
+          </a:p>
+        </p:txBody>
+      </p:sp>
+      <p:sp>
+        <p:nvSpPr>
+          <p:cNvPr id="19" name="TextBox 18"/>
+          <p:cNvSpPr txBox="1"/>
+          <p:nvPr/>
+        </p:nvSpPr>
+        <p:spPr>
+          <a:xfrm>
+            <a:off x="9025128" y="3127248"/>
+            <a:ext cx="3246120" cy="685800"/>
+          </a:xfrm>
+          <a:prstGeom prst="rect">
+            <a:avLst/>
+          </a:prstGeom>
+          <a:noFill/>
+        </p:spPr>
+        <p:txBody>
+          <a:bodyPr wrap="square">
+            <a:spAutoFit/>
+          </a:bodyPr>
+          <a:lstStyle/>
+          <a:p>
+            <a:pPr algn="ctr"/>
+            <a:r>
+              <a:rPr sz="3000" b="1" i="0">
+                <a:solidFill>
+                  <a:srgbClr val="AACCFF"/>
+                </a:solidFill>
+              </a:rPr>
+              <a:t>435</a:t>
+            </a:r>
+          </a:p>
+        </p:txBody>
+      </p:sp>
+      <p:sp>
+        <p:nvSpPr>
+          <p:cNvPr id="20" name="TextBox 19"/>
+          <p:cNvSpPr txBox="1"/>
+          <p:nvPr/>
+        </p:nvSpPr>
+        <p:spPr>
+          <a:xfrm>
+            <a:off x="9025128" y="3822192"/>
+            <a:ext cx="3246120" cy="420624"/>
+          </a:xfrm>
+          <a:prstGeom prst="rect">
+            <a:avLst/>
+          </a:prstGeom>
+          <a:noFill/>
+        </p:spPr>
+        <p:txBody>
+          <a:bodyPr wrap="square">
+            <a:spAutoFit/>
+          </a:bodyPr>
+          <a:lstStyle/>
+          <a:p>
+            <a:pPr algn="ctr"/>
+            <a:r>
+              <a:rPr sz="1400" b="0" i="0">
+                <a:solidFill>
+                  <a:srgbClr val="FFFFFF"/>
+                </a:solidFill>
+              </a:rPr>
+              <a:t>Fresh Input Tokens</a:t>
+            </a:r>
+          </a:p>
+        </p:txBody>
+      </p:sp>
+      <p:sp>
+        <p:nvSpPr>
+          <p:cNvPr id="21" name="Rectangle 20"/>
+          <p:cNvSpPr/>
+          <p:nvPr/>
+        </p:nvSpPr>
+        <p:spPr>
+          <a:xfrm>
+            <a:off x="320040" y="4773168"/>
+            <a:ext cx="11548872" cy="1371600"/>
+          </a:xfrm>
+          <a:prstGeom prst="rect">
+            <a:avLst/>
+          </a:prstGeom>
+          <a:solidFill>
+            <a:srgbClr val="162A48"/>
+          </a:solidFill>
+          <a:ln>
+            <a:noFill/>
+          </a:ln>
+        </p:spPr>
+        <p:style>
+          <a:lnRef idx="1">
+            <a:schemeClr val="accent1"/>
+          </a:lnRef>
+          <a:fillRef idx="3">
+            <a:schemeClr val="accent1"/>
+          </a:fillRef>
+          <a:effectRef idx="2">
+            <a:schemeClr val="accent1"/>
+          </a:effectRef>
+          <a:fontRef idx="minor">
+            <a:schemeClr val="lt1"/>
+          </a:fontRef>
+        </p:style>
+        <p:txBody>
+          <a:bodyPr rtlCol="0" anchor="ctr"/>
+          <a:lstStyle/>
+          <a:p>
+            <a:pPr algn="ctr"/>
+          </a:p>
+        </p:txBody>
+      </p:sp>
+      <p:sp>
+        <p:nvSpPr>
+          <p:cNvPr id="22" name="TextBox 21"/>
+          <p:cNvSpPr txBox="1"/>
+          <p:nvPr/>
+        </p:nvSpPr>
+        <p:spPr>
+          <a:xfrm>
+            <a:off x="502920" y="4864608"/>
+            <a:ext cx="11201400" cy="438912"/>
+          </a:xfrm>
+          <a:prstGeom prst="rect">
+            <a:avLst/>
+          </a:prstGeom>
+          <a:noFill/>
+        </p:spPr>
+        <p:txBody>
+          <a:bodyPr wrap="square">
+            <a:spAutoFit/>
+          </a:bodyPr>
+          <a:lstStyle/>
+          <a:p>
+            <a:pPr algn="l"/>
+            <a:r>
+              <a:rPr sz="1700" b="1" i="0">
+                <a:solidFill>
+                  <a:srgbClr val="4A90E2"/>
+                </a:solidFill>
+              </a:rPr>
+              <a:t>92% of all tokens came from cache  --  showing how efficiently Claude reused context across turns</a:t>
+            </a:r>
+          </a:p>
+        </p:txBody>
+      </p:sp>
+      <p:sp>
+        <p:nvSpPr>
+          <p:cNvPr id="23" name="TextBox 22"/>
+          <p:cNvSpPr txBox="1"/>
+          <p:nvPr/>
+        </p:nvSpPr>
+        <p:spPr>
+          <a:xfrm>
+            <a:off x="502920" y="5321808"/>
+            <a:ext cx="11201400" cy="685800"/>
+          </a:xfrm>
+          <a:prstGeom prst="rect">
+            <a:avLst/>
+          </a:prstGeom>
+          <a:noFill/>
+        </p:spPr>
+        <p:txBody>
+          <a:bodyPr wrap="square">
+            <a:spAutoFit/>
+          </a:bodyPr>
+          <a:lstStyle/>
+          <a:p>
+            <a:pPr algn="l"/>
+            <a:r>
+              <a:rPr sz="1500" b="0" i="0">
+                <a:solidFill>
+                  <a:srgbClr val="B0C8E8"/>
+                </a:solidFill>
+              </a:rPr>
+              <a:t>Cache hits save processing time and cost. Output tokens (343K) represent all code, explanations and fixes generated by Claude.</a:t>
+            </a:r>
+          </a:p>
+        </p:txBody>
+      </p:sp>
+    </p:spTree>
+  </p:cSld>
+  <p:clrMapOvr>
+    <a:masterClrMapping/>
+  </p:clrMapOvr>
+</p:sld>
+</file>
+
+<file path=ppt/slides/slide12.xml><?xml version="1.0" encoding="utf-8"?>
 <p:sld xmlns:a="http://schemas.openxmlformats.org/drawingml/2006/main" xmlns:p="http://schemas.openxmlformats.org/presentationml/2006/main" xmlns:r="http://schemas.openxmlformats.org/officeDocument/2006/relationships">
   <p:cSld>
     <p:bg>
@@ -5262,7 +6101,7 @@
 </p:sld>
 </file>
 
-<file path=ppt/slides/slide12.xml><?xml version="1.0" encoding="utf-8"?>
+<file path=ppt/slides/slide13.xml><?xml version="1.0" encoding="utf-8"?>
 <p:sld xmlns:a="http://schemas.openxmlformats.org/drawingml/2006/main" xmlns:p="http://schemas.openxmlformats.org/presentationml/2006/main" xmlns:r="http://schemas.openxmlformats.org/officeDocument/2006/relationships">
   <p:cSld>
     <p:bg>
@@ -6519,7 +7358,7 @@
                   <a:srgbClr val="222233"/>
                 </a:solidFill>
               </a:rPr>
-              <a:t>  City search  +  ?C / ?F toggle</a:t>
+              <a:t>  City search  +  oC / oF toggle</a:t>
             </a:r>
           </a:p>
         </p:txBody>
@@ -9603,7 +10442,7 @@
                   <a:srgbClr val="222233"/>
                 </a:solidFill>
               </a:rPr>
-              <a:t>  City search  +  ?C / ?F toggle</a:t>
+              <a:t>  City search  +  oC / oF toggle</a:t>
             </a:r>
           </a:p>
           <a:p>
@@ -11035,7 +11874,7 @@
         <p:spPr>
           <a:xfrm>
             <a:off x="274320" y="1115568"/>
-            <a:ext cx="3291840" cy="484632"/>
+            <a:ext cx="3291840" cy="502920"/>
           </a:xfrm>
           <a:prstGeom prst="rect">
             <a:avLst/>
@@ -11078,7 +11917,7 @@
         <p:spPr>
           <a:xfrm>
             <a:off x="384048" y="1207008"/>
-            <a:ext cx="3145536" cy="393192"/>
+            <a:ext cx="3145536" cy="411480"/>
           </a:xfrm>
           <a:prstGeom prst="rect">
             <a:avLst/>
@@ -11112,7 +11951,7 @@
         <p:spPr>
           <a:xfrm>
             <a:off x="3611880" y="1115568"/>
-            <a:ext cx="3657600" cy="484632"/>
+            <a:ext cx="3657600" cy="502920"/>
           </a:xfrm>
           <a:prstGeom prst="rect">
             <a:avLst/>
@@ -11155,7 +11994,7 @@
         <p:spPr>
           <a:xfrm>
             <a:off x="3721608" y="1207008"/>
-            <a:ext cx="3511296" cy="393192"/>
+            <a:ext cx="3511296" cy="411480"/>
           </a:xfrm>
           <a:prstGeom prst="rect">
             <a:avLst/>
@@ -11189,7 +12028,7 @@
         <p:spPr>
           <a:xfrm>
             <a:off x="7315200" y="1115568"/>
-            <a:ext cx="4096512" cy="484632"/>
+            <a:ext cx="4096512" cy="502920"/>
           </a:xfrm>
           <a:prstGeom prst="rect">
             <a:avLst/>
@@ -11232,7 +12071,7 @@
         <p:spPr>
           <a:xfrm>
             <a:off x="7424928" y="1207008"/>
-            <a:ext cx="3950208" cy="393192"/>
+            <a:ext cx="3950208" cy="411480"/>
           </a:xfrm>
           <a:prstGeom prst="rect">
             <a:avLst/>
@@ -11265,8 +12104,8 @@
         </p:nvSpPr>
         <p:spPr>
           <a:xfrm>
-            <a:off x="274320" y="1600200"/>
-            <a:ext cx="3291840" cy="484632"/>
+            <a:off x="274320" y="1618488"/>
+            <a:ext cx="3291840" cy="502920"/>
           </a:xfrm>
           <a:prstGeom prst="rect">
             <a:avLst/>
@@ -11308,8 +12147,8 @@
         </p:nvSpPr>
         <p:spPr>
           <a:xfrm>
-            <a:off x="384048" y="1691640"/>
-            <a:ext cx="3145536" cy="393192"/>
+            <a:off x="384048" y="1709928"/>
+            <a:ext cx="3145536" cy="411480"/>
           </a:xfrm>
           <a:prstGeom prst="rect">
             <a:avLst/>
@@ -11342,8 +12181,8 @@
         </p:nvSpPr>
         <p:spPr>
           <a:xfrm>
-            <a:off x="3611880" y="1600200"/>
-            <a:ext cx="3657600" cy="484632"/>
+            <a:off x="3611880" y="1618488"/>
+            <a:ext cx="3657600" cy="502920"/>
           </a:xfrm>
           <a:prstGeom prst="rect">
             <a:avLst/>
@@ -11385,8 +12224,8 @@
         </p:nvSpPr>
         <p:spPr>
           <a:xfrm>
-            <a:off x="3721608" y="1691640"/>
-            <a:ext cx="3511296" cy="393192"/>
+            <a:off x="3721608" y="1709928"/>
+            <a:ext cx="3511296" cy="411480"/>
           </a:xfrm>
           <a:prstGeom prst="rect">
             <a:avLst/>
@@ -11419,8 +12258,8 @@
         </p:nvSpPr>
         <p:spPr>
           <a:xfrm>
-            <a:off x="7315200" y="1600200"/>
-            <a:ext cx="4096512" cy="484632"/>
+            <a:off x="7315200" y="1618488"/>
+            <a:ext cx="4096512" cy="502920"/>
           </a:xfrm>
           <a:prstGeom prst="rect">
             <a:avLst/>
@@ -11462,8 +12301,8 @@
         </p:nvSpPr>
         <p:spPr>
           <a:xfrm>
-            <a:off x="7424928" y="1691640"/>
-            <a:ext cx="3950208" cy="393192"/>
+            <a:off x="7424928" y="1709928"/>
+            <a:ext cx="3950208" cy="411480"/>
           </a:xfrm>
           <a:prstGeom prst="rect">
             <a:avLst/>
@@ -11496,8 +12335,8 @@
         </p:nvSpPr>
         <p:spPr>
           <a:xfrm>
-            <a:off x="274320" y="2084832"/>
-            <a:ext cx="3291840" cy="484632"/>
+            <a:off x="274320" y="2121408"/>
+            <a:ext cx="3291840" cy="502920"/>
           </a:xfrm>
           <a:prstGeom prst="rect">
             <a:avLst/>
@@ -11539,8 +12378,8 @@
         </p:nvSpPr>
         <p:spPr>
           <a:xfrm>
-            <a:off x="384048" y="2176272"/>
-            <a:ext cx="3145536" cy="393192"/>
+            <a:off x="384048" y="2212848"/>
+            <a:ext cx="3145536" cy="411480"/>
           </a:xfrm>
           <a:prstGeom prst="rect">
             <a:avLst/>
@@ -11573,8 +12412,8 @@
         </p:nvSpPr>
         <p:spPr>
           <a:xfrm>
-            <a:off x="3611880" y="2084832"/>
-            <a:ext cx="3657600" cy="484632"/>
+            <a:off x="3611880" y="2121408"/>
+            <a:ext cx="3657600" cy="502920"/>
           </a:xfrm>
           <a:prstGeom prst="rect">
             <a:avLst/>
@@ -11616,8 +12455,8 @@
         </p:nvSpPr>
         <p:spPr>
           <a:xfrm>
-            <a:off x="3721608" y="2176272"/>
-            <a:ext cx="3511296" cy="393192"/>
+            <a:off x="3721608" y="2212848"/>
+            <a:ext cx="3511296" cy="411480"/>
           </a:xfrm>
           <a:prstGeom prst="rect">
             <a:avLst/>
@@ -11650,8 +12489,8 @@
         </p:nvSpPr>
         <p:spPr>
           <a:xfrm>
-            <a:off x="7315200" y="2084832"/>
-            <a:ext cx="4096512" cy="484632"/>
+            <a:off x="7315200" y="2121408"/>
+            <a:ext cx="4096512" cy="502920"/>
           </a:xfrm>
           <a:prstGeom prst="rect">
             <a:avLst/>
@@ -11693,8 +12532,8 @@
         </p:nvSpPr>
         <p:spPr>
           <a:xfrm>
-            <a:off x="7424928" y="2176272"/>
-            <a:ext cx="3950208" cy="393192"/>
+            <a:off x="7424928" y="2212848"/>
+            <a:ext cx="3950208" cy="411480"/>
           </a:xfrm>
           <a:prstGeom prst="rect">
             <a:avLst/>
@@ -11727,8 +12566,8 @@
         </p:nvSpPr>
         <p:spPr>
           <a:xfrm>
-            <a:off x="274320" y="2569464"/>
-            <a:ext cx="3291840" cy="484632"/>
+            <a:off x="274320" y="2624328"/>
+            <a:ext cx="3291840" cy="502920"/>
           </a:xfrm>
           <a:prstGeom prst="rect">
             <a:avLst/>
@@ -11770,8 +12609,8 @@
         </p:nvSpPr>
         <p:spPr>
           <a:xfrm>
-            <a:off x="384048" y="2660904"/>
-            <a:ext cx="3145536" cy="393192"/>
+            <a:off x="384048" y="2715768"/>
+            <a:ext cx="3145536" cy="411480"/>
           </a:xfrm>
           <a:prstGeom prst="rect">
             <a:avLst/>
@@ -11804,8 +12643,8 @@
         </p:nvSpPr>
         <p:spPr>
           <a:xfrm>
-            <a:off x="3611880" y="2569464"/>
-            <a:ext cx="3657600" cy="484632"/>
+            <a:off x="3611880" y="2624328"/>
+            <a:ext cx="3657600" cy="502920"/>
           </a:xfrm>
           <a:prstGeom prst="rect">
             <a:avLst/>
@@ -11847,8 +12686,8 @@
         </p:nvSpPr>
         <p:spPr>
           <a:xfrm>
-            <a:off x="3721608" y="2660904"/>
-            <a:ext cx="3511296" cy="393192"/>
+            <a:off x="3721608" y="2715768"/>
+            <a:ext cx="3511296" cy="411480"/>
           </a:xfrm>
           <a:prstGeom prst="rect">
             <a:avLst/>
@@ -11881,8 +12720,8 @@
         </p:nvSpPr>
         <p:spPr>
           <a:xfrm>
-            <a:off x="7315200" y="2569464"/>
-            <a:ext cx="4096512" cy="484632"/>
+            <a:off x="7315200" y="2624328"/>
+            <a:ext cx="4096512" cy="502920"/>
           </a:xfrm>
           <a:prstGeom prst="rect">
             <a:avLst/>
@@ -11924,8 +12763,8 @@
         </p:nvSpPr>
         <p:spPr>
           <a:xfrm>
-            <a:off x="7424928" y="2660904"/>
-            <a:ext cx="3950208" cy="393192"/>
+            <a:off x="7424928" y="2715768"/>
+            <a:ext cx="3950208" cy="411480"/>
           </a:xfrm>
           <a:prstGeom prst="rect">
             <a:avLst/>
@@ -11958,8 +12797,8 @@
         </p:nvSpPr>
         <p:spPr>
           <a:xfrm>
-            <a:off x="274320" y="3054096"/>
-            <a:ext cx="3291840" cy="484632"/>
+            <a:off x="274320" y="3127248"/>
+            <a:ext cx="3291840" cy="502920"/>
           </a:xfrm>
           <a:prstGeom prst="rect">
             <a:avLst/>
@@ -12001,8 +12840,8 @@
         </p:nvSpPr>
         <p:spPr>
           <a:xfrm>
-            <a:off x="384048" y="3145536"/>
-            <a:ext cx="3145536" cy="393192"/>
+            <a:off x="384048" y="3218688"/>
+            <a:ext cx="3145536" cy="411480"/>
           </a:xfrm>
           <a:prstGeom prst="rect">
             <a:avLst/>
@@ -12035,8 +12874,8 @@
         </p:nvSpPr>
         <p:spPr>
           <a:xfrm>
-            <a:off x="3611880" y="3054096"/>
-            <a:ext cx="3657600" cy="484632"/>
+            <a:off x="3611880" y="3127248"/>
+            <a:ext cx="3657600" cy="502920"/>
           </a:xfrm>
           <a:prstGeom prst="rect">
             <a:avLst/>
@@ -12078,8 +12917,8 @@
         </p:nvSpPr>
         <p:spPr>
           <a:xfrm>
-            <a:off x="3721608" y="3145536"/>
-            <a:ext cx="3511296" cy="393192"/>
+            <a:off x="3721608" y="3218688"/>
+            <a:ext cx="3511296" cy="411480"/>
           </a:xfrm>
           <a:prstGeom prst="rect">
             <a:avLst/>
@@ -12112,8 +12951,8 @@
         </p:nvSpPr>
         <p:spPr>
           <a:xfrm>
-            <a:off x="7315200" y="3054096"/>
-            <a:ext cx="4096512" cy="484632"/>
+            <a:off x="7315200" y="3127248"/>
+            <a:ext cx="4096512" cy="502920"/>
           </a:xfrm>
           <a:prstGeom prst="rect">
             <a:avLst/>
@@ -12155,8 +12994,8 @@
         </p:nvSpPr>
         <p:spPr>
           <a:xfrm>
-            <a:off x="7424928" y="3145536"/>
-            <a:ext cx="3950208" cy="393192"/>
+            <a:off x="7424928" y="3218688"/>
+            <a:ext cx="3950208" cy="411480"/>
           </a:xfrm>
           <a:prstGeom prst="rect">
             <a:avLst/>
@@ -12189,8 +13028,8 @@
         </p:nvSpPr>
         <p:spPr>
           <a:xfrm>
-            <a:off x="274320" y="3538728"/>
-            <a:ext cx="3291840" cy="484632"/>
+            <a:off x="274320" y="3630168"/>
+            <a:ext cx="3291840" cy="502920"/>
           </a:xfrm>
           <a:prstGeom prst="rect">
             <a:avLst/>
@@ -12232,8 +13071,8 @@
         </p:nvSpPr>
         <p:spPr>
           <a:xfrm>
-            <a:off x="384048" y="3630168"/>
-            <a:ext cx="3145536" cy="393192"/>
+            <a:off x="384048" y="3721608"/>
+            <a:ext cx="3145536" cy="411480"/>
           </a:xfrm>
           <a:prstGeom prst="rect">
             <a:avLst/>
@@ -12266,8 +13105,8 @@
         </p:nvSpPr>
         <p:spPr>
           <a:xfrm>
-            <a:off x="3611880" y="3538728"/>
-            <a:ext cx="3657600" cy="484632"/>
+            <a:off x="3611880" y="3630168"/>
+            <a:ext cx="3657600" cy="502920"/>
           </a:xfrm>
           <a:prstGeom prst="rect">
             <a:avLst/>
@@ -12309,8 +13148,8 @@
         </p:nvSpPr>
         <p:spPr>
           <a:xfrm>
-            <a:off x="3721608" y="3630168"/>
-            <a:ext cx="3511296" cy="393192"/>
+            <a:off x="3721608" y="3721608"/>
+            <a:ext cx="3511296" cy="411480"/>
           </a:xfrm>
           <a:prstGeom prst="rect">
             <a:avLst/>
@@ -12343,8 +13182,8 @@
         </p:nvSpPr>
         <p:spPr>
           <a:xfrm>
-            <a:off x="7315200" y="3538728"/>
-            <a:ext cx="4096512" cy="484632"/>
+            <a:off x="7315200" y="3630168"/>
+            <a:ext cx="4096512" cy="502920"/>
           </a:xfrm>
           <a:prstGeom prst="rect">
             <a:avLst/>
@@ -12386,8 +13225,8 @@
         </p:nvSpPr>
         <p:spPr>
           <a:xfrm>
-            <a:off x="7424928" y="3630168"/>
-            <a:ext cx="3950208" cy="393192"/>
+            <a:off x="7424928" y="3721608"/>
+            <a:ext cx="3950208" cy="411480"/>
           </a:xfrm>
           <a:prstGeom prst="rect">
             <a:avLst/>
@@ -12420,8 +13259,8 @@
         </p:nvSpPr>
         <p:spPr>
           <a:xfrm>
-            <a:off x="274320" y="4023360"/>
-            <a:ext cx="3291840" cy="484632"/>
+            <a:off x="274320" y="4133088"/>
+            <a:ext cx="3291840" cy="502920"/>
           </a:xfrm>
           <a:prstGeom prst="rect">
             <a:avLst/>
@@ -12463,8 +13302,8 @@
         </p:nvSpPr>
         <p:spPr>
           <a:xfrm>
-            <a:off x="384048" y="4114800"/>
-            <a:ext cx="3145536" cy="393192"/>
+            <a:off x="384048" y="4224528"/>
+            <a:ext cx="3145536" cy="411480"/>
           </a:xfrm>
           <a:prstGeom prst="rect">
             <a:avLst/>
@@ -12497,8 +13336,8 @@
         </p:nvSpPr>
         <p:spPr>
           <a:xfrm>
-            <a:off x="3611880" y="4023360"/>
-            <a:ext cx="3657600" cy="484632"/>
+            <a:off x="3611880" y="4133088"/>
+            <a:ext cx="3657600" cy="502920"/>
           </a:xfrm>
           <a:prstGeom prst="rect">
             <a:avLst/>
@@ -12540,8 +13379,8 @@
         </p:nvSpPr>
         <p:spPr>
           <a:xfrm>
-            <a:off x="3721608" y="4114800"/>
-            <a:ext cx="3511296" cy="393192"/>
+            <a:off x="3721608" y="4224528"/>
+            <a:ext cx="3511296" cy="411480"/>
           </a:xfrm>
           <a:prstGeom prst="rect">
             <a:avLst/>
@@ -12574,8 +13413,8 @@
         </p:nvSpPr>
         <p:spPr>
           <a:xfrm>
-            <a:off x="7315200" y="4023360"/>
-            <a:ext cx="4096512" cy="484632"/>
+            <a:off x="7315200" y="4133088"/>
+            <a:ext cx="4096512" cy="502920"/>
           </a:xfrm>
           <a:prstGeom prst="rect">
             <a:avLst/>
@@ -12617,8 +13456,8 @@
         </p:nvSpPr>
         <p:spPr>
           <a:xfrm>
-            <a:off x="7424928" y="4114800"/>
-            <a:ext cx="3950208" cy="393192"/>
+            <a:off x="7424928" y="4224528"/>
+            <a:ext cx="3950208" cy="411480"/>
           </a:xfrm>
           <a:prstGeom prst="rect">
             <a:avLst/>
@@ -12651,8 +13490,8 @@
         </p:nvSpPr>
         <p:spPr>
           <a:xfrm>
-            <a:off x="274320" y="4507992"/>
-            <a:ext cx="3291840" cy="484632"/>
+            <a:off x="274320" y="4636008"/>
+            <a:ext cx="3291840" cy="502920"/>
           </a:xfrm>
           <a:prstGeom prst="rect">
             <a:avLst/>
@@ -12694,8 +13533,8 @@
         </p:nvSpPr>
         <p:spPr>
           <a:xfrm>
-            <a:off x="384048" y="4599432"/>
-            <a:ext cx="3145536" cy="393192"/>
+            <a:off x="384048" y="4727448"/>
+            <a:ext cx="3145536" cy="411480"/>
           </a:xfrm>
           <a:prstGeom prst="rect">
             <a:avLst/>
@@ -12728,8 +13567,8 @@
         </p:nvSpPr>
         <p:spPr>
           <a:xfrm>
-            <a:off x="3611880" y="4507992"/>
-            <a:ext cx="3657600" cy="484632"/>
+            <a:off x="3611880" y="4636008"/>
+            <a:ext cx="3657600" cy="502920"/>
           </a:xfrm>
           <a:prstGeom prst="rect">
             <a:avLst/>
@@ -12771,8 +13610,8 @@
         </p:nvSpPr>
         <p:spPr>
           <a:xfrm>
-            <a:off x="3721608" y="4599432"/>
-            <a:ext cx="3511296" cy="393192"/>
+            <a:off x="3721608" y="4727448"/>
+            <a:ext cx="3511296" cy="411480"/>
           </a:xfrm>
           <a:prstGeom prst="rect">
             <a:avLst/>
@@ -12805,8 +13644,8 @@
         </p:nvSpPr>
         <p:spPr>
           <a:xfrm>
-            <a:off x="7315200" y="4507992"/>
-            <a:ext cx="4096512" cy="484632"/>
+            <a:off x="7315200" y="4636008"/>
+            <a:ext cx="4096512" cy="502920"/>
           </a:xfrm>
           <a:prstGeom prst="rect">
             <a:avLst/>
@@ -12848,8 +13687,8 @@
         </p:nvSpPr>
         <p:spPr>
           <a:xfrm>
-            <a:off x="7424928" y="4599432"/>
-            <a:ext cx="3950208" cy="393192"/>
+            <a:off x="7424928" y="4727448"/>
+            <a:ext cx="3950208" cy="411480"/>
           </a:xfrm>
           <a:prstGeom prst="rect">
             <a:avLst/>
@@ -12882,8 +13721,8 @@
         </p:nvSpPr>
         <p:spPr>
           <a:xfrm>
-            <a:off x="274320" y="4992624"/>
-            <a:ext cx="3291840" cy="484632"/>
+            <a:off x="274320" y="5138928"/>
+            <a:ext cx="3291840" cy="502920"/>
           </a:xfrm>
           <a:prstGeom prst="rect">
             <a:avLst/>
@@ -12925,8 +13764,8 @@
         </p:nvSpPr>
         <p:spPr>
           <a:xfrm>
-            <a:off x="384048" y="5084064"/>
-            <a:ext cx="3145536" cy="393192"/>
+            <a:off x="384048" y="5230368"/>
+            <a:ext cx="3145536" cy="411480"/>
           </a:xfrm>
           <a:prstGeom prst="rect">
             <a:avLst/>
@@ -12959,8 +13798,8 @@
         </p:nvSpPr>
         <p:spPr>
           <a:xfrm>
-            <a:off x="3611880" y="4992624"/>
-            <a:ext cx="3657600" cy="484632"/>
+            <a:off x="3611880" y="5138928"/>
+            <a:ext cx="3657600" cy="502920"/>
           </a:xfrm>
           <a:prstGeom prst="rect">
             <a:avLst/>
@@ -13002,8 +13841,8 @@
         </p:nvSpPr>
         <p:spPr>
           <a:xfrm>
-            <a:off x="3721608" y="5084064"/>
-            <a:ext cx="3511296" cy="393192"/>
+            <a:off x="3721608" y="5230368"/>
+            <a:ext cx="3511296" cy="411480"/>
           </a:xfrm>
           <a:prstGeom prst="rect">
             <a:avLst/>
@@ -13036,8 +13875,8 @@
         </p:nvSpPr>
         <p:spPr>
           <a:xfrm>
-            <a:off x="7315200" y="4992624"/>
-            <a:ext cx="4096512" cy="484632"/>
+            <a:off x="7315200" y="5138928"/>
+            <a:ext cx="4096512" cy="502920"/>
           </a:xfrm>
           <a:prstGeom prst="rect">
             <a:avLst/>
@@ -13079,8 +13918,8 @@
         </p:nvSpPr>
         <p:spPr>
           <a:xfrm>
-            <a:off x="7424928" y="5084064"/>
-            <a:ext cx="3950208" cy="393192"/>
+            <a:off x="7424928" y="5230368"/>
+            <a:ext cx="3950208" cy="411480"/>
           </a:xfrm>
           <a:prstGeom prst="rect">
             <a:avLst/>
@@ -13113,8 +13952,8 @@
         </p:nvSpPr>
         <p:spPr>
           <a:xfrm>
-            <a:off x="274320" y="5477256"/>
-            <a:ext cx="3291840" cy="484632"/>
+            <a:off x="274320" y="5641848"/>
+            <a:ext cx="3291840" cy="502920"/>
           </a:xfrm>
           <a:prstGeom prst="rect">
             <a:avLst/>
@@ -13156,8 +13995,8 @@
         </p:nvSpPr>
         <p:spPr>
           <a:xfrm>
-            <a:off x="384048" y="5568696"/>
-            <a:ext cx="3145536" cy="393192"/>
+            <a:off x="384048" y="5733288"/>
+            <a:ext cx="3145536" cy="411480"/>
           </a:xfrm>
           <a:prstGeom prst="rect">
             <a:avLst/>
@@ -13190,8 +14029,8 @@
         </p:nvSpPr>
         <p:spPr>
           <a:xfrm>
-            <a:off x="3611880" y="5477256"/>
-            <a:ext cx="3657600" cy="484632"/>
+            <a:off x="3611880" y="5641848"/>
+            <a:ext cx="3657600" cy="502920"/>
           </a:xfrm>
           <a:prstGeom prst="rect">
             <a:avLst/>
@@ -13233,8 +14072,8 @@
         </p:nvSpPr>
         <p:spPr>
           <a:xfrm>
-            <a:off x="3721608" y="5568696"/>
-            <a:ext cx="3511296" cy="393192"/>
+            <a:off x="3721608" y="5733288"/>
+            <a:ext cx="3511296" cy="411480"/>
           </a:xfrm>
           <a:prstGeom prst="rect">
             <a:avLst/>
@@ -13267,8 +14106,8 @@
         </p:nvSpPr>
         <p:spPr>
           <a:xfrm>
-            <a:off x="7315200" y="5477256"/>
-            <a:ext cx="4096512" cy="484632"/>
+            <a:off x="7315200" y="5641848"/>
+            <a:ext cx="4096512" cy="502920"/>
           </a:xfrm>
           <a:prstGeom prst="rect">
             <a:avLst/>
@@ -13310,8 +14149,8 @@
         </p:nvSpPr>
         <p:spPr>
           <a:xfrm>
-            <a:off x="7424928" y="5568696"/>
-            <a:ext cx="3950208" cy="393192"/>
+            <a:off x="7424928" y="5733288"/>
+            <a:ext cx="3950208" cy="411480"/>
           </a:xfrm>
           <a:prstGeom prst="rect">
             <a:avLst/>

--- a/docs/WeatheryApp_Presentation.pptx
+++ b/docs/WeatheryApp_Presentation.pptx
@@ -5,21 +5,22 @@
     <p:sldMasterId id="2147483648" r:id="rId1"/>
   </p:sldMasterIdLst>
   <p:sldIdLst>
-    <p:sldId id="256" r:id="rId7"/>
-    <p:sldId id="257" r:id="rId8"/>
-    <p:sldId id="258" r:id="rId9"/>
-    <p:sldId id="259" r:id="rId10"/>
-    <p:sldId id="260" r:id="rId11"/>
-    <p:sldId id="261" r:id="rId12"/>
-    <p:sldId id="262" r:id="rId13"/>
-    <p:sldId id="263" r:id="rId14"/>
-    <p:sldId id="264" r:id="rId15"/>
-    <p:sldId id="265" r:id="rId16"/>
-    <p:sldId id="266" r:id="rId17"/>
-    <p:sldId id="267" r:id="rId18"/>
-    <p:sldId id="268" r:id="rId19"/>
+    <p:sldId id="256" r:id="rId2"/>
+    <p:sldId id="257" r:id="rId3"/>
+    <p:sldId id="258" r:id="rId4"/>
+    <p:sldId id="259" r:id="rId5"/>
+    <p:sldId id="260" r:id="rId6"/>
+    <p:sldId id="261" r:id="rId7"/>
+    <p:sldId id="262" r:id="rId8"/>
+    <p:sldId id="263" r:id="rId9"/>
+    <p:sldId id="264" r:id="rId10"/>
+    <p:sldId id="265" r:id="rId11"/>
+    <p:sldId id="266" r:id="rId12"/>
+    <p:sldId id="267" r:id="rId13"/>
+    <p:sldId id="269" r:id="rId14"/>
+    <p:sldId id="268" r:id="rId15"/>
   </p:sldIdLst>
-  <p:sldSz cx="12188952" cy="6858000" type="screen4x3"/>
+  <p:sldSz cx="12188825" cy="6858000"/>
   <p:notesSz cx="6858000" cy="9144000"/>
   <p:defaultTextStyle>
     <a:defPPr>
@@ -116,6 +117,22 @@
       </a:defRPr>
     </a:lvl9pPr>
   </p:defaultTextStyle>
+  <p:extLst>
+    <p:ext uri="{EFAFB233-063F-42B5-8137-9DF3F51BA10A}">
+      <p15:sldGuideLst xmlns:p15="http://schemas.microsoft.com/office/powerpoint/2012/main">
+        <p15:guide id="1" orient="horz" pos="2160">
+          <p15:clr>
+            <a:srgbClr val="A4A3A4"/>
+          </p15:clr>
+        </p15:guide>
+        <p15:guide id="2" pos="2880">
+          <p15:clr>
+            <a:srgbClr val="A4A3A4"/>
+          </p15:clr>
+        </p15:guide>
+      </p15:sldGuideLst>
+    </p:ext>
+  </p:extLst>
 </p:presentation>
 </file>
 
@@ -157,10 +174,9 @@
           <a:lstStyle/>
           <a:p>
             <a:r>
-              <a:rPr lang="en-US" smtClean="0"/>
+              <a:rPr lang="en-US"/>
               <a:t>Click to edit Master title style</a:t>
             </a:r>
-            <a:endParaRPr lang="en-US"/>
           </a:p>
         </p:txBody>
       </p:sp>
@@ -276,10 +292,9 @@
           </a:lstStyle>
           <a:p>
             <a:r>
-              <a:rPr lang="en-US" smtClean="0"/>
+              <a:rPr lang="en-US"/>
               <a:t>Click to edit Master subtitle style</a:t>
             </a:r>
-            <a:endParaRPr lang="en-US"/>
           </a:p>
         </p:txBody>
       </p:sp>
@@ -300,7 +315,7 @@
           <a:p>
             <a:fld id="{5BCAD085-E8A6-8845-BD4E-CB4CCA059FC4}" type="datetimeFigureOut">
               <a:rPr lang="en-US" smtClean="0"/>
-              <a:t>1/27/13</a:t>
+              <a:t>6/19/2026</a:t>
             </a:fld>
             <a:endParaRPr lang="en-US"/>
           </a:p>
@@ -342,7 +357,7 @@
           <a:p>
             <a:fld id="{C1FF6DA9-008F-8B48-92A6-B652298478BF}" type="slidenum">
               <a:rPr lang="en-US" smtClean="0"/>
-              <a:t>‹#›</a:t>
+              <a:t>‹Nr.›</a:t>
             </a:fld>
             <a:endParaRPr lang="en-US"/>
           </a:p>
@@ -394,10 +409,9 @@
           <a:lstStyle/>
           <a:p>
             <a:r>
-              <a:rPr lang="en-US" smtClean="0"/>
+              <a:rPr lang="en-US"/>
               <a:t>Click to edit Master title style</a:t>
             </a:r>
-            <a:endParaRPr lang="en-US"/>
           </a:p>
         </p:txBody>
       </p:sp>
@@ -418,38 +432,37 @@
           <a:p>
             <a:pPr lvl="0"/>
             <a:r>
-              <a:rPr lang="en-US" smtClean="0"/>
+              <a:rPr lang="en-US"/>
               <a:t>Click to edit Master text styles</a:t>
             </a:r>
           </a:p>
           <a:p>
             <a:pPr lvl="1"/>
             <a:r>
-              <a:rPr lang="en-US" smtClean="0"/>
+              <a:rPr lang="en-US"/>
               <a:t>Second level</a:t>
             </a:r>
           </a:p>
           <a:p>
             <a:pPr lvl="2"/>
             <a:r>
-              <a:rPr lang="en-US" smtClean="0"/>
+              <a:rPr lang="en-US"/>
               <a:t>Third level</a:t>
             </a:r>
           </a:p>
           <a:p>
             <a:pPr lvl="3"/>
             <a:r>
-              <a:rPr lang="en-US" smtClean="0"/>
+              <a:rPr lang="en-US"/>
               <a:t>Fourth level</a:t>
             </a:r>
           </a:p>
           <a:p>
             <a:pPr lvl="4"/>
             <a:r>
-              <a:rPr lang="en-US" smtClean="0"/>
+              <a:rPr lang="en-US"/>
               <a:t>Fifth level</a:t>
             </a:r>
-            <a:endParaRPr lang="en-US"/>
           </a:p>
         </p:txBody>
       </p:sp>
@@ -470,7 +483,7 @@
           <a:p>
             <a:fld id="{5BCAD085-E8A6-8845-BD4E-CB4CCA059FC4}" type="datetimeFigureOut">
               <a:rPr lang="en-US" smtClean="0"/>
-              <a:t>1/27/13</a:t>
+              <a:t>6/19/2026</a:t>
             </a:fld>
             <a:endParaRPr lang="en-US"/>
           </a:p>
@@ -512,7 +525,7 @@
           <a:p>
             <a:fld id="{C1FF6DA9-008F-8B48-92A6-B652298478BF}" type="slidenum">
               <a:rPr lang="en-US" smtClean="0"/>
-              <a:t>‹#›</a:t>
+              <a:t>‹Nr.›</a:t>
             </a:fld>
             <a:endParaRPr lang="en-US"/>
           </a:p>
@@ -569,10 +582,9 @@
           <a:lstStyle/>
           <a:p>
             <a:r>
-              <a:rPr lang="en-US" smtClean="0"/>
+              <a:rPr lang="en-US"/>
               <a:t>Click to edit Master title style</a:t>
             </a:r>
-            <a:endParaRPr lang="en-US"/>
           </a:p>
         </p:txBody>
       </p:sp>
@@ -598,38 +610,37 @@
           <a:p>
             <a:pPr lvl="0"/>
             <a:r>
-              <a:rPr lang="en-US" smtClean="0"/>
+              <a:rPr lang="en-US"/>
               <a:t>Click to edit Master text styles</a:t>
             </a:r>
           </a:p>
           <a:p>
             <a:pPr lvl="1"/>
             <a:r>
-              <a:rPr lang="en-US" smtClean="0"/>
+              <a:rPr lang="en-US"/>
               <a:t>Second level</a:t>
             </a:r>
           </a:p>
           <a:p>
             <a:pPr lvl="2"/>
             <a:r>
-              <a:rPr lang="en-US" smtClean="0"/>
+              <a:rPr lang="en-US"/>
               <a:t>Third level</a:t>
             </a:r>
           </a:p>
           <a:p>
             <a:pPr lvl="3"/>
             <a:r>
-              <a:rPr lang="en-US" smtClean="0"/>
+              <a:rPr lang="en-US"/>
               <a:t>Fourth level</a:t>
             </a:r>
           </a:p>
           <a:p>
             <a:pPr lvl="4"/>
             <a:r>
-              <a:rPr lang="en-US" smtClean="0"/>
+              <a:rPr lang="en-US"/>
               <a:t>Fifth level</a:t>
             </a:r>
-            <a:endParaRPr lang="en-US"/>
           </a:p>
         </p:txBody>
       </p:sp>
@@ -650,7 +661,7 @@
           <a:p>
             <a:fld id="{5BCAD085-E8A6-8845-BD4E-CB4CCA059FC4}" type="datetimeFigureOut">
               <a:rPr lang="en-US" smtClean="0"/>
-              <a:t>1/27/13</a:t>
+              <a:t>6/19/2026</a:t>
             </a:fld>
             <a:endParaRPr lang="en-US"/>
           </a:p>
@@ -692,7 +703,7 @@
           <a:p>
             <a:fld id="{C1FF6DA9-008F-8B48-92A6-B652298478BF}" type="slidenum">
               <a:rPr lang="en-US" smtClean="0"/>
-              <a:t>‹#›</a:t>
+              <a:t>‹Nr.›</a:t>
             </a:fld>
             <a:endParaRPr lang="en-US"/>
           </a:p>
@@ -744,10 +755,9 @@
           <a:lstStyle/>
           <a:p>
             <a:r>
-              <a:rPr lang="en-US" smtClean="0"/>
+              <a:rPr lang="en-US"/>
               <a:t>Click to edit Master title style</a:t>
             </a:r>
-            <a:endParaRPr lang="en-US"/>
           </a:p>
         </p:txBody>
       </p:sp>
@@ -768,38 +778,37 @@
           <a:p>
             <a:pPr lvl="0"/>
             <a:r>
-              <a:rPr lang="en-US" smtClean="0"/>
+              <a:rPr lang="en-US"/>
               <a:t>Click to edit Master text styles</a:t>
             </a:r>
           </a:p>
           <a:p>
             <a:pPr lvl="1"/>
             <a:r>
-              <a:rPr lang="en-US" smtClean="0"/>
+              <a:rPr lang="en-US"/>
               <a:t>Second level</a:t>
             </a:r>
           </a:p>
           <a:p>
             <a:pPr lvl="2"/>
             <a:r>
-              <a:rPr lang="en-US" smtClean="0"/>
+              <a:rPr lang="en-US"/>
               <a:t>Third level</a:t>
             </a:r>
           </a:p>
           <a:p>
             <a:pPr lvl="3"/>
             <a:r>
-              <a:rPr lang="en-US" smtClean="0"/>
+              <a:rPr lang="en-US"/>
               <a:t>Fourth level</a:t>
             </a:r>
           </a:p>
           <a:p>
             <a:pPr lvl="4"/>
             <a:r>
-              <a:rPr lang="en-US" smtClean="0"/>
+              <a:rPr lang="en-US"/>
               <a:t>Fifth level</a:t>
             </a:r>
-            <a:endParaRPr lang="en-US"/>
           </a:p>
         </p:txBody>
       </p:sp>
@@ -820,7 +829,7 @@
           <a:p>
             <a:fld id="{5BCAD085-E8A6-8845-BD4E-CB4CCA059FC4}" type="datetimeFigureOut">
               <a:rPr lang="en-US" smtClean="0"/>
-              <a:t>1/27/13</a:t>
+              <a:t>6/19/2026</a:t>
             </a:fld>
             <a:endParaRPr lang="en-US"/>
           </a:p>
@@ -862,7 +871,7 @@
           <a:p>
             <a:fld id="{C1FF6DA9-008F-8B48-92A6-B652298478BF}" type="slidenum">
               <a:rPr lang="en-US" smtClean="0"/>
-              <a:t>‹#›</a:t>
+              <a:t>‹Nr.›</a:t>
             </a:fld>
             <a:endParaRPr lang="en-US"/>
           </a:p>
@@ -923,10 +932,9 @@
           </a:lstStyle>
           <a:p>
             <a:r>
-              <a:rPr lang="en-US" smtClean="0"/>
+              <a:rPr lang="en-US"/>
               <a:t>Click to edit Master title style</a:t>
             </a:r>
-            <a:endParaRPr lang="en-US"/>
           </a:p>
         </p:txBody>
       </p:sp>
@@ -1043,7 +1051,7 @@
           <a:p>
             <a:pPr lvl="0"/>
             <a:r>
-              <a:rPr lang="en-US" smtClean="0"/>
+              <a:rPr lang="en-US"/>
               <a:t>Click to edit Master text styles</a:t>
             </a:r>
           </a:p>
@@ -1066,7 +1074,7 @@
           <a:p>
             <a:fld id="{5BCAD085-E8A6-8845-BD4E-CB4CCA059FC4}" type="datetimeFigureOut">
               <a:rPr lang="en-US" smtClean="0"/>
-              <a:t>1/27/13</a:t>
+              <a:t>6/19/2026</a:t>
             </a:fld>
             <a:endParaRPr lang="en-US"/>
           </a:p>
@@ -1108,7 +1116,7 @@
           <a:p>
             <a:fld id="{C1FF6DA9-008F-8B48-92A6-B652298478BF}" type="slidenum">
               <a:rPr lang="en-US" smtClean="0"/>
-              <a:t>‹#›</a:t>
+              <a:t>‹Nr.›</a:t>
             </a:fld>
             <a:endParaRPr lang="en-US"/>
           </a:p>
@@ -1160,10 +1168,9 @@
           <a:lstStyle/>
           <a:p>
             <a:r>
-              <a:rPr lang="en-US" smtClean="0"/>
+              <a:rPr lang="en-US"/>
               <a:t>Click to edit Master title style</a:t>
             </a:r>
-            <a:endParaRPr lang="en-US"/>
           </a:p>
         </p:txBody>
       </p:sp>
@@ -1217,38 +1224,37 @@
           <a:p>
             <a:pPr lvl="0"/>
             <a:r>
-              <a:rPr lang="en-US" smtClean="0"/>
+              <a:rPr lang="en-US"/>
               <a:t>Click to edit Master text styles</a:t>
             </a:r>
           </a:p>
           <a:p>
             <a:pPr lvl="1"/>
             <a:r>
-              <a:rPr lang="en-US" smtClean="0"/>
+              <a:rPr lang="en-US"/>
               <a:t>Second level</a:t>
             </a:r>
           </a:p>
           <a:p>
             <a:pPr lvl="2"/>
             <a:r>
-              <a:rPr lang="en-US" smtClean="0"/>
+              <a:rPr lang="en-US"/>
               <a:t>Third level</a:t>
             </a:r>
           </a:p>
           <a:p>
             <a:pPr lvl="3"/>
             <a:r>
-              <a:rPr lang="en-US" smtClean="0"/>
+              <a:rPr lang="en-US"/>
               <a:t>Fourth level</a:t>
             </a:r>
           </a:p>
           <a:p>
             <a:pPr lvl="4"/>
             <a:r>
-              <a:rPr lang="en-US" smtClean="0"/>
+              <a:rPr lang="en-US"/>
               <a:t>Fifth level</a:t>
             </a:r>
-            <a:endParaRPr lang="en-US"/>
           </a:p>
         </p:txBody>
       </p:sp>
@@ -1302,38 +1308,37 @@
           <a:p>
             <a:pPr lvl="0"/>
             <a:r>
-              <a:rPr lang="en-US" smtClean="0"/>
+              <a:rPr lang="en-US"/>
               <a:t>Click to edit Master text styles</a:t>
             </a:r>
           </a:p>
           <a:p>
             <a:pPr lvl="1"/>
             <a:r>
-              <a:rPr lang="en-US" smtClean="0"/>
+              <a:rPr lang="en-US"/>
               <a:t>Second level</a:t>
             </a:r>
           </a:p>
           <a:p>
             <a:pPr lvl="2"/>
             <a:r>
-              <a:rPr lang="en-US" smtClean="0"/>
+              <a:rPr lang="en-US"/>
               <a:t>Third level</a:t>
             </a:r>
           </a:p>
           <a:p>
             <a:pPr lvl="3"/>
             <a:r>
-              <a:rPr lang="en-US" smtClean="0"/>
+              <a:rPr lang="en-US"/>
               <a:t>Fourth level</a:t>
             </a:r>
           </a:p>
           <a:p>
             <a:pPr lvl="4"/>
             <a:r>
-              <a:rPr lang="en-US" smtClean="0"/>
+              <a:rPr lang="en-US"/>
               <a:t>Fifth level</a:t>
             </a:r>
-            <a:endParaRPr lang="en-US"/>
           </a:p>
         </p:txBody>
       </p:sp>
@@ -1354,7 +1359,7 @@
           <a:p>
             <a:fld id="{5BCAD085-E8A6-8845-BD4E-CB4CCA059FC4}" type="datetimeFigureOut">
               <a:rPr lang="en-US" smtClean="0"/>
-              <a:t>1/27/13</a:t>
+              <a:t>6/19/2026</a:t>
             </a:fld>
             <a:endParaRPr lang="en-US"/>
           </a:p>
@@ -1396,7 +1401,7 @@
           <a:p>
             <a:fld id="{C1FF6DA9-008F-8B48-92A6-B652298478BF}" type="slidenum">
               <a:rPr lang="en-US" smtClean="0"/>
-              <a:t>‹#›</a:t>
+              <a:t>‹Nr.›</a:t>
             </a:fld>
             <a:endParaRPr lang="en-US"/>
           </a:p>
@@ -1452,10 +1457,9 @@
           </a:lstStyle>
           <a:p>
             <a:r>
-              <a:rPr lang="en-US" smtClean="0"/>
+              <a:rPr lang="en-US"/>
               <a:t>Click to edit Master title style</a:t>
             </a:r>
-            <a:endParaRPr lang="en-US"/>
           </a:p>
         </p:txBody>
       </p:sp>
@@ -1518,7 +1522,7 @@
           <a:p>
             <a:pPr lvl="0"/>
             <a:r>
-              <a:rPr lang="en-US" smtClean="0"/>
+              <a:rPr lang="en-US"/>
               <a:t>Click to edit Master text styles</a:t>
             </a:r>
           </a:p>
@@ -1574,38 +1578,37 @@
           <a:p>
             <a:pPr lvl="0"/>
             <a:r>
-              <a:rPr lang="en-US" smtClean="0"/>
+              <a:rPr lang="en-US"/>
               <a:t>Click to edit Master text styles</a:t>
             </a:r>
           </a:p>
           <a:p>
             <a:pPr lvl="1"/>
             <a:r>
-              <a:rPr lang="en-US" smtClean="0"/>
+              <a:rPr lang="en-US"/>
               <a:t>Second level</a:t>
             </a:r>
           </a:p>
           <a:p>
             <a:pPr lvl="2"/>
             <a:r>
-              <a:rPr lang="en-US" smtClean="0"/>
+              <a:rPr lang="en-US"/>
               <a:t>Third level</a:t>
             </a:r>
           </a:p>
           <a:p>
             <a:pPr lvl="3"/>
             <a:r>
-              <a:rPr lang="en-US" smtClean="0"/>
+              <a:rPr lang="en-US"/>
               <a:t>Fourth level</a:t>
             </a:r>
           </a:p>
           <a:p>
             <a:pPr lvl="4"/>
             <a:r>
-              <a:rPr lang="en-US" smtClean="0"/>
+              <a:rPr lang="en-US"/>
               <a:t>Fifth level</a:t>
             </a:r>
-            <a:endParaRPr lang="en-US"/>
           </a:p>
         </p:txBody>
       </p:sp>
@@ -1668,7 +1671,7 @@
           <a:p>
             <a:pPr lvl="0"/>
             <a:r>
-              <a:rPr lang="en-US" smtClean="0"/>
+              <a:rPr lang="en-US"/>
               <a:t>Click to edit Master text styles</a:t>
             </a:r>
           </a:p>
@@ -1724,38 +1727,37 @@
           <a:p>
             <a:pPr lvl="0"/>
             <a:r>
-              <a:rPr lang="en-US" smtClean="0"/>
+              <a:rPr lang="en-US"/>
               <a:t>Click to edit Master text styles</a:t>
             </a:r>
           </a:p>
           <a:p>
             <a:pPr lvl="1"/>
             <a:r>
-              <a:rPr lang="en-US" smtClean="0"/>
+              <a:rPr lang="en-US"/>
               <a:t>Second level</a:t>
             </a:r>
           </a:p>
           <a:p>
             <a:pPr lvl="2"/>
             <a:r>
-              <a:rPr lang="en-US" smtClean="0"/>
+              <a:rPr lang="en-US"/>
               <a:t>Third level</a:t>
             </a:r>
           </a:p>
           <a:p>
             <a:pPr lvl="3"/>
             <a:r>
-              <a:rPr lang="en-US" smtClean="0"/>
+              <a:rPr lang="en-US"/>
               <a:t>Fourth level</a:t>
             </a:r>
           </a:p>
           <a:p>
             <a:pPr lvl="4"/>
             <a:r>
-              <a:rPr lang="en-US" smtClean="0"/>
+              <a:rPr lang="en-US"/>
               <a:t>Fifth level</a:t>
             </a:r>
-            <a:endParaRPr lang="en-US"/>
           </a:p>
         </p:txBody>
       </p:sp>
@@ -1776,7 +1778,7 @@
           <a:p>
             <a:fld id="{5BCAD085-E8A6-8845-BD4E-CB4CCA059FC4}" type="datetimeFigureOut">
               <a:rPr lang="en-US" smtClean="0"/>
-              <a:t>1/27/13</a:t>
+              <a:t>6/19/2026</a:t>
             </a:fld>
             <a:endParaRPr lang="en-US"/>
           </a:p>
@@ -1818,7 +1820,7 @@
           <a:p>
             <a:fld id="{C1FF6DA9-008F-8B48-92A6-B652298478BF}" type="slidenum">
               <a:rPr lang="en-US" smtClean="0"/>
-              <a:t>‹#›</a:t>
+              <a:t>‹Nr.›</a:t>
             </a:fld>
             <a:endParaRPr lang="en-US"/>
           </a:p>
@@ -1870,10 +1872,9 @@
           <a:lstStyle/>
           <a:p>
             <a:r>
-              <a:rPr lang="en-US" smtClean="0"/>
+              <a:rPr lang="en-US"/>
               <a:t>Click to edit Master title style</a:t>
             </a:r>
-            <a:endParaRPr lang="en-US"/>
           </a:p>
         </p:txBody>
       </p:sp>
@@ -1894,7 +1895,7 @@
           <a:p>
             <a:fld id="{5BCAD085-E8A6-8845-BD4E-CB4CCA059FC4}" type="datetimeFigureOut">
               <a:rPr lang="en-US" smtClean="0"/>
-              <a:t>1/27/13</a:t>
+              <a:t>6/19/2026</a:t>
             </a:fld>
             <a:endParaRPr lang="en-US"/>
           </a:p>
@@ -1936,7 +1937,7 @@
           <a:p>
             <a:fld id="{C1FF6DA9-008F-8B48-92A6-B652298478BF}" type="slidenum">
               <a:rPr lang="en-US" smtClean="0"/>
-              <a:t>‹#›</a:t>
+              <a:t>‹Nr.›</a:t>
             </a:fld>
             <a:endParaRPr lang="en-US"/>
           </a:p>
@@ -1989,7 +1990,7 @@
           <a:p>
             <a:fld id="{5BCAD085-E8A6-8845-BD4E-CB4CCA059FC4}" type="datetimeFigureOut">
               <a:rPr lang="en-US" smtClean="0"/>
-              <a:t>1/27/13</a:t>
+              <a:t>6/19/2026</a:t>
             </a:fld>
             <a:endParaRPr lang="en-US"/>
           </a:p>
@@ -2031,7 +2032,7 @@
           <a:p>
             <a:fld id="{C1FF6DA9-008F-8B48-92A6-B652298478BF}" type="slidenum">
               <a:rPr lang="en-US" smtClean="0"/>
-              <a:t>‹#›</a:t>
+              <a:t>‹Nr.›</a:t>
             </a:fld>
             <a:endParaRPr lang="en-US"/>
           </a:p>
@@ -2092,10 +2093,9 @@
           </a:lstStyle>
           <a:p>
             <a:r>
-              <a:rPr lang="en-US" smtClean="0"/>
+              <a:rPr lang="en-US"/>
               <a:t>Click to edit Master title style</a:t>
             </a:r>
-            <a:endParaRPr lang="en-US"/>
           </a:p>
         </p:txBody>
       </p:sp>
@@ -2149,38 +2149,37 @@
           <a:p>
             <a:pPr lvl="0"/>
             <a:r>
-              <a:rPr lang="en-US" smtClean="0"/>
+              <a:rPr lang="en-US"/>
               <a:t>Click to edit Master text styles</a:t>
             </a:r>
           </a:p>
           <a:p>
             <a:pPr lvl="1"/>
             <a:r>
-              <a:rPr lang="en-US" smtClean="0"/>
+              <a:rPr lang="en-US"/>
               <a:t>Second level</a:t>
             </a:r>
           </a:p>
           <a:p>
             <a:pPr lvl="2"/>
             <a:r>
-              <a:rPr lang="en-US" smtClean="0"/>
+              <a:rPr lang="en-US"/>
               <a:t>Third level</a:t>
             </a:r>
           </a:p>
           <a:p>
             <a:pPr lvl="3"/>
             <a:r>
-              <a:rPr lang="en-US" smtClean="0"/>
+              <a:rPr lang="en-US"/>
               <a:t>Fourth level</a:t>
             </a:r>
           </a:p>
           <a:p>
             <a:pPr lvl="4"/>
             <a:r>
-              <a:rPr lang="en-US" smtClean="0"/>
+              <a:rPr lang="en-US"/>
               <a:t>Fifth level</a:t>
             </a:r>
-            <a:endParaRPr lang="en-US"/>
           </a:p>
         </p:txBody>
       </p:sp>
@@ -2243,7 +2242,7 @@
           <a:p>
             <a:pPr lvl="0"/>
             <a:r>
-              <a:rPr lang="en-US" smtClean="0"/>
+              <a:rPr lang="en-US"/>
               <a:t>Click to edit Master text styles</a:t>
             </a:r>
           </a:p>
@@ -2266,7 +2265,7 @@
           <a:p>
             <a:fld id="{5BCAD085-E8A6-8845-BD4E-CB4CCA059FC4}" type="datetimeFigureOut">
               <a:rPr lang="en-US" smtClean="0"/>
-              <a:t>1/27/13</a:t>
+              <a:t>6/19/2026</a:t>
             </a:fld>
             <a:endParaRPr lang="en-US"/>
           </a:p>
@@ -2308,7 +2307,7 @@
           <a:p>
             <a:fld id="{C1FF6DA9-008F-8B48-92A6-B652298478BF}" type="slidenum">
               <a:rPr lang="en-US" smtClean="0"/>
-              <a:t>‹#›</a:t>
+              <a:t>‹Nr.›</a:t>
             </a:fld>
             <a:endParaRPr lang="en-US"/>
           </a:p>
@@ -2369,10 +2368,9 @@
           </a:lstStyle>
           <a:p>
             <a:r>
-              <a:rPr lang="en-US" smtClean="0"/>
+              <a:rPr lang="en-US"/>
               <a:t>Click to edit Master title style</a:t>
             </a:r>
-            <a:endParaRPr lang="en-US"/>
           </a:p>
         </p:txBody>
       </p:sp>
@@ -2496,7 +2494,7 @@
           <a:p>
             <a:pPr lvl="0"/>
             <a:r>
-              <a:rPr lang="en-US" smtClean="0"/>
+              <a:rPr lang="en-US"/>
               <a:t>Click to edit Master text styles</a:t>
             </a:r>
           </a:p>
@@ -2519,7 +2517,7 @@
           <a:p>
             <a:fld id="{5BCAD085-E8A6-8845-BD4E-CB4CCA059FC4}" type="datetimeFigureOut">
               <a:rPr lang="en-US" smtClean="0"/>
-              <a:t>1/27/13</a:t>
+              <a:t>6/19/2026</a:t>
             </a:fld>
             <a:endParaRPr lang="en-US"/>
           </a:p>
@@ -2561,7 +2559,7 @@
           <a:p>
             <a:fld id="{C1FF6DA9-008F-8B48-92A6-B652298478BF}" type="slidenum">
               <a:rPr lang="en-US" smtClean="0"/>
-              <a:t>‹#›</a:t>
+              <a:t>‹Nr.›</a:t>
             </a:fld>
             <a:endParaRPr lang="en-US"/>
           </a:p>
@@ -2628,10 +2626,9 @@
           <a:lstStyle/>
           <a:p>
             <a:r>
-              <a:rPr lang="en-US" smtClean="0"/>
+              <a:rPr lang="en-US"/>
               <a:t>Click to edit Master title style</a:t>
             </a:r>
-            <a:endParaRPr lang="en-US"/>
           </a:p>
         </p:txBody>
       </p:sp>
@@ -2662,38 +2659,37 @@
           <a:p>
             <a:pPr lvl="0"/>
             <a:r>
-              <a:rPr lang="en-US" smtClean="0"/>
+              <a:rPr lang="en-US"/>
               <a:t>Click to edit Master text styles</a:t>
             </a:r>
           </a:p>
           <a:p>
             <a:pPr lvl="1"/>
             <a:r>
-              <a:rPr lang="en-US" smtClean="0"/>
+              <a:rPr lang="en-US"/>
               <a:t>Second level</a:t>
             </a:r>
           </a:p>
           <a:p>
             <a:pPr lvl="2"/>
             <a:r>
-              <a:rPr lang="en-US" smtClean="0"/>
+              <a:rPr lang="en-US"/>
               <a:t>Third level</a:t>
             </a:r>
           </a:p>
           <a:p>
             <a:pPr lvl="3"/>
             <a:r>
-              <a:rPr lang="en-US" smtClean="0"/>
+              <a:rPr lang="en-US"/>
               <a:t>Fourth level</a:t>
             </a:r>
           </a:p>
           <a:p>
             <a:pPr lvl="4"/>
             <a:r>
-              <a:rPr lang="en-US" smtClean="0"/>
+              <a:rPr lang="en-US"/>
               <a:t>Fifth level</a:t>
             </a:r>
-            <a:endParaRPr lang="en-US"/>
           </a:p>
         </p:txBody>
       </p:sp>
@@ -2732,7 +2728,7 @@
           <a:p>
             <a:fld id="{5BCAD085-E8A6-8845-BD4E-CB4CCA059FC4}" type="datetimeFigureOut">
               <a:rPr lang="en-US" smtClean="0"/>
-              <a:t>1/27/13</a:t>
+              <a:t>6/19/2026</a:t>
             </a:fld>
             <a:endParaRPr lang="en-US"/>
           </a:p>
@@ -2810,7 +2806,7 @@
           <a:p>
             <a:fld id="{C1FF6DA9-008F-8B48-92A6-B652298478BF}" type="slidenum">
               <a:rPr lang="en-US" smtClean="0"/>
-              <a:t>‹#›</a:t>
+              <a:t>‹Nr.›</a:t>
             </a:fld>
             <a:endParaRPr lang="en-US"/>
           </a:p>
@@ -3091,7 +3087,7 @@
 </file>
 
 <file path=ppt/slides/slide1.xml><?xml version="1.0" encoding="utf-8"?>
-<p:sld xmlns:a="http://schemas.openxmlformats.org/drawingml/2006/main" xmlns:p="http://schemas.openxmlformats.org/presentationml/2006/main" xmlns:r="http://schemas.openxmlformats.org/officeDocument/2006/relationships">
+<p:sld xmlns:a="http://schemas.openxmlformats.org/drawingml/2006/main" xmlns:r="http://schemas.openxmlformats.org/officeDocument/2006/relationships" xmlns:p="http://schemas.openxmlformats.org/presentationml/2006/main">
   <p:cSld>
     <p:bg>
       <p:bgPr>
@@ -3107,7 +3103,14 @@
         <p:cNvGrpSpPr/>
         <p:nvPr/>
       </p:nvGrpSpPr>
-      <p:grpSpPr/>
+      <p:grpSpPr>
+        <a:xfrm>
+          <a:off x="0" y="0"/>
+          <a:ext cx="0" cy="0"/>
+          <a:chOff x="0" y="0"/>
+          <a:chExt cx="0" cy="0"/>
+        </a:xfrm>
+      </p:grpSpPr>
       <p:sp>
         <p:nvSpPr>
           <p:cNvPr id="2" name="Rectangle 1"/>
@@ -3148,6 +3151,7 @@
           <a:lstStyle/>
           <a:p>
             <a:pPr algn="ctr"/>
+            <a:endParaRPr/>
           </a:p>
         </p:txBody>
       </p:sp>
@@ -3191,6 +3195,7 @@
           <a:lstStyle/>
           <a:p>
             <a:pPr algn="ctr"/>
+            <a:endParaRPr/>
           </a:p>
         </p:txBody>
       </p:sp>
@@ -3326,6 +3331,7 @@
           <a:lstStyle/>
           <a:p>
             <a:pPr algn="ctr"/>
+            <a:endParaRPr/>
           </a:p>
         </p:txBody>
       </p:sp>
@@ -3372,7 +3378,7 @@
 </file>
 
 <file path=ppt/slides/slide10.xml><?xml version="1.0" encoding="utf-8"?>
-<p:sld xmlns:a="http://schemas.openxmlformats.org/drawingml/2006/main" xmlns:p="http://schemas.openxmlformats.org/presentationml/2006/main" xmlns:r="http://schemas.openxmlformats.org/officeDocument/2006/relationships">
+<p:sld xmlns:a="http://schemas.openxmlformats.org/drawingml/2006/main" xmlns:r="http://schemas.openxmlformats.org/officeDocument/2006/relationships" xmlns:p="http://schemas.openxmlformats.org/presentationml/2006/main">
   <p:cSld>
     <p:bg>
       <p:bgPr>
@@ -3388,7 +3394,14 @@
         <p:cNvGrpSpPr/>
         <p:nvPr/>
       </p:nvGrpSpPr>
-      <p:grpSpPr/>
+      <p:grpSpPr>
+        <a:xfrm>
+          <a:off x="0" y="0"/>
+          <a:ext cx="0" cy="0"/>
+          <a:chOff x="0" y="0"/>
+          <a:chExt cx="0" cy="0"/>
+        </a:xfrm>
+      </p:grpSpPr>
       <p:sp>
         <p:nvSpPr>
           <p:cNvPr id="2" name="Rectangle 1"/>
@@ -3429,6 +3442,7 @@
           <a:lstStyle/>
           <a:p>
             <a:pPr algn="ctr"/>
+            <a:endParaRPr/>
           </a:p>
         </p:txBody>
       </p:sp>
@@ -3506,6 +3520,7 @@
           <a:lstStyle/>
           <a:p>
             <a:pPr algn="ctr"/>
+            <a:endParaRPr/>
           </a:p>
         </p:txBody>
       </p:sp>
@@ -3549,6 +3564,7 @@
           <a:lstStyle/>
           <a:p>
             <a:pPr algn="ctr"/>
+            <a:endParaRPr/>
           </a:p>
         </p:txBody>
       </p:sp>
@@ -3694,6 +3710,7 @@
           <a:lstStyle/>
           <a:p>
             <a:pPr algn="ctr"/>
+            <a:endParaRPr/>
           </a:p>
         </p:txBody>
       </p:sp>
@@ -3737,6 +3754,7 @@
           <a:lstStyle/>
           <a:p>
             <a:pPr algn="ctr"/>
+            <a:endParaRPr/>
           </a:p>
         </p:txBody>
       </p:sp>
@@ -3882,6 +3900,7 @@
           <a:lstStyle/>
           <a:p>
             <a:pPr algn="ctr"/>
+            <a:endParaRPr/>
           </a:p>
         </p:txBody>
       </p:sp>
@@ -3925,6 +3944,7 @@
           <a:lstStyle/>
           <a:p>
             <a:pPr algn="ctr"/>
+            <a:endParaRPr/>
           </a:p>
         </p:txBody>
       </p:sp>
@@ -4070,6 +4090,7 @@
           <a:lstStyle/>
           <a:p>
             <a:pPr algn="ctr"/>
+            <a:endParaRPr/>
           </a:p>
         </p:txBody>
       </p:sp>
@@ -4113,6 +4134,7 @@
           <a:lstStyle/>
           <a:p>
             <a:pPr algn="ctr"/>
+            <a:endParaRPr/>
           </a:p>
         </p:txBody>
       </p:sp>
@@ -4227,7 +4249,7 @@
 </file>
 
 <file path=ppt/slides/slide11.xml><?xml version="1.0" encoding="utf-8"?>
-<p:sld xmlns:a="http://schemas.openxmlformats.org/drawingml/2006/main" xmlns:p="http://schemas.openxmlformats.org/presentationml/2006/main" xmlns:r="http://schemas.openxmlformats.org/officeDocument/2006/relationships">
+<p:sld xmlns:a="http://schemas.openxmlformats.org/drawingml/2006/main" xmlns:r="http://schemas.openxmlformats.org/officeDocument/2006/relationships" xmlns:p="http://schemas.openxmlformats.org/presentationml/2006/main">
   <p:cSld>
     <p:bg>
       <p:bgPr>
@@ -4243,7 +4265,14 @@
         <p:cNvGrpSpPr/>
         <p:nvPr/>
       </p:nvGrpSpPr>
-      <p:grpSpPr/>
+      <p:grpSpPr>
+        <a:xfrm>
+          <a:off x="0" y="0"/>
+          <a:ext cx="0" cy="0"/>
+          <a:chOff x="0" y="0"/>
+          <a:chExt cx="0" cy="0"/>
+        </a:xfrm>
+      </p:grpSpPr>
       <p:sp>
         <p:nvSpPr>
           <p:cNvPr id="2" name="Rectangle 1"/>
@@ -4284,6 +4313,7 @@
           <a:lstStyle/>
           <a:p>
             <a:pPr algn="ctr"/>
+            <a:endParaRPr/>
           </a:p>
         </p:txBody>
       </p:sp>
@@ -4395,6 +4425,7 @@
           <a:lstStyle/>
           <a:p>
             <a:pPr algn="ctr"/>
+            <a:endParaRPr/>
           </a:p>
         </p:txBody>
       </p:sp>
@@ -4540,6 +4571,7 @@
           <a:lstStyle/>
           <a:p>
             <a:pPr algn="ctr"/>
+            <a:endParaRPr/>
           </a:p>
         </p:txBody>
       </p:sp>
@@ -4651,6 +4683,7 @@
           <a:lstStyle/>
           <a:p>
             <a:pPr algn="ctr"/>
+            <a:endParaRPr/>
           </a:p>
         </p:txBody>
       </p:sp>
@@ -4762,6 +4795,7 @@
           <a:lstStyle/>
           <a:p>
             <a:pPr algn="ctr"/>
+            <a:endParaRPr/>
           </a:p>
         </p:txBody>
       </p:sp>
@@ -4874,6 +4908,7 @@
           <a:lstStyle/>
           <a:p>
             <a:pPr algn="ctr"/>
+            <a:endParaRPr/>
           </a:p>
         </p:txBody>
       </p:sp>
@@ -4941,117 +4976,6 @@
                 </a:solidFill>
               </a:rPr>
               <a:t>Fresh Input Tokens</a:t>
-            </a:r>
-          </a:p>
-        </p:txBody>
-      </p:sp>
-      <p:sp>
-        <p:nvSpPr>
-          <p:cNvPr id="21" name="Rectangle 20"/>
-          <p:cNvSpPr/>
-          <p:nvPr/>
-        </p:nvSpPr>
-        <p:spPr>
-          <a:xfrm>
-            <a:off x="320040" y="4773168"/>
-            <a:ext cx="11548872" cy="1371600"/>
-          </a:xfrm>
-          <a:prstGeom prst="rect">
-            <a:avLst/>
-          </a:prstGeom>
-          <a:solidFill>
-            <a:srgbClr val="162A48"/>
-          </a:solidFill>
-          <a:ln>
-            <a:noFill/>
-          </a:ln>
-        </p:spPr>
-        <p:style>
-          <a:lnRef idx="1">
-            <a:schemeClr val="accent1"/>
-          </a:lnRef>
-          <a:fillRef idx="3">
-            <a:schemeClr val="accent1"/>
-          </a:fillRef>
-          <a:effectRef idx="2">
-            <a:schemeClr val="accent1"/>
-          </a:effectRef>
-          <a:fontRef idx="minor">
-            <a:schemeClr val="lt1"/>
-          </a:fontRef>
-        </p:style>
-        <p:txBody>
-          <a:bodyPr rtlCol="0" anchor="ctr"/>
-          <a:lstStyle/>
-          <a:p>
-            <a:pPr algn="ctr"/>
-          </a:p>
-        </p:txBody>
-      </p:sp>
-      <p:sp>
-        <p:nvSpPr>
-          <p:cNvPr id="22" name="TextBox 21"/>
-          <p:cNvSpPr txBox="1"/>
-          <p:nvPr/>
-        </p:nvSpPr>
-        <p:spPr>
-          <a:xfrm>
-            <a:off x="502920" y="4864608"/>
-            <a:ext cx="11201400" cy="438912"/>
-          </a:xfrm>
-          <a:prstGeom prst="rect">
-            <a:avLst/>
-          </a:prstGeom>
-          <a:noFill/>
-        </p:spPr>
-        <p:txBody>
-          <a:bodyPr wrap="square">
-            <a:spAutoFit/>
-          </a:bodyPr>
-          <a:lstStyle/>
-          <a:p>
-            <a:pPr algn="l"/>
-            <a:r>
-              <a:rPr sz="1700" b="1" i="0">
-                <a:solidFill>
-                  <a:srgbClr val="4A90E2"/>
-                </a:solidFill>
-              </a:rPr>
-              <a:t>92% of all tokens came from cache  --  showing how efficiently Claude reused context across turns</a:t>
-            </a:r>
-          </a:p>
-        </p:txBody>
-      </p:sp>
-      <p:sp>
-        <p:nvSpPr>
-          <p:cNvPr id="23" name="TextBox 22"/>
-          <p:cNvSpPr txBox="1"/>
-          <p:nvPr/>
-        </p:nvSpPr>
-        <p:spPr>
-          <a:xfrm>
-            <a:off x="502920" y="5321808"/>
-            <a:ext cx="11201400" cy="685800"/>
-          </a:xfrm>
-          <a:prstGeom prst="rect">
-            <a:avLst/>
-          </a:prstGeom>
-          <a:noFill/>
-        </p:spPr>
-        <p:txBody>
-          <a:bodyPr wrap="square">
-            <a:spAutoFit/>
-          </a:bodyPr>
-          <a:lstStyle/>
-          <a:p>
-            <a:pPr algn="l"/>
-            <a:r>
-              <a:rPr sz="1500" b="0" i="0">
-                <a:solidFill>
-                  <a:srgbClr val="B0C8E8"/>
-                </a:solidFill>
-              </a:rPr>
-              <a:t>Cache hits save processing time and cost. Output tokens (343K) represent all code, explanations and fixes generated by Claude.</a:t>
             </a:r>
           </a:p>
         </p:txBody>
@@ -5065,7 +4989,7 @@
 </file>
 
 <file path=ppt/slides/slide12.xml><?xml version="1.0" encoding="utf-8"?>
-<p:sld xmlns:a="http://schemas.openxmlformats.org/drawingml/2006/main" xmlns:p="http://schemas.openxmlformats.org/presentationml/2006/main" xmlns:r="http://schemas.openxmlformats.org/officeDocument/2006/relationships">
+<p:sld xmlns:a="http://schemas.openxmlformats.org/drawingml/2006/main" xmlns:r="http://schemas.openxmlformats.org/officeDocument/2006/relationships" xmlns:p="http://schemas.openxmlformats.org/presentationml/2006/main">
   <p:cSld>
     <p:bg>
       <p:bgPr>
@@ -5081,7 +5005,14 @@
         <p:cNvGrpSpPr/>
         <p:nvPr/>
       </p:nvGrpSpPr>
-      <p:grpSpPr/>
+      <p:grpSpPr>
+        <a:xfrm>
+          <a:off x="0" y="0"/>
+          <a:ext cx="0" cy="0"/>
+          <a:chOff x="0" y="0"/>
+          <a:chExt cx="0" cy="0"/>
+        </a:xfrm>
+      </p:grpSpPr>
       <p:sp>
         <p:nvSpPr>
           <p:cNvPr id="2" name="Rectangle 1"/>
@@ -5122,6 +5053,7 @@
           <a:lstStyle/>
           <a:p>
             <a:pPr algn="ctr"/>
+            <a:endParaRPr/>
           </a:p>
         </p:txBody>
       </p:sp>
@@ -5199,6 +5131,7 @@
           <a:lstStyle/>
           <a:p>
             <a:pPr algn="ctr"/>
+            <a:endParaRPr/>
           </a:p>
         </p:txBody>
       </p:sp>
@@ -5311,6 +5244,7 @@
           <a:lstStyle/>
           <a:p>
             <a:pPr algn="ctr"/>
+            <a:endParaRPr/>
           </a:p>
         </p:txBody>
       </p:sp>
@@ -5423,6 +5357,7 @@
           <a:lstStyle/>
           <a:p>
             <a:pPr algn="ctr"/>
+            <a:endParaRPr/>
           </a:p>
         </p:txBody>
       </p:sp>
@@ -5534,6 +5469,7 @@
           <a:lstStyle/>
           <a:p>
             <a:pPr algn="ctr"/>
+            <a:endParaRPr/>
           </a:p>
         </p:txBody>
       </p:sp>
@@ -5646,6 +5582,7 @@
           <a:lstStyle/>
           <a:p>
             <a:pPr algn="ctr"/>
+            <a:endParaRPr/>
           </a:p>
         </p:txBody>
       </p:sp>
@@ -5757,6 +5694,7 @@
           <a:lstStyle/>
           <a:p>
             <a:pPr algn="ctr"/>
+            <a:endParaRPr/>
           </a:p>
         </p:txBody>
       </p:sp>
@@ -5800,6 +5738,7 @@
           <a:lstStyle/>
           <a:p>
             <a:pPr algn="ctr"/>
+            <a:endParaRPr/>
           </a:p>
         </p:txBody>
       </p:sp>
@@ -5945,6 +5884,7 @@
           <a:lstStyle/>
           <a:p>
             <a:pPr algn="ctr"/>
+            <a:endParaRPr/>
           </a:p>
         </p:txBody>
       </p:sp>
@@ -5988,6 +5928,7 @@
           <a:lstStyle/>
           <a:p>
             <a:pPr algn="ctr"/>
+            <a:endParaRPr/>
           </a:p>
         </p:txBody>
       </p:sp>
@@ -6102,7 +6043,844 @@
 </file>
 
 <file path=ppt/slides/slide13.xml><?xml version="1.0" encoding="utf-8"?>
-<p:sld xmlns:a="http://schemas.openxmlformats.org/drawingml/2006/main" xmlns:p="http://schemas.openxmlformats.org/presentationml/2006/main" xmlns:r="http://schemas.openxmlformats.org/officeDocument/2006/relationships">
+<p:sld xmlns:a="http://schemas.openxmlformats.org/drawingml/2006/main" xmlns:r="http://schemas.openxmlformats.org/officeDocument/2006/relationships" xmlns:p="http://schemas.openxmlformats.org/presentationml/2006/main">
+  <p:cSld>
+    <p:spTree>
+      <p:nvGrpSpPr>
+        <p:cNvPr id="1" name=""/>
+        <p:cNvGrpSpPr/>
+        <p:nvPr/>
+      </p:nvGrpSpPr>
+      <p:grpSpPr>
+        <a:xfrm>
+          <a:off x="0" y="0"/>
+          <a:ext cx="0" cy="0"/>
+          <a:chOff x="0" y="0"/>
+          <a:chExt cx="0" cy="0"/>
+        </a:xfrm>
+      </p:grpSpPr>
+      <p:sp>
+        <p:nvSpPr>
+          <p:cNvPr id="2" name="Rectangle 1"/>
+          <p:cNvSpPr/>
+          <p:nvPr/>
+        </p:nvSpPr>
+        <p:spPr>
+          <a:xfrm>
+            <a:off x="0" y="0"/>
+            <a:ext cx="12188825" cy="1097280"/>
+          </a:xfrm>
+          <a:prstGeom prst="rect">
+            <a:avLst/>
+          </a:prstGeom>
+          <a:solidFill>
+            <a:srgbClr val="1C3557"/>
+          </a:solidFill>
+          <a:ln>
+            <a:noFill/>
+          </a:ln>
+        </p:spPr>
+        <p:style>
+          <a:lnRef idx="1">
+            <a:schemeClr val="accent1"/>
+          </a:lnRef>
+          <a:fillRef idx="3">
+            <a:schemeClr val="accent1"/>
+          </a:fillRef>
+          <a:effectRef idx="2">
+            <a:schemeClr val="accent1"/>
+          </a:effectRef>
+          <a:fontRef idx="minor">
+            <a:schemeClr val="lt1"/>
+          </a:fontRef>
+        </p:style>
+        <p:txBody>
+          <a:bodyPr rtlCol="0" anchor="ctr"/>
+          <a:lstStyle/>
+          <a:p>
+            <a:pPr algn="ctr"/>
+            <a:endParaRPr/>
+          </a:p>
+        </p:txBody>
+      </p:sp>
+      <p:sp>
+        <p:nvSpPr>
+          <p:cNvPr id="3" name="TextBox 2"/>
+          <p:cNvSpPr txBox="1"/>
+          <p:nvPr/>
+        </p:nvSpPr>
+        <p:spPr>
+          <a:xfrm>
+            <a:off x="411480" y="201168"/>
+            <a:ext cx="11430000" cy="777240"/>
+          </a:xfrm>
+          <a:prstGeom prst="rect">
+            <a:avLst/>
+          </a:prstGeom>
+          <a:noFill/>
+        </p:spPr>
+        <p:txBody>
+          <a:bodyPr wrap="square"/>
+          <a:lstStyle/>
+          <a:p>
+            <a:pPr algn="l"/>
+            <a:r>
+              <a:rPr sz="3200" b="1">
+                <a:solidFill>
+                  <a:srgbClr val="FFFFFF"/>
+                </a:solidFill>
+              </a:rPr>
+              <a:t>C/F Toggle Bug  —  Analysis &amp; Fix</a:t>
+            </a:r>
+          </a:p>
+        </p:txBody>
+      </p:sp>
+      <p:sp>
+        <p:nvSpPr>
+          <p:cNvPr id="4" name="Rectangle 3"/>
+          <p:cNvSpPr/>
+          <p:nvPr/>
+        </p:nvSpPr>
+        <p:spPr>
+          <a:xfrm>
+            <a:off x="274320" y="1170432"/>
+            <a:ext cx="5669280" cy="1920240"/>
+          </a:xfrm>
+          <a:prstGeom prst="rect">
+            <a:avLst/>
+          </a:prstGeom>
+          <a:solidFill>
+            <a:srgbClr val="F4F6F9"/>
+          </a:solidFill>
+          <a:ln>
+            <a:noFill/>
+          </a:ln>
+        </p:spPr>
+        <p:style>
+          <a:lnRef idx="1">
+            <a:schemeClr val="accent1"/>
+          </a:lnRef>
+          <a:fillRef idx="3">
+            <a:schemeClr val="accent1"/>
+          </a:fillRef>
+          <a:effectRef idx="2">
+            <a:schemeClr val="accent1"/>
+          </a:effectRef>
+          <a:fontRef idx="minor">
+            <a:schemeClr val="lt1"/>
+          </a:fontRef>
+        </p:style>
+        <p:txBody>
+          <a:bodyPr rtlCol="0" anchor="ctr"/>
+          <a:lstStyle/>
+          <a:p>
+            <a:pPr algn="ctr"/>
+            <a:endParaRPr/>
+          </a:p>
+        </p:txBody>
+      </p:sp>
+      <p:sp>
+        <p:nvSpPr>
+          <p:cNvPr id="5" name="Rectangle 4"/>
+          <p:cNvSpPr/>
+          <p:nvPr/>
+        </p:nvSpPr>
+        <p:spPr>
+          <a:xfrm>
+            <a:off x="274320" y="1170432"/>
+            <a:ext cx="182880" cy="1920240"/>
+          </a:xfrm>
+          <a:prstGeom prst="rect">
+            <a:avLst/>
+          </a:prstGeom>
+          <a:solidFill>
+            <a:srgbClr val="E86A2C"/>
+          </a:solidFill>
+          <a:ln>
+            <a:noFill/>
+          </a:ln>
+        </p:spPr>
+        <p:style>
+          <a:lnRef idx="1">
+            <a:schemeClr val="accent1"/>
+          </a:lnRef>
+          <a:fillRef idx="3">
+            <a:schemeClr val="accent1"/>
+          </a:fillRef>
+          <a:effectRef idx="2">
+            <a:schemeClr val="accent1"/>
+          </a:effectRef>
+          <a:fontRef idx="minor">
+            <a:schemeClr val="lt1"/>
+          </a:fontRef>
+        </p:style>
+        <p:txBody>
+          <a:bodyPr rtlCol="0" anchor="ctr"/>
+          <a:lstStyle/>
+          <a:p>
+            <a:pPr algn="ctr"/>
+            <a:endParaRPr/>
+          </a:p>
+        </p:txBody>
+      </p:sp>
+      <p:sp>
+        <p:nvSpPr>
+          <p:cNvPr id="6" name="TextBox 5"/>
+          <p:cNvSpPr txBox="1"/>
+          <p:nvPr/>
+        </p:nvSpPr>
+        <p:spPr>
+          <a:xfrm>
+            <a:off x="566928" y="1280160"/>
+            <a:ext cx="5303520" cy="384048"/>
+          </a:xfrm>
+          <a:prstGeom prst="rect">
+            <a:avLst/>
+          </a:prstGeom>
+          <a:noFill/>
+        </p:spPr>
+        <p:txBody>
+          <a:bodyPr wrap="square"/>
+          <a:lstStyle/>
+          <a:p>
+            <a:pPr algn="l"/>
+            <a:r>
+              <a:rPr sz="1700" b="1">
+                <a:solidFill>
+                  <a:srgbClr val="1C3557"/>
+                </a:solidFill>
+              </a:rPr>
+              <a:t>Root Cause</a:t>
+            </a:r>
+          </a:p>
+        </p:txBody>
+      </p:sp>
+      <p:sp>
+        <p:nvSpPr>
+          <p:cNvPr id="7" name="TextBox 6"/>
+          <p:cNvSpPr txBox="1"/>
+          <p:nvPr/>
+        </p:nvSpPr>
+        <p:spPr>
+          <a:xfrm>
+            <a:off x="566928" y="1700784"/>
+            <a:ext cx="5303520" cy="457200"/>
+          </a:xfrm>
+          <a:prstGeom prst="rect">
+            <a:avLst/>
+          </a:prstGeom>
+          <a:noFill/>
+        </p:spPr>
+        <p:txBody>
+          <a:bodyPr wrap="square"/>
+          <a:lstStyle/>
+          <a:p>
+            <a:pPr algn="l"/>
+            <a:r>
+              <a:rPr sz="1500" b="0">
+                <a:solidFill>
+                  <a:srgbClr val="993322"/>
+                </a:solidFill>
+              </a:rPr>
+              <a:t>isCelsius: a dead parameter</a:t>
+            </a:r>
+          </a:p>
+        </p:txBody>
+      </p:sp>
+      <p:sp>
+        <p:nvSpPr>
+          <p:cNvPr id="8" name="TextBox 7"/>
+          <p:cNvSpPr txBox="1"/>
+          <p:nvPr/>
+        </p:nvSpPr>
+        <p:spPr>
+          <a:xfrm>
+            <a:off x="566928" y="2194560"/>
+            <a:ext cx="5303520" cy="777240"/>
+          </a:xfrm>
+          <a:prstGeom prst="rect">
+            <a:avLst/>
+          </a:prstGeom>
+          <a:noFill/>
+        </p:spPr>
+        <p:txBody>
+          <a:bodyPr wrap="square"/>
+          <a:lstStyle/>
+          <a:p>
+            <a:pPr algn="l"/>
+            <a:r>
+              <a:rPr sz="1300" b="0">
+                <a:solidFill>
+                  <a:srgbClr val="222233"/>
+                </a:solidFill>
+              </a:rPr>
+              <a:t>Passed to every child Composable (TopWeatherSection, HourlyForecastItem, DailyForecastRow, IndicatorsGrid) but never read in any body -- only viewModel.formatTemp() is called, which reads _isCelsius.value directly from a StateFlow.</a:t>
+            </a:r>
+          </a:p>
+        </p:txBody>
+      </p:sp>
+      <p:sp>
+        <p:nvSpPr>
+          <p:cNvPr id="9" name="Rectangle 8"/>
+          <p:cNvSpPr/>
+          <p:nvPr/>
+        </p:nvSpPr>
+        <p:spPr>
+          <a:xfrm>
+            <a:off x="6382512" y="1170432"/>
+            <a:ext cx="5669280" cy="1920240"/>
+          </a:xfrm>
+          <a:prstGeom prst="rect">
+            <a:avLst/>
+          </a:prstGeom>
+          <a:solidFill>
+            <a:srgbClr val="F4F6F9"/>
+          </a:solidFill>
+          <a:ln>
+            <a:noFill/>
+          </a:ln>
+        </p:spPr>
+        <p:style>
+          <a:lnRef idx="1">
+            <a:schemeClr val="accent1"/>
+          </a:lnRef>
+          <a:fillRef idx="3">
+            <a:schemeClr val="accent1"/>
+          </a:fillRef>
+          <a:effectRef idx="2">
+            <a:schemeClr val="accent1"/>
+          </a:effectRef>
+          <a:fontRef idx="minor">
+            <a:schemeClr val="lt1"/>
+          </a:fontRef>
+        </p:style>
+        <p:txBody>
+          <a:bodyPr rtlCol="0" anchor="ctr"/>
+          <a:lstStyle/>
+          <a:p>
+            <a:pPr algn="ctr"/>
+            <a:endParaRPr/>
+          </a:p>
+        </p:txBody>
+      </p:sp>
+      <p:sp>
+        <p:nvSpPr>
+          <p:cNvPr id="10" name="Rectangle 9"/>
+          <p:cNvSpPr/>
+          <p:nvPr/>
+        </p:nvSpPr>
+        <p:spPr>
+          <a:xfrm>
+            <a:off x="6382512" y="1170432"/>
+            <a:ext cx="182880" cy="1920240"/>
+          </a:xfrm>
+          <a:prstGeom prst="rect">
+            <a:avLst/>
+          </a:prstGeom>
+          <a:solidFill>
+            <a:srgbClr val="4A90E2"/>
+          </a:solidFill>
+          <a:ln>
+            <a:noFill/>
+          </a:ln>
+        </p:spPr>
+        <p:style>
+          <a:lnRef idx="1">
+            <a:schemeClr val="accent1"/>
+          </a:lnRef>
+          <a:fillRef idx="3">
+            <a:schemeClr val="accent1"/>
+          </a:fillRef>
+          <a:effectRef idx="2">
+            <a:schemeClr val="accent1"/>
+          </a:effectRef>
+          <a:fontRef idx="minor">
+            <a:schemeClr val="lt1"/>
+          </a:fontRef>
+        </p:style>
+        <p:txBody>
+          <a:bodyPr rtlCol="0" anchor="ctr"/>
+          <a:lstStyle/>
+          <a:p>
+            <a:pPr algn="ctr"/>
+            <a:endParaRPr/>
+          </a:p>
+        </p:txBody>
+      </p:sp>
+      <p:sp>
+        <p:nvSpPr>
+          <p:cNvPr id="11" name="TextBox 10"/>
+          <p:cNvSpPr txBox="1"/>
+          <p:nvPr/>
+        </p:nvSpPr>
+        <p:spPr>
+          <a:xfrm>
+            <a:off x="6675120" y="1280160"/>
+            <a:ext cx="5303520" cy="384048"/>
+          </a:xfrm>
+          <a:prstGeom prst="rect">
+            <a:avLst/>
+          </a:prstGeom>
+          <a:noFill/>
+        </p:spPr>
+        <p:txBody>
+          <a:bodyPr wrap="square"/>
+          <a:lstStyle/>
+          <a:p>
+            <a:pPr algn="l"/>
+            <a:r>
+              <a:rPr sz="1700" b="1">
+                <a:solidFill>
+                  <a:srgbClr val="1C3557"/>
+                </a:solidFill>
+              </a:rPr>
+              <a:t>Why It Breaks</a:t>
+            </a:r>
+          </a:p>
+        </p:txBody>
+      </p:sp>
+      <p:sp>
+        <p:nvSpPr>
+          <p:cNvPr id="12" name="TextBox 11"/>
+          <p:cNvSpPr txBox="1"/>
+          <p:nvPr/>
+        </p:nvSpPr>
+        <p:spPr>
+          <a:xfrm>
+            <a:off x="6675120" y="1700784"/>
+            <a:ext cx="5303520" cy="457200"/>
+          </a:xfrm>
+          <a:prstGeom prst="rect">
+            <a:avLst/>
+          </a:prstGeom>
+          <a:noFill/>
+        </p:spPr>
+        <p:txBody>
+          <a:bodyPr wrap="square"/>
+          <a:lstStyle/>
+          <a:p>
+            <a:pPr algn="l"/>
+            <a:r>
+              <a:rPr sz="1500" b="0">
+                <a:solidFill>
+                  <a:srgbClr val="993322"/>
+                </a:solidFill>
+              </a:rPr>
+              <a:t>Compose cannot track the StateFlow read</a:t>
+            </a:r>
+          </a:p>
+        </p:txBody>
+      </p:sp>
+      <p:sp>
+        <p:nvSpPr>
+          <p:cNvPr id="13" name="TextBox 12"/>
+          <p:cNvSpPr txBox="1"/>
+          <p:nvPr/>
+        </p:nvSpPr>
+        <p:spPr>
+          <a:xfrm>
+            <a:off x="6675120" y="2194560"/>
+            <a:ext cx="5303520" cy="777240"/>
+          </a:xfrm>
+          <a:prstGeom prst="rect">
+            <a:avLst/>
+          </a:prstGeom>
+          <a:noFill/>
+        </p:spPr>
+        <p:txBody>
+          <a:bodyPr wrap="square"/>
+          <a:lstStyle/>
+          <a:p>
+            <a:pPr algn="l"/>
+            <a:r>
+              <a:rPr sz="1300" b="0">
+                <a:solidFill>
+                  <a:srgbClr val="222233"/>
+                </a:solidFill>
+              </a:rPr>
+              <a:t>Compose only re-renders when a State&lt;T&gt; value changes inside a composable body. Reading _isCelsius.value inside a plain Kotlin function is invisible to Compose -- so LazyRow items may silently skip recomposition.</a:t>
+            </a:r>
+          </a:p>
+        </p:txBody>
+      </p:sp>
+      <p:sp>
+        <p:nvSpPr>
+          <p:cNvPr id="14" name="Rectangle 13"/>
+          <p:cNvSpPr/>
+          <p:nvPr/>
+        </p:nvSpPr>
+        <p:spPr>
+          <a:xfrm>
+            <a:off x="274320" y="3200400"/>
+            <a:ext cx="5669280" cy="1920240"/>
+          </a:xfrm>
+          <a:prstGeom prst="rect">
+            <a:avLst/>
+          </a:prstGeom>
+          <a:solidFill>
+            <a:srgbClr val="F4F6F9"/>
+          </a:solidFill>
+          <a:ln>
+            <a:noFill/>
+          </a:ln>
+        </p:spPr>
+        <p:style>
+          <a:lnRef idx="1">
+            <a:schemeClr val="accent1"/>
+          </a:lnRef>
+          <a:fillRef idx="3">
+            <a:schemeClr val="accent1"/>
+          </a:fillRef>
+          <a:effectRef idx="2">
+            <a:schemeClr val="accent1"/>
+          </a:effectRef>
+          <a:fontRef idx="minor">
+            <a:schemeClr val="lt1"/>
+          </a:fontRef>
+        </p:style>
+        <p:txBody>
+          <a:bodyPr rtlCol="0" anchor="ctr"/>
+          <a:lstStyle/>
+          <a:p>
+            <a:pPr algn="ctr"/>
+            <a:endParaRPr/>
+          </a:p>
+        </p:txBody>
+      </p:sp>
+      <p:sp>
+        <p:nvSpPr>
+          <p:cNvPr id="15" name="Rectangle 14"/>
+          <p:cNvSpPr/>
+          <p:nvPr/>
+        </p:nvSpPr>
+        <p:spPr>
+          <a:xfrm>
+            <a:off x="274320" y="3200400"/>
+            <a:ext cx="182880" cy="1920240"/>
+          </a:xfrm>
+          <a:prstGeom prst="rect">
+            <a:avLst/>
+          </a:prstGeom>
+          <a:solidFill>
+            <a:srgbClr val="8E44AD"/>
+          </a:solidFill>
+          <a:ln>
+            <a:noFill/>
+          </a:ln>
+        </p:spPr>
+        <p:style>
+          <a:lnRef idx="1">
+            <a:schemeClr val="accent1"/>
+          </a:lnRef>
+          <a:fillRef idx="3">
+            <a:schemeClr val="accent1"/>
+          </a:fillRef>
+          <a:effectRef idx="2">
+            <a:schemeClr val="accent1"/>
+          </a:effectRef>
+          <a:fontRef idx="minor">
+            <a:schemeClr val="lt1"/>
+          </a:fontRef>
+        </p:style>
+        <p:txBody>
+          <a:bodyPr rtlCol="0" anchor="ctr"/>
+          <a:lstStyle/>
+          <a:p>
+            <a:pPr algn="ctr"/>
+            <a:endParaRPr/>
+          </a:p>
+        </p:txBody>
+      </p:sp>
+      <p:sp>
+        <p:nvSpPr>
+          <p:cNvPr id="16" name="TextBox 15"/>
+          <p:cNvSpPr txBox="1"/>
+          <p:nvPr/>
+        </p:nvSpPr>
+        <p:spPr>
+          <a:xfrm>
+            <a:off x="566928" y="3310128"/>
+            <a:ext cx="5303520" cy="384048"/>
+          </a:xfrm>
+          <a:prstGeom prst="rect">
+            <a:avLst/>
+          </a:prstGeom>
+          <a:noFill/>
+        </p:spPr>
+        <p:txBody>
+          <a:bodyPr wrap="square"/>
+          <a:lstStyle/>
+          <a:p>
+            <a:pPr algn="l"/>
+            <a:r>
+              <a:rPr sz="1700" b="1">
+                <a:solidFill>
+                  <a:srgbClr val="1C3557"/>
+                </a:solidFill>
+              </a:rPr>
+              <a:t>Fix Applied</a:t>
+            </a:r>
+          </a:p>
+        </p:txBody>
+      </p:sp>
+      <p:sp>
+        <p:nvSpPr>
+          <p:cNvPr id="17" name="TextBox 16"/>
+          <p:cNvSpPr txBox="1"/>
+          <p:nvPr/>
+        </p:nvSpPr>
+        <p:spPr>
+          <a:xfrm>
+            <a:off x="566928" y="3730752"/>
+            <a:ext cx="5303520" cy="457200"/>
+          </a:xfrm>
+          <a:prstGeom prst="rect">
+            <a:avLst/>
+          </a:prstGeom>
+          <a:noFill/>
+        </p:spPr>
+        <p:txBody>
+          <a:bodyPr wrap="square"/>
+          <a:lstStyle/>
+          <a:p>
+            <a:pPr algn="l"/>
+            <a:r>
+              <a:rPr sz="1500" b="0">
+                <a:solidFill>
+                  <a:srgbClr val="993322"/>
+                </a:solidFill>
+              </a:rPr>
+              <a:t>Pure functions with explicit isCelsius param</a:t>
+            </a:r>
+          </a:p>
+        </p:txBody>
+      </p:sp>
+      <p:sp>
+        <p:nvSpPr>
+          <p:cNvPr id="18" name="TextBox 17"/>
+          <p:cNvSpPr txBox="1"/>
+          <p:nvPr/>
+        </p:nvSpPr>
+        <p:spPr>
+          <a:xfrm>
+            <a:off x="566928" y="4224528"/>
+            <a:ext cx="5303520" cy="777240"/>
+          </a:xfrm>
+          <a:prstGeom prst="rect">
+            <a:avLst/>
+          </a:prstGeom>
+          <a:noFill/>
+        </p:spPr>
+        <p:txBody>
+          <a:bodyPr wrap="square"/>
+          <a:lstStyle/>
+          <a:p>
+            <a:pPr algn="l"/>
+            <a:r>
+              <a:rPr sz="1300" b="0">
+                <a:solidFill>
+                  <a:srgbClr val="222233"/>
+                </a:solidFill>
+              </a:rPr>
+              <a:t>convertTemp(celsius, isCelsius) and formatTemp(celsius, isCelsius) now take isCelsius as an explicit argument. All 4 child Composables actually read the parameter -- Compose tracks it and recomposes correctly on toggle.</a:t>
+            </a:r>
+          </a:p>
+        </p:txBody>
+      </p:sp>
+      <p:sp>
+        <p:nvSpPr>
+          <p:cNvPr id="19" name="Rectangle 18"/>
+          <p:cNvSpPr/>
+          <p:nvPr/>
+        </p:nvSpPr>
+        <p:spPr>
+          <a:xfrm>
+            <a:off x="6382512" y="3200400"/>
+            <a:ext cx="5669280" cy="1920240"/>
+          </a:xfrm>
+          <a:prstGeom prst="rect">
+            <a:avLst/>
+          </a:prstGeom>
+          <a:solidFill>
+            <a:srgbClr val="F4F6F9"/>
+          </a:solidFill>
+          <a:ln>
+            <a:noFill/>
+          </a:ln>
+        </p:spPr>
+        <p:style>
+          <a:lnRef idx="1">
+            <a:schemeClr val="accent1"/>
+          </a:lnRef>
+          <a:fillRef idx="3">
+            <a:schemeClr val="accent1"/>
+          </a:fillRef>
+          <a:effectRef idx="2">
+            <a:schemeClr val="accent1"/>
+          </a:effectRef>
+          <a:fontRef idx="minor">
+            <a:schemeClr val="lt1"/>
+          </a:fontRef>
+        </p:style>
+        <p:txBody>
+          <a:bodyPr rtlCol="0" anchor="ctr"/>
+          <a:lstStyle/>
+          <a:p>
+            <a:pPr algn="ctr"/>
+            <a:endParaRPr/>
+          </a:p>
+        </p:txBody>
+      </p:sp>
+      <p:sp>
+        <p:nvSpPr>
+          <p:cNvPr id="20" name="Rectangle 19"/>
+          <p:cNvSpPr/>
+          <p:nvPr/>
+        </p:nvSpPr>
+        <p:spPr>
+          <a:xfrm>
+            <a:off x="6382512" y="3200400"/>
+            <a:ext cx="182880" cy="1920240"/>
+          </a:xfrm>
+          <a:prstGeom prst="rect">
+            <a:avLst/>
+          </a:prstGeom>
+          <a:solidFill>
+            <a:srgbClr val="3DDC84"/>
+          </a:solidFill>
+          <a:ln>
+            <a:noFill/>
+          </a:ln>
+        </p:spPr>
+        <p:style>
+          <a:lnRef idx="1">
+            <a:schemeClr val="accent1"/>
+          </a:lnRef>
+          <a:fillRef idx="3">
+            <a:schemeClr val="accent1"/>
+          </a:fillRef>
+          <a:effectRef idx="2">
+            <a:schemeClr val="accent1"/>
+          </a:effectRef>
+          <a:fontRef idx="minor">
+            <a:schemeClr val="lt1"/>
+          </a:fontRef>
+        </p:style>
+        <p:txBody>
+          <a:bodyPr rtlCol="0" anchor="ctr"/>
+          <a:lstStyle/>
+          <a:p>
+            <a:pPr algn="ctr"/>
+            <a:endParaRPr/>
+          </a:p>
+        </p:txBody>
+      </p:sp>
+      <p:sp>
+        <p:nvSpPr>
+          <p:cNvPr id="21" name="TextBox 20"/>
+          <p:cNvSpPr txBox="1"/>
+          <p:nvPr/>
+        </p:nvSpPr>
+        <p:spPr>
+          <a:xfrm>
+            <a:off x="6675120" y="3310128"/>
+            <a:ext cx="5303520" cy="384048"/>
+          </a:xfrm>
+          <a:prstGeom prst="rect">
+            <a:avLst/>
+          </a:prstGeom>
+          <a:noFill/>
+        </p:spPr>
+        <p:txBody>
+          <a:bodyPr wrap="square"/>
+          <a:lstStyle/>
+          <a:p>
+            <a:pPr algn="l"/>
+            <a:r>
+              <a:rPr sz="1700" b="1">
+                <a:solidFill>
+                  <a:srgbClr val="1C3557"/>
+                </a:solidFill>
+              </a:rPr>
+              <a:t>Bonus Fix</a:t>
+            </a:r>
+          </a:p>
+        </p:txBody>
+      </p:sp>
+      <p:sp>
+        <p:nvSpPr>
+          <p:cNvPr id="22" name="TextBox 21"/>
+          <p:cNvSpPr txBox="1"/>
+          <p:nvPr/>
+        </p:nvSpPr>
+        <p:spPr>
+          <a:xfrm>
+            <a:off x="6675120" y="3730752"/>
+            <a:ext cx="5303520" cy="457200"/>
+          </a:xfrm>
+          <a:prstGeom prst="rect">
+            <a:avLst/>
+          </a:prstGeom>
+          <a:noFill/>
+        </p:spPr>
+        <p:txBody>
+          <a:bodyPr wrap="square"/>
+          <a:lstStyle/>
+          <a:p>
+            <a:pPr algn="l"/>
+            <a:r>
+              <a:rPr sz="1500" b="0">
+                <a:solidFill>
+                  <a:srgbClr val="993322"/>
+                </a:solidFill>
+              </a:rPr>
+              <a:t>Unit label added to temperature output</a:t>
+            </a:r>
+          </a:p>
+        </p:txBody>
+      </p:sp>
+      <p:sp>
+        <p:nvSpPr>
+          <p:cNvPr id="23" name="TextBox 22"/>
+          <p:cNvSpPr txBox="1"/>
+          <p:nvPr/>
+        </p:nvSpPr>
+        <p:spPr>
+          <a:xfrm>
+            <a:off x="6675120" y="4224528"/>
+            <a:ext cx="5303520" cy="777240"/>
+          </a:xfrm>
+          <a:prstGeom prst="rect">
+            <a:avLst/>
+          </a:prstGeom>
+          <a:noFill/>
+        </p:spPr>
+        <p:txBody>
+          <a:bodyPr wrap="square"/>
+          <a:lstStyle/>
+          <a:p>
+            <a:pPr algn="l"/>
+            <a:r>
+              <a:rPr sz="1300" b="0">
+                <a:solidFill>
+                  <a:srgbClr val="222233"/>
+                </a:solidFill>
+              </a:rPr>
+              <a:t>formatTemp() previously returned "22°" with no C or F suffix, making it impossible to confirm which unit was active. Now returns "22°C" or "72°F" so the toggle is visually verifiable.</a:t>
+            </a:r>
+          </a:p>
+        </p:txBody>
+      </p:sp>
+    </p:spTree>
+  </p:cSld>
+  <p:clrMapOvr>
+    <a:masterClrMapping/>
+  </p:clrMapOvr>
+</p:sld>
+</file>
+
+<file path=ppt/slides/slide14.xml><?xml version="1.0" encoding="utf-8"?>
+<p:sld xmlns:a="http://schemas.openxmlformats.org/drawingml/2006/main" xmlns:r="http://schemas.openxmlformats.org/officeDocument/2006/relationships" xmlns:p="http://schemas.openxmlformats.org/presentationml/2006/main">
   <p:cSld>
     <p:bg>
       <p:bgPr>
@@ -6118,7 +6896,14 @@
         <p:cNvGrpSpPr/>
         <p:nvPr/>
       </p:nvGrpSpPr>
-      <p:grpSpPr/>
+      <p:grpSpPr>
+        <a:xfrm>
+          <a:off x="0" y="0"/>
+          <a:ext cx="0" cy="0"/>
+          <a:chOff x="0" y="0"/>
+          <a:chExt cx="0" cy="0"/>
+        </a:xfrm>
+      </p:grpSpPr>
       <p:sp>
         <p:nvSpPr>
           <p:cNvPr id="2" name="Rectangle 1"/>
@@ -6159,6 +6944,7 @@
           <a:lstStyle/>
           <a:p>
             <a:pPr algn="ctr"/>
+            <a:endParaRPr/>
           </a:p>
         </p:txBody>
       </p:sp>
@@ -6202,6 +6988,7 @@
           <a:lstStyle/>
           <a:p>
             <a:pPr algn="ctr"/>
+            <a:endParaRPr/>
           </a:p>
         </p:txBody>
       </p:sp>
@@ -6313,6 +7100,7 @@
           <a:lstStyle/>
           <a:p>
             <a:pPr algn="ctr"/>
+            <a:endParaRPr/>
           </a:p>
         </p:txBody>
       </p:sp>
@@ -6393,7 +7181,7 @@
 </file>
 
 <file path=ppt/slides/slide2.xml><?xml version="1.0" encoding="utf-8"?>
-<p:sld xmlns:a="http://schemas.openxmlformats.org/drawingml/2006/main" xmlns:p="http://schemas.openxmlformats.org/presentationml/2006/main" xmlns:r="http://schemas.openxmlformats.org/officeDocument/2006/relationships">
+<p:sld xmlns:a="http://schemas.openxmlformats.org/drawingml/2006/main" xmlns:r="http://schemas.openxmlformats.org/officeDocument/2006/relationships" xmlns:p="http://schemas.openxmlformats.org/presentationml/2006/main">
   <p:cSld>
     <p:bg>
       <p:bgPr>
@@ -6409,7 +7197,14 @@
         <p:cNvGrpSpPr/>
         <p:nvPr/>
       </p:nvGrpSpPr>
-      <p:grpSpPr/>
+      <p:grpSpPr>
+        <a:xfrm>
+          <a:off x="0" y="0"/>
+          <a:ext cx="0" cy="0"/>
+          <a:chOff x="0" y="0"/>
+          <a:chExt cx="0" cy="0"/>
+        </a:xfrm>
+      </p:grpSpPr>
       <p:sp>
         <p:nvSpPr>
           <p:cNvPr id="2" name="Rectangle 1"/>
@@ -6450,6 +7245,7 @@
           <a:lstStyle/>
           <a:p>
             <a:pPr algn="ctr"/>
+            <a:endParaRPr/>
           </a:p>
         </p:txBody>
       </p:sp>
@@ -6527,6 +7323,7 @@
           <a:lstStyle/>
           <a:p>
             <a:pPr algn="ctr"/>
+            <a:endParaRPr/>
           </a:p>
         </p:txBody>
       </p:sp>
@@ -6606,6 +7403,7 @@
           <a:lstStyle/>
           <a:p>
             <a:pPr algn="ctr"/>
+            <a:endParaRPr/>
           </a:p>
         </p:txBody>
       </p:sp>
@@ -6717,6 +7515,7 @@
           <a:lstStyle/>
           <a:p>
             <a:pPr algn="ctr"/>
+            <a:endParaRPr/>
           </a:p>
         </p:txBody>
       </p:sp>
@@ -6796,6 +7595,7 @@
           <a:lstStyle/>
           <a:p>
             <a:pPr algn="ctr"/>
+            <a:endParaRPr/>
           </a:p>
         </p:txBody>
       </p:sp>
@@ -6907,6 +7707,7 @@
           <a:lstStyle/>
           <a:p>
             <a:pPr algn="ctr"/>
+            <a:endParaRPr/>
           </a:p>
         </p:txBody>
       </p:sp>
@@ -6986,6 +7787,7 @@
           <a:lstStyle/>
           <a:p>
             <a:pPr algn="ctr"/>
+            <a:endParaRPr/>
           </a:p>
         </p:txBody>
       </p:sp>
@@ -7066,7 +7868,7 @@
 </file>
 
 <file path=ppt/slides/slide3.xml><?xml version="1.0" encoding="utf-8"?>
-<p:sld xmlns:a="http://schemas.openxmlformats.org/drawingml/2006/main" xmlns:p="http://schemas.openxmlformats.org/presentationml/2006/main" xmlns:r="http://schemas.openxmlformats.org/officeDocument/2006/relationships">
+<p:sld xmlns:a="http://schemas.openxmlformats.org/drawingml/2006/main" xmlns:r="http://schemas.openxmlformats.org/officeDocument/2006/relationships" xmlns:p="http://schemas.openxmlformats.org/presentationml/2006/main">
   <p:cSld>
     <p:bg>
       <p:bgPr>
@@ -7082,7 +7884,14 @@
         <p:cNvGrpSpPr/>
         <p:nvPr/>
       </p:nvGrpSpPr>
-      <p:grpSpPr/>
+      <p:grpSpPr>
+        <a:xfrm>
+          <a:off x="0" y="0"/>
+          <a:ext cx="0" cy="0"/>
+          <a:chOff x="0" y="0"/>
+          <a:chExt cx="0" cy="0"/>
+        </a:xfrm>
+      </p:grpSpPr>
       <p:sp>
         <p:nvSpPr>
           <p:cNvPr id="2" name="Rectangle 1"/>
@@ -7123,6 +7932,7 @@
           <a:lstStyle/>
           <a:p>
             <a:pPr algn="ctr"/>
+            <a:endParaRPr/>
           </a:p>
         </p:txBody>
       </p:sp>
@@ -7200,6 +8010,7 @@
           <a:lstStyle/>
           <a:p>
             <a:pPr algn="ctr"/>
+            <a:endParaRPr/>
           </a:p>
         </p:txBody>
       </p:sp>
@@ -7277,6 +8088,7 @@
           <a:lstStyle/>
           <a:p>
             <a:pPr algn="ctr"/>
+            <a:endParaRPr/>
           </a:p>
         </p:txBody>
       </p:sp>
@@ -7403,6 +8215,7 @@
           <a:lstStyle/>
           <a:p>
             <a:pPr algn="ctr"/>
+            <a:endParaRPr/>
           </a:p>
         </p:txBody>
       </p:sp>
@@ -7480,6 +8293,7 @@
           <a:lstStyle/>
           <a:p>
             <a:pPr algn="ctr"/>
+            <a:endParaRPr/>
           </a:p>
         </p:txBody>
       </p:sp>
@@ -7599,7 +8413,7 @@
 </file>
 
 <file path=ppt/slides/slide4.xml><?xml version="1.0" encoding="utf-8"?>
-<p:sld xmlns:a="http://schemas.openxmlformats.org/drawingml/2006/main" xmlns:p="http://schemas.openxmlformats.org/presentationml/2006/main" xmlns:r="http://schemas.openxmlformats.org/officeDocument/2006/relationships">
+<p:sld xmlns:a="http://schemas.openxmlformats.org/drawingml/2006/main" xmlns:r="http://schemas.openxmlformats.org/officeDocument/2006/relationships" xmlns:p="http://schemas.openxmlformats.org/presentationml/2006/main">
   <p:cSld>
     <p:bg>
       <p:bgPr>
@@ -7615,7 +8429,14 @@
         <p:cNvGrpSpPr/>
         <p:nvPr/>
       </p:nvGrpSpPr>
-      <p:grpSpPr/>
+      <p:grpSpPr>
+        <a:xfrm>
+          <a:off x="0" y="0"/>
+          <a:ext cx="0" cy="0"/>
+          <a:chOff x="0" y="0"/>
+          <a:chExt cx="0" cy="0"/>
+        </a:xfrm>
+      </p:grpSpPr>
       <p:sp>
         <p:nvSpPr>
           <p:cNvPr id="2" name="Rectangle 1"/>
@@ -7656,6 +8477,7 @@
           <a:lstStyle/>
           <a:p>
             <a:pPr algn="ctr"/>
+            <a:endParaRPr/>
           </a:p>
         </p:txBody>
       </p:sp>
@@ -7693,1000 +8515,118 @@
           </a:p>
         </p:txBody>
       </p:sp>
-      <p:sp>
-        <p:nvSpPr>
-          <p:cNvPr id="4" name="TextBox 3"/>
-          <p:cNvSpPr txBox="1"/>
-          <p:nvPr/>
-        </p:nvSpPr>
-        <p:spPr>
-          <a:xfrm>
-            <a:off x="365760" y="1143000"/>
-            <a:ext cx="11430000" cy="347472"/>
-          </a:xfrm>
-          <a:prstGeom prst="rect">
-            <a:avLst/>
-          </a:prstGeom>
-          <a:noFill/>
-        </p:spPr>
-        <p:txBody>
-          <a:bodyPr wrap="square">
-            <a:spAutoFit/>
-          </a:bodyPr>
-          <a:lstStyle/>
-          <a:p>
-            <a:pPr algn="l"/>
-            <a:r>
-              <a:rPr sz="1600" b="0" i="1">
-                <a:solidFill>
-                  <a:srgbClr val="9999AA"/>
-                </a:solidFill>
-              </a:rPr>
-              <a:t>Insert your iOS simulator / device screenshots here</a:t>
-            </a:r>
-          </a:p>
-        </p:txBody>
-      </p:sp>
-      <p:sp>
-        <p:nvSpPr>
-          <p:cNvPr id="5" name="Rectangle 4"/>
-          <p:cNvSpPr/>
-          <p:nvPr/>
-        </p:nvSpPr>
-        <p:spPr>
-          <a:xfrm>
-            <a:off x="461774" y="1572768"/>
-            <a:ext cx="2084831" cy="4846320"/>
-          </a:xfrm>
-          <a:prstGeom prst="rect">
-            <a:avLst/>
+      <p:pic>
+        <p:nvPicPr>
+          <p:cNvPr id="31" name="Grafik 30">
+            <a:extLst>
+              <a:ext uri="{FF2B5EF4-FFF2-40B4-BE49-F238E27FC236}">
+                <a16:creationId xmlns:a16="http://schemas.microsoft.com/office/drawing/2014/main" id="{7DE38153-B0DC-6F24-C0FE-743E9E003355}"/>
+              </a:ext>
+            </a:extLst>
+          </p:cNvPr>
+          <p:cNvPicPr>
+            <a:picLocks noChangeAspect="1"/>
+          </p:cNvPicPr>
+          <p:nvPr/>
+        </p:nvPicPr>
+        <p:blipFill>
+          <a:blip r:embed="rId2"/>
+          <a:stretch>
+            <a:fillRect/>
+          </a:stretch>
+        </p:blipFill>
+        <p:spPr>
+          <a:xfrm>
+            <a:off x="6376732" y="1298448"/>
+            <a:ext cx="2390342" cy="5186516"/>
+          </a:xfrm>
+          <a:prstGeom prst="roundRect">
+            <a:avLst>
+              <a:gd name="adj" fmla="val 4167"/>
+            </a:avLst>
           </a:prstGeom>
           <a:solidFill>
-            <a:srgbClr val="EAF2FF"/>
+            <a:srgbClr val="FFFFFF"/>
           </a:solidFill>
-          <a:ln w="38100">
+          <a:ln w="76200" cap="sq">
             <a:solidFill>
-              <a:srgbClr val="007AFF"/>
+              <a:srgbClr val="EAEAEA"/>
             </a:solidFill>
+            <a:miter lim="800000"/>
           </a:ln>
-        </p:spPr>
-        <p:style>
-          <a:lnRef idx="1">
-            <a:schemeClr val="accent1"/>
-          </a:lnRef>
-          <a:fillRef idx="3">
-            <a:schemeClr val="accent1"/>
-          </a:fillRef>
-          <a:effectRef idx="2">
-            <a:schemeClr val="accent1"/>
-          </a:effectRef>
-          <a:fontRef idx="minor">
-            <a:schemeClr val="lt1"/>
-          </a:fontRef>
-        </p:style>
-        <p:txBody>
-          <a:bodyPr rtlCol="0" anchor="ctr"/>
-          <a:lstStyle/>
-          <a:p>
-            <a:pPr algn="ctr"/>
-          </a:p>
-        </p:txBody>
-      </p:sp>
-      <p:sp>
-        <p:nvSpPr>
-          <p:cNvPr id="6" name="Rectangle 5"/>
-          <p:cNvSpPr/>
-          <p:nvPr/>
-        </p:nvSpPr>
-        <p:spPr>
-          <a:xfrm>
-            <a:off x="598934" y="1755648"/>
-            <a:ext cx="1810511" cy="4069080"/>
-          </a:xfrm>
-          <a:prstGeom prst="rect">
-            <a:avLst/>
+          <a:effectLst>
+            <a:reflection blurRad="12700" stA="33000" endPos="28000" dist="5000" dir="5400000" sy="-100000" algn="bl" rotWithShape="0"/>
+          </a:effectLst>
+          <a:scene3d>
+            <a:camera prst="orthographicFront"/>
+            <a:lightRig rig="threePt" dir="t">
+              <a:rot lat="0" lon="0" rev="2700000"/>
+            </a:lightRig>
+          </a:scene3d>
+          <a:sp3d contourW="6350">
+            <a:bevelT h="38100"/>
+            <a:contourClr>
+              <a:srgbClr val="C0C0C0"/>
+            </a:contourClr>
+          </a:sp3d>
+        </p:spPr>
+      </p:pic>
+      <p:pic>
+        <p:nvPicPr>
+          <p:cNvPr id="33" name="Grafik 32">
+            <a:extLst>
+              <a:ext uri="{FF2B5EF4-FFF2-40B4-BE49-F238E27FC236}">
+                <a16:creationId xmlns:a16="http://schemas.microsoft.com/office/drawing/2014/main" id="{0C87A805-9B9F-EE10-E42B-1A3B881B2B58}"/>
+              </a:ext>
+            </a:extLst>
+          </p:cNvPr>
+          <p:cNvPicPr>
+            <a:picLocks noChangeAspect="1"/>
+          </p:cNvPicPr>
+          <p:nvPr/>
+        </p:nvPicPr>
+        <p:blipFill>
+          <a:blip r:embed="rId3"/>
+          <a:stretch>
+            <a:fillRect/>
+          </a:stretch>
+        </p:blipFill>
+        <p:spPr>
+          <a:xfrm>
+            <a:off x="3421750" y="1298448"/>
+            <a:ext cx="2390343" cy="5186516"/>
+          </a:xfrm>
+          <a:prstGeom prst="roundRect">
+            <a:avLst>
+              <a:gd name="adj" fmla="val 4167"/>
+            </a:avLst>
           </a:prstGeom>
           <a:solidFill>
-            <a:srgbClr val="D0E4F8"/>
+            <a:srgbClr val="FFFFFF"/>
           </a:solidFill>
-          <a:ln w="19050">
+          <a:ln w="76200" cap="sq">
             <a:solidFill>
-              <a:srgbClr val="007AFF"/>
+              <a:srgbClr val="EAEAEA"/>
             </a:solidFill>
+            <a:miter lim="800000"/>
           </a:ln>
-        </p:spPr>
-        <p:style>
-          <a:lnRef idx="1">
-            <a:schemeClr val="accent1"/>
-          </a:lnRef>
-          <a:fillRef idx="3">
-            <a:schemeClr val="accent1"/>
-          </a:fillRef>
-          <a:effectRef idx="2">
-            <a:schemeClr val="accent1"/>
-          </a:effectRef>
-          <a:fontRef idx="minor">
-            <a:schemeClr val="lt1"/>
-          </a:fontRef>
-        </p:style>
-        <p:txBody>
-          <a:bodyPr rtlCol="0" anchor="ctr"/>
-          <a:lstStyle/>
-          <a:p>
-            <a:pPr algn="ctr"/>
-          </a:p>
-        </p:txBody>
-      </p:sp>
-      <p:sp>
-        <p:nvSpPr>
-          <p:cNvPr id="7" name="TextBox 6"/>
-          <p:cNvSpPr txBox="1"/>
-          <p:nvPr/>
-        </p:nvSpPr>
-        <p:spPr>
-          <a:xfrm>
-            <a:off x="461774" y="3493008"/>
-            <a:ext cx="2084831" cy="502920"/>
-          </a:xfrm>
-          <a:prstGeom prst="rect">
-            <a:avLst/>
-          </a:prstGeom>
-          <a:noFill/>
-        </p:spPr>
-        <p:txBody>
-          <a:bodyPr wrap="square">
-            <a:spAutoFit/>
-          </a:bodyPr>
-          <a:lstStyle/>
-          <a:p>
-            <a:pPr algn="ctr"/>
-            <a:r>
-              <a:rPr sz="2400" b="1" i="0">
-                <a:solidFill>
-                  <a:srgbClr val="007AFF"/>
-                </a:solidFill>
-              </a:rPr>
-              <a:t>iOS</a:t>
-            </a:r>
-          </a:p>
-        </p:txBody>
-      </p:sp>
-      <p:sp>
-        <p:nvSpPr>
-          <p:cNvPr id="8" name="TextBox 7"/>
-          <p:cNvSpPr txBox="1"/>
-          <p:nvPr/>
-        </p:nvSpPr>
-        <p:spPr>
-          <a:xfrm>
-            <a:off x="461774" y="4041648"/>
-            <a:ext cx="2084831" cy="347472"/>
-          </a:xfrm>
-          <a:prstGeom prst="rect">
-            <a:avLst/>
-          </a:prstGeom>
-          <a:noFill/>
-        </p:spPr>
-        <p:txBody>
-          <a:bodyPr wrap="square">
-            <a:spAutoFit/>
-          </a:bodyPr>
-          <a:lstStyle/>
-          <a:p>
-            <a:pPr algn="ctr"/>
-            <a:r>
-              <a:rPr sz="1400" b="0" i="0">
-                <a:solidFill>
-                  <a:srgbClr val="9999AA"/>
-                </a:solidFill>
-              </a:rPr>
-              <a:t>Screenshot</a:t>
-            </a:r>
-          </a:p>
-        </p:txBody>
-      </p:sp>
-      <p:sp>
-        <p:nvSpPr>
-          <p:cNvPr id="9" name="TextBox 8"/>
-          <p:cNvSpPr txBox="1"/>
-          <p:nvPr/>
-        </p:nvSpPr>
-        <p:spPr>
-          <a:xfrm>
-            <a:off x="461774" y="5961888"/>
-            <a:ext cx="2084831" cy="411480"/>
-          </a:xfrm>
-          <a:prstGeom prst="rect">
-            <a:avLst/>
-          </a:prstGeom>
-          <a:noFill/>
-        </p:spPr>
-        <p:txBody>
-          <a:bodyPr wrap="square">
-            <a:spAutoFit/>
-          </a:bodyPr>
-          <a:lstStyle/>
-          <a:p>
-            <a:pPr algn="ctr"/>
-            <a:r>
-              <a:rPr sz="1400" b="1" i="0">
-                <a:solidFill>
-                  <a:srgbClr val="007AFF"/>
-                </a:solidFill>
-              </a:rPr>
-              <a:t>Welcome</a:t>
-            </a:r>
-          </a:p>
-        </p:txBody>
-      </p:sp>
-      <p:sp>
-        <p:nvSpPr>
-          <p:cNvPr id="10" name="Rectangle 9"/>
-          <p:cNvSpPr/>
-          <p:nvPr/>
-        </p:nvSpPr>
-        <p:spPr>
-          <a:xfrm>
-            <a:off x="2756917" y="1572768"/>
-            <a:ext cx="2084831" cy="4846320"/>
-          </a:xfrm>
-          <a:prstGeom prst="rect">
-            <a:avLst/>
-          </a:prstGeom>
-          <a:solidFill>
-            <a:srgbClr val="EAF2FF"/>
-          </a:solidFill>
-          <a:ln w="38100">
-            <a:solidFill>
-              <a:srgbClr val="007AFF"/>
-            </a:solidFill>
-          </a:ln>
-        </p:spPr>
-        <p:style>
-          <a:lnRef idx="1">
-            <a:schemeClr val="accent1"/>
-          </a:lnRef>
-          <a:fillRef idx="3">
-            <a:schemeClr val="accent1"/>
-          </a:fillRef>
-          <a:effectRef idx="2">
-            <a:schemeClr val="accent1"/>
-          </a:effectRef>
-          <a:fontRef idx="minor">
-            <a:schemeClr val="lt1"/>
-          </a:fontRef>
-        </p:style>
-        <p:txBody>
-          <a:bodyPr rtlCol="0" anchor="ctr"/>
-          <a:lstStyle/>
-          <a:p>
-            <a:pPr algn="ctr"/>
-          </a:p>
-        </p:txBody>
-      </p:sp>
-      <p:sp>
-        <p:nvSpPr>
-          <p:cNvPr id="11" name="Rectangle 10"/>
-          <p:cNvSpPr/>
-          <p:nvPr/>
-        </p:nvSpPr>
-        <p:spPr>
-          <a:xfrm>
-            <a:off x="2894077" y="1755648"/>
-            <a:ext cx="1810511" cy="4069080"/>
-          </a:xfrm>
-          <a:prstGeom prst="rect">
-            <a:avLst/>
-          </a:prstGeom>
-          <a:solidFill>
-            <a:srgbClr val="D0E4F8"/>
-          </a:solidFill>
-          <a:ln w="19050">
-            <a:solidFill>
-              <a:srgbClr val="007AFF"/>
-            </a:solidFill>
-          </a:ln>
-        </p:spPr>
-        <p:style>
-          <a:lnRef idx="1">
-            <a:schemeClr val="accent1"/>
-          </a:lnRef>
-          <a:fillRef idx="3">
-            <a:schemeClr val="accent1"/>
-          </a:fillRef>
-          <a:effectRef idx="2">
-            <a:schemeClr val="accent1"/>
-          </a:effectRef>
-          <a:fontRef idx="minor">
-            <a:schemeClr val="lt1"/>
-          </a:fontRef>
-        </p:style>
-        <p:txBody>
-          <a:bodyPr rtlCol="0" anchor="ctr"/>
-          <a:lstStyle/>
-          <a:p>
-            <a:pPr algn="ctr"/>
-          </a:p>
-        </p:txBody>
-      </p:sp>
-      <p:sp>
-        <p:nvSpPr>
-          <p:cNvPr id="12" name="TextBox 11"/>
-          <p:cNvSpPr txBox="1"/>
-          <p:nvPr/>
-        </p:nvSpPr>
-        <p:spPr>
-          <a:xfrm>
-            <a:off x="2756917" y="3493008"/>
-            <a:ext cx="2084831" cy="502920"/>
-          </a:xfrm>
-          <a:prstGeom prst="rect">
-            <a:avLst/>
-          </a:prstGeom>
-          <a:noFill/>
-        </p:spPr>
-        <p:txBody>
-          <a:bodyPr wrap="square">
-            <a:spAutoFit/>
-          </a:bodyPr>
-          <a:lstStyle/>
-          <a:p>
-            <a:pPr algn="ctr"/>
-            <a:r>
-              <a:rPr sz="2400" b="1" i="0">
-                <a:solidFill>
-                  <a:srgbClr val="007AFF"/>
-                </a:solidFill>
-              </a:rPr>
-              <a:t>iOS</a:t>
-            </a:r>
-          </a:p>
-        </p:txBody>
-      </p:sp>
-      <p:sp>
-        <p:nvSpPr>
-          <p:cNvPr id="13" name="TextBox 12"/>
-          <p:cNvSpPr txBox="1"/>
-          <p:nvPr/>
-        </p:nvSpPr>
-        <p:spPr>
-          <a:xfrm>
-            <a:off x="2756917" y="4041648"/>
-            <a:ext cx="2084831" cy="347472"/>
-          </a:xfrm>
-          <a:prstGeom prst="rect">
-            <a:avLst/>
-          </a:prstGeom>
-          <a:noFill/>
-        </p:spPr>
-        <p:txBody>
-          <a:bodyPr wrap="square">
-            <a:spAutoFit/>
-          </a:bodyPr>
-          <a:lstStyle/>
-          <a:p>
-            <a:pPr algn="ctr"/>
-            <a:r>
-              <a:rPr sz="1400" b="0" i="0">
-                <a:solidFill>
-                  <a:srgbClr val="9999AA"/>
-                </a:solidFill>
-              </a:rPr>
-              <a:t>Screenshot</a:t>
-            </a:r>
-          </a:p>
-        </p:txBody>
-      </p:sp>
-      <p:sp>
-        <p:nvSpPr>
-          <p:cNvPr id="14" name="TextBox 13"/>
-          <p:cNvSpPr txBox="1"/>
-          <p:nvPr/>
-        </p:nvSpPr>
-        <p:spPr>
-          <a:xfrm>
-            <a:off x="2756917" y="5961888"/>
-            <a:ext cx="2084831" cy="411480"/>
-          </a:xfrm>
-          <a:prstGeom prst="rect">
-            <a:avLst/>
-          </a:prstGeom>
-          <a:noFill/>
-        </p:spPr>
-        <p:txBody>
-          <a:bodyPr wrap="square">
-            <a:spAutoFit/>
-          </a:bodyPr>
-          <a:lstStyle/>
-          <a:p>
-            <a:pPr algn="ctr"/>
-            <a:r>
-              <a:rPr sz="1400" b="1" i="0">
-                <a:solidFill>
-                  <a:srgbClr val="007AFF"/>
-                </a:solidFill>
-              </a:rPr>
-              <a:t>Main Weather</a:t>
-            </a:r>
-          </a:p>
-        </p:txBody>
-      </p:sp>
-      <p:sp>
-        <p:nvSpPr>
-          <p:cNvPr id="15" name="Rectangle 14"/>
-          <p:cNvSpPr/>
-          <p:nvPr/>
-        </p:nvSpPr>
-        <p:spPr>
-          <a:xfrm>
-            <a:off x="5052060" y="1572768"/>
-            <a:ext cx="2084831" cy="4846320"/>
-          </a:xfrm>
-          <a:prstGeom prst="rect">
-            <a:avLst/>
-          </a:prstGeom>
-          <a:solidFill>
-            <a:srgbClr val="EAF2FF"/>
-          </a:solidFill>
-          <a:ln w="38100">
-            <a:solidFill>
-              <a:srgbClr val="007AFF"/>
-            </a:solidFill>
-          </a:ln>
-        </p:spPr>
-        <p:style>
-          <a:lnRef idx="1">
-            <a:schemeClr val="accent1"/>
-          </a:lnRef>
-          <a:fillRef idx="3">
-            <a:schemeClr val="accent1"/>
-          </a:fillRef>
-          <a:effectRef idx="2">
-            <a:schemeClr val="accent1"/>
-          </a:effectRef>
-          <a:fontRef idx="minor">
-            <a:schemeClr val="lt1"/>
-          </a:fontRef>
-        </p:style>
-        <p:txBody>
-          <a:bodyPr rtlCol="0" anchor="ctr"/>
-          <a:lstStyle/>
-          <a:p>
-            <a:pPr algn="ctr"/>
-          </a:p>
-        </p:txBody>
-      </p:sp>
-      <p:sp>
-        <p:nvSpPr>
-          <p:cNvPr id="16" name="Rectangle 15"/>
-          <p:cNvSpPr/>
-          <p:nvPr/>
-        </p:nvSpPr>
-        <p:spPr>
-          <a:xfrm>
-            <a:off x="5189220" y="1755648"/>
-            <a:ext cx="1810511" cy="4069080"/>
-          </a:xfrm>
-          <a:prstGeom prst="rect">
-            <a:avLst/>
-          </a:prstGeom>
-          <a:solidFill>
-            <a:srgbClr val="D0E4F8"/>
-          </a:solidFill>
-          <a:ln w="19050">
-            <a:solidFill>
-              <a:srgbClr val="007AFF"/>
-            </a:solidFill>
-          </a:ln>
-        </p:spPr>
-        <p:style>
-          <a:lnRef idx="1">
-            <a:schemeClr val="accent1"/>
-          </a:lnRef>
-          <a:fillRef idx="3">
-            <a:schemeClr val="accent1"/>
-          </a:fillRef>
-          <a:effectRef idx="2">
-            <a:schemeClr val="accent1"/>
-          </a:effectRef>
-          <a:fontRef idx="minor">
-            <a:schemeClr val="lt1"/>
-          </a:fontRef>
-        </p:style>
-        <p:txBody>
-          <a:bodyPr rtlCol="0" anchor="ctr"/>
-          <a:lstStyle/>
-          <a:p>
-            <a:pPr algn="ctr"/>
-          </a:p>
-        </p:txBody>
-      </p:sp>
-      <p:sp>
-        <p:nvSpPr>
-          <p:cNvPr id="17" name="TextBox 16"/>
-          <p:cNvSpPr txBox="1"/>
-          <p:nvPr/>
-        </p:nvSpPr>
-        <p:spPr>
-          <a:xfrm>
-            <a:off x="5052060" y="3493008"/>
-            <a:ext cx="2084831" cy="502920"/>
-          </a:xfrm>
-          <a:prstGeom prst="rect">
-            <a:avLst/>
-          </a:prstGeom>
-          <a:noFill/>
-        </p:spPr>
-        <p:txBody>
-          <a:bodyPr wrap="square">
-            <a:spAutoFit/>
-          </a:bodyPr>
-          <a:lstStyle/>
-          <a:p>
-            <a:pPr algn="ctr"/>
-            <a:r>
-              <a:rPr sz="2400" b="1" i="0">
-                <a:solidFill>
-                  <a:srgbClr val="007AFF"/>
-                </a:solidFill>
-              </a:rPr>
-              <a:t>iOS</a:t>
-            </a:r>
-          </a:p>
-        </p:txBody>
-      </p:sp>
-      <p:sp>
-        <p:nvSpPr>
-          <p:cNvPr id="18" name="TextBox 17"/>
-          <p:cNvSpPr txBox="1"/>
-          <p:nvPr/>
-        </p:nvSpPr>
-        <p:spPr>
-          <a:xfrm>
-            <a:off x="5052060" y="4041648"/>
-            <a:ext cx="2084831" cy="347472"/>
-          </a:xfrm>
-          <a:prstGeom prst="rect">
-            <a:avLst/>
-          </a:prstGeom>
-          <a:noFill/>
-        </p:spPr>
-        <p:txBody>
-          <a:bodyPr wrap="square">
-            <a:spAutoFit/>
-          </a:bodyPr>
-          <a:lstStyle/>
-          <a:p>
-            <a:pPr algn="ctr"/>
-            <a:r>
-              <a:rPr sz="1400" b="0" i="0">
-                <a:solidFill>
-                  <a:srgbClr val="9999AA"/>
-                </a:solidFill>
-              </a:rPr>
-              <a:t>Screenshot</a:t>
-            </a:r>
-          </a:p>
-        </p:txBody>
-      </p:sp>
-      <p:sp>
-        <p:nvSpPr>
-          <p:cNvPr id="19" name="TextBox 18"/>
-          <p:cNvSpPr txBox="1"/>
-          <p:nvPr/>
-        </p:nvSpPr>
-        <p:spPr>
-          <a:xfrm>
-            <a:off x="5052060" y="5961888"/>
-            <a:ext cx="2084831" cy="411480"/>
-          </a:xfrm>
-          <a:prstGeom prst="rect">
-            <a:avLst/>
-          </a:prstGeom>
-          <a:noFill/>
-        </p:spPr>
-        <p:txBody>
-          <a:bodyPr wrap="square">
-            <a:spAutoFit/>
-          </a:bodyPr>
-          <a:lstStyle/>
-          <a:p>
-            <a:pPr algn="ctr"/>
-            <a:r>
-              <a:rPr sz="1400" b="1" i="0">
-                <a:solidFill>
-                  <a:srgbClr val="007AFF"/>
-                </a:solidFill>
-              </a:rPr>
-              <a:t>Forecast</a:t>
-            </a:r>
-          </a:p>
-        </p:txBody>
-      </p:sp>
-      <p:sp>
-        <p:nvSpPr>
-          <p:cNvPr id="20" name="Rectangle 19"/>
-          <p:cNvSpPr/>
-          <p:nvPr/>
-        </p:nvSpPr>
-        <p:spPr>
-          <a:xfrm>
-            <a:off x="7347203" y="1572768"/>
-            <a:ext cx="2084831" cy="4846320"/>
-          </a:xfrm>
-          <a:prstGeom prst="rect">
-            <a:avLst/>
-          </a:prstGeom>
-          <a:solidFill>
-            <a:srgbClr val="EAF2FF"/>
-          </a:solidFill>
-          <a:ln w="38100">
-            <a:solidFill>
-              <a:srgbClr val="007AFF"/>
-            </a:solidFill>
-          </a:ln>
-        </p:spPr>
-        <p:style>
-          <a:lnRef idx="1">
-            <a:schemeClr val="accent1"/>
-          </a:lnRef>
-          <a:fillRef idx="3">
-            <a:schemeClr val="accent1"/>
-          </a:fillRef>
-          <a:effectRef idx="2">
-            <a:schemeClr val="accent1"/>
-          </a:effectRef>
-          <a:fontRef idx="minor">
-            <a:schemeClr val="lt1"/>
-          </a:fontRef>
-        </p:style>
-        <p:txBody>
-          <a:bodyPr rtlCol="0" anchor="ctr"/>
-          <a:lstStyle/>
-          <a:p>
-            <a:pPr algn="ctr"/>
-          </a:p>
-        </p:txBody>
-      </p:sp>
-      <p:sp>
-        <p:nvSpPr>
-          <p:cNvPr id="21" name="Rectangle 20"/>
-          <p:cNvSpPr/>
-          <p:nvPr/>
-        </p:nvSpPr>
-        <p:spPr>
-          <a:xfrm>
-            <a:off x="7484363" y="1755648"/>
-            <a:ext cx="1810511" cy="4069080"/>
-          </a:xfrm>
-          <a:prstGeom prst="rect">
-            <a:avLst/>
-          </a:prstGeom>
-          <a:solidFill>
-            <a:srgbClr val="D0E4F8"/>
-          </a:solidFill>
-          <a:ln w="19050">
-            <a:solidFill>
-              <a:srgbClr val="007AFF"/>
-            </a:solidFill>
-          </a:ln>
-        </p:spPr>
-        <p:style>
-          <a:lnRef idx="1">
-            <a:schemeClr val="accent1"/>
-          </a:lnRef>
-          <a:fillRef idx="3">
-            <a:schemeClr val="accent1"/>
-          </a:fillRef>
-          <a:effectRef idx="2">
-            <a:schemeClr val="accent1"/>
-          </a:effectRef>
-          <a:fontRef idx="minor">
-            <a:schemeClr val="lt1"/>
-          </a:fontRef>
-        </p:style>
-        <p:txBody>
-          <a:bodyPr rtlCol="0" anchor="ctr"/>
-          <a:lstStyle/>
-          <a:p>
-            <a:pPr algn="ctr"/>
-          </a:p>
-        </p:txBody>
-      </p:sp>
-      <p:sp>
-        <p:nvSpPr>
-          <p:cNvPr id="22" name="TextBox 21"/>
-          <p:cNvSpPr txBox="1"/>
-          <p:nvPr/>
-        </p:nvSpPr>
-        <p:spPr>
-          <a:xfrm>
-            <a:off x="7347203" y="3493008"/>
-            <a:ext cx="2084831" cy="502920"/>
-          </a:xfrm>
-          <a:prstGeom prst="rect">
-            <a:avLst/>
-          </a:prstGeom>
-          <a:noFill/>
-        </p:spPr>
-        <p:txBody>
-          <a:bodyPr wrap="square">
-            <a:spAutoFit/>
-          </a:bodyPr>
-          <a:lstStyle/>
-          <a:p>
-            <a:pPr algn="ctr"/>
-            <a:r>
-              <a:rPr sz="2400" b="1" i="0">
-                <a:solidFill>
-                  <a:srgbClr val="007AFF"/>
-                </a:solidFill>
-              </a:rPr>
-              <a:t>iOS</a:t>
-            </a:r>
-          </a:p>
-        </p:txBody>
-      </p:sp>
-      <p:sp>
-        <p:nvSpPr>
-          <p:cNvPr id="23" name="TextBox 22"/>
-          <p:cNvSpPr txBox="1"/>
-          <p:nvPr/>
-        </p:nvSpPr>
-        <p:spPr>
-          <a:xfrm>
-            <a:off x="7347203" y="4041648"/>
-            <a:ext cx="2084831" cy="347472"/>
-          </a:xfrm>
-          <a:prstGeom prst="rect">
-            <a:avLst/>
-          </a:prstGeom>
-          <a:noFill/>
-        </p:spPr>
-        <p:txBody>
-          <a:bodyPr wrap="square">
-            <a:spAutoFit/>
-          </a:bodyPr>
-          <a:lstStyle/>
-          <a:p>
-            <a:pPr algn="ctr"/>
-            <a:r>
-              <a:rPr sz="1400" b="0" i="0">
-                <a:solidFill>
-                  <a:srgbClr val="9999AA"/>
-                </a:solidFill>
-              </a:rPr>
-              <a:t>Screenshot</a:t>
-            </a:r>
-          </a:p>
-        </p:txBody>
-      </p:sp>
-      <p:sp>
-        <p:nvSpPr>
-          <p:cNvPr id="24" name="TextBox 23"/>
-          <p:cNvSpPr txBox="1"/>
-          <p:nvPr/>
-        </p:nvSpPr>
-        <p:spPr>
-          <a:xfrm>
-            <a:off x="7347203" y="5961888"/>
-            <a:ext cx="2084831" cy="411480"/>
-          </a:xfrm>
-          <a:prstGeom prst="rect">
-            <a:avLst/>
-          </a:prstGeom>
-          <a:noFill/>
-        </p:spPr>
-        <p:txBody>
-          <a:bodyPr wrap="square">
-            <a:spAutoFit/>
-          </a:bodyPr>
-          <a:lstStyle/>
-          <a:p>
-            <a:pPr algn="ctr"/>
-            <a:r>
-              <a:rPr sz="1400" b="1" i="0">
-                <a:solidFill>
-                  <a:srgbClr val="007AFF"/>
-                </a:solidFill>
-              </a:rPr>
-              <a:t>Locations</a:t>
-            </a:r>
-          </a:p>
-        </p:txBody>
-      </p:sp>
-      <p:sp>
-        <p:nvSpPr>
-          <p:cNvPr id="25" name="Rectangle 24"/>
-          <p:cNvSpPr/>
-          <p:nvPr/>
-        </p:nvSpPr>
-        <p:spPr>
-          <a:xfrm>
-            <a:off x="9642346" y="1572768"/>
-            <a:ext cx="2084831" cy="4846320"/>
-          </a:xfrm>
-          <a:prstGeom prst="rect">
-            <a:avLst/>
-          </a:prstGeom>
-          <a:solidFill>
-            <a:srgbClr val="EAF2FF"/>
-          </a:solidFill>
-          <a:ln w="38100">
-            <a:solidFill>
-              <a:srgbClr val="007AFF"/>
-            </a:solidFill>
-          </a:ln>
-        </p:spPr>
-        <p:style>
-          <a:lnRef idx="1">
-            <a:schemeClr val="accent1"/>
-          </a:lnRef>
-          <a:fillRef idx="3">
-            <a:schemeClr val="accent1"/>
-          </a:fillRef>
-          <a:effectRef idx="2">
-            <a:schemeClr val="accent1"/>
-          </a:effectRef>
-          <a:fontRef idx="minor">
-            <a:schemeClr val="lt1"/>
-          </a:fontRef>
-        </p:style>
-        <p:txBody>
-          <a:bodyPr rtlCol="0" anchor="ctr"/>
-          <a:lstStyle/>
-          <a:p>
-            <a:pPr algn="ctr"/>
-          </a:p>
-        </p:txBody>
-      </p:sp>
-      <p:sp>
-        <p:nvSpPr>
-          <p:cNvPr id="26" name="Rectangle 25"/>
-          <p:cNvSpPr/>
-          <p:nvPr/>
-        </p:nvSpPr>
-        <p:spPr>
-          <a:xfrm>
-            <a:off x="9779506" y="1755648"/>
-            <a:ext cx="1810511" cy="4069080"/>
-          </a:xfrm>
-          <a:prstGeom prst="rect">
-            <a:avLst/>
-          </a:prstGeom>
-          <a:solidFill>
-            <a:srgbClr val="D0E4F8"/>
-          </a:solidFill>
-          <a:ln w="19050">
-            <a:solidFill>
-              <a:srgbClr val="007AFF"/>
-            </a:solidFill>
-          </a:ln>
-        </p:spPr>
-        <p:style>
-          <a:lnRef idx="1">
-            <a:schemeClr val="accent1"/>
-          </a:lnRef>
-          <a:fillRef idx="3">
-            <a:schemeClr val="accent1"/>
-          </a:fillRef>
-          <a:effectRef idx="2">
-            <a:schemeClr val="accent1"/>
-          </a:effectRef>
-          <a:fontRef idx="minor">
-            <a:schemeClr val="lt1"/>
-          </a:fontRef>
-        </p:style>
-        <p:txBody>
-          <a:bodyPr rtlCol="0" anchor="ctr"/>
-          <a:lstStyle/>
-          <a:p>
-            <a:pPr algn="ctr"/>
-          </a:p>
-        </p:txBody>
-      </p:sp>
-      <p:sp>
-        <p:nvSpPr>
-          <p:cNvPr id="27" name="TextBox 26"/>
-          <p:cNvSpPr txBox="1"/>
-          <p:nvPr/>
-        </p:nvSpPr>
-        <p:spPr>
-          <a:xfrm>
-            <a:off x="9642346" y="3493008"/>
-            <a:ext cx="2084831" cy="502920"/>
-          </a:xfrm>
-          <a:prstGeom prst="rect">
-            <a:avLst/>
-          </a:prstGeom>
-          <a:noFill/>
-        </p:spPr>
-        <p:txBody>
-          <a:bodyPr wrap="square">
-            <a:spAutoFit/>
-          </a:bodyPr>
-          <a:lstStyle/>
-          <a:p>
-            <a:pPr algn="ctr"/>
-            <a:r>
-              <a:rPr sz="2400" b="1" i="0">
-                <a:solidFill>
-                  <a:srgbClr val="007AFF"/>
-                </a:solidFill>
-              </a:rPr>
-              <a:t>iOS</a:t>
-            </a:r>
-          </a:p>
-        </p:txBody>
-      </p:sp>
-      <p:sp>
-        <p:nvSpPr>
-          <p:cNvPr id="28" name="TextBox 27"/>
-          <p:cNvSpPr txBox="1"/>
-          <p:nvPr/>
-        </p:nvSpPr>
-        <p:spPr>
-          <a:xfrm>
-            <a:off x="9642346" y="4041648"/>
-            <a:ext cx="2084831" cy="347472"/>
-          </a:xfrm>
-          <a:prstGeom prst="rect">
-            <a:avLst/>
-          </a:prstGeom>
-          <a:noFill/>
-        </p:spPr>
-        <p:txBody>
-          <a:bodyPr wrap="square">
-            <a:spAutoFit/>
-          </a:bodyPr>
-          <a:lstStyle/>
-          <a:p>
-            <a:pPr algn="ctr"/>
-            <a:r>
-              <a:rPr sz="1400" b="0" i="0">
-                <a:solidFill>
-                  <a:srgbClr val="9999AA"/>
-                </a:solidFill>
-              </a:rPr>
-              <a:t>Screenshot</a:t>
-            </a:r>
-          </a:p>
-        </p:txBody>
-      </p:sp>
-      <p:sp>
-        <p:nvSpPr>
-          <p:cNvPr id="29" name="TextBox 28"/>
-          <p:cNvSpPr txBox="1"/>
-          <p:nvPr/>
-        </p:nvSpPr>
-        <p:spPr>
-          <a:xfrm>
-            <a:off x="9642346" y="5961888"/>
-            <a:ext cx="2084831" cy="411480"/>
-          </a:xfrm>
-          <a:prstGeom prst="rect">
-            <a:avLst/>
-          </a:prstGeom>
-          <a:noFill/>
-        </p:spPr>
-        <p:txBody>
-          <a:bodyPr wrap="square">
-            <a:spAutoFit/>
-          </a:bodyPr>
-          <a:lstStyle/>
-          <a:p>
-            <a:pPr algn="ctr"/>
-            <a:r>
-              <a:rPr sz="1400" b="1" i="0">
-                <a:solidFill>
-                  <a:srgbClr val="007AFF"/>
-                </a:solidFill>
-              </a:rPr>
-              <a:t>Settings</a:t>
-            </a:r>
-          </a:p>
-        </p:txBody>
-      </p:sp>
+          <a:effectLst>
+            <a:reflection blurRad="12700" stA="33000" endPos="28000" dist="5000" dir="5400000" sy="-100000" algn="bl" rotWithShape="0"/>
+          </a:effectLst>
+          <a:scene3d>
+            <a:camera prst="orthographicFront"/>
+            <a:lightRig rig="threePt" dir="t">
+              <a:rot lat="0" lon="0" rev="2700000"/>
+            </a:lightRig>
+          </a:scene3d>
+          <a:sp3d contourW="6350">
+            <a:bevelT h="38100"/>
+            <a:contourClr>
+              <a:srgbClr val="C0C0C0"/>
+            </a:contourClr>
+          </a:sp3d>
+        </p:spPr>
+      </p:pic>
     </p:spTree>
   </p:cSld>
   <p:clrMapOvr>
@@ -8696,7 +8636,7 @@
 </file>
 
 <file path=ppt/slides/slide5.xml><?xml version="1.0" encoding="utf-8"?>
-<p:sld xmlns:a="http://schemas.openxmlformats.org/drawingml/2006/main" xmlns:p="http://schemas.openxmlformats.org/presentationml/2006/main" xmlns:r="http://schemas.openxmlformats.org/officeDocument/2006/relationships">
+<p:sld xmlns:a="http://schemas.openxmlformats.org/drawingml/2006/main" xmlns:r="http://schemas.openxmlformats.org/officeDocument/2006/relationships" xmlns:p="http://schemas.openxmlformats.org/presentationml/2006/main">
   <p:cSld>
     <p:bg>
       <p:bgPr>
@@ -8712,7 +8652,14 @@
         <p:cNvGrpSpPr/>
         <p:nvPr/>
       </p:nvGrpSpPr>
-      <p:grpSpPr/>
+      <p:grpSpPr>
+        <a:xfrm>
+          <a:off x="0" y="0"/>
+          <a:ext cx="0" cy="0"/>
+          <a:chOff x="0" y="0"/>
+          <a:chExt cx="0" cy="0"/>
+        </a:xfrm>
+      </p:grpSpPr>
       <p:sp>
         <p:nvSpPr>
           <p:cNvPr id="2" name="Rectangle 1"/>
@@ -8753,6 +8700,7 @@
           <a:lstStyle/>
           <a:p>
             <a:pPr algn="ctr"/>
+            <a:endParaRPr/>
           </a:p>
         </p:txBody>
       </p:sp>
@@ -8830,6 +8778,7 @@
           <a:lstStyle/>
           <a:p>
             <a:pPr algn="ctr"/>
+            <a:endParaRPr/>
           </a:p>
         </p:txBody>
       </p:sp>
@@ -8875,6 +8824,7 @@
           <a:lstStyle/>
           <a:p>
             <a:pPr algn="ctr"/>
+            <a:endParaRPr/>
           </a:p>
         </p:txBody>
       </p:sp>
@@ -8918,6 +8868,7 @@
           <a:lstStyle/>
           <a:p>
             <a:pPr algn="ctr"/>
+            <a:endParaRPr/>
           </a:p>
         </p:txBody>
       </p:sp>
@@ -9065,6 +9016,7 @@
           <a:lstStyle/>
           <a:p>
             <a:pPr algn="ctr"/>
+            <a:endParaRPr/>
           </a:p>
         </p:txBody>
       </p:sp>
@@ -9110,6 +9062,7 @@
           <a:lstStyle/>
           <a:p>
             <a:pPr algn="ctr"/>
+            <a:endParaRPr/>
           </a:p>
         </p:txBody>
       </p:sp>
@@ -9153,6 +9106,7 @@
           <a:lstStyle/>
           <a:p>
             <a:pPr algn="ctr"/>
+            <a:endParaRPr/>
           </a:p>
         </p:txBody>
       </p:sp>
@@ -9299,6 +9253,7 @@
           <a:lstStyle/>
           <a:p>
             <a:pPr algn="ctr"/>
+            <a:endParaRPr/>
           </a:p>
         </p:txBody>
       </p:sp>
@@ -9344,6 +9299,7 @@
           <a:lstStyle/>
           <a:p>
             <a:pPr algn="ctr"/>
+            <a:endParaRPr/>
           </a:p>
         </p:txBody>
       </p:sp>
@@ -9387,6 +9343,7 @@
           <a:lstStyle/>
           <a:p>
             <a:pPr algn="ctr"/>
+            <a:endParaRPr/>
           </a:p>
         </p:txBody>
       </p:sp>
@@ -9534,6 +9491,7 @@
           <a:lstStyle/>
           <a:p>
             <a:pPr algn="ctr"/>
+            <a:endParaRPr/>
           </a:p>
         </p:txBody>
       </p:sp>
@@ -9579,6 +9537,7 @@
           <a:lstStyle/>
           <a:p>
             <a:pPr algn="ctr"/>
+            <a:endParaRPr/>
           </a:p>
         </p:txBody>
       </p:sp>
@@ -9622,6 +9581,7 @@
           <a:lstStyle/>
           <a:p>
             <a:pPr algn="ctr"/>
+            <a:endParaRPr/>
           </a:p>
         </p:txBody>
       </p:sp>
@@ -9769,6 +9729,7 @@
           <a:lstStyle/>
           <a:p>
             <a:pPr algn="ctr"/>
+            <a:endParaRPr/>
           </a:p>
         </p:txBody>
       </p:sp>
@@ -9814,6 +9775,7 @@
           <a:lstStyle/>
           <a:p>
             <a:pPr algn="ctr"/>
+            <a:endParaRPr/>
           </a:p>
         </p:txBody>
       </p:sp>
@@ -9857,6 +9819,7 @@
           <a:lstStyle/>
           <a:p>
             <a:pPr algn="ctr"/>
+            <a:endParaRPr/>
           </a:p>
         </p:txBody>
       </p:sp>
@@ -10006,6 +9969,7 @@
           <a:lstStyle/>
           <a:p>
             <a:pPr algn="ctr"/>
+            <a:endParaRPr/>
           </a:p>
         </p:txBody>
       </p:sp>
@@ -10049,6 +10013,7 @@
           <a:lstStyle/>
           <a:p>
             <a:pPr algn="ctr"/>
+            <a:endParaRPr/>
           </a:p>
         </p:txBody>
       </p:sp>
@@ -10165,7 +10130,7 @@
 </file>
 
 <file path=ppt/slides/slide6.xml><?xml version="1.0" encoding="utf-8"?>
-<p:sld xmlns:a="http://schemas.openxmlformats.org/drawingml/2006/main" xmlns:p="http://schemas.openxmlformats.org/presentationml/2006/main" xmlns:r="http://schemas.openxmlformats.org/officeDocument/2006/relationships">
+<p:sld xmlns:a="http://schemas.openxmlformats.org/drawingml/2006/main" xmlns:r="http://schemas.openxmlformats.org/officeDocument/2006/relationships" xmlns:p="http://schemas.openxmlformats.org/presentationml/2006/main">
   <p:cSld>
     <p:bg>
       <p:bgPr>
@@ -10181,7 +10146,14 @@
         <p:cNvGrpSpPr/>
         <p:nvPr/>
       </p:nvGrpSpPr>
-      <p:grpSpPr/>
+      <p:grpSpPr>
+        <a:xfrm>
+          <a:off x="0" y="0"/>
+          <a:ext cx="0" cy="0"/>
+          <a:chOff x="0" y="0"/>
+          <a:chExt cx="0" cy="0"/>
+        </a:xfrm>
+      </p:grpSpPr>
       <p:sp>
         <p:nvSpPr>
           <p:cNvPr id="2" name="Rectangle 1"/>
@@ -10222,6 +10194,7 @@
           <a:lstStyle/>
           <a:p>
             <a:pPr algn="ctr"/>
+            <a:endParaRPr/>
           </a:p>
         </p:txBody>
       </p:sp>
@@ -10299,6 +10272,7 @@
           <a:lstStyle/>
           <a:p>
             <a:pPr algn="ctr"/>
+            <a:endParaRPr/>
           </a:p>
         </p:txBody>
       </p:sp>
@@ -10376,6 +10350,7 @@
           <a:lstStyle/>
           <a:p>
             <a:pPr algn="ctr"/>
+            <a:endParaRPr/>
           </a:p>
         </p:txBody>
       </p:sp>
@@ -10502,6 +10477,7 @@
           <a:lstStyle/>
           <a:p>
             <a:pPr algn="ctr"/>
+            <a:endParaRPr/>
           </a:p>
         </p:txBody>
       </p:sp>
@@ -10579,6 +10555,7 @@
           <a:lstStyle/>
           <a:p>
             <a:pPr algn="ctr"/>
+            <a:endParaRPr/>
           </a:p>
         </p:txBody>
       </p:sp>
@@ -10674,7 +10651,7 @@
 </file>
 
 <file path=ppt/slides/slide7.xml><?xml version="1.0" encoding="utf-8"?>
-<p:sld xmlns:a="http://schemas.openxmlformats.org/drawingml/2006/main" xmlns:p="http://schemas.openxmlformats.org/presentationml/2006/main" xmlns:r="http://schemas.openxmlformats.org/officeDocument/2006/relationships">
+<p:sld xmlns:a="http://schemas.openxmlformats.org/drawingml/2006/main" xmlns:r="http://schemas.openxmlformats.org/officeDocument/2006/relationships" xmlns:p="http://schemas.openxmlformats.org/presentationml/2006/main">
   <p:cSld>
     <p:bg>
       <p:bgPr>
@@ -10690,7 +10667,14 @@
         <p:cNvGrpSpPr/>
         <p:nvPr/>
       </p:nvGrpSpPr>
-      <p:grpSpPr/>
+      <p:grpSpPr>
+        <a:xfrm>
+          <a:off x="0" y="0"/>
+          <a:ext cx="0" cy="0"/>
+          <a:chOff x="0" y="0"/>
+          <a:chExt cx="0" cy="0"/>
+        </a:xfrm>
+      </p:grpSpPr>
       <p:sp>
         <p:nvSpPr>
           <p:cNvPr id="2" name="Rectangle 1"/>
@@ -10731,6 +10715,7 @@
           <a:lstStyle/>
           <a:p>
             <a:pPr algn="ctr"/>
+            <a:endParaRPr/>
           </a:p>
         </p:txBody>
       </p:sp>
@@ -10768,1000 +10753,118 @@
           </a:p>
         </p:txBody>
       </p:sp>
-      <p:sp>
-        <p:nvSpPr>
-          <p:cNvPr id="4" name="TextBox 3"/>
-          <p:cNvSpPr txBox="1"/>
-          <p:nvPr/>
-        </p:nvSpPr>
-        <p:spPr>
-          <a:xfrm>
-            <a:off x="365760" y="1143000"/>
-            <a:ext cx="11430000" cy="347472"/>
-          </a:xfrm>
-          <a:prstGeom prst="rect">
-            <a:avLst/>
-          </a:prstGeom>
-          <a:noFill/>
-        </p:spPr>
-        <p:txBody>
-          <a:bodyPr wrap="square">
-            <a:spAutoFit/>
-          </a:bodyPr>
-          <a:lstStyle/>
-          <a:p>
-            <a:pPr algn="l"/>
-            <a:r>
-              <a:rPr sz="1600" b="0" i="1">
-                <a:solidFill>
-                  <a:srgbClr val="9999AA"/>
-                </a:solidFill>
-              </a:rPr>
-              <a:t>Insert your Android emulator / device screenshots here</a:t>
-            </a:r>
-          </a:p>
-        </p:txBody>
-      </p:sp>
-      <p:sp>
-        <p:nvSpPr>
-          <p:cNvPr id="5" name="Rectangle 4"/>
-          <p:cNvSpPr/>
-          <p:nvPr/>
-        </p:nvSpPr>
-        <p:spPr>
-          <a:xfrm>
-            <a:off x="461774" y="1572768"/>
-            <a:ext cx="2084831" cy="4846320"/>
-          </a:xfrm>
-          <a:prstGeom prst="rect">
-            <a:avLst/>
+      <p:pic>
+        <p:nvPicPr>
+          <p:cNvPr id="33" name="Grafik 32">
+            <a:extLst>
+              <a:ext uri="{FF2B5EF4-FFF2-40B4-BE49-F238E27FC236}">
+                <a16:creationId xmlns:a16="http://schemas.microsoft.com/office/drawing/2014/main" id="{F3F110DB-814B-12DC-4402-225E2CF98A29}"/>
+              </a:ext>
+            </a:extLst>
+          </p:cNvPr>
+          <p:cNvPicPr>
+            <a:picLocks noChangeAspect="1"/>
+          </p:cNvPicPr>
+          <p:nvPr/>
+        </p:nvPicPr>
+        <p:blipFill>
+          <a:blip r:embed="rId2"/>
+          <a:stretch>
+            <a:fillRect/>
+          </a:stretch>
+        </p:blipFill>
+        <p:spPr>
+          <a:xfrm>
+            <a:off x="3323302" y="1298447"/>
+            <a:ext cx="2351299" cy="5280111"/>
+          </a:xfrm>
+          <a:prstGeom prst="roundRect">
+            <a:avLst>
+              <a:gd name="adj" fmla="val 4167"/>
+            </a:avLst>
           </a:prstGeom>
           <a:solidFill>
-            <a:srgbClr val="E8F8EE"/>
+            <a:srgbClr val="FFFFFF"/>
           </a:solidFill>
-          <a:ln w="38100">
+          <a:ln w="76200" cap="sq">
             <a:solidFill>
-              <a:srgbClr val="3DDC84"/>
+              <a:srgbClr val="EAEAEA"/>
             </a:solidFill>
+            <a:miter lim="800000"/>
           </a:ln>
-        </p:spPr>
-        <p:style>
-          <a:lnRef idx="1">
-            <a:schemeClr val="accent1"/>
-          </a:lnRef>
-          <a:fillRef idx="3">
-            <a:schemeClr val="accent1"/>
-          </a:fillRef>
-          <a:effectRef idx="2">
-            <a:schemeClr val="accent1"/>
-          </a:effectRef>
-          <a:fontRef idx="minor">
-            <a:schemeClr val="lt1"/>
-          </a:fontRef>
-        </p:style>
-        <p:txBody>
-          <a:bodyPr rtlCol="0" anchor="ctr"/>
-          <a:lstStyle/>
-          <a:p>
-            <a:pPr algn="ctr"/>
-          </a:p>
-        </p:txBody>
-      </p:sp>
-      <p:sp>
-        <p:nvSpPr>
-          <p:cNvPr id="6" name="Rectangle 5"/>
-          <p:cNvSpPr/>
-          <p:nvPr/>
-        </p:nvSpPr>
-        <p:spPr>
-          <a:xfrm>
-            <a:off x="598934" y="1755648"/>
-            <a:ext cx="1810511" cy="4069080"/>
-          </a:xfrm>
-          <a:prstGeom prst="rect">
-            <a:avLst/>
+          <a:effectLst>
+            <a:reflection blurRad="12700" stA="33000" endPos="28000" dist="5000" dir="5400000" sy="-100000" algn="bl" rotWithShape="0"/>
+          </a:effectLst>
+          <a:scene3d>
+            <a:camera prst="orthographicFront"/>
+            <a:lightRig rig="threePt" dir="t">
+              <a:rot lat="0" lon="0" rev="2700000"/>
+            </a:lightRig>
+          </a:scene3d>
+          <a:sp3d contourW="6350">
+            <a:bevelT h="38100"/>
+            <a:contourClr>
+              <a:srgbClr val="C0C0C0"/>
+            </a:contourClr>
+          </a:sp3d>
+        </p:spPr>
+      </p:pic>
+      <p:pic>
+        <p:nvPicPr>
+          <p:cNvPr id="35" name="Grafik 34">
+            <a:extLst>
+              <a:ext uri="{FF2B5EF4-FFF2-40B4-BE49-F238E27FC236}">
+                <a16:creationId xmlns:a16="http://schemas.microsoft.com/office/drawing/2014/main" id="{FF0BCD8E-E568-3663-E4D5-B60C8C13C07C}"/>
+              </a:ext>
+            </a:extLst>
+          </p:cNvPr>
+          <p:cNvPicPr>
+            <a:picLocks noChangeAspect="1"/>
+          </p:cNvPicPr>
+          <p:nvPr/>
+        </p:nvPicPr>
+        <p:blipFill>
+          <a:blip r:embed="rId3"/>
+          <a:stretch>
+            <a:fillRect/>
+          </a:stretch>
+        </p:blipFill>
+        <p:spPr>
+          <a:xfrm>
+            <a:off x="6184490" y="1298448"/>
+            <a:ext cx="2351299" cy="5280111"/>
+          </a:xfrm>
+          <a:prstGeom prst="roundRect">
+            <a:avLst>
+              <a:gd name="adj" fmla="val 4167"/>
+            </a:avLst>
           </a:prstGeom>
           <a:solidFill>
-            <a:srgbClr val="C8F0D8"/>
+            <a:srgbClr val="FFFFFF"/>
           </a:solidFill>
-          <a:ln w="19050">
+          <a:ln w="76200" cap="sq">
             <a:solidFill>
-              <a:srgbClr val="3DDC84"/>
+              <a:srgbClr val="EAEAEA"/>
             </a:solidFill>
+            <a:miter lim="800000"/>
           </a:ln>
-        </p:spPr>
-        <p:style>
-          <a:lnRef idx="1">
-            <a:schemeClr val="accent1"/>
-          </a:lnRef>
-          <a:fillRef idx="3">
-            <a:schemeClr val="accent1"/>
-          </a:fillRef>
-          <a:effectRef idx="2">
-            <a:schemeClr val="accent1"/>
-          </a:effectRef>
-          <a:fontRef idx="minor">
-            <a:schemeClr val="lt1"/>
-          </a:fontRef>
-        </p:style>
-        <p:txBody>
-          <a:bodyPr rtlCol="0" anchor="ctr"/>
-          <a:lstStyle/>
-          <a:p>
-            <a:pPr algn="ctr"/>
-          </a:p>
-        </p:txBody>
-      </p:sp>
-      <p:sp>
-        <p:nvSpPr>
-          <p:cNvPr id="7" name="TextBox 6"/>
-          <p:cNvSpPr txBox="1"/>
-          <p:nvPr/>
-        </p:nvSpPr>
-        <p:spPr>
-          <a:xfrm>
-            <a:off x="461774" y="3493008"/>
-            <a:ext cx="2084831" cy="502920"/>
-          </a:xfrm>
-          <a:prstGeom prst="rect">
-            <a:avLst/>
-          </a:prstGeom>
-          <a:noFill/>
-        </p:spPr>
-        <p:txBody>
-          <a:bodyPr wrap="square">
-            <a:spAutoFit/>
-          </a:bodyPr>
-          <a:lstStyle/>
-          <a:p>
-            <a:pPr algn="ctr"/>
-            <a:r>
-              <a:rPr sz="2400" b="1" i="0">
-                <a:solidFill>
-                  <a:srgbClr val="3DDC84"/>
-                </a:solidFill>
-              </a:rPr>
-              <a:t>Android</a:t>
-            </a:r>
-          </a:p>
-        </p:txBody>
-      </p:sp>
-      <p:sp>
-        <p:nvSpPr>
-          <p:cNvPr id="8" name="TextBox 7"/>
-          <p:cNvSpPr txBox="1"/>
-          <p:nvPr/>
-        </p:nvSpPr>
-        <p:spPr>
-          <a:xfrm>
-            <a:off x="461774" y="4041648"/>
-            <a:ext cx="2084831" cy="347472"/>
-          </a:xfrm>
-          <a:prstGeom prst="rect">
-            <a:avLst/>
-          </a:prstGeom>
-          <a:noFill/>
-        </p:spPr>
-        <p:txBody>
-          <a:bodyPr wrap="square">
-            <a:spAutoFit/>
-          </a:bodyPr>
-          <a:lstStyle/>
-          <a:p>
-            <a:pPr algn="ctr"/>
-            <a:r>
-              <a:rPr sz="1400" b="0" i="0">
-                <a:solidFill>
-                  <a:srgbClr val="9999AA"/>
-                </a:solidFill>
-              </a:rPr>
-              <a:t>Screenshot</a:t>
-            </a:r>
-          </a:p>
-        </p:txBody>
-      </p:sp>
-      <p:sp>
-        <p:nvSpPr>
-          <p:cNvPr id="9" name="TextBox 8"/>
-          <p:cNvSpPr txBox="1"/>
-          <p:nvPr/>
-        </p:nvSpPr>
-        <p:spPr>
-          <a:xfrm>
-            <a:off x="461774" y="5961888"/>
-            <a:ext cx="2084831" cy="411480"/>
-          </a:xfrm>
-          <a:prstGeom prst="rect">
-            <a:avLst/>
-          </a:prstGeom>
-          <a:noFill/>
-        </p:spPr>
-        <p:txBody>
-          <a:bodyPr wrap="square">
-            <a:spAutoFit/>
-          </a:bodyPr>
-          <a:lstStyle/>
-          <a:p>
-            <a:pPr algn="ctr"/>
-            <a:r>
-              <a:rPr sz="1400" b="1" i="0">
-                <a:solidFill>
-                  <a:srgbClr val="3DDC84"/>
-                </a:solidFill>
-              </a:rPr>
-              <a:t>Welcome</a:t>
-            </a:r>
-          </a:p>
-        </p:txBody>
-      </p:sp>
-      <p:sp>
-        <p:nvSpPr>
-          <p:cNvPr id="10" name="Rectangle 9"/>
-          <p:cNvSpPr/>
-          <p:nvPr/>
-        </p:nvSpPr>
-        <p:spPr>
-          <a:xfrm>
-            <a:off x="2756917" y="1572768"/>
-            <a:ext cx="2084831" cy="4846320"/>
-          </a:xfrm>
-          <a:prstGeom prst="rect">
-            <a:avLst/>
-          </a:prstGeom>
-          <a:solidFill>
-            <a:srgbClr val="E8F8EE"/>
-          </a:solidFill>
-          <a:ln w="38100">
-            <a:solidFill>
-              <a:srgbClr val="3DDC84"/>
-            </a:solidFill>
-          </a:ln>
-        </p:spPr>
-        <p:style>
-          <a:lnRef idx="1">
-            <a:schemeClr val="accent1"/>
-          </a:lnRef>
-          <a:fillRef idx="3">
-            <a:schemeClr val="accent1"/>
-          </a:fillRef>
-          <a:effectRef idx="2">
-            <a:schemeClr val="accent1"/>
-          </a:effectRef>
-          <a:fontRef idx="minor">
-            <a:schemeClr val="lt1"/>
-          </a:fontRef>
-        </p:style>
-        <p:txBody>
-          <a:bodyPr rtlCol="0" anchor="ctr"/>
-          <a:lstStyle/>
-          <a:p>
-            <a:pPr algn="ctr"/>
-          </a:p>
-        </p:txBody>
-      </p:sp>
-      <p:sp>
-        <p:nvSpPr>
-          <p:cNvPr id="11" name="Rectangle 10"/>
-          <p:cNvSpPr/>
-          <p:nvPr/>
-        </p:nvSpPr>
-        <p:spPr>
-          <a:xfrm>
-            <a:off x="2894077" y="1755648"/>
-            <a:ext cx="1810511" cy="4069080"/>
-          </a:xfrm>
-          <a:prstGeom prst="rect">
-            <a:avLst/>
-          </a:prstGeom>
-          <a:solidFill>
-            <a:srgbClr val="C8F0D8"/>
-          </a:solidFill>
-          <a:ln w="19050">
-            <a:solidFill>
-              <a:srgbClr val="3DDC84"/>
-            </a:solidFill>
-          </a:ln>
-        </p:spPr>
-        <p:style>
-          <a:lnRef idx="1">
-            <a:schemeClr val="accent1"/>
-          </a:lnRef>
-          <a:fillRef idx="3">
-            <a:schemeClr val="accent1"/>
-          </a:fillRef>
-          <a:effectRef idx="2">
-            <a:schemeClr val="accent1"/>
-          </a:effectRef>
-          <a:fontRef idx="minor">
-            <a:schemeClr val="lt1"/>
-          </a:fontRef>
-        </p:style>
-        <p:txBody>
-          <a:bodyPr rtlCol="0" anchor="ctr"/>
-          <a:lstStyle/>
-          <a:p>
-            <a:pPr algn="ctr"/>
-          </a:p>
-        </p:txBody>
-      </p:sp>
-      <p:sp>
-        <p:nvSpPr>
-          <p:cNvPr id="12" name="TextBox 11"/>
-          <p:cNvSpPr txBox="1"/>
-          <p:nvPr/>
-        </p:nvSpPr>
-        <p:spPr>
-          <a:xfrm>
-            <a:off x="2756917" y="3493008"/>
-            <a:ext cx="2084831" cy="502920"/>
-          </a:xfrm>
-          <a:prstGeom prst="rect">
-            <a:avLst/>
-          </a:prstGeom>
-          <a:noFill/>
-        </p:spPr>
-        <p:txBody>
-          <a:bodyPr wrap="square">
-            <a:spAutoFit/>
-          </a:bodyPr>
-          <a:lstStyle/>
-          <a:p>
-            <a:pPr algn="ctr"/>
-            <a:r>
-              <a:rPr sz="2400" b="1" i="0">
-                <a:solidFill>
-                  <a:srgbClr val="3DDC84"/>
-                </a:solidFill>
-              </a:rPr>
-              <a:t>Android</a:t>
-            </a:r>
-          </a:p>
-        </p:txBody>
-      </p:sp>
-      <p:sp>
-        <p:nvSpPr>
-          <p:cNvPr id="13" name="TextBox 12"/>
-          <p:cNvSpPr txBox="1"/>
-          <p:nvPr/>
-        </p:nvSpPr>
-        <p:spPr>
-          <a:xfrm>
-            <a:off x="2756917" y="4041648"/>
-            <a:ext cx="2084831" cy="347472"/>
-          </a:xfrm>
-          <a:prstGeom prst="rect">
-            <a:avLst/>
-          </a:prstGeom>
-          <a:noFill/>
-        </p:spPr>
-        <p:txBody>
-          <a:bodyPr wrap="square">
-            <a:spAutoFit/>
-          </a:bodyPr>
-          <a:lstStyle/>
-          <a:p>
-            <a:pPr algn="ctr"/>
-            <a:r>
-              <a:rPr sz="1400" b="0" i="0">
-                <a:solidFill>
-                  <a:srgbClr val="9999AA"/>
-                </a:solidFill>
-              </a:rPr>
-              <a:t>Screenshot</a:t>
-            </a:r>
-          </a:p>
-        </p:txBody>
-      </p:sp>
-      <p:sp>
-        <p:nvSpPr>
-          <p:cNvPr id="14" name="TextBox 13"/>
-          <p:cNvSpPr txBox="1"/>
-          <p:nvPr/>
-        </p:nvSpPr>
-        <p:spPr>
-          <a:xfrm>
-            <a:off x="2756917" y="5961888"/>
-            <a:ext cx="2084831" cy="411480"/>
-          </a:xfrm>
-          <a:prstGeom prst="rect">
-            <a:avLst/>
-          </a:prstGeom>
-          <a:noFill/>
-        </p:spPr>
-        <p:txBody>
-          <a:bodyPr wrap="square">
-            <a:spAutoFit/>
-          </a:bodyPr>
-          <a:lstStyle/>
-          <a:p>
-            <a:pPr algn="ctr"/>
-            <a:r>
-              <a:rPr sz="1400" b="1" i="0">
-                <a:solidFill>
-                  <a:srgbClr val="3DDC84"/>
-                </a:solidFill>
-              </a:rPr>
-              <a:t>Main Weather</a:t>
-            </a:r>
-          </a:p>
-        </p:txBody>
-      </p:sp>
-      <p:sp>
-        <p:nvSpPr>
-          <p:cNvPr id="15" name="Rectangle 14"/>
-          <p:cNvSpPr/>
-          <p:nvPr/>
-        </p:nvSpPr>
-        <p:spPr>
-          <a:xfrm>
-            <a:off x="5052060" y="1572768"/>
-            <a:ext cx="2084831" cy="4846320"/>
-          </a:xfrm>
-          <a:prstGeom prst="rect">
-            <a:avLst/>
-          </a:prstGeom>
-          <a:solidFill>
-            <a:srgbClr val="E8F8EE"/>
-          </a:solidFill>
-          <a:ln w="38100">
-            <a:solidFill>
-              <a:srgbClr val="3DDC84"/>
-            </a:solidFill>
-          </a:ln>
-        </p:spPr>
-        <p:style>
-          <a:lnRef idx="1">
-            <a:schemeClr val="accent1"/>
-          </a:lnRef>
-          <a:fillRef idx="3">
-            <a:schemeClr val="accent1"/>
-          </a:fillRef>
-          <a:effectRef idx="2">
-            <a:schemeClr val="accent1"/>
-          </a:effectRef>
-          <a:fontRef idx="minor">
-            <a:schemeClr val="lt1"/>
-          </a:fontRef>
-        </p:style>
-        <p:txBody>
-          <a:bodyPr rtlCol="0" anchor="ctr"/>
-          <a:lstStyle/>
-          <a:p>
-            <a:pPr algn="ctr"/>
-          </a:p>
-        </p:txBody>
-      </p:sp>
-      <p:sp>
-        <p:nvSpPr>
-          <p:cNvPr id="16" name="Rectangle 15"/>
-          <p:cNvSpPr/>
-          <p:nvPr/>
-        </p:nvSpPr>
-        <p:spPr>
-          <a:xfrm>
-            <a:off x="5189220" y="1755648"/>
-            <a:ext cx="1810511" cy="4069080"/>
-          </a:xfrm>
-          <a:prstGeom prst="rect">
-            <a:avLst/>
-          </a:prstGeom>
-          <a:solidFill>
-            <a:srgbClr val="C8F0D8"/>
-          </a:solidFill>
-          <a:ln w="19050">
-            <a:solidFill>
-              <a:srgbClr val="3DDC84"/>
-            </a:solidFill>
-          </a:ln>
-        </p:spPr>
-        <p:style>
-          <a:lnRef idx="1">
-            <a:schemeClr val="accent1"/>
-          </a:lnRef>
-          <a:fillRef idx="3">
-            <a:schemeClr val="accent1"/>
-          </a:fillRef>
-          <a:effectRef idx="2">
-            <a:schemeClr val="accent1"/>
-          </a:effectRef>
-          <a:fontRef idx="minor">
-            <a:schemeClr val="lt1"/>
-          </a:fontRef>
-        </p:style>
-        <p:txBody>
-          <a:bodyPr rtlCol="0" anchor="ctr"/>
-          <a:lstStyle/>
-          <a:p>
-            <a:pPr algn="ctr"/>
-          </a:p>
-        </p:txBody>
-      </p:sp>
-      <p:sp>
-        <p:nvSpPr>
-          <p:cNvPr id="17" name="TextBox 16"/>
-          <p:cNvSpPr txBox="1"/>
-          <p:nvPr/>
-        </p:nvSpPr>
-        <p:spPr>
-          <a:xfrm>
-            <a:off x="5052060" y="3493008"/>
-            <a:ext cx="2084831" cy="502920"/>
-          </a:xfrm>
-          <a:prstGeom prst="rect">
-            <a:avLst/>
-          </a:prstGeom>
-          <a:noFill/>
-        </p:spPr>
-        <p:txBody>
-          <a:bodyPr wrap="square">
-            <a:spAutoFit/>
-          </a:bodyPr>
-          <a:lstStyle/>
-          <a:p>
-            <a:pPr algn="ctr"/>
-            <a:r>
-              <a:rPr sz="2400" b="1" i="0">
-                <a:solidFill>
-                  <a:srgbClr val="3DDC84"/>
-                </a:solidFill>
-              </a:rPr>
-              <a:t>Android</a:t>
-            </a:r>
-          </a:p>
-        </p:txBody>
-      </p:sp>
-      <p:sp>
-        <p:nvSpPr>
-          <p:cNvPr id="18" name="TextBox 17"/>
-          <p:cNvSpPr txBox="1"/>
-          <p:nvPr/>
-        </p:nvSpPr>
-        <p:spPr>
-          <a:xfrm>
-            <a:off x="5052060" y="4041648"/>
-            <a:ext cx="2084831" cy="347472"/>
-          </a:xfrm>
-          <a:prstGeom prst="rect">
-            <a:avLst/>
-          </a:prstGeom>
-          <a:noFill/>
-        </p:spPr>
-        <p:txBody>
-          <a:bodyPr wrap="square">
-            <a:spAutoFit/>
-          </a:bodyPr>
-          <a:lstStyle/>
-          <a:p>
-            <a:pPr algn="ctr"/>
-            <a:r>
-              <a:rPr sz="1400" b="0" i="0">
-                <a:solidFill>
-                  <a:srgbClr val="9999AA"/>
-                </a:solidFill>
-              </a:rPr>
-              <a:t>Screenshot</a:t>
-            </a:r>
-          </a:p>
-        </p:txBody>
-      </p:sp>
-      <p:sp>
-        <p:nvSpPr>
-          <p:cNvPr id="19" name="TextBox 18"/>
-          <p:cNvSpPr txBox="1"/>
-          <p:nvPr/>
-        </p:nvSpPr>
-        <p:spPr>
-          <a:xfrm>
-            <a:off x="5052060" y="5961888"/>
-            <a:ext cx="2084831" cy="411480"/>
-          </a:xfrm>
-          <a:prstGeom prst="rect">
-            <a:avLst/>
-          </a:prstGeom>
-          <a:noFill/>
-        </p:spPr>
-        <p:txBody>
-          <a:bodyPr wrap="square">
-            <a:spAutoFit/>
-          </a:bodyPr>
-          <a:lstStyle/>
-          <a:p>
-            <a:pPr algn="ctr"/>
-            <a:r>
-              <a:rPr sz="1400" b="1" i="0">
-                <a:solidFill>
-                  <a:srgbClr val="3DDC84"/>
-                </a:solidFill>
-              </a:rPr>
-              <a:t>Forecast</a:t>
-            </a:r>
-          </a:p>
-        </p:txBody>
-      </p:sp>
-      <p:sp>
-        <p:nvSpPr>
-          <p:cNvPr id="20" name="Rectangle 19"/>
-          <p:cNvSpPr/>
-          <p:nvPr/>
-        </p:nvSpPr>
-        <p:spPr>
-          <a:xfrm>
-            <a:off x="7347203" y="1572768"/>
-            <a:ext cx="2084831" cy="4846320"/>
-          </a:xfrm>
-          <a:prstGeom prst="rect">
-            <a:avLst/>
-          </a:prstGeom>
-          <a:solidFill>
-            <a:srgbClr val="E8F8EE"/>
-          </a:solidFill>
-          <a:ln w="38100">
-            <a:solidFill>
-              <a:srgbClr val="3DDC84"/>
-            </a:solidFill>
-          </a:ln>
-        </p:spPr>
-        <p:style>
-          <a:lnRef idx="1">
-            <a:schemeClr val="accent1"/>
-          </a:lnRef>
-          <a:fillRef idx="3">
-            <a:schemeClr val="accent1"/>
-          </a:fillRef>
-          <a:effectRef idx="2">
-            <a:schemeClr val="accent1"/>
-          </a:effectRef>
-          <a:fontRef idx="minor">
-            <a:schemeClr val="lt1"/>
-          </a:fontRef>
-        </p:style>
-        <p:txBody>
-          <a:bodyPr rtlCol="0" anchor="ctr"/>
-          <a:lstStyle/>
-          <a:p>
-            <a:pPr algn="ctr"/>
-          </a:p>
-        </p:txBody>
-      </p:sp>
-      <p:sp>
-        <p:nvSpPr>
-          <p:cNvPr id="21" name="Rectangle 20"/>
-          <p:cNvSpPr/>
-          <p:nvPr/>
-        </p:nvSpPr>
-        <p:spPr>
-          <a:xfrm>
-            <a:off x="7484363" y="1755648"/>
-            <a:ext cx="1810511" cy="4069080"/>
-          </a:xfrm>
-          <a:prstGeom prst="rect">
-            <a:avLst/>
-          </a:prstGeom>
-          <a:solidFill>
-            <a:srgbClr val="C8F0D8"/>
-          </a:solidFill>
-          <a:ln w="19050">
-            <a:solidFill>
-              <a:srgbClr val="3DDC84"/>
-            </a:solidFill>
-          </a:ln>
-        </p:spPr>
-        <p:style>
-          <a:lnRef idx="1">
-            <a:schemeClr val="accent1"/>
-          </a:lnRef>
-          <a:fillRef idx="3">
-            <a:schemeClr val="accent1"/>
-          </a:fillRef>
-          <a:effectRef idx="2">
-            <a:schemeClr val="accent1"/>
-          </a:effectRef>
-          <a:fontRef idx="minor">
-            <a:schemeClr val="lt1"/>
-          </a:fontRef>
-        </p:style>
-        <p:txBody>
-          <a:bodyPr rtlCol="0" anchor="ctr"/>
-          <a:lstStyle/>
-          <a:p>
-            <a:pPr algn="ctr"/>
-          </a:p>
-        </p:txBody>
-      </p:sp>
-      <p:sp>
-        <p:nvSpPr>
-          <p:cNvPr id="22" name="TextBox 21"/>
-          <p:cNvSpPr txBox="1"/>
-          <p:nvPr/>
-        </p:nvSpPr>
-        <p:spPr>
-          <a:xfrm>
-            <a:off x="7347203" y="3493008"/>
-            <a:ext cx="2084831" cy="502920"/>
-          </a:xfrm>
-          <a:prstGeom prst="rect">
-            <a:avLst/>
-          </a:prstGeom>
-          <a:noFill/>
-        </p:spPr>
-        <p:txBody>
-          <a:bodyPr wrap="square">
-            <a:spAutoFit/>
-          </a:bodyPr>
-          <a:lstStyle/>
-          <a:p>
-            <a:pPr algn="ctr"/>
-            <a:r>
-              <a:rPr sz="2400" b="1" i="0">
-                <a:solidFill>
-                  <a:srgbClr val="3DDC84"/>
-                </a:solidFill>
-              </a:rPr>
-              <a:t>Android</a:t>
-            </a:r>
-          </a:p>
-        </p:txBody>
-      </p:sp>
-      <p:sp>
-        <p:nvSpPr>
-          <p:cNvPr id="23" name="TextBox 22"/>
-          <p:cNvSpPr txBox="1"/>
-          <p:nvPr/>
-        </p:nvSpPr>
-        <p:spPr>
-          <a:xfrm>
-            <a:off x="7347203" y="4041648"/>
-            <a:ext cx="2084831" cy="347472"/>
-          </a:xfrm>
-          <a:prstGeom prst="rect">
-            <a:avLst/>
-          </a:prstGeom>
-          <a:noFill/>
-        </p:spPr>
-        <p:txBody>
-          <a:bodyPr wrap="square">
-            <a:spAutoFit/>
-          </a:bodyPr>
-          <a:lstStyle/>
-          <a:p>
-            <a:pPr algn="ctr"/>
-            <a:r>
-              <a:rPr sz="1400" b="0" i="0">
-                <a:solidFill>
-                  <a:srgbClr val="9999AA"/>
-                </a:solidFill>
-              </a:rPr>
-              <a:t>Screenshot</a:t>
-            </a:r>
-          </a:p>
-        </p:txBody>
-      </p:sp>
-      <p:sp>
-        <p:nvSpPr>
-          <p:cNvPr id="24" name="TextBox 23"/>
-          <p:cNvSpPr txBox="1"/>
-          <p:nvPr/>
-        </p:nvSpPr>
-        <p:spPr>
-          <a:xfrm>
-            <a:off x="7347203" y="5961888"/>
-            <a:ext cx="2084831" cy="411480"/>
-          </a:xfrm>
-          <a:prstGeom prst="rect">
-            <a:avLst/>
-          </a:prstGeom>
-          <a:noFill/>
-        </p:spPr>
-        <p:txBody>
-          <a:bodyPr wrap="square">
-            <a:spAutoFit/>
-          </a:bodyPr>
-          <a:lstStyle/>
-          <a:p>
-            <a:pPr algn="ctr"/>
-            <a:r>
-              <a:rPr sz="1400" b="1" i="0">
-                <a:solidFill>
-                  <a:srgbClr val="3DDC84"/>
-                </a:solidFill>
-              </a:rPr>
-              <a:t>City Search</a:t>
-            </a:r>
-          </a:p>
-        </p:txBody>
-      </p:sp>
-      <p:sp>
-        <p:nvSpPr>
-          <p:cNvPr id="25" name="Rectangle 24"/>
-          <p:cNvSpPr/>
-          <p:nvPr/>
-        </p:nvSpPr>
-        <p:spPr>
-          <a:xfrm>
-            <a:off x="9642346" y="1572768"/>
-            <a:ext cx="2084831" cy="4846320"/>
-          </a:xfrm>
-          <a:prstGeom prst="rect">
-            <a:avLst/>
-          </a:prstGeom>
-          <a:solidFill>
-            <a:srgbClr val="E8F8EE"/>
-          </a:solidFill>
-          <a:ln w="38100">
-            <a:solidFill>
-              <a:srgbClr val="3DDC84"/>
-            </a:solidFill>
-          </a:ln>
-        </p:spPr>
-        <p:style>
-          <a:lnRef idx="1">
-            <a:schemeClr val="accent1"/>
-          </a:lnRef>
-          <a:fillRef idx="3">
-            <a:schemeClr val="accent1"/>
-          </a:fillRef>
-          <a:effectRef idx="2">
-            <a:schemeClr val="accent1"/>
-          </a:effectRef>
-          <a:fontRef idx="minor">
-            <a:schemeClr val="lt1"/>
-          </a:fontRef>
-        </p:style>
-        <p:txBody>
-          <a:bodyPr rtlCol="0" anchor="ctr"/>
-          <a:lstStyle/>
-          <a:p>
-            <a:pPr algn="ctr"/>
-          </a:p>
-        </p:txBody>
-      </p:sp>
-      <p:sp>
-        <p:nvSpPr>
-          <p:cNvPr id="26" name="Rectangle 25"/>
-          <p:cNvSpPr/>
-          <p:nvPr/>
-        </p:nvSpPr>
-        <p:spPr>
-          <a:xfrm>
-            <a:off x="9779506" y="1755648"/>
-            <a:ext cx="1810511" cy="4069080"/>
-          </a:xfrm>
-          <a:prstGeom prst="rect">
-            <a:avLst/>
-          </a:prstGeom>
-          <a:solidFill>
-            <a:srgbClr val="C8F0D8"/>
-          </a:solidFill>
-          <a:ln w="19050">
-            <a:solidFill>
-              <a:srgbClr val="3DDC84"/>
-            </a:solidFill>
-          </a:ln>
-        </p:spPr>
-        <p:style>
-          <a:lnRef idx="1">
-            <a:schemeClr val="accent1"/>
-          </a:lnRef>
-          <a:fillRef idx="3">
-            <a:schemeClr val="accent1"/>
-          </a:fillRef>
-          <a:effectRef idx="2">
-            <a:schemeClr val="accent1"/>
-          </a:effectRef>
-          <a:fontRef idx="minor">
-            <a:schemeClr val="lt1"/>
-          </a:fontRef>
-        </p:style>
-        <p:txBody>
-          <a:bodyPr rtlCol="0" anchor="ctr"/>
-          <a:lstStyle/>
-          <a:p>
-            <a:pPr algn="ctr"/>
-          </a:p>
-        </p:txBody>
-      </p:sp>
-      <p:sp>
-        <p:nvSpPr>
-          <p:cNvPr id="27" name="TextBox 26"/>
-          <p:cNvSpPr txBox="1"/>
-          <p:nvPr/>
-        </p:nvSpPr>
-        <p:spPr>
-          <a:xfrm>
-            <a:off x="9642346" y="3493008"/>
-            <a:ext cx="2084831" cy="502920"/>
-          </a:xfrm>
-          <a:prstGeom prst="rect">
-            <a:avLst/>
-          </a:prstGeom>
-          <a:noFill/>
-        </p:spPr>
-        <p:txBody>
-          <a:bodyPr wrap="square">
-            <a:spAutoFit/>
-          </a:bodyPr>
-          <a:lstStyle/>
-          <a:p>
-            <a:pPr algn="ctr"/>
-            <a:r>
-              <a:rPr sz="2400" b="1" i="0">
-                <a:solidFill>
-                  <a:srgbClr val="3DDC84"/>
-                </a:solidFill>
-              </a:rPr>
-              <a:t>Android</a:t>
-            </a:r>
-          </a:p>
-        </p:txBody>
-      </p:sp>
-      <p:sp>
-        <p:nvSpPr>
-          <p:cNvPr id="28" name="TextBox 27"/>
-          <p:cNvSpPr txBox="1"/>
-          <p:nvPr/>
-        </p:nvSpPr>
-        <p:spPr>
-          <a:xfrm>
-            <a:off x="9642346" y="4041648"/>
-            <a:ext cx="2084831" cy="347472"/>
-          </a:xfrm>
-          <a:prstGeom prst="rect">
-            <a:avLst/>
-          </a:prstGeom>
-          <a:noFill/>
-        </p:spPr>
-        <p:txBody>
-          <a:bodyPr wrap="square">
-            <a:spAutoFit/>
-          </a:bodyPr>
-          <a:lstStyle/>
-          <a:p>
-            <a:pPr algn="ctr"/>
-            <a:r>
-              <a:rPr sz="1400" b="0" i="0">
-                <a:solidFill>
-                  <a:srgbClr val="9999AA"/>
-                </a:solidFill>
-              </a:rPr>
-              <a:t>Screenshot</a:t>
-            </a:r>
-          </a:p>
-        </p:txBody>
-      </p:sp>
-      <p:sp>
-        <p:nvSpPr>
-          <p:cNvPr id="29" name="TextBox 28"/>
-          <p:cNvSpPr txBox="1"/>
-          <p:nvPr/>
-        </p:nvSpPr>
-        <p:spPr>
-          <a:xfrm>
-            <a:off x="9642346" y="5961888"/>
-            <a:ext cx="2084831" cy="411480"/>
-          </a:xfrm>
-          <a:prstGeom prst="rect">
-            <a:avLst/>
-          </a:prstGeom>
-          <a:noFill/>
-        </p:spPr>
-        <p:txBody>
-          <a:bodyPr wrap="square">
-            <a:spAutoFit/>
-          </a:bodyPr>
-          <a:lstStyle/>
-          <a:p>
-            <a:pPr algn="ctr"/>
-            <a:r>
-              <a:rPr sz="1400" b="1" i="0">
-                <a:solidFill>
-                  <a:srgbClr val="3DDC84"/>
-                </a:solidFill>
-              </a:rPr>
-              <a:t>Settings</a:t>
-            </a:r>
-          </a:p>
-        </p:txBody>
-      </p:sp>
+          <a:effectLst>
+            <a:reflection blurRad="12700" stA="33000" endPos="28000" dist="5000" dir="5400000" sy="-100000" algn="bl" rotWithShape="0"/>
+          </a:effectLst>
+          <a:scene3d>
+            <a:camera prst="orthographicFront"/>
+            <a:lightRig rig="threePt" dir="t">
+              <a:rot lat="0" lon="0" rev="2700000"/>
+            </a:lightRig>
+          </a:scene3d>
+          <a:sp3d contourW="6350">
+            <a:bevelT h="38100"/>
+            <a:contourClr>
+              <a:srgbClr val="C0C0C0"/>
+            </a:contourClr>
+          </a:sp3d>
+        </p:spPr>
+      </p:pic>
     </p:spTree>
   </p:cSld>
   <p:clrMapOvr>
@@ -11771,7 +10874,7 @@
 </file>
 
 <file path=ppt/slides/slide8.xml><?xml version="1.0" encoding="utf-8"?>
-<p:sld xmlns:a="http://schemas.openxmlformats.org/drawingml/2006/main" xmlns:p="http://schemas.openxmlformats.org/presentationml/2006/main" xmlns:r="http://schemas.openxmlformats.org/officeDocument/2006/relationships">
+<p:sld xmlns:a="http://schemas.openxmlformats.org/drawingml/2006/main" xmlns:r="http://schemas.openxmlformats.org/officeDocument/2006/relationships" xmlns:p="http://schemas.openxmlformats.org/presentationml/2006/main">
   <p:cSld>
     <p:bg>
       <p:bgPr>
@@ -11787,7 +10890,14 @@
         <p:cNvGrpSpPr/>
         <p:nvPr/>
       </p:nvGrpSpPr>
-      <p:grpSpPr/>
+      <p:grpSpPr>
+        <a:xfrm>
+          <a:off x="0" y="0"/>
+          <a:ext cx="0" cy="0"/>
+          <a:chOff x="0" y="0"/>
+          <a:chExt cx="0" cy="0"/>
+        </a:xfrm>
+      </p:grpSpPr>
       <p:sp>
         <p:nvSpPr>
           <p:cNvPr id="2" name="Rectangle 1"/>
@@ -11828,6 +10938,7 @@
           <a:lstStyle/>
           <a:p>
             <a:pPr algn="ctr"/>
+            <a:endParaRPr/>
           </a:p>
         </p:txBody>
       </p:sp>
@@ -11905,6 +11016,7 @@
           <a:lstStyle/>
           <a:p>
             <a:pPr algn="ctr"/>
+            <a:endParaRPr/>
           </a:p>
         </p:txBody>
       </p:sp>
@@ -11982,6 +11094,7 @@
           <a:lstStyle/>
           <a:p>
             <a:pPr algn="ctr"/>
+            <a:endParaRPr/>
           </a:p>
         </p:txBody>
       </p:sp>
@@ -12059,6 +11172,7 @@
           <a:lstStyle/>
           <a:p>
             <a:pPr algn="ctr"/>
+            <a:endParaRPr/>
           </a:p>
         </p:txBody>
       </p:sp>
@@ -12136,6 +11250,7 @@
           <a:lstStyle/>
           <a:p>
             <a:pPr algn="ctr"/>
+            <a:endParaRPr/>
           </a:p>
         </p:txBody>
       </p:sp>
@@ -12213,6 +11328,7 @@
           <a:lstStyle/>
           <a:p>
             <a:pPr algn="ctr"/>
+            <a:endParaRPr/>
           </a:p>
         </p:txBody>
       </p:sp>
@@ -12290,6 +11406,7 @@
           <a:lstStyle/>
           <a:p>
             <a:pPr algn="ctr"/>
+            <a:endParaRPr/>
           </a:p>
         </p:txBody>
       </p:sp>
@@ -12367,6 +11484,7 @@
           <a:lstStyle/>
           <a:p>
             <a:pPr algn="ctr"/>
+            <a:endParaRPr/>
           </a:p>
         </p:txBody>
       </p:sp>
@@ -12444,6 +11562,7 @@
           <a:lstStyle/>
           <a:p>
             <a:pPr algn="ctr"/>
+            <a:endParaRPr/>
           </a:p>
         </p:txBody>
       </p:sp>
@@ -12521,6 +11640,7 @@
           <a:lstStyle/>
           <a:p>
             <a:pPr algn="ctr"/>
+            <a:endParaRPr/>
           </a:p>
         </p:txBody>
       </p:sp>
@@ -12598,6 +11718,7 @@
           <a:lstStyle/>
           <a:p>
             <a:pPr algn="ctr"/>
+            <a:endParaRPr/>
           </a:p>
         </p:txBody>
       </p:sp>
@@ -12675,6 +11796,7 @@
           <a:lstStyle/>
           <a:p>
             <a:pPr algn="ctr"/>
+            <a:endParaRPr/>
           </a:p>
         </p:txBody>
       </p:sp>
@@ -12752,6 +11874,7 @@
           <a:lstStyle/>
           <a:p>
             <a:pPr algn="ctr"/>
+            <a:endParaRPr/>
           </a:p>
         </p:txBody>
       </p:sp>
@@ -12829,6 +11952,7 @@
           <a:lstStyle/>
           <a:p>
             <a:pPr algn="ctr"/>
+            <a:endParaRPr/>
           </a:p>
         </p:txBody>
       </p:sp>
@@ -12906,6 +12030,7 @@
           <a:lstStyle/>
           <a:p>
             <a:pPr algn="ctr"/>
+            <a:endParaRPr/>
           </a:p>
         </p:txBody>
       </p:sp>
@@ -12983,6 +12108,7 @@
           <a:lstStyle/>
           <a:p>
             <a:pPr algn="ctr"/>
+            <a:endParaRPr/>
           </a:p>
         </p:txBody>
       </p:sp>
@@ -13060,6 +12186,7 @@
           <a:lstStyle/>
           <a:p>
             <a:pPr algn="ctr"/>
+            <a:endParaRPr/>
           </a:p>
         </p:txBody>
       </p:sp>
@@ -13137,6 +12264,7 @@
           <a:lstStyle/>
           <a:p>
             <a:pPr algn="ctr"/>
+            <a:endParaRPr/>
           </a:p>
         </p:txBody>
       </p:sp>
@@ -13214,6 +12342,7 @@
           <a:lstStyle/>
           <a:p>
             <a:pPr algn="ctr"/>
+            <a:endParaRPr/>
           </a:p>
         </p:txBody>
       </p:sp>
@@ -13291,6 +12420,7 @@
           <a:lstStyle/>
           <a:p>
             <a:pPr algn="ctr"/>
+            <a:endParaRPr/>
           </a:p>
         </p:txBody>
       </p:sp>
@@ -13368,6 +12498,7 @@
           <a:lstStyle/>
           <a:p>
             <a:pPr algn="ctr"/>
+            <a:endParaRPr/>
           </a:p>
         </p:txBody>
       </p:sp>
@@ -13445,6 +12576,7 @@
           <a:lstStyle/>
           <a:p>
             <a:pPr algn="ctr"/>
+            <a:endParaRPr/>
           </a:p>
         </p:txBody>
       </p:sp>
@@ -13522,6 +12654,7 @@
           <a:lstStyle/>
           <a:p>
             <a:pPr algn="ctr"/>
+            <a:endParaRPr/>
           </a:p>
         </p:txBody>
       </p:sp>
@@ -13599,6 +12732,7 @@
           <a:lstStyle/>
           <a:p>
             <a:pPr algn="ctr"/>
+            <a:endParaRPr/>
           </a:p>
         </p:txBody>
       </p:sp>
@@ -13676,6 +12810,7 @@
           <a:lstStyle/>
           <a:p>
             <a:pPr algn="ctr"/>
+            <a:endParaRPr/>
           </a:p>
         </p:txBody>
       </p:sp>
@@ -13753,6 +12888,7 @@
           <a:lstStyle/>
           <a:p>
             <a:pPr algn="ctr"/>
+            <a:endParaRPr/>
           </a:p>
         </p:txBody>
       </p:sp>
@@ -13830,6 +12966,7 @@
           <a:lstStyle/>
           <a:p>
             <a:pPr algn="ctr"/>
+            <a:endParaRPr/>
           </a:p>
         </p:txBody>
       </p:sp>
@@ -13907,6 +13044,7 @@
           <a:lstStyle/>
           <a:p>
             <a:pPr algn="ctr"/>
+            <a:endParaRPr/>
           </a:p>
         </p:txBody>
       </p:sp>
@@ -13984,6 +13122,7 @@
           <a:lstStyle/>
           <a:p>
             <a:pPr algn="ctr"/>
+            <a:endParaRPr/>
           </a:p>
         </p:txBody>
       </p:sp>
@@ -14061,6 +13200,7 @@
           <a:lstStyle/>
           <a:p>
             <a:pPr algn="ctr"/>
+            <a:endParaRPr/>
           </a:p>
         </p:txBody>
       </p:sp>
@@ -14138,6 +13278,7 @@
           <a:lstStyle/>
           <a:p>
             <a:pPr algn="ctr"/>
+            <a:endParaRPr/>
           </a:p>
         </p:txBody>
       </p:sp>
@@ -14184,7 +13325,7 @@
 </file>
 
 <file path=ppt/slides/slide9.xml><?xml version="1.0" encoding="utf-8"?>
-<p:sld xmlns:a="http://schemas.openxmlformats.org/drawingml/2006/main" xmlns:p="http://schemas.openxmlformats.org/presentationml/2006/main" xmlns:r="http://schemas.openxmlformats.org/officeDocument/2006/relationships">
+<p:sld xmlns:a="http://schemas.openxmlformats.org/drawingml/2006/main" xmlns:r="http://schemas.openxmlformats.org/officeDocument/2006/relationships" xmlns:p="http://schemas.openxmlformats.org/presentationml/2006/main">
   <p:cSld>
     <p:bg>
       <p:bgPr>
@@ -14200,7 +13341,14 @@
         <p:cNvGrpSpPr/>
         <p:nvPr/>
       </p:nvGrpSpPr>
-      <p:grpSpPr/>
+      <p:grpSpPr>
+        <a:xfrm>
+          <a:off x="0" y="0"/>
+          <a:ext cx="0" cy="0"/>
+          <a:chOff x="0" y="0"/>
+          <a:chExt cx="0" cy="0"/>
+        </a:xfrm>
+      </p:grpSpPr>
       <p:sp>
         <p:nvSpPr>
           <p:cNvPr id="2" name="Rectangle 1"/>
@@ -14241,6 +13389,7 @@
           <a:lstStyle/>
           <a:p>
             <a:pPr algn="ctr"/>
+            <a:endParaRPr/>
           </a:p>
         </p:txBody>
       </p:sp>
@@ -14318,6 +13467,7 @@
           <a:lstStyle/>
           <a:p>
             <a:pPr algn="ctr"/>
+            <a:endParaRPr/>
           </a:p>
         </p:txBody>
       </p:sp>
@@ -14361,6 +13511,7 @@
           <a:lstStyle/>
           <a:p>
             <a:pPr algn="ctr"/>
+            <a:endParaRPr/>
           </a:p>
         </p:txBody>
       </p:sp>
@@ -14521,6 +13672,7 @@
           <a:lstStyle/>
           <a:p>
             <a:pPr algn="ctr"/>
+            <a:endParaRPr/>
           </a:p>
         </p:txBody>
       </p:sp>
@@ -14564,6 +13716,7 @@
           <a:lstStyle/>
           <a:p>
             <a:pPr algn="ctr"/>
+            <a:endParaRPr/>
           </a:p>
         </p:txBody>
       </p:sp>

--- a/docs/WeatheryApp_Presentation.pptx
+++ b/docs/WeatheryApp_Presentation.pptx
@@ -14,10 +14,10 @@
     <p:sldId id="262" r:id="rId8"/>
     <p:sldId id="263" r:id="rId9"/>
     <p:sldId id="264" r:id="rId10"/>
-    <p:sldId id="265" r:id="rId11"/>
+    <p:sldId id="269" r:id="rId11"/>
     <p:sldId id="266" r:id="rId12"/>
-    <p:sldId id="267" r:id="rId13"/>
-    <p:sldId id="269" r:id="rId14"/>
+    <p:sldId id="265" r:id="rId13"/>
+    <p:sldId id="267" r:id="rId14"/>
     <p:sldId id="268" r:id="rId15"/>
   </p:sldIdLst>
   <p:sldSz cx="12188825" cy="6858000"/>
@@ -315,7 +315,7 @@
           <a:p>
             <a:fld id="{5BCAD085-E8A6-8845-BD4E-CB4CCA059FC4}" type="datetimeFigureOut">
               <a:rPr lang="en-US" smtClean="0"/>
-              <a:t>6/19/2026</a:t>
+              <a:t>6/20/2026</a:t>
             </a:fld>
             <a:endParaRPr lang="en-US"/>
           </a:p>
@@ -483,7 +483,7 @@
           <a:p>
             <a:fld id="{5BCAD085-E8A6-8845-BD4E-CB4CCA059FC4}" type="datetimeFigureOut">
               <a:rPr lang="en-US" smtClean="0"/>
-              <a:t>6/19/2026</a:t>
+              <a:t>6/20/2026</a:t>
             </a:fld>
             <a:endParaRPr lang="en-US"/>
           </a:p>
@@ -661,7 +661,7 @@
           <a:p>
             <a:fld id="{5BCAD085-E8A6-8845-BD4E-CB4CCA059FC4}" type="datetimeFigureOut">
               <a:rPr lang="en-US" smtClean="0"/>
-              <a:t>6/19/2026</a:t>
+              <a:t>6/20/2026</a:t>
             </a:fld>
             <a:endParaRPr lang="en-US"/>
           </a:p>
@@ -829,7 +829,7 @@
           <a:p>
             <a:fld id="{5BCAD085-E8A6-8845-BD4E-CB4CCA059FC4}" type="datetimeFigureOut">
               <a:rPr lang="en-US" smtClean="0"/>
-              <a:t>6/19/2026</a:t>
+              <a:t>6/20/2026</a:t>
             </a:fld>
             <a:endParaRPr lang="en-US"/>
           </a:p>
@@ -1074,7 +1074,7 @@
           <a:p>
             <a:fld id="{5BCAD085-E8A6-8845-BD4E-CB4CCA059FC4}" type="datetimeFigureOut">
               <a:rPr lang="en-US" smtClean="0"/>
-              <a:t>6/19/2026</a:t>
+              <a:t>6/20/2026</a:t>
             </a:fld>
             <a:endParaRPr lang="en-US"/>
           </a:p>
@@ -1359,7 +1359,7 @@
           <a:p>
             <a:fld id="{5BCAD085-E8A6-8845-BD4E-CB4CCA059FC4}" type="datetimeFigureOut">
               <a:rPr lang="en-US" smtClean="0"/>
-              <a:t>6/19/2026</a:t>
+              <a:t>6/20/2026</a:t>
             </a:fld>
             <a:endParaRPr lang="en-US"/>
           </a:p>
@@ -1778,7 +1778,7 @@
           <a:p>
             <a:fld id="{5BCAD085-E8A6-8845-BD4E-CB4CCA059FC4}" type="datetimeFigureOut">
               <a:rPr lang="en-US" smtClean="0"/>
-              <a:t>6/19/2026</a:t>
+              <a:t>6/20/2026</a:t>
             </a:fld>
             <a:endParaRPr lang="en-US"/>
           </a:p>
@@ -1895,7 +1895,7 @@
           <a:p>
             <a:fld id="{5BCAD085-E8A6-8845-BD4E-CB4CCA059FC4}" type="datetimeFigureOut">
               <a:rPr lang="en-US" smtClean="0"/>
-              <a:t>6/19/2026</a:t>
+              <a:t>6/20/2026</a:t>
             </a:fld>
             <a:endParaRPr lang="en-US"/>
           </a:p>
@@ -1990,7 +1990,7 @@
           <a:p>
             <a:fld id="{5BCAD085-E8A6-8845-BD4E-CB4CCA059FC4}" type="datetimeFigureOut">
               <a:rPr lang="en-US" smtClean="0"/>
-              <a:t>6/19/2026</a:t>
+              <a:t>6/20/2026</a:t>
             </a:fld>
             <a:endParaRPr lang="en-US"/>
           </a:p>
@@ -2265,7 +2265,7 @@
           <a:p>
             <a:fld id="{5BCAD085-E8A6-8845-BD4E-CB4CCA059FC4}" type="datetimeFigureOut">
               <a:rPr lang="en-US" smtClean="0"/>
-              <a:t>6/19/2026</a:t>
+              <a:t>6/20/2026</a:t>
             </a:fld>
             <a:endParaRPr lang="en-US"/>
           </a:p>
@@ -2517,7 +2517,7 @@
           <a:p>
             <a:fld id="{5BCAD085-E8A6-8845-BD4E-CB4CCA059FC4}" type="datetimeFigureOut">
               <a:rPr lang="en-US" smtClean="0"/>
-              <a:t>6/19/2026</a:t>
+              <a:t>6/20/2026</a:t>
             </a:fld>
             <a:endParaRPr lang="en-US"/>
           </a:p>
@@ -2728,7 +2728,7 @@
           <a:p>
             <a:fld id="{5BCAD085-E8A6-8845-BD4E-CB4CCA059FC4}" type="datetimeFigureOut">
               <a:rPr lang="en-US" smtClean="0"/>
-              <a:t>6/19/2026</a:t>
+              <a:t>6/20/2026</a:t>
             </a:fld>
             <a:endParaRPr lang="en-US"/>
           </a:p>
@@ -3380,14 +3380,6 @@
 <file path=ppt/slides/slide10.xml><?xml version="1.0" encoding="utf-8"?>
 <p:sld xmlns:a="http://schemas.openxmlformats.org/drawingml/2006/main" xmlns:r="http://schemas.openxmlformats.org/officeDocument/2006/relationships" xmlns:p="http://schemas.openxmlformats.org/presentationml/2006/main">
   <p:cSld>
-    <p:bg>
-      <p:bgPr>
-        <a:solidFill>
-          <a:srgbClr val="FFFFFF"/>
-        </a:solidFill>
-        <a:effectLst/>
-      </p:bgPr>
-    </p:bg>
     <p:spTree>
       <p:nvGrpSpPr>
         <p:cNvPr id="1" name=""/>
@@ -3411,7 +3403,7 @@
         <p:spPr>
           <a:xfrm>
             <a:off x="0" y="0"/>
-            <a:ext cx="12188952" cy="1097280"/>
+            <a:ext cx="12188825" cy="1097280"/>
           </a:xfrm>
           <a:prstGeom prst="rect">
             <a:avLst/>
@@ -3463,19 +3455,17 @@
           <a:noFill/>
         </p:spPr>
         <p:txBody>
-          <a:bodyPr wrap="square">
-            <a:spAutoFit/>
-          </a:bodyPr>
+          <a:bodyPr wrap="square"/>
           <a:lstStyle/>
           <a:p>
             <a:pPr algn="l"/>
             <a:r>
-              <a:rPr sz="3200" b="1" i="0">
+              <a:rPr sz="3200" b="1">
                 <a:solidFill>
                   <a:srgbClr val="FFFFFF"/>
                 </a:solidFill>
               </a:rPr>
-              <a:t>Key Challenges</a:t>
+              <a:t>C/F Toggle Bug  —  Analysis &amp; Fix</a:t>
             </a:r>
           </a:p>
         </p:txBody>
@@ -3585,19 +3575,17 @@
           <a:noFill/>
         </p:spPr>
         <p:txBody>
-          <a:bodyPr wrap="square">
-            <a:spAutoFit/>
-          </a:bodyPr>
+          <a:bodyPr wrap="square"/>
           <a:lstStyle/>
           <a:p>
             <a:pPr algn="l"/>
             <a:r>
-              <a:rPr sz="1700" b="1" i="0">
+              <a:rPr sz="1700" b="1">
                 <a:solidFill>
                   <a:srgbClr val="1C3557"/>
                 </a:solidFill>
               </a:rPr>
-              <a:t>WeatherKit not on Android</a:t>
+              <a:t>Root Cause</a:t>
             </a:r>
           </a:p>
         </p:txBody>
@@ -3619,19 +3607,17 @@
           <a:noFill/>
         </p:spPr>
         <p:txBody>
-          <a:bodyPr wrap="square">
-            <a:spAutoFit/>
-          </a:bodyPr>
+          <a:bodyPr wrap="square"/>
           <a:lstStyle/>
           <a:p>
             <a:pPr algn="l"/>
             <a:r>
-              <a:rPr sz="1600" b="0" i="1">
+              <a:rPr sz="1500" b="0">
                 <a:solidFill>
                   <a:srgbClr val="993322"/>
                 </a:solidFill>
               </a:rPr>
-              <a:t>Apple-exclusive API</a:t>
+              <a:t>isCelsius: a dead parameter</a:t>
             </a:r>
           </a:p>
         </p:txBody>
@@ -3653,19 +3639,17 @@
           <a:noFill/>
         </p:spPr>
         <p:txBody>
-          <a:bodyPr wrap="square">
-            <a:spAutoFit/>
-          </a:bodyPr>
+          <a:bodyPr wrap="square"/>
           <a:lstStyle/>
           <a:p>
             <a:pPr algn="l"/>
             <a:r>
-              <a:rPr sz="1600" b="0" i="0">
+              <a:rPr sz="1300" b="0">
                 <a:solidFill>
                   <a:srgbClr val="222233"/>
                 </a:solidFill>
               </a:rPr>
-              <a:t>Used OpenWeatherMap REST API instead</a:t>
+              <a:t>Passed to every child Composable (TopWeatherSection, HourlyForecastItem, DailyForecastRow, IndicatorsGrid) but never read in any body -- only viewModel.formatTemp() is called, which reads _isCelsius.value directly from a StateFlow.</a:t>
             </a:r>
           </a:p>
         </p:txBody>
@@ -3775,19 +3759,17 @@
           <a:noFill/>
         </p:spPr>
         <p:txBody>
-          <a:bodyPr wrap="square">
-            <a:spAutoFit/>
-          </a:bodyPr>
+          <a:bodyPr wrap="square"/>
           <a:lstStyle/>
           <a:p>
             <a:pPr algn="l"/>
             <a:r>
-              <a:rPr sz="1700" b="1" i="0">
+              <a:rPr sz="1700" b="1">
                 <a:solidFill>
                   <a:srgbClr val="1C3557"/>
                 </a:solidFill>
               </a:rPr>
-              <a:t>Sidebar navigation</a:t>
+              <a:t>Why It Breaks</a:t>
             </a:r>
           </a:p>
         </p:txBody>
@@ -3809,19 +3791,17 @@
           <a:noFill/>
         </p:spPr>
         <p:txBody>
-          <a:bodyPr wrap="square">
-            <a:spAutoFit/>
-          </a:bodyPr>
+          <a:bodyPr wrap="square"/>
           <a:lstStyle/>
           <a:p>
             <a:pPr algn="l"/>
             <a:r>
-              <a:rPr sz="1600" b="0" i="1">
+              <a:rPr sz="1500" b="0">
                 <a:solidFill>
                   <a:srgbClr val="993322"/>
                 </a:solidFill>
               </a:rPr>
-              <a:t>No native drawer equivalent on Android</a:t>
+              <a:t>Compose cannot track the StateFlow read</a:t>
             </a:r>
           </a:p>
         </p:txBody>
@@ -3843,19 +3823,17 @@
           <a:noFill/>
         </p:spPr>
         <p:txBody>
-          <a:bodyPr wrap="square">
-            <a:spAutoFit/>
-          </a:bodyPr>
+          <a:bodyPr wrap="square"/>
           <a:lstStyle/>
           <a:p>
             <a:pPr algn="l"/>
             <a:r>
-              <a:rPr sz="1600" b="0" i="0">
+              <a:rPr sz="1300" b="0">
                 <a:solidFill>
                   <a:srgbClr val="222233"/>
                 </a:solidFill>
               </a:rPr>
-              <a:t>Left sidebar --&gt; search dialog   /   Right --&gt; BottomSheet</a:t>
+              <a:t>Compose only re-renders when a State&lt;T&gt; value changes inside a composable body. Reading _isCelsius.value inside a plain Kotlin function is invisible to Compose -- so LazyRow items may silently skip recomposition.</a:t>
             </a:r>
           </a:p>
         </p:txBody>
@@ -3965,19 +3943,17 @@
           <a:noFill/>
         </p:spPr>
         <p:txBody>
-          <a:bodyPr wrap="square">
-            <a:spAutoFit/>
-          </a:bodyPr>
+          <a:bodyPr wrap="square"/>
           <a:lstStyle/>
           <a:p>
             <a:pPr algn="l"/>
             <a:r>
-              <a:rPr sz="1700" b="1" i="0">
+              <a:rPr sz="1700" b="1">
                 <a:solidFill>
                   <a:srgbClr val="1C3557"/>
                 </a:solidFill>
               </a:rPr>
-              <a:t>Missing Version Catalog</a:t>
+              <a:t>Fix Applied</a:t>
             </a:r>
           </a:p>
         </p:txBody>
@@ -3999,19 +3975,17 @@
           <a:noFill/>
         </p:spPr>
         <p:txBody>
-          <a:bodyPr wrap="square">
-            <a:spAutoFit/>
-          </a:bodyPr>
+          <a:bodyPr wrap="square"/>
           <a:lstStyle/>
           <a:p>
             <a:pPr algn="l"/>
             <a:r>
-              <a:rPr sz="1600" b="0" i="1">
+              <a:rPr sz="1500" b="0">
                 <a:solidFill>
                   <a:srgbClr val="993322"/>
                 </a:solidFill>
               </a:rPr>
-              <a:t>gradle/ was gitignored -- build broken</a:t>
+              <a:t>Pure functions with explicit isCelsius param</a:t>
             </a:r>
           </a:p>
         </p:txBody>
@@ -4033,19 +4007,17 @@
           <a:noFill/>
         </p:spPr>
         <p:txBody>
-          <a:bodyPr wrap="square">
-            <a:spAutoFit/>
-          </a:bodyPr>
+          <a:bodyPr wrap="square"/>
           <a:lstStyle/>
           <a:p>
             <a:pPr algn="l"/>
             <a:r>
-              <a:rPr sz="1600" b="0" i="0">
+              <a:rPr sz="1300" b="0">
                 <a:solidFill>
                   <a:srgbClr val="222233"/>
                 </a:solidFill>
               </a:rPr>
-              <a:t>Fixed .gitignore, recreated libs.versions.toml</a:t>
+              <a:t>convertTemp(celsius, isCelsius) and formatTemp(celsius, isCelsius) now take isCelsius as an explicit argument. All 4 child Composables actually read the parameter -- Compose tracks it and recomposes correctly on toggle.</a:t>
             </a:r>
           </a:p>
         </p:txBody>
@@ -4155,19 +4127,17 @@
           <a:noFill/>
         </p:spPr>
         <p:txBody>
-          <a:bodyPr wrap="square">
-            <a:spAutoFit/>
-          </a:bodyPr>
+          <a:bodyPr wrap="square"/>
           <a:lstStyle/>
           <a:p>
             <a:pPr algn="l"/>
             <a:r>
-              <a:rPr sz="1700" b="1" i="0">
+              <a:rPr sz="1700" b="1">
                 <a:solidFill>
                   <a:srgbClr val="1C3557"/>
                 </a:solidFill>
               </a:rPr>
-              <a:t>State management</a:t>
+              <a:t>Bonus Fix</a:t>
             </a:r>
           </a:p>
         </p:txBody>
@@ -4189,19 +4159,17 @@
           <a:noFill/>
         </p:spPr>
         <p:txBody>
-          <a:bodyPr wrap="square">
-            <a:spAutoFit/>
-          </a:bodyPr>
+          <a:bodyPr wrap="square"/>
           <a:lstStyle/>
           <a:p>
             <a:pPr algn="l"/>
             <a:r>
-              <a:rPr sz="1600" b="0" i="1">
+              <a:rPr sz="1500" b="0">
                 <a:solidFill>
                   <a:srgbClr val="993322"/>
                 </a:solidFill>
               </a:rPr>
-              <a:t>No @EnvironmentObject in Compose</a:t>
+              <a:t>Unit label added to temperature output</a:t>
             </a:r>
           </a:p>
         </p:txBody>
@@ -4223,19 +4191,17 @@
           <a:noFill/>
         </p:spPr>
         <p:txBody>
-          <a:bodyPr wrap="square">
-            <a:spAutoFit/>
-          </a:bodyPr>
+          <a:bodyPr wrap="square"/>
           <a:lstStyle/>
           <a:p>
             <a:pPr algn="l"/>
             <a:r>
-              <a:rPr sz="1600" b="0" i="0">
+              <a:rPr sz="1300" b="0">
                 <a:solidFill>
                   <a:srgbClr val="222233"/>
                 </a:solidFill>
               </a:rPr>
-              <a:t>ViewModel + StateFlow + collectAsState()</a:t>
+              <a:t>formatTemp() previously returned "22°" with no C or F suffix, making it impossible to confirm which unit was active. Now returns "22°C" or "72°F" so the toggle is visually verifiable.</a:t>
             </a:r>
           </a:p>
         </p:txBody>
@@ -4249,7 +4215,7 @@
 </file>
 
 <file path=ppt/slides/slide11.xml><?xml version="1.0" encoding="utf-8"?>
-<p:sld xmlns:a="http://schemas.openxmlformats.org/drawingml/2006/main" xmlns:r="http://schemas.openxmlformats.org/officeDocument/2006/relationships" xmlns:p="http://schemas.openxmlformats.org/presentationml/2006/main">
+<p:sld xmlns:a="http://schemas.openxmlformats.org/drawingml/2006/main" xmlns:r="http://schemas.openxmlformats.org/officeDocument/2006/relationships" xmlns:p="http://schemas.openxmlformats.org/presentationml/2006/main" show="0">
   <p:cSld>
     <p:bg>
       <p:bgPr>
@@ -5086,7 +5052,7 @@
                   <a:srgbClr val="FFFFFF"/>
                 </a:solidFill>
               </a:rPr>
-              <a:t>Results &amp; Conclusion</a:t>
+              <a:t>Key Challenges</a:t>
             </a:r>
           </a:p>
         </p:txBody>
@@ -5099,571 +5065,8 @@
         </p:nvSpPr>
         <p:spPr>
           <a:xfrm>
-            <a:off x="347472" y="1170432"/>
-            <a:ext cx="2103120" cy="1554480"/>
-          </a:xfrm>
-          <a:prstGeom prst="rect">
-            <a:avLst/>
-          </a:prstGeom>
-          <a:solidFill>
-            <a:srgbClr val="1C3557"/>
-          </a:solidFill>
-          <a:ln>
-            <a:noFill/>
-          </a:ln>
-        </p:spPr>
-        <p:style>
-          <a:lnRef idx="1">
-            <a:schemeClr val="accent1"/>
-          </a:lnRef>
-          <a:fillRef idx="3">
-            <a:schemeClr val="accent1"/>
-          </a:fillRef>
-          <a:effectRef idx="2">
-            <a:schemeClr val="accent1"/>
-          </a:effectRef>
-          <a:fontRef idx="minor">
-            <a:schemeClr val="lt1"/>
-          </a:fontRef>
-        </p:style>
-        <p:txBody>
-          <a:bodyPr rtlCol="0" anchor="ctr"/>
-          <a:lstStyle/>
-          <a:p>
-            <a:pPr algn="ctr"/>
-            <a:endParaRPr/>
-          </a:p>
-        </p:txBody>
-      </p:sp>
-      <p:sp>
-        <p:nvSpPr>
-          <p:cNvPr id="5" name="TextBox 4"/>
-          <p:cNvSpPr txBox="1"/>
-          <p:nvPr/>
-        </p:nvSpPr>
-        <p:spPr>
-          <a:xfrm>
-            <a:off x="347472" y="1216152"/>
-            <a:ext cx="2103120" cy="804672"/>
-          </a:xfrm>
-          <a:prstGeom prst="rect">
-            <a:avLst/>
-          </a:prstGeom>
-          <a:noFill/>
-        </p:spPr>
-        <p:txBody>
-          <a:bodyPr wrap="square">
-            <a:spAutoFit/>
-          </a:bodyPr>
-          <a:lstStyle/>
-          <a:p>
-            <a:pPr algn="ctr"/>
-            <a:r>
-              <a:rPr sz="4000" b="1" i="0">
-                <a:solidFill>
-                  <a:srgbClr val="4A90E2"/>
-                </a:solidFill>
-              </a:rPr>
-              <a:t>10+</a:t>
-            </a:r>
-          </a:p>
-        </p:txBody>
-      </p:sp>
-      <p:sp>
-        <p:nvSpPr>
-          <p:cNvPr id="6" name="TextBox 5"/>
-          <p:cNvSpPr txBox="1"/>
-          <p:nvPr/>
-        </p:nvSpPr>
-        <p:spPr>
-          <a:xfrm>
-            <a:off x="347472" y="1993392"/>
-            <a:ext cx="2103120" cy="658368"/>
-          </a:xfrm>
-          <a:prstGeom prst="rect">
-            <a:avLst/>
-          </a:prstGeom>
-          <a:noFill/>
-        </p:spPr>
-        <p:txBody>
-          <a:bodyPr wrap="square">
-            <a:spAutoFit/>
-          </a:bodyPr>
-          <a:lstStyle/>
-          <a:p>
-            <a:pPr algn="ctr"/>
-            <a:r>
-              <a:rPr sz="1400" b="0" i="0">
-                <a:solidFill>
-                  <a:srgbClr val="FFFFFF"/>
-                </a:solidFill>
-              </a:rPr>
-              <a:t>Swift files
-analysed</a:t>
-            </a:r>
-          </a:p>
-        </p:txBody>
-      </p:sp>
-      <p:sp>
-        <p:nvSpPr>
-          <p:cNvPr id="7" name="Rectangle 6"/>
-          <p:cNvSpPr/>
-          <p:nvPr/>
-        </p:nvSpPr>
-        <p:spPr>
-          <a:xfrm>
-            <a:off x="2615184" y="1170432"/>
-            <a:ext cx="2103120" cy="1554480"/>
-          </a:xfrm>
-          <a:prstGeom prst="rect">
-            <a:avLst/>
-          </a:prstGeom>
-          <a:solidFill>
-            <a:srgbClr val="1C3557"/>
-          </a:solidFill>
-          <a:ln>
-            <a:noFill/>
-          </a:ln>
-        </p:spPr>
-        <p:style>
-          <a:lnRef idx="1">
-            <a:schemeClr val="accent1"/>
-          </a:lnRef>
-          <a:fillRef idx="3">
-            <a:schemeClr val="accent1"/>
-          </a:fillRef>
-          <a:effectRef idx="2">
-            <a:schemeClr val="accent1"/>
-          </a:effectRef>
-          <a:fontRef idx="minor">
-            <a:schemeClr val="lt1"/>
-          </a:fontRef>
-        </p:style>
-        <p:txBody>
-          <a:bodyPr rtlCol="0" anchor="ctr"/>
-          <a:lstStyle/>
-          <a:p>
-            <a:pPr algn="ctr"/>
-            <a:endParaRPr/>
-          </a:p>
-        </p:txBody>
-      </p:sp>
-      <p:sp>
-        <p:nvSpPr>
-          <p:cNvPr id="8" name="TextBox 7"/>
-          <p:cNvSpPr txBox="1"/>
-          <p:nvPr/>
-        </p:nvSpPr>
-        <p:spPr>
-          <a:xfrm>
-            <a:off x="2615184" y="1216152"/>
-            <a:ext cx="2103120" cy="804672"/>
-          </a:xfrm>
-          <a:prstGeom prst="rect">
-            <a:avLst/>
-          </a:prstGeom>
-          <a:noFill/>
-        </p:spPr>
-        <p:txBody>
-          <a:bodyPr wrap="square">
-            <a:spAutoFit/>
-          </a:bodyPr>
-          <a:lstStyle/>
-          <a:p>
-            <a:pPr algn="ctr"/>
-            <a:r>
-              <a:rPr sz="4000" b="1" i="0">
-                <a:solidFill>
-                  <a:srgbClr val="4A90E2"/>
-                </a:solidFill>
-              </a:rPr>
-              <a:t>13</a:t>
-            </a:r>
-          </a:p>
-        </p:txBody>
-      </p:sp>
-      <p:sp>
-        <p:nvSpPr>
-          <p:cNvPr id="9" name="TextBox 8"/>
-          <p:cNvSpPr txBox="1"/>
-          <p:nvPr/>
-        </p:nvSpPr>
-        <p:spPr>
-          <a:xfrm>
-            <a:off x="2615184" y="1993392"/>
-            <a:ext cx="2103120" cy="658368"/>
-          </a:xfrm>
-          <a:prstGeom prst="rect">
-            <a:avLst/>
-          </a:prstGeom>
-          <a:noFill/>
-        </p:spPr>
-        <p:txBody>
-          <a:bodyPr wrap="square">
-            <a:spAutoFit/>
-          </a:bodyPr>
-          <a:lstStyle/>
-          <a:p>
-            <a:pPr algn="ctr"/>
-            <a:r>
-              <a:rPr sz="1400" b="0" i="0">
-                <a:solidFill>
-                  <a:srgbClr val="FFFFFF"/>
-                </a:solidFill>
-              </a:rPr>
-              <a:t>Kotlin files
-created</a:t>
-            </a:r>
-          </a:p>
-        </p:txBody>
-      </p:sp>
-      <p:sp>
-        <p:nvSpPr>
-          <p:cNvPr id="10" name="Rectangle 9"/>
-          <p:cNvSpPr/>
-          <p:nvPr/>
-        </p:nvSpPr>
-        <p:spPr>
-          <a:xfrm>
-            <a:off x="4882896" y="1170432"/>
-            <a:ext cx="2103120" cy="1554480"/>
-          </a:xfrm>
-          <a:prstGeom prst="rect">
-            <a:avLst/>
-          </a:prstGeom>
-          <a:solidFill>
-            <a:srgbClr val="1C3557"/>
-          </a:solidFill>
-          <a:ln>
-            <a:noFill/>
-          </a:ln>
-        </p:spPr>
-        <p:style>
-          <a:lnRef idx="1">
-            <a:schemeClr val="accent1"/>
-          </a:lnRef>
-          <a:fillRef idx="3">
-            <a:schemeClr val="accent1"/>
-          </a:fillRef>
-          <a:effectRef idx="2">
-            <a:schemeClr val="accent1"/>
-          </a:effectRef>
-          <a:fontRef idx="minor">
-            <a:schemeClr val="lt1"/>
-          </a:fontRef>
-        </p:style>
-        <p:txBody>
-          <a:bodyPr rtlCol="0" anchor="ctr"/>
-          <a:lstStyle/>
-          <a:p>
-            <a:pPr algn="ctr"/>
-            <a:endParaRPr/>
-          </a:p>
-        </p:txBody>
-      </p:sp>
-      <p:sp>
-        <p:nvSpPr>
-          <p:cNvPr id="11" name="TextBox 10"/>
-          <p:cNvSpPr txBox="1"/>
-          <p:nvPr/>
-        </p:nvSpPr>
-        <p:spPr>
-          <a:xfrm>
-            <a:off x="4882896" y="1216152"/>
-            <a:ext cx="2103120" cy="804672"/>
-          </a:xfrm>
-          <a:prstGeom prst="rect">
-            <a:avLst/>
-          </a:prstGeom>
-          <a:noFill/>
-        </p:spPr>
-        <p:txBody>
-          <a:bodyPr wrap="square">
-            <a:spAutoFit/>
-          </a:bodyPr>
-          <a:lstStyle/>
-          <a:p>
-            <a:pPr algn="ctr"/>
-            <a:r>
-              <a:rPr sz="4000" b="1" i="0">
-                <a:solidFill>
-                  <a:srgbClr val="4A90E2"/>
-                </a:solidFill>
-              </a:rPr>
-              <a:t>~95%</a:t>
-            </a:r>
-          </a:p>
-        </p:txBody>
-      </p:sp>
-      <p:sp>
-        <p:nvSpPr>
-          <p:cNvPr id="12" name="TextBox 11"/>
-          <p:cNvSpPr txBox="1"/>
-          <p:nvPr/>
-        </p:nvSpPr>
-        <p:spPr>
-          <a:xfrm>
-            <a:off x="4882896" y="1993392"/>
-            <a:ext cx="2103120" cy="658368"/>
-          </a:xfrm>
-          <a:prstGeom prst="rect">
-            <a:avLst/>
-          </a:prstGeom>
-          <a:noFill/>
-        </p:spPr>
-        <p:txBody>
-          <a:bodyPr wrap="square">
-            <a:spAutoFit/>
-          </a:bodyPr>
-          <a:lstStyle/>
-          <a:p>
-            <a:pPr algn="ctr"/>
-            <a:r>
-              <a:rPr sz="1400" b="0" i="0">
-                <a:solidFill>
-                  <a:srgbClr val="FFFFFF"/>
-                </a:solidFill>
-              </a:rPr>
-              <a:t>Feature parity</a:t>
-            </a:r>
-          </a:p>
-        </p:txBody>
-      </p:sp>
-      <p:sp>
-        <p:nvSpPr>
-          <p:cNvPr id="13" name="Rectangle 12"/>
-          <p:cNvSpPr/>
-          <p:nvPr/>
-        </p:nvSpPr>
-        <p:spPr>
-          <a:xfrm>
-            <a:off x="7150608" y="1170432"/>
-            <a:ext cx="2103120" cy="1554480"/>
-          </a:xfrm>
-          <a:prstGeom prst="rect">
-            <a:avLst/>
-          </a:prstGeom>
-          <a:solidFill>
-            <a:srgbClr val="1C3557"/>
-          </a:solidFill>
-          <a:ln>
-            <a:noFill/>
-          </a:ln>
-        </p:spPr>
-        <p:style>
-          <a:lnRef idx="1">
-            <a:schemeClr val="accent1"/>
-          </a:lnRef>
-          <a:fillRef idx="3">
-            <a:schemeClr val="accent1"/>
-          </a:fillRef>
-          <a:effectRef idx="2">
-            <a:schemeClr val="accent1"/>
-          </a:effectRef>
-          <a:fontRef idx="minor">
-            <a:schemeClr val="lt1"/>
-          </a:fontRef>
-        </p:style>
-        <p:txBody>
-          <a:bodyPr rtlCol="0" anchor="ctr"/>
-          <a:lstStyle/>
-          <a:p>
-            <a:pPr algn="ctr"/>
-            <a:endParaRPr/>
-          </a:p>
-        </p:txBody>
-      </p:sp>
-      <p:sp>
-        <p:nvSpPr>
-          <p:cNvPr id="14" name="TextBox 13"/>
-          <p:cNvSpPr txBox="1"/>
-          <p:nvPr/>
-        </p:nvSpPr>
-        <p:spPr>
-          <a:xfrm>
-            <a:off x="7150608" y="1216152"/>
-            <a:ext cx="2103120" cy="804672"/>
-          </a:xfrm>
-          <a:prstGeom prst="rect">
-            <a:avLst/>
-          </a:prstGeom>
-          <a:noFill/>
-        </p:spPr>
-        <p:txBody>
-          <a:bodyPr wrap="square">
-            <a:spAutoFit/>
-          </a:bodyPr>
-          <a:lstStyle/>
-          <a:p>
-            <a:pPr algn="ctr"/>
-            <a:r>
-              <a:rPr sz="4000" b="1" i="0">
-                <a:solidFill>
-                  <a:srgbClr val="4A90E2"/>
-                </a:solidFill>
-              </a:rPr>
-              <a:t>3</a:t>
-            </a:r>
-          </a:p>
-        </p:txBody>
-      </p:sp>
-      <p:sp>
-        <p:nvSpPr>
-          <p:cNvPr id="15" name="TextBox 14"/>
-          <p:cNvSpPr txBox="1"/>
-          <p:nvPr/>
-        </p:nvSpPr>
-        <p:spPr>
-          <a:xfrm>
-            <a:off x="7150608" y="1993392"/>
-            <a:ext cx="2103120" cy="658368"/>
-          </a:xfrm>
-          <a:prstGeom prst="rect">
-            <a:avLst/>
-          </a:prstGeom>
-          <a:noFill/>
-        </p:spPr>
-        <p:txBody>
-          <a:bodyPr wrap="square">
-            <a:spAutoFit/>
-          </a:bodyPr>
-          <a:lstStyle/>
-          <a:p>
-            <a:pPr algn="ctr"/>
-            <a:r>
-              <a:rPr sz="1400" b="0" i="0">
-                <a:solidFill>
-                  <a:srgbClr val="FFFFFF"/>
-                </a:solidFill>
-              </a:rPr>
-              <a:t>AI tools
-used</a:t>
-            </a:r>
-          </a:p>
-        </p:txBody>
-      </p:sp>
-      <p:sp>
-        <p:nvSpPr>
-          <p:cNvPr id="16" name="Rectangle 15"/>
-          <p:cNvSpPr/>
-          <p:nvPr/>
-        </p:nvSpPr>
-        <p:spPr>
-          <a:xfrm>
-            <a:off x="9418320" y="1170432"/>
-            <a:ext cx="2103120" cy="1554480"/>
-          </a:xfrm>
-          <a:prstGeom prst="rect">
-            <a:avLst/>
-          </a:prstGeom>
-          <a:solidFill>
-            <a:srgbClr val="1C3557"/>
-          </a:solidFill>
-          <a:ln>
-            <a:noFill/>
-          </a:ln>
-        </p:spPr>
-        <p:style>
-          <a:lnRef idx="1">
-            <a:schemeClr val="accent1"/>
-          </a:lnRef>
-          <a:fillRef idx="3">
-            <a:schemeClr val="accent1"/>
-          </a:fillRef>
-          <a:effectRef idx="2">
-            <a:schemeClr val="accent1"/>
-          </a:effectRef>
-          <a:fontRef idx="minor">
-            <a:schemeClr val="lt1"/>
-          </a:fontRef>
-        </p:style>
-        <p:txBody>
-          <a:bodyPr rtlCol="0" anchor="ctr"/>
-          <a:lstStyle/>
-          <a:p>
-            <a:pPr algn="ctr"/>
-            <a:endParaRPr/>
-          </a:p>
-        </p:txBody>
-      </p:sp>
-      <p:sp>
-        <p:nvSpPr>
-          <p:cNvPr id="17" name="TextBox 16"/>
-          <p:cNvSpPr txBox="1"/>
-          <p:nvPr/>
-        </p:nvSpPr>
-        <p:spPr>
-          <a:xfrm>
-            <a:off x="9418320" y="1216152"/>
-            <a:ext cx="2103120" cy="804672"/>
-          </a:xfrm>
-          <a:prstGeom prst="rect">
-            <a:avLst/>
-          </a:prstGeom>
-          <a:noFill/>
-        </p:spPr>
-        <p:txBody>
-          <a:bodyPr wrap="square">
-            <a:spAutoFit/>
-          </a:bodyPr>
-          <a:lstStyle/>
-          <a:p>
-            <a:pPr algn="ctr"/>
-            <a:r>
-              <a:rPr sz="4000" b="1" i="0">
-                <a:solidFill>
-                  <a:srgbClr val="4A90E2"/>
-                </a:solidFill>
-              </a:rPr>
-              <a:t>&lt;1 week</a:t>
-            </a:r>
-          </a:p>
-        </p:txBody>
-      </p:sp>
-      <p:sp>
-        <p:nvSpPr>
-          <p:cNvPr id="18" name="TextBox 17"/>
-          <p:cNvSpPr txBox="1"/>
-          <p:nvPr/>
-        </p:nvSpPr>
-        <p:spPr>
-          <a:xfrm>
-            <a:off x="9418320" y="1993392"/>
-            <a:ext cx="2103120" cy="658368"/>
-          </a:xfrm>
-          <a:prstGeom prst="rect">
-            <a:avLst/>
-          </a:prstGeom>
-          <a:noFill/>
-        </p:spPr>
-        <p:txBody>
-          <a:bodyPr wrap="square">
-            <a:spAutoFit/>
-          </a:bodyPr>
-          <a:lstStyle/>
-          <a:p>
-            <a:pPr algn="ctr"/>
-            <a:r>
-              <a:rPr sz="1400" b="0" i="0">
-                <a:solidFill>
-                  <a:srgbClr val="FFFFFF"/>
-                </a:solidFill>
-              </a:rPr>
-              <a:t>Migration time</a:t>
-            </a:r>
-          </a:p>
-        </p:txBody>
-      </p:sp>
-      <p:sp>
-        <p:nvSpPr>
-          <p:cNvPr id="19" name="Rectangle 18"/>
-          <p:cNvSpPr/>
-          <p:nvPr/>
-        </p:nvSpPr>
-        <p:spPr>
-          <a:xfrm>
-            <a:off x="320040" y="2907792"/>
-            <a:ext cx="5669280" cy="3703320"/>
+            <a:off x="274320" y="1170432"/>
+            <a:ext cx="5669280" cy="1920240"/>
           </a:xfrm>
           <a:prstGeom prst="rect">
             <a:avLst/>
@@ -5700,20 +5103,20 @@
       </p:sp>
       <p:sp>
         <p:nvSpPr>
-          <p:cNvPr id="20" name="Rectangle 19"/>
+          <p:cNvPr id="5" name="Rectangle 4"/>
           <p:cNvSpPr/>
           <p:nvPr/>
         </p:nvSpPr>
         <p:spPr>
           <a:xfrm>
-            <a:off x="320040" y="2907792"/>
-            <a:ext cx="5669280" cy="502920"/>
+            <a:off x="274320" y="1170432"/>
+            <a:ext cx="182880" cy="1920240"/>
           </a:xfrm>
           <a:prstGeom prst="rect">
             <a:avLst/>
           </a:prstGeom>
           <a:solidFill>
-            <a:srgbClr val="1C3557"/>
+            <a:srgbClr val="E86A2C"/>
           </a:solidFill>
           <a:ln>
             <a:noFill/>
@@ -5744,14 +5147,14 @@
       </p:sp>
       <p:sp>
         <p:nvSpPr>
-          <p:cNvPr id="21" name="TextBox 20"/>
+          <p:cNvPr id="6" name="TextBox 5"/>
           <p:cNvSpPr txBox="1"/>
           <p:nvPr/>
         </p:nvSpPr>
         <p:spPr>
           <a:xfrm>
-            <a:off x="320040" y="2935224"/>
-            <a:ext cx="5669280" cy="457200"/>
+            <a:off x="566928" y="1280160"/>
+            <a:ext cx="5303520" cy="384048"/>
           </a:xfrm>
           <a:prstGeom prst="rect">
             <a:avLst/>
@@ -5764,28 +5167,28 @@
           </a:bodyPr>
           <a:lstStyle/>
           <a:p>
-            <a:pPr algn="ctr"/>
-            <a:r>
-              <a:rPr sz="1900" b="1" i="0">
-                <a:solidFill>
-                  <a:srgbClr val="FFFFFF"/>
-                </a:solidFill>
-              </a:rPr>
-              <a:t>What We Learned</a:t>
-            </a:r>
-          </a:p>
-        </p:txBody>
-      </p:sp>
-      <p:sp>
-        <p:nvSpPr>
-          <p:cNvPr id="22" name="TextBox 21"/>
+            <a:pPr algn="l"/>
+            <a:r>
+              <a:rPr sz="1700" b="1" i="0">
+                <a:solidFill>
+                  <a:srgbClr val="1C3557"/>
+                </a:solidFill>
+              </a:rPr>
+              <a:t>WeatherKit not on Android</a:t>
+            </a:r>
+          </a:p>
+        </p:txBody>
+      </p:sp>
+      <p:sp>
+        <p:nvSpPr>
+          <p:cNvPr id="7" name="TextBox 6"/>
           <p:cNvSpPr txBox="1"/>
           <p:nvPr/>
         </p:nvSpPr>
         <p:spPr>
           <a:xfrm>
-            <a:off x="457200" y="3502152"/>
-            <a:ext cx="5394960" cy="2971800"/>
+            <a:off x="566928" y="1700784"/>
+            <a:ext cx="5303520" cy="457200"/>
           </a:xfrm>
           <a:prstGeom prst="rect">
             <a:avLst/>
@@ -5798,62 +5201,62 @@
           </a:bodyPr>
           <a:lstStyle/>
           <a:p>
-            <a:pPr>
-              <a:spcBef>
-                <a:spcPts val="1800"/>
-              </a:spcBef>
-            </a:pPr>
-            <a:r>
-              <a:rPr sz="2000">
+            <a:pPr algn="l"/>
+            <a:r>
+              <a:rPr sz="1600" b="0" i="1">
+                <a:solidFill>
+                  <a:srgbClr val="993322"/>
+                </a:solidFill>
+              </a:rPr>
+              <a:t>Apple-exclusive API</a:t>
+            </a:r>
+          </a:p>
+        </p:txBody>
+      </p:sp>
+      <p:sp>
+        <p:nvSpPr>
+          <p:cNvPr id="8" name="TextBox 7"/>
+          <p:cNvSpPr txBox="1"/>
+          <p:nvPr/>
+        </p:nvSpPr>
+        <p:spPr>
+          <a:xfrm>
+            <a:off x="566928" y="2194560"/>
+            <a:ext cx="5303520" cy="777240"/>
+          </a:xfrm>
+          <a:prstGeom prst="rect">
+            <a:avLst/>
+          </a:prstGeom>
+          <a:noFill/>
+        </p:spPr>
+        <p:txBody>
+          <a:bodyPr wrap="square">
+            <a:spAutoFit/>
+          </a:bodyPr>
+          <a:lstStyle/>
+          <a:p>
+            <a:pPr algn="l"/>
+            <a:r>
+              <a:rPr sz="1600" b="0" i="0">
                 <a:solidFill>
                   <a:srgbClr val="222233"/>
                 </a:solidFill>
               </a:rPr>
-              <a:t>  AI excels at translating between similar frameworks</a:t>
-            </a:r>
-          </a:p>
-          <a:p>
-            <a:pPr>
-              <a:spcBef>
-                <a:spcPts val="1800"/>
-              </a:spcBef>
-            </a:pPr>
-            <a:r>
-              <a:rPr sz="2000">
-                <a:solidFill>
-                  <a:srgbClr val="222233"/>
-                </a:solidFill>
-              </a:rPr>
-              <a:t>  Iterative prompting beats one-shot generation</a:t>
-            </a:r>
-          </a:p>
-          <a:p>
-            <a:pPr>
-              <a:spcBef>
-                <a:spcPts val="1800"/>
-              </a:spcBef>
-            </a:pPr>
-            <a:r>
-              <a:rPr sz="2000">
-                <a:solidFill>
-                  <a:srgbClr val="222233"/>
-                </a:solidFill>
-              </a:rPr>
-              <a:t>  Human oversight is still essential for config &amp; APIs</a:t>
-            </a:r>
-          </a:p>
-        </p:txBody>
-      </p:sp>
-      <p:sp>
-        <p:nvSpPr>
-          <p:cNvPr id="23" name="Rectangle 22"/>
+              <a:t>Used OpenWeatherMap REST API instead</a:t>
+            </a:r>
+          </a:p>
+        </p:txBody>
+      </p:sp>
+      <p:sp>
+        <p:nvSpPr>
+          <p:cNvPr id="9" name="Rectangle 8"/>
           <p:cNvSpPr/>
           <p:nvPr/>
         </p:nvSpPr>
         <p:spPr>
           <a:xfrm>
-            <a:off x="6281928" y="2907792"/>
-            <a:ext cx="5669280" cy="3703320"/>
+            <a:off x="6382512" y="1170432"/>
+            <a:ext cx="5669280" cy="1920240"/>
           </a:xfrm>
           <a:prstGeom prst="rect">
             <a:avLst/>
@@ -5890,20 +5293,20 @@
       </p:sp>
       <p:sp>
         <p:nvSpPr>
-          <p:cNvPr id="24" name="Rectangle 23"/>
+          <p:cNvPr id="10" name="Rectangle 9"/>
           <p:cNvSpPr/>
           <p:nvPr/>
         </p:nvSpPr>
         <p:spPr>
           <a:xfrm>
-            <a:off x="6281928" y="2907792"/>
-            <a:ext cx="5669280" cy="502920"/>
+            <a:off x="6382512" y="1170432"/>
+            <a:ext cx="182880" cy="1920240"/>
           </a:xfrm>
           <a:prstGeom prst="rect">
             <a:avLst/>
           </a:prstGeom>
           <a:solidFill>
-            <a:srgbClr val="147A3A"/>
+            <a:srgbClr val="4A90E2"/>
           </a:solidFill>
           <a:ln>
             <a:noFill/>
@@ -5934,14 +5337,14 @@
       </p:sp>
       <p:sp>
         <p:nvSpPr>
-          <p:cNvPr id="25" name="TextBox 24"/>
+          <p:cNvPr id="11" name="TextBox 10"/>
           <p:cNvSpPr txBox="1"/>
           <p:nvPr/>
         </p:nvSpPr>
         <p:spPr>
           <a:xfrm>
-            <a:off x="6281928" y="2935224"/>
-            <a:ext cx="5669280" cy="457200"/>
+            <a:off x="6675120" y="1280160"/>
+            <a:ext cx="5303520" cy="384048"/>
           </a:xfrm>
           <a:prstGeom prst="rect">
             <a:avLst/>
@@ -5954,28 +5357,28 @@
           </a:bodyPr>
           <a:lstStyle/>
           <a:p>
-            <a:pPr algn="ctr"/>
-            <a:r>
-              <a:rPr sz="1900" b="1" i="0">
-                <a:solidFill>
-                  <a:srgbClr val="FFFFFF"/>
-                </a:solidFill>
-              </a:rPr>
-              <a:t>Verdict</a:t>
-            </a:r>
-          </a:p>
-        </p:txBody>
-      </p:sp>
-      <p:sp>
-        <p:nvSpPr>
-          <p:cNvPr id="26" name="TextBox 25"/>
+            <a:pPr algn="l"/>
+            <a:r>
+              <a:rPr sz="1700" b="1" i="0">
+                <a:solidFill>
+                  <a:srgbClr val="1C3557"/>
+                </a:solidFill>
+              </a:rPr>
+              <a:t>Sidebar navigation</a:t>
+            </a:r>
+          </a:p>
+        </p:txBody>
+      </p:sp>
+      <p:sp>
+        <p:nvSpPr>
+          <p:cNvPr id="12" name="TextBox 11"/>
           <p:cNvSpPr txBox="1"/>
           <p:nvPr/>
         </p:nvSpPr>
         <p:spPr>
           <a:xfrm>
-            <a:off x="6419088" y="3502152"/>
-            <a:ext cx="5394960" cy="2971800"/>
+            <a:off x="6675120" y="1700784"/>
+            <a:ext cx="5303520" cy="457200"/>
           </a:xfrm>
           <a:prstGeom prst="rect">
             <a:avLst/>
@@ -5988,48 +5391,428 @@
           </a:bodyPr>
           <a:lstStyle/>
           <a:p>
-            <a:pPr>
-              <a:spcBef>
-                <a:spcPts val="1800"/>
-              </a:spcBef>
-            </a:pPr>
-            <a:r>
-              <a:rPr sz="2000">
+            <a:pPr algn="l"/>
+            <a:r>
+              <a:rPr sz="1600" b="0" i="1">
+                <a:solidFill>
+                  <a:srgbClr val="993322"/>
+                </a:solidFill>
+              </a:rPr>
+              <a:t>No native drawer equivalent on Android</a:t>
+            </a:r>
+          </a:p>
+        </p:txBody>
+      </p:sp>
+      <p:sp>
+        <p:nvSpPr>
+          <p:cNvPr id="13" name="TextBox 12"/>
+          <p:cNvSpPr txBox="1"/>
+          <p:nvPr/>
+        </p:nvSpPr>
+        <p:spPr>
+          <a:xfrm>
+            <a:off x="6675120" y="2194560"/>
+            <a:ext cx="5303520" cy="777240"/>
+          </a:xfrm>
+          <a:prstGeom prst="rect">
+            <a:avLst/>
+          </a:prstGeom>
+          <a:noFill/>
+        </p:spPr>
+        <p:txBody>
+          <a:bodyPr wrap="square">
+            <a:spAutoFit/>
+          </a:bodyPr>
+          <a:lstStyle/>
+          <a:p>
+            <a:pPr algn="l"/>
+            <a:r>
+              <a:rPr sz="1600" b="0" i="0">
                 <a:solidFill>
                   <a:srgbClr val="222233"/>
                 </a:solidFill>
               </a:rPr>
-              <a:t>  AI made this migration feasible in under a week</a:t>
-            </a:r>
-          </a:p>
-          <a:p>
-            <a:pPr>
-              <a:spcBef>
-                <a:spcPts val="1800"/>
-              </a:spcBef>
-            </a:pPr>
-            <a:r>
-              <a:rPr sz="2000">
+              <a:t>Left sidebar --&gt; search dialog   /   Right --&gt; BottomSheet</a:t>
+            </a:r>
+          </a:p>
+        </p:txBody>
+      </p:sp>
+      <p:sp>
+        <p:nvSpPr>
+          <p:cNvPr id="14" name="Rectangle 13"/>
+          <p:cNvSpPr/>
+          <p:nvPr/>
+        </p:nvSpPr>
+        <p:spPr>
+          <a:xfrm>
+            <a:off x="274320" y="3200400"/>
+            <a:ext cx="5669280" cy="1920240"/>
+          </a:xfrm>
+          <a:prstGeom prst="rect">
+            <a:avLst/>
+          </a:prstGeom>
+          <a:solidFill>
+            <a:srgbClr val="F4F6F9"/>
+          </a:solidFill>
+          <a:ln>
+            <a:noFill/>
+          </a:ln>
+        </p:spPr>
+        <p:style>
+          <a:lnRef idx="1">
+            <a:schemeClr val="accent1"/>
+          </a:lnRef>
+          <a:fillRef idx="3">
+            <a:schemeClr val="accent1"/>
+          </a:fillRef>
+          <a:effectRef idx="2">
+            <a:schemeClr val="accent1"/>
+          </a:effectRef>
+          <a:fontRef idx="minor">
+            <a:schemeClr val="lt1"/>
+          </a:fontRef>
+        </p:style>
+        <p:txBody>
+          <a:bodyPr rtlCol="0" anchor="ctr"/>
+          <a:lstStyle/>
+          <a:p>
+            <a:pPr algn="ctr"/>
+            <a:endParaRPr/>
+          </a:p>
+        </p:txBody>
+      </p:sp>
+      <p:sp>
+        <p:nvSpPr>
+          <p:cNvPr id="15" name="Rectangle 14"/>
+          <p:cNvSpPr/>
+          <p:nvPr/>
+        </p:nvSpPr>
+        <p:spPr>
+          <a:xfrm>
+            <a:off x="274320" y="3200400"/>
+            <a:ext cx="182880" cy="1920240"/>
+          </a:xfrm>
+          <a:prstGeom prst="rect">
+            <a:avLst/>
+          </a:prstGeom>
+          <a:solidFill>
+            <a:srgbClr val="8E44AD"/>
+          </a:solidFill>
+          <a:ln>
+            <a:noFill/>
+          </a:ln>
+        </p:spPr>
+        <p:style>
+          <a:lnRef idx="1">
+            <a:schemeClr val="accent1"/>
+          </a:lnRef>
+          <a:fillRef idx="3">
+            <a:schemeClr val="accent1"/>
+          </a:fillRef>
+          <a:effectRef idx="2">
+            <a:schemeClr val="accent1"/>
+          </a:effectRef>
+          <a:fontRef idx="minor">
+            <a:schemeClr val="lt1"/>
+          </a:fontRef>
+        </p:style>
+        <p:txBody>
+          <a:bodyPr rtlCol="0" anchor="ctr"/>
+          <a:lstStyle/>
+          <a:p>
+            <a:pPr algn="ctr"/>
+            <a:endParaRPr/>
+          </a:p>
+        </p:txBody>
+      </p:sp>
+      <p:sp>
+        <p:nvSpPr>
+          <p:cNvPr id="16" name="TextBox 15"/>
+          <p:cNvSpPr txBox="1"/>
+          <p:nvPr/>
+        </p:nvSpPr>
+        <p:spPr>
+          <a:xfrm>
+            <a:off x="566928" y="3310128"/>
+            <a:ext cx="5303520" cy="384048"/>
+          </a:xfrm>
+          <a:prstGeom prst="rect">
+            <a:avLst/>
+          </a:prstGeom>
+          <a:noFill/>
+        </p:spPr>
+        <p:txBody>
+          <a:bodyPr wrap="square">
+            <a:spAutoFit/>
+          </a:bodyPr>
+          <a:lstStyle/>
+          <a:p>
+            <a:pPr algn="l"/>
+            <a:r>
+              <a:rPr sz="1700" b="1" i="0">
+                <a:solidFill>
+                  <a:srgbClr val="1C3557"/>
+                </a:solidFill>
+              </a:rPr>
+              <a:t>Missing Version Catalog</a:t>
+            </a:r>
+          </a:p>
+        </p:txBody>
+      </p:sp>
+      <p:sp>
+        <p:nvSpPr>
+          <p:cNvPr id="17" name="TextBox 16"/>
+          <p:cNvSpPr txBox="1"/>
+          <p:nvPr/>
+        </p:nvSpPr>
+        <p:spPr>
+          <a:xfrm>
+            <a:off x="566928" y="3730752"/>
+            <a:ext cx="5303520" cy="457200"/>
+          </a:xfrm>
+          <a:prstGeom prst="rect">
+            <a:avLst/>
+          </a:prstGeom>
+          <a:noFill/>
+        </p:spPr>
+        <p:txBody>
+          <a:bodyPr wrap="square">
+            <a:spAutoFit/>
+          </a:bodyPr>
+          <a:lstStyle/>
+          <a:p>
+            <a:pPr algn="l"/>
+            <a:r>
+              <a:rPr sz="1600" b="0" i="1">
+                <a:solidFill>
+                  <a:srgbClr val="993322"/>
+                </a:solidFill>
+              </a:rPr>
+              <a:t>gradle/ was gitignored -- build broken</a:t>
+            </a:r>
+          </a:p>
+        </p:txBody>
+      </p:sp>
+      <p:sp>
+        <p:nvSpPr>
+          <p:cNvPr id="18" name="TextBox 17"/>
+          <p:cNvSpPr txBox="1"/>
+          <p:nvPr/>
+        </p:nvSpPr>
+        <p:spPr>
+          <a:xfrm>
+            <a:off x="566928" y="4224528"/>
+            <a:ext cx="5303520" cy="777240"/>
+          </a:xfrm>
+          <a:prstGeom prst="rect">
+            <a:avLst/>
+          </a:prstGeom>
+          <a:noFill/>
+        </p:spPr>
+        <p:txBody>
+          <a:bodyPr wrap="square">
+            <a:spAutoFit/>
+          </a:bodyPr>
+          <a:lstStyle/>
+          <a:p>
+            <a:pPr algn="l"/>
+            <a:r>
+              <a:rPr sz="1600" b="0" i="0">
                 <a:solidFill>
                   <a:srgbClr val="222233"/>
                 </a:solidFill>
               </a:rPr>
-              <a:t>  Claude produced clean, idiomatic Kotlin</a:t>
-            </a:r>
-          </a:p>
-          <a:p>
-            <a:pPr>
-              <a:spcBef>
-                <a:spcPts val="1800"/>
-              </a:spcBef>
-            </a:pPr>
-            <a:r>
-              <a:rPr sz="2000">
+              <a:t>Fixed .gitignore, recreated libs.versions.toml</a:t>
+            </a:r>
+          </a:p>
+        </p:txBody>
+      </p:sp>
+      <p:sp>
+        <p:nvSpPr>
+          <p:cNvPr id="19" name="Rectangle 18"/>
+          <p:cNvSpPr/>
+          <p:nvPr/>
+        </p:nvSpPr>
+        <p:spPr>
+          <a:xfrm>
+            <a:off x="6382512" y="3200400"/>
+            <a:ext cx="5669280" cy="1920240"/>
+          </a:xfrm>
+          <a:prstGeom prst="rect">
+            <a:avLst/>
+          </a:prstGeom>
+          <a:solidFill>
+            <a:srgbClr val="F4F6F9"/>
+          </a:solidFill>
+          <a:ln>
+            <a:noFill/>
+          </a:ln>
+        </p:spPr>
+        <p:style>
+          <a:lnRef idx="1">
+            <a:schemeClr val="accent1"/>
+          </a:lnRef>
+          <a:fillRef idx="3">
+            <a:schemeClr val="accent1"/>
+          </a:fillRef>
+          <a:effectRef idx="2">
+            <a:schemeClr val="accent1"/>
+          </a:effectRef>
+          <a:fontRef idx="minor">
+            <a:schemeClr val="lt1"/>
+          </a:fontRef>
+        </p:style>
+        <p:txBody>
+          <a:bodyPr rtlCol="0" anchor="ctr"/>
+          <a:lstStyle/>
+          <a:p>
+            <a:pPr algn="ctr"/>
+            <a:endParaRPr/>
+          </a:p>
+        </p:txBody>
+      </p:sp>
+      <p:sp>
+        <p:nvSpPr>
+          <p:cNvPr id="20" name="Rectangle 19"/>
+          <p:cNvSpPr/>
+          <p:nvPr/>
+        </p:nvSpPr>
+        <p:spPr>
+          <a:xfrm>
+            <a:off x="6382512" y="3200400"/>
+            <a:ext cx="182880" cy="1920240"/>
+          </a:xfrm>
+          <a:prstGeom prst="rect">
+            <a:avLst/>
+          </a:prstGeom>
+          <a:solidFill>
+            <a:srgbClr val="3DDC84"/>
+          </a:solidFill>
+          <a:ln>
+            <a:noFill/>
+          </a:ln>
+        </p:spPr>
+        <p:style>
+          <a:lnRef idx="1">
+            <a:schemeClr val="accent1"/>
+          </a:lnRef>
+          <a:fillRef idx="3">
+            <a:schemeClr val="accent1"/>
+          </a:fillRef>
+          <a:effectRef idx="2">
+            <a:schemeClr val="accent1"/>
+          </a:effectRef>
+          <a:fontRef idx="minor">
+            <a:schemeClr val="lt1"/>
+          </a:fontRef>
+        </p:style>
+        <p:txBody>
+          <a:bodyPr rtlCol="0" anchor="ctr"/>
+          <a:lstStyle/>
+          <a:p>
+            <a:pPr algn="ctr"/>
+            <a:endParaRPr/>
+          </a:p>
+        </p:txBody>
+      </p:sp>
+      <p:sp>
+        <p:nvSpPr>
+          <p:cNvPr id="21" name="TextBox 20"/>
+          <p:cNvSpPr txBox="1"/>
+          <p:nvPr/>
+        </p:nvSpPr>
+        <p:spPr>
+          <a:xfrm>
+            <a:off x="6675120" y="3310128"/>
+            <a:ext cx="5303520" cy="384048"/>
+          </a:xfrm>
+          <a:prstGeom prst="rect">
+            <a:avLst/>
+          </a:prstGeom>
+          <a:noFill/>
+        </p:spPr>
+        <p:txBody>
+          <a:bodyPr wrap="square">
+            <a:spAutoFit/>
+          </a:bodyPr>
+          <a:lstStyle/>
+          <a:p>
+            <a:pPr algn="l"/>
+            <a:r>
+              <a:rPr sz="1700" b="1" i="0">
+                <a:solidFill>
+                  <a:srgbClr val="1C3557"/>
+                </a:solidFill>
+              </a:rPr>
+              <a:t>State management</a:t>
+            </a:r>
+          </a:p>
+        </p:txBody>
+      </p:sp>
+      <p:sp>
+        <p:nvSpPr>
+          <p:cNvPr id="22" name="TextBox 21"/>
+          <p:cNvSpPr txBox="1"/>
+          <p:nvPr/>
+        </p:nvSpPr>
+        <p:spPr>
+          <a:xfrm>
+            <a:off x="6675120" y="3730752"/>
+            <a:ext cx="5303520" cy="457200"/>
+          </a:xfrm>
+          <a:prstGeom prst="rect">
+            <a:avLst/>
+          </a:prstGeom>
+          <a:noFill/>
+        </p:spPr>
+        <p:txBody>
+          <a:bodyPr wrap="square">
+            <a:spAutoFit/>
+          </a:bodyPr>
+          <a:lstStyle/>
+          <a:p>
+            <a:pPr algn="l"/>
+            <a:r>
+              <a:rPr sz="1600" b="0" i="1">
+                <a:solidFill>
+                  <a:srgbClr val="993322"/>
+                </a:solidFill>
+              </a:rPr>
+              <a:t>No @EnvironmentObject in Compose</a:t>
+            </a:r>
+          </a:p>
+        </p:txBody>
+      </p:sp>
+      <p:sp>
+        <p:nvSpPr>
+          <p:cNvPr id="23" name="TextBox 22"/>
+          <p:cNvSpPr txBox="1"/>
+          <p:nvPr/>
+        </p:nvSpPr>
+        <p:spPr>
+          <a:xfrm>
+            <a:off x="6675120" y="4224528"/>
+            <a:ext cx="5303520" cy="777240"/>
+          </a:xfrm>
+          <a:prstGeom prst="rect">
+            <a:avLst/>
+          </a:prstGeom>
+          <a:noFill/>
+        </p:spPr>
+        <p:txBody>
+          <a:bodyPr wrap="square">
+            <a:spAutoFit/>
+          </a:bodyPr>
+          <a:lstStyle/>
+          <a:p>
+            <a:pPr algn="l"/>
+            <a:r>
+              <a:rPr sz="1600" b="0" i="0">
                 <a:solidFill>
                   <a:srgbClr val="222233"/>
                 </a:solidFill>
               </a:rPr>
-              <a:t>  Workflow: AI drafts  --  Human reviews  --  AI fixes</a:t>
+              <a:t>ViewModel + StateFlow + collectAsState()</a:t>
             </a:r>
           </a:p>
         </p:txBody>
@@ -6045,6 +5828,14 @@
 <file path=ppt/slides/slide13.xml><?xml version="1.0" encoding="utf-8"?>
 <p:sld xmlns:a="http://schemas.openxmlformats.org/drawingml/2006/main" xmlns:r="http://schemas.openxmlformats.org/officeDocument/2006/relationships" xmlns:p="http://schemas.openxmlformats.org/presentationml/2006/main">
   <p:cSld>
+    <p:bg>
+      <p:bgPr>
+        <a:solidFill>
+          <a:srgbClr val="FFFFFF"/>
+        </a:solidFill>
+        <a:effectLst/>
+      </p:bgPr>
+    </p:bg>
     <p:spTree>
       <p:nvGrpSpPr>
         <p:cNvPr id="1" name=""/>
@@ -6068,7 +5859,7 @@
         <p:spPr>
           <a:xfrm>
             <a:off x="0" y="0"/>
-            <a:ext cx="12188825" cy="1097280"/>
+            <a:ext cx="12188952" cy="1097280"/>
           </a:xfrm>
           <a:prstGeom prst="rect">
             <a:avLst/>
@@ -6120,17 +5911,19 @@
           <a:noFill/>
         </p:spPr>
         <p:txBody>
-          <a:bodyPr wrap="square"/>
+          <a:bodyPr wrap="square">
+            <a:spAutoFit/>
+          </a:bodyPr>
           <a:lstStyle/>
           <a:p>
             <a:pPr algn="l"/>
             <a:r>
-              <a:rPr sz="3200" b="1">
+              <a:rPr sz="3200" b="1" i="0">
                 <a:solidFill>
                   <a:srgbClr val="FFFFFF"/>
                 </a:solidFill>
               </a:rPr>
-              <a:t>C/F Toggle Bug  —  Analysis &amp; Fix</a:t>
+              <a:t>Results &amp; Conclusion</a:t>
             </a:r>
           </a:p>
         </p:txBody>
@@ -6143,8 +5936,584 @@
         </p:nvSpPr>
         <p:spPr>
           <a:xfrm>
-            <a:off x="274320" y="1170432"/>
-            <a:ext cx="5669280" cy="1920240"/>
+            <a:off x="347472" y="1170432"/>
+            <a:ext cx="2103120" cy="1554480"/>
+          </a:xfrm>
+          <a:prstGeom prst="rect">
+            <a:avLst/>
+          </a:prstGeom>
+          <a:solidFill>
+            <a:srgbClr val="1C3557"/>
+          </a:solidFill>
+          <a:ln>
+            <a:noFill/>
+          </a:ln>
+        </p:spPr>
+        <p:style>
+          <a:lnRef idx="1">
+            <a:schemeClr val="accent1"/>
+          </a:lnRef>
+          <a:fillRef idx="3">
+            <a:schemeClr val="accent1"/>
+          </a:fillRef>
+          <a:effectRef idx="2">
+            <a:schemeClr val="accent1"/>
+          </a:effectRef>
+          <a:fontRef idx="minor">
+            <a:schemeClr val="lt1"/>
+          </a:fontRef>
+        </p:style>
+        <p:txBody>
+          <a:bodyPr rtlCol="0" anchor="ctr"/>
+          <a:lstStyle/>
+          <a:p>
+            <a:pPr algn="ctr"/>
+            <a:endParaRPr/>
+          </a:p>
+        </p:txBody>
+      </p:sp>
+      <p:sp>
+        <p:nvSpPr>
+          <p:cNvPr id="5" name="TextBox 4"/>
+          <p:cNvSpPr txBox="1"/>
+          <p:nvPr/>
+        </p:nvSpPr>
+        <p:spPr>
+          <a:xfrm>
+            <a:off x="347472" y="1216152"/>
+            <a:ext cx="2103120" cy="804672"/>
+          </a:xfrm>
+          <a:prstGeom prst="rect">
+            <a:avLst/>
+          </a:prstGeom>
+          <a:noFill/>
+        </p:spPr>
+        <p:txBody>
+          <a:bodyPr wrap="square">
+            <a:spAutoFit/>
+          </a:bodyPr>
+          <a:lstStyle/>
+          <a:p>
+            <a:pPr algn="ctr"/>
+            <a:r>
+              <a:rPr sz="4000" b="1" i="0">
+                <a:solidFill>
+                  <a:srgbClr val="4A90E2"/>
+                </a:solidFill>
+              </a:rPr>
+              <a:t>10+</a:t>
+            </a:r>
+          </a:p>
+        </p:txBody>
+      </p:sp>
+      <p:sp>
+        <p:nvSpPr>
+          <p:cNvPr id="6" name="TextBox 5"/>
+          <p:cNvSpPr txBox="1"/>
+          <p:nvPr/>
+        </p:nvSpPr>
+        <p:spPr>
+          <a:xfrm>
+            <a:off x="347472" y="1993392"/>
+            <a:ext cx="2103120" cy="658368"/>
+          </a:xfrm>
+          <a:prstGeom prst="rect">
+            <a:avLst/>
+          </a:prstGeom>
+          <a:noFill/>
+        </p:spPr>
+        <p:txBody>
+          <a:bodyPr wrap="square">
+            <a:spAutoFit/>
+          </a:bodyPr>
+          <a:lstStyle/>
+          <a:p>
+            <a:pPr algn="ctr"/>
+            <a:r>
+              <a:rPr sz="1400" b="0" i="0">
+                <a:solidFill>
+                  <a:srgbClr val="FFFFFF"/>
+                </a:solidFill>
+              </a:rPr>
+              <a:t>Swift files
+analysed</a:t>
+            </a:r>
+          </a:p>
+        </p:txBody>
+      </p:sp>
+      <p:sp>
+        <p:nvSpPr>
+          <p:cNvPr id="7" name="Rectangle 6"/>
+          <p:cNvSpPr/>
+          <p:nvPr/>
+        </p:nvSpPr>
+        <p:spPr>
+          <a:xfrm>
+            <a:off x="2615184" y="1170432"/>
+            <a:ext cx="2103120" cy="1554480"/>
+          </a:xfrm>
+          <a:prstGeom prst="rect">
+            <a:avLst/>
+          </a:prstGeom>
+          <a:solidFill>
+            <a:srgbClr val="1C3557"/>
+          </a:solidFill>
+          <a:ln>
+            <a:noFill/>
+          </a:ln>
+        </p:spPr>
+        <p:style>
+          <a:lnRef idx="1">
+            <a:schemeClr val="accent1"/>
+          </a:lnRef>
+          <a:fillRef idx="3">
+            <a:schemeClr val="accent1"/>
+          </a:fillRef>
+          <a:effectRef idx="2">
+            <a:schemeClr val="accent1"/>
+          </a:effectRef>
+          <a:fontRef idx="minor">
+            <a:schemeClr val="lt1"/>
+          </a:fontRef>
+        </p:style>
+        <p:txBody>
+          <a:bodyPr rtlCol="0" anchor="ctr"/>
+          <a:lstStyle/>
+          <a:p>
+            <a:pPr algn="ctr"/>
+            <a:endParaRPr/>
+          </a:p>
+        </p:txBody>
+      </p:sp>
+      <p:sp>
+        <p:nvSpPr>
+          <p:cNvPr id="8" name="TextBox 7"/>
+          <p:cNvSpPr txBox="1"/>
+          <p:nvPr/>
+        </p:nvSpPr>
+        <p:spPr>
+          <a:xfrm>
+            <a:off x="2615184" y="1216152"/>
+            <a:ext cx="2103120" cy="804672"/>
+          </a:xfrm>
+          <a:prstGeom prst="rect">
+            <a:avLst/>
+          </a:prstGeom>
+          <a:noFill/>
+        </p:spPr>
+        <p:txBody>
+          <a:bodyPr wrap="square">
+            <a:spAutoFit/>
+          </a:bodyPr>
+          <a:lstStyle/>
+          <a:p>
+            <a:pPr algn="ctr"/>
+            <a:r>
+              <a:rPr sz="4000" b="1" i="0">
+                <a:solidFill>
+                  <a:srgbClr val="4A90E2"/>
+                </a:solidFill>
+              </a:rPr>
+              <a:t>13</a:t>
+            </a:r>
+          </a:p>
+        </p:txBody>
+      </p:sp>
+      <p:sp>
+        <p:nvSpPr>
+          <p:cNvPr id="9" name="TextBox 8"/>
+          <p:cNvSpPr txBox="1"/>
+          <p:nvPr/>
+        </p:nvSpPr>
+        <p:spPr>
+          <a:xfrm>
+            <a:off x="2615184" y="1993392"/>
+            <a:ext cx="2103120" cy="658368"/>
+          </a:xfrm>
+          <a:prstGeom prst="rect">
+            <a:avLst/>
+          </a:prstGeom>
+          <a:noFill/>
+        </p:spPr>
+        <p:txBody>
+          <a:bodyPr wrap="square">
+            <a:spAutoFit/>
+          </a:bodyPr>
+          <a:lstStyle/>
+          <a:p>
+            <a:pPr algn="ctr"/>
+            <a:r>
+              <a:rPr sz="1400" b="0" i="0">
+                <a:solidFill>
+                  <a:srgbClr val="FFFFFF"/>
+                </a:solidFill>
+              </a:rPr>
+              <a:t>Kotlin files
+created</a:t>
+            </a:r>
+          </a:p>
+        </p:txBody>
+      </p:sp>
+      <p:sp>
+        <p:nvSpPr>
+          <p:cNvPr id="10" name="Rectangle 9"/>
+          <p:cNvSpPr/>
+          <p:nvPr/>
+        </p:nvSpPr>
+        <p:spPr>
+          <a:xfrm>
+            <a:off x="4882896" y="1170432"/>
+            <a:ext cx="2103120" cy="1554480"/>
+          </a:xfrm>
+          <a:prstGeom prst="rect">
+            <a:avLst/>
+          </a:prstGeom>
+          <a:solidFill>
+            <a:srgbClr val="1C3557"/>
+          </a:solidFill>
+          <a:ln>
+            <a:noFill/>
+          </a:ln>
+        </p:spPr>
+        <p:style>
+          <a:lnRef idx="1">
+            <a:schemeClr val="accent1"/>
+          </a:lnRef>
+          <a:fillRef idx="3">
+            <a:schemeClr val="accent1"/>
+          </a:fillRef>
+          <a:effectRef idx="2">
+            <a:schemeClr val="accent1"/>
+          </a:effectRef>
+          <a:fontRef idx="minor">
+            <a:schemeClr val="lt1"/>
+          </a:fontRef>
+        </p:style>
+        <p:txBody>
+          <a:bodyPr rtlCol="0" anchor="ctr"/>
+          <a:lstStyle/>
+          <a:p>
+            <a:pPr algn="ctr"/>
+            <a:endParaRPr/>
+          </a:p>
+        </p:txBody>
+      </p:sp>
+      <p:sp>
+        <p:nvSpPr>
+          <p:cNvPr id="11" name="TextBox 10"/>
+          <p:cNvSpPr txBox="1"/>
+          <p:nvPr/>
+        </p:nvSpPr>
+        <p:spPr>
+          <a:xfrm>
+            <a:off x="4882896" y="1216152"/>
+            <a:ext cx="2103120" cy="804672"/>
+          </a:xfrm>
+          <a:prstGeom prst="rect">
+            <a:avLst/>
+          </a:prstGeom>
+          <a:noFill/>
+        </p:spPr>
+        <p:txBody>
+          <a:bodyPr wrap="square">
+            <a:spAutoFit/>
+          </a:bodyPr>
+          <a:lstStyle/>
+          <a:p>
+            <a:pPr algn="ctr"/>
+            <a:r>
+              <a:rPr sz="4000" b="1" i="0">
+                <a:solidFill>
+                  <a:srgbClr val="4A90E2"/>
+                </a:solidFill>
+              </a:rPr>
+              <a:t>~95%</a:t>
+            </a:r>
+          </a:p>
+        </p:txBody>
+      </p:sp>
+      <p:sp>
+        <p:nvSpPr>
+          <p:cNvPr id="12" name="TextBox 11"/>
+          <p:cNvSpPr txBox="1"/>
+          <p:nvPr/>
+        </p:nvSpPr>
+        <p:spPr>
+          <a:xfrm>
+            <a:off x="4882896" y="1993392"/>
+            <a:ext cx="2103120" cy="658368"/>
+          </a:xfrm>
+          <a:prstGeom prst="rect">
+            <a:avLst/>
+          </a:prstGeom>
+          <a:noFill/>
+        </p:spPr>
+        <p:txBody>
+          <a:bodyPr wrap="square">
+            <a:spAutoFit/>
+          </a:bodyPr>
+          <a:lstStyle/>
+          <a:p>
+            <a:pPr algn="ctr"/>
+            <a:r>
+              <a:rPr sz="1400" b="0" i="0">
+                <a:solidFill>
+                  <a:srgbClr val="FFFFFF"/>
+                </a:solidFill>
+              </a:rPr>
+              <a:t>Feature parity</a:t>
+            </a:r>
+          </a:p>
+        </p:txBody>
+      </p:sp>
+      <p:sp>
+        <p:nvSpPr>
+          <p:cNvPr id="13" name="Rectangle 12"/>
+          <p:cNvSpPr/>
+          <p:nvPr/>
+        </p:nvSpPr>
+        <p:spPr>
+          <a:xfrm>
+            <a:off x="7150608" y="1170432"/>
+            <a:ext cx="2103120" cy="1554480"/>
+          </a:xfrm>
+          <a:prstGeom prst="rect">
+            <a:avLst/>
+          </a:prstGeom>
+          <a:solidFill>
+            <a:srgbClr val="1C3557"/>
+          </a:solidFill>
+          <a:ln>
+            <a:noFill/>
+          </a:ln>
+        </p:spPr>
+        <p:style>
+          <a:lnRef idx="1">
+            <a:schemeClr val="accent1"/>
+          </a:lnRef>
+          <a:fillRef idx="3">
+            <a:schemeClr val="accent1"/>
+          </a:fillRef>
+          <a:effectRef idx="2">
+            <a:schemeClr val="accent1"/>
+          </a:effectRef>
+          <a:fontRef idx="minor">
+            <a:schemeClr val="lt1"/>
+          </a:fontRef>
+        </p:style>
+        <p:txBody>
+          <a:bodyPr rtlCol="0" anchor="ctr"/>
+          <a:lstStyle/>
+          <a:p>
+            <a:pPr algn="ctr"/>
+            <a:endParaRPr/>
+          </a:p>
+        </p:txBody>
+      </p:sp>
+      <p:sp>
+        <p:nvSpPr>
+          <p:cNvPr id="14" name="TextBox 13"/>
+          <p:cNvSpPr txBox="1"/>
+          <p:nvPr/>
+        </p:nvSpPr>
+        <p:spPr>
+          <a:xfrm>
+            <a:off x="7150608" y="1216152"/>
+            <a:ext cx="2103120" cy="707886"/>
+          </a:xfrm>
+          <a:prstGeom prst="rect">
+            <a:avLst/>
+          </a:prstGeom>
+          <a:noFill/>
+        </p:spPr>
+        <p:txBody>
+          <a:bodyPr wrap="square">
+            <a:spAutoFit/>
+          </a:bodyPr>
+          <a:lstStyle/>
+          <a:p>
+            <a:pPr algn="ctr"/>
+            <a:r>
+              <a:rPr lang="de-DE" sz="4000" b="1" dirty="0">
+                <a:solidFill>
+                  <a:srgbClr val="4A90E2"/>
+                </a:solidFill>
+              </a:rPr>
+              <a:t>&gt;400k</a:t>
+            </a:r>
+            <a:endParaRPr sz="4000" b="1" i="0" dirty="0">
+              <a:solidFill>
+                <a:srgbClr val="4A90E2"/>
+              </a:solidFill>
+            </a:endParaRPr>
+          </a:p>
+        </p:txBody>
+      </p:sp>
+      <p:sp>
+        <p:nvSpPr>
+          <p:cNvPr id="15" name="TextBox 14"/>
+          <p:cNvSpPr txBox="1"/>
+          <p:nvPr/>
+        </p:nvSpPr>
+        <p:spPr>
+          <a:xfrm>
+            <a:off x="7150608" y="1993392"/>
+            <a:ext cx="2103120" cy="523220"/>
+          </a:xfrm>
+          <a:prstGeom prst="rect">
+            <a:avLst/>
+          </a:prstGeom>
+          <a:noFill/>
+        </p:spPr>
+        <p:txBody>
+          <a:bodyPr wrap="square">
+            <a:spAutoFit/>
+          </a:bodyPr>
+          <a:lstStyle/>
+          <a:p>
+            <a:pPr algn="ctr"/>
+            <a:r>
+              <a:rPr lang="de-DE" sz="1400" b="0" i="0" dirty="0" err="1">
+                <a:solidFill>
+                  <a:srgbClr val="FFFFFF"/>
+                </a:solidFill>
+              </a:rPr>
+              <a:t>tokens</a:t>
+            </a:r>
+            <a:r>
+              <a:rPr sz="1400" b="0" i="0" dirty="0">
+                <a:solidFill>
+                  <a:srgbClr val="FFFFFF"/>
+                </a:solidFill>
+              </a:rPr>
+              <a:t>
+used</a:t>
+            </a:r>
+          </a:p>
+        </p:txBody>
+      </p:sp>
+      <p:sp>
+        <p:nvSpPr>
+          <p:cNvPr id="16" name="Rectangle 15"/>
+          <p:cNvSpPr/>
+          <p:nvPr/>
+        </p:nvSpPr>
+        <p:spPr>
+          <a:xfrm>
+            <a:off x="9418320" y="1170432"/>
+            <a:ext cx="2103120" cy="1554480"/>
+          </a:xfrm>
+          <a:prstGeom prst="rect">
+            <a:avLst/>
+          </a:prstGeom>
+          <a:solidFill>
+            <a:srgbClr val="1C3557"/>
+          </a:solidFill>
+          <a:ln>
+            <a:noFill/>
+          </a:ln>
+        </p:spPr>
+        <p:style>
+          <a:lnRef idx="1">
+            <a:schemeClr val="accent1"/>
+          </a:lnRef>
+          <a:fillRef idx="3">
+            <a:schemeClr val="accent1"/>
+          </a:fillRef>
+          <a:effectRef idx="2">
+            <a:schemeClr val="accent1"/>
+          </a:effectRef>
+          <a:fontRef idx="minor">
+            <a:schemeClr val="lt1"/>
+          </a:fontRef>
+        </p:style>
+        <p:txBody>
+          <a:bodyPr rtlCol="0" anchor="ctr"/>
+          <a:lstStyle/>
+          <a:p>
+            <a:pPr algn="ctr"/>
+            <a:endParaRPr/>
+          </a:p>
+        </p:txBody>
+      </p:sp>
+      <p:sp>
+        <p:nvSpPr>
+          <p:cNvPr id="17" name="TextBox 16"/>
+          <p:cNvSpPr txBox="1"/>
+          <p:nvPr/>
+        </p:nvSpPr>
+        <p:spPr>
+          <a:xfrm>
+            <a:off x="9418320" y="1216152"/>
+            <a:ext cx="2103120" cy="804672"/>
+          </a:xfrm>
+          <a:prstGeom prst="rect">
+            <a:avLst/>
+          </a:prstGeom>
+          <a:noFill/>
+        </p:spPr>
+        <p:txBody>
+          <a:bodyPr wrap="square">
+            <a:spAutoFit/>
+          </a:bodyPr>
+          <a:lstStyle/>
+          <a:p>
+            <a:pPr algn="ctr"/>
+            <a:r>
+              <a:rPr sz="4000" b="1" i="0" dirty="0">
+                <a:solidFill>
+                  <a:srgbClr val="4A90E2"/>
+                </a:solidFill>
+              </a:rPr>
+              <a:t>&lt;1 week</a:t>
+            </a:r>
+          </a:p>
+        </p:txBody>
+      </p:sp>
+      <p:sp>
+        <p:nvSpPr>
+          <p:cNvPr id="18" name="TextBox 17"/>
+          <p:cNvSpPr txBox="1"/>
+          <p:nvPr/>
+        </p:nvSpPr>
+        <p:spPr>
+          <a:xfrm>
+            <a:off x="9418320" y="1993392"/>
+            <a:ext cx="2103120" cy="658368"/>
+          </a:xfrm>
+          <a:prstGeom prst="rect">
+            <a:avLst/>
+          </a:prstGeom>
+          <a:noFill/>
+        </p:spPr>
+        <p:txBody>
+          <a:bodyPr wrap="square">
+            <a:spAutoFit/>
+          </a:bodyPr>
+          <a:lstStyle/>
+          <a:p>
+            <a:pPr algn="ctr"/>
+            <a:r>
+              <a:rPr sz="1400" b="0" i="0">
+                <a:solidFill>
+                  <a:srgbClr val="FFFFFF"/>
+                </a:solidFill>
+              </a:rPr>
+              <a:t>Migration time</a:t>
+            </a:r>
+          </a:p>
+        </p:txBody>
+      </p:sp>
+      <p:sp>
+        <p:nvSpPr>
+          <p:cNvPr id="19" name="Rectangle 18"/>
+          <p:cNvSpPr/>
+          <p:nvPr/>
+        </p:nvSpPr>
+        <p:spPr>
+          <a:xfrm>
+            <a:off x="320040" y="2907792"/>
+            <a:ext cx="5669280" cy="3703320"/>
           </a:xfrm>
           <a:prstGeom prst="rect">
             <a:avLst/>
@@ -6181,20 +6550,20 @@
       </p:sp>
       <p:sp>
         <p:nvSpPr>
-          <p:cNvPr id="5" name="Rectangle 4"/>
+          <p:cNvPr id="20" name="Rectangle 19"/>
           <p:cNvSpPr/>
           <p:nvPr/>
         </p:nvSpPr>
         <p:spPr>
           <a:xfrm>
-            <a:off x="274320" y="1170432"/>
-            <a:ext cx="182880" cy="1920240"/>
+            <a:off x="320040" y="2907792"/>
+            <a:ext cx="5669280" cy="502920"/>
           </a:xfrm>
           <a:prstGeom prst="rect">
             <a:avLst/>
           </a:prstGeom>
           <a:solidFill>
-            <a:srgbClr val="E86A2C"/>
+            <a:srgbClr val="1C3557"/>
           </a:solidFill>
           <a:ln>
             <a:noFill/>
@@ -6225,14 +6594,14 @@
       </p:sp>
       <p:sp>
         <p:nvSpPr>
-          <p:cNvPr id="6" name="TextBox 5"/>
+          <p:cNvPr id="21" name="TextBox 20"/>
           <p:cNvSpPr txBox="1"/>
           <p:nvPr/>
         </p:nvSpPr>
         <p:spPr>
           <a:xfrm>
-            <a:off x="566928" y="1280160"/>
-            <a:ext cx="5303520" cy="384048"/>
+            <a:off x="320040" y="2935224"/>
+            <a:ext cx="5669280" cy="457200"/>
           </a:xfrm>
           <a:prstGeom prst="rect">
             <a:avLst/>
@@ -6240,31 +6609,33 @@
           <a:noFill/>
         </p:spPr>
         <p:txBody>
-          <a:bodyPr wrap="square"/>
-          <a:lstStyle/>
-          <a:p>
-            <a:pPr algn="l"/>
-            <a:r>
-              <a:rPr sz="1700" b="1">
-                <a:solidFill>
-                  <a:srgbClr val="1C3557"/>
-                </a:solidFill>
-              </a:rPr>
-              <a:t>Root Cause</a:t>
-            </a:r>
-          </a:p>
-        </p:txBody>
-      </p:sp>
-      <p:sp>
-        <p:nvSpPr>
-          <p:cNvPr id="7" name="TextBox 6"/>
+          <a:bodyPr wrap="square">
+            <a:spAutoFit/>
+          </a:bodyPr>
+          <a:lstStyle/>
+          <a:p>
+            <a:pPr algn="ctr"/>
+            <a:r>
+              <a:rPr sz="1900" b="1" i="0">
+                <a:solidFill>
+                  <a:srgbClr val="FFFFFF"/>
+                </a:solidFill>
+              </a:rPr>
+              <a:t>What We Learned</a:t>
+            </a:r>
+          </a:p>
+        </p:txBody>
+      </p:sp>
+      <p:sp>
+        <p:nvSpPr>
+          <p:cNvPr id="22" name="TextBox 21"/>
           <p:cNvSpPr txBox="1"/>
           <p:nvPr/>
         </p:nvSpPr>
         <p:spPr>
           <a:xfrm>
-            <a:off x="566928" y="1700784"/>
-            <a:ext cx="5303520" cy="457200"/>
+            <a:off x="457200" y="3502152"/>
+            <a:ext cx="5394960" cy="2971800"/>
           </a:xfrm>
           <a:prstGeom prst="rect">
             <a:avLst/>
@@ -6272,63 +6643,67 @@
           <a:noFill/>
         </p:spPr>
         <p:txBody>
-          <a:bodyPr wrap="square"/>
-          <a:lstStyle/>
-          <a:p>
-            <a:pPr algn="l"/>
-            <a:r>
-              <a:rPr sz="1500" b="0">
-                <a:solidFill>
-                  <a:srgbClr val="993322"/>
-                </a:solidFill>
-              </a:rPr>
-              <a:t>isCelsius: a dead parameter</a:t>
-            </a:r>
-          </a:p>
-        </p:txBody>
-      </p:sp>
-      <p:sp>
-        <p:nvSpPr>
-          <p:cNvPr id="8" name="TextBox 7"/>
-          <p:cNvSpPr txBox="1"/>
-          <p:nvPr/>
-        </p:nvSpPr>
-        <p:spPr>
-          <a:xfrm>
-            <a:off x="566928" y="2194560"/>
-            <a:ext cx="5303520" cy="777240"/>
-          </a:xfrm>
-          <a:prstGeom prst="rect">
-            <a:avLst/>
-          </a:prstGeom>
-          <a:noFill/>
-        </p:spPr>
-        <p:txBody>
-          <a:bodyPr wrap="square"/>
-          <a:lstStyle/>
-          <a:p>
-            <a:pPr algn="l"/>
-            <a:r>
-              <a:rPr sz="1300" b="0">
+          <a:bodyPr wrap="square">
+            <a:spAutoFit/>
+          </a:bodyPr>
+          <a:lstStyle/>
+          <a:p>
+            <a:pPr>
+              <a:spcBef>
+                <a:spcPts val="1800"/>
+              </a:spcBef>
+            </a:pPr>
+            <a:r>
+              <a:rPr sz="2000">
                 <a:solidFill>
                   <a:srgbClr val="222233"/>
                 </a:solidFill>
               </a:rPr>
-              <a:t>Passed to every child Composable (TopWeatherSection, HourlyForecastItem, DailyForecastRow, IndicatorsGrid) but never read in any body -- only viewModel.formatTemp() is called, which reads _isCelsius.value directly from a StateFlow.</a:t>
-            </a:r>
-          </a:p>
-        </p:txBody>
-      </p:sp>
-      <p:sp>
-        <p:nvSpPr>
-          <p:cNvPr id="9" name="Rectangle 8"/>
+              <a:t>  AI excels at translating between similar frameworks</a:t>
+            </a:r>
+          </a:p>
+          <a:p>
+            <a:pPr>
+              <a:spcBef>
+                <a:spcPts val="1800"/>
+              </a:spcBef>
+            </a:pPr>
+            <a:r>
+              <a:rPr sz="2000">
+                <a:solidFill>
+                  <a:srgbClr val="222233"/>
+                </a:solidFill>
+              </a:rPr>
+              <a:t>  Iterative prompting beats one-shot generation</a:t>
+            </a:r>
+          </a:p>
+          <a:p>
+            <a:pPr>
+              <a:spcBef>
+                <a:spcPts val="1800"/>
+              </a:spcBef>
+            </a:pPr>
+            <a:r>
+              <a:rPr sz="2000">
+                <a:solidFill>
+                  <a:srgbClr val="222233"/>
+                </a:solidFill>
+              </a:rPr>
+              <a:t>  Human oversight is still essential for config &amp; APIs</a:t>
+            </a:r>
+          </a:p>
+        </p:txBody>
+      </p:sp>
+      <p:sp>
+        <p:nvSpPr>
+          <p:cNvPr id="23" name="Rectangle 22"/>
           <p:cNvSpPr/>
           <p:nvPr/>
         </p:nvSpPr>
         <p:spPr>
           <a:xfrm>
-            <a:off x="6382512" y="1170432"/>
-            <a:ext cx="5669280" cy="1920240"/>
+            <a:off x="6281928" y="2907792"/>
+            <a:ext cx="5669280" cy="3703320"/>
           </a:xfrm>
           <a:prstGeom prst="rect">
             <a:avLst/>
@@ -6365,20 +6740,20 @@
       </p:sp>
       <p:sp>
         <p:nvSpPr>
-          <p:cNvPr id="10" name="Rectangle 9"/>
+          <p:cNvPr id="24" name="Rectangle 23"/>
           <p:cNvSpPr/>
           <p:nvPr/>
         </p:nvSpPr>
         <p:spPr>
           <a:xfrm>
-            <a:off x="6382512" y="1170432"/>
-            <a:ext cx="182880" cy="1920240"/>
+            <a:off x="6281928" y="2907792"/>
+            <a:ext cx="5669280" cy="502920"/>
           </a:xfrm>
           <a:prstGeom prst="rect">
             <a:avLst/>
           </a:prstGeom>
           <a:solidFill>
-            <a:srgbClr val="4A90E2"/>
+            <a:srgbClr val="147A3A"/>
           </a:solidFill>
           <a:ln>
             <a:noFill/>
@@ -6409,14 +6784,14 @@
       </p:sp>
       <p:sp>
         <p:nvSpPr>
-          <p:cNvPr id="11" name="TextBox 10"/>
+          <p:cNvPr id="25" name="TextBox 24"/>
           <p:cNvSpPr txBox="1"/>
           <p:nvPr/>
         </p:nvSpPr>
         <p:spPr>
           <a:xfrm>
-            <a:off x="6675120" y="1280160"/>
-            <a:ext cx="5303520" cy="384048"/>
+            <a:off x="6281928" y="2935224"/>
+            <a:ext cx="5669280" cy="457200"/>
           </a:xfrm>
           <a:prstGeom prst="rect">
             <a:avLst/>
@@ -6424,31 +6799,33 @@
           <a:noFill/>
         </p:spPr>
         <p:txBody>
-          <a:bodyPr wrap="square"/>
-          <a:lstStyle/>
-          <a:p>
-            <a:pPr algn="l"/>
-            <a:r>
-              <a:rPr sz="1700" b="1">
-                <a:solidFill>
-                  <a:srgbClr val="1C3557"/>
-                </a:solidFill>
-              </a:rPr>
-              <a:t>Why It Breaks</a:t>
-            </a:r>
-          </a:p>
-        </p:txBody>
-      </p:sp>
-      <p:sp>
-        <p:nvSpPr>
-          <p:cNvPr id="12" name="TextBox 11"/>
+          <a:bodyPr wrap="square">
+            <a:spAutoFit/>
+          </a:bodyPr>
+          <a:lstStyle/>
+          <a:p>
+            <a:pPr algn="ctr"/>
+            <a:r>
+              <a:rPr sz="1900" b="1" i="0">
+                <a:solidFill>
+                  <a:srgbClr val="FFFFFF"/>
+                </a:solidFill>
+              </a:rPr>
+              <a:t>Verdict</a:t>
+            </a:r>
+          </a:p>
+        </p:txBody>
+      </p:sp>
+      <p:sp>
+        <p:nvSpPr>
+          <p:cNvPr id="26" name="TextBox 25"/>
           <p:cNvSpPr txBox="1"/>
           <p:nvPr/>
         </p:nvSpPr>
         <p:spPr>
           <a:xfrm>
-            <a:off x="6675120" y="1700784"/>
-            <a:ext cx="5303520" cy="457200"/>
+            <a:off x="6419088" y="3502152"/>
+            <a:ext cx="5394960" cy="2971800"/>
           </a:xfrm>
           <a:prstGeom prst="rect">
             <a:avLst/>
@@ -6456,417 +6833,53 @@
           <a:noFill/>
         </p:spPr>
         <p:txBody>
-          <a:bodyPr wrap="square"/>
-          <a:lstStyle/>
-          <a:p>
-            <a:pPr algn="l"/>
-            <a:r>
-              <a:rPr sz="1500" b="0">
-                <a:solidFill>
-                  <a:srgbClr val="993322"/>
-                </a:solidFill>
-              </a:rPr>
-              <a:t>Compose cannot track the StateFlow read</a:t>
-            </a:r>
-          </a:p>
-        </p:txBody>
-      </p:sp>
-      <p:sp>
-        <p:nvSpPr>
-          <p:cNvPr id="13" name="TextBox 12"/>
-          <p:cNvSpPr txBox="1"/>
-          <p:nvPr/>
-        </p:nvSpPr>
-        <p:spPr>
-          <a:xfrm>
-            <a:off x="6675120" y="2194560"/>
-            <a:ext cx="5303520" cy="777240"/>
-          </a:xfrm>
-          <a:prstGeom prst="rect">
-            <a:avLst/>
-          </a:prstGeom>
-          <a:noFill/>
-        </p:spPr>
-        <p:txBody>
-          <a:bodyPr wrap="square"/>
-          <a:lstStyle/>
-          <a:p>
-            <a:pPr algn="l"/>
-            <a:r>
-              <a:rPr sz="1300" b="0">
+          <a:bodyPr wrap="square">
+            <a:spAutoFit/>
+          </a:bodyPr>
+          <a:lstStyle/>
+          <a:p>
+            <a:pPr>
+              <a:spcBef>
+                <a:spcPts val="1800"/>
+              </a:spcBef>
+            </a:pPr>
+            <a:r>
+              <a:rPr sz="2000">
                 <a:solidFill>
                   <a:srgbClr val="222233"/>
                 </a:solidFill>
               </a:rPr>
-              <a:t>Compose only re-renders when a State&lt;T&gt; value changes inside a composable body. Reading _isCelsius.value inside a plain Kotlin function is invisible to Compose -- so LazyRow items may silently skip recomposition.</a:t>
-            </a:r>
-          </a:p>
-        </p:txBody>
-      </p:sp>
-      <p:sp>
-        <p:nvSpPr>
-          <p:cNvPr id="14" name="Rectangle 13"/>
-          <p:cNvSpPr/>
-          <p:nvPr/>
-        </p:nvSpPr>
-        <p:spPr>
-          <a:xfrm>
-            <a:off x="274320" y="3200400"/>
-            <a:ext cx="5669280" cy="1920240"/>
-          </a:xfrm>
-          <a:prstGeom prst="rect">
-            <a:avLst/>
-          </a:prstGeom>
-          <a:solidFill>
-            <a:srgbClr val="F4F6F9"/>
-          </a:solidFill>
-          <a:ln>
-            <a:noFill/>
-          </a:ln>
-        </p:spPr>
-        <p:style>
-          <a:lnRef idx="1">
-            <a:schemeClr val="accent1"/>
-          </a:lnRef>
-          <a:fillRef idx="3">
-            <a:schemeClr val="accent1"/>
-          </a:fillRef>
-          <a:effectRef idx="2">
-            <a:schemeClr val="accent1"/>
-          </a:effectRef>
-          <a:fontRef idx="minor">
-            <a:schemeClr val="lt1"/>
-          </a:fontRef>
-        </p:style>
-        <p:txBody>
-          <a:bodyPr rtlCol="0" anchor="ctr"/>
-          <a:lstStyle/>
-          <a:p>
-            <a:pPr algn="ctr"/>
-            <a:endParaRPr/>
-          </a:p>
-        </p:txBody>
-      </p:sp>
-      <p:sp>
-        <p:nvSpPr>
-          <p:cNvPr id="15" name="Rectangle 14"/>
-          <p:cNvSpPr/>
-          <p:nvPr/>
-        </p:nvSpPr>
-        <p:spPr>
-          <a:xfrm>
-            <a:off x="274320" y="3200400"/>
-            <a:ext cx="182880" cy="1920240"/>
-          </a:xfrm>
-          <a:prstGeom prst="rect">
-            <a:avLst/>
-          </a:prstGeom>
-          <a:solidFill>
-            <a:srgbClr val="8E44AD"/>
-          </a:solidFill>
-          <a:ln>
-            <a:noFill/>
-          </a:ln>
-        </p:spPr>
-        <p:style>
-          <a:lnRef idx="1">
-            <a:schemeClr val="accent1"/>
-          </a:lnRef>
-          <a:fillRef idx="3">
-            <a:schemeClr val="accent1"/>
-          </a:fillRef>
-          <a:effectRef idx="2">
-            <a:schemeClr val="accent1"/>
-          </a:effectRef>
-          <a:fontRef idx="minor">
-            <a:schemeClr val="lt1"/>
-          </a:fontRef>
-        </p:style>
-        <p:txBody>
-          <a:bodyPr rtlCol="0" anchor="ctr"/>
-          <a:lstStyle/>
-          <a:p>
-            <a:pPr algn="ctr"/>
-            <a:endParaRPr/>
-          </a:p>
-        </p:txBody>
-      </p:sp>
-      <p:sp>
-        <p:nvSpPr>
-          <p:cNvPr id="16" name="TextBox 15"/>
-          <p:cNvSpPr txBox="1"/>
-          <p:nvPr/>
-        </p:nvSpPr>
-        <p:spPr>
-          <a:xfrm>
-            <a:off x="566928" y="3310128"/>
-            <a:ext cx="5303520" cy="384048"/>
-          </a:xfrm>
-          <a:prstGeom prst="rect">
-            <a:avLst/>
-          </a:prstGeom>
-          <a:noFill/>
-        </p:spPr>
-        <p:txBody>
-          <a:bodyPr wrap="square"/>
-          <a:lstStyle/>
-          <a:p>
-            <a:pPr algn="l"/>
-            <a:r>
-              <a:rPr sz="1700" b="1">
-                <a:solidFill>
-                  <a:srgbClr val="1C3557"/>
-                </a:solidFill>
-              </a:rPr>
-              <a:t>Fix Applied</a:t>
-            </a:r>
-          </a:p>
-        </p:txBody>
-      </p:sp>
-      <p:sp>
-        <p:nvSpPr>
-          <p:cNvPr id="17" name="TextBox 16"/>
-          <p:cNvSpPr txBox="1"/>
-          <p:nvPr/>
-        </p:nvSpPr>
-        <p:spPr>
-          <a:xfrm>
-            <a:off x="566928" y="3730752"/>
-            <a:ext cx="5303520" cy="457200"/>
-          </a:xfrm>
-          <a:prstGeom prst="rect">
-            <a:avLst/>
-          </a:prstGeom>
-          <a:noFill/>
-        </p:spPr>
-        <p:txBody>
-          <a:bodyPr wrap="square"/>
-          <a:lstStyle/>
-          <a:p>
-            <a:pPr algn="l"/>
-            <a:r>
-              <a:rPr sz="1500" b="0">
-                <a:solidFill>
-                  <a:srgbClr val="993322"/>
-                </a:solidFill>
-              </a:rPr>
-              <a:t>Pure functions with explicit isCelsius param</a:t>
-            </a:r>
-          </a:p>
-        </p:txBody>
-      </p:sp>
-      <p:sp>
-        <p:nvSpPr>
-          <p:cNvPr id="18" name="TextBox 17"/>
-          <p:cNvSpPr txBox="1"/>
-          <p:nvPr/>
-        </p:nvSpPr>
-        <p:spPr>
-          <a:xfrm>
-            <a:off x="566928" y="4224528"/>
-            <a:ext cx="5303520" cy="777240"/>
-          </a:xfrm>
-          <a:prstGeom prst="rect">
-            <a:avLst/>
-          </a:prstGeom>
-          <a:noFill/>
-        </p:spPr>
-        <p:txBody>
-          <a:bodyPr wrap="square"/>
-          <a:lstStyle/>
-          <a:p>
-            <a:pPr algn="l"/>
-            <a:r>
-              <a:rPr sz="1300" b="0">
+              <a:t>  AI made this migration feasible in under a week</a:t>
+            </a:r>
+          </a:p>
+          <a:p>
+            <a:pPr>
+              <a:spcBef>
+                <a:spcPts val="1800"/>
+              </a:spcBef>
+            </a:pPr>
+            <a:r>
+              <a:rPr sz="2000">
                 <a:solidFill>
                   <a:srgbClr val="222233"/>
                 </a:solidFill>
               </a:rPr>
-              <a:t>convertTemp(celsius, isCelsius) and formatTemp(celsius, isCelsius) now take isCelsius as an explicit argument. All 4 child Composables actually read the parameter -- Compose tracks it and recomposes correctly on toggle.</a:t>
-            </a:r>
-          </a:p>
-        </p:txBody>
-      </p:sp>
-      <p:sp>
-        <p:nvSpPr>
-          <p:cNvPr id="19" name="Rectangle 18"/>
-          <p:cNvSpPr/>
-          <p:nvPr/>
-        </p:nvSpPr>
-        <p:spPr>
-          <a:xfrm>
-            <a:off x="6382512" y="3200400"/>
-            <a:ext cx="5669280" cy="1920240"/>
-          </a:xfrm>
-          <a:prstGeom prst="rect">
-            <a:avLst/>
-          </a:prstGeom>
-          <a:solidFill>
-            <a:srgbClr val="F4F6F9"/>
-          </a:solidFill>
-          <a:ln>
-            <a:noFill/>
-          </a:ln>
-        </p:spPr>
-        <p:style>
-          <a:lnRef idx="1">
-            <a:schemeClr val="accent1"/>
-          </a:lnRef>
-          <a:fillRef idx="3">
-            <a:schemeClr val="accent1"/>
-          </a:fillRef>
-          <a:effectRef idx="2">
-            <a:schemeClr val="accent1"/>
-          </a:effectRef>
-          <a:fontRef idx="minor">
-            <a:schemeClr val="lt1"/>
-          </a:fontRef>
-        </p:style>
-        <p:txBody>
-          <a:bodyPr rtlCol="0" anchor="ctr"/>
-          <a:lstStyle/>
-          <a:p>
-            <a:pPr algn="ctr"/>
-            <a:endParaRPr/>
-          </a:p>
-        </p:txBody>
-      </p:sp>
-      <p:sp>
-        <p:nvSpPr>
-          <p:cNvPr id="20" name="Rectangle 19"/>
-          <p:cNvSpPr/>
-          <p:nvPr/>
-        </p:nvSpPr>
-        <p:spPr>
-          <a:xfrm>
-            <a:off x="6382512" y="3200400"/>
-            <a:ext cx="182880" cy="1920240"/>
-          </a:xfrm>
-          <a:prstGeom prst="rect">
-            <a:avLst/>
-          </a:prstGeom>
-          <a:solidFill>
-            <a:srgbClr val="3DDC84"/>
-          </a:solidFill>
-          <a:ln>
-            <a:noFill/>
-          </a:ln>
-        </p:spPr>
-        <p:style>
-          <a:lnRef idx="1">
-            <a:schemeClr val="accent1"/>
-          </a:lnRef>
-          <a:fillRef idx="3">
-            <a:schemeClr val="accent1"/>
-          </a:fillRef>
-          <a:effectRef idx="2">
-            <a:schemeClr val="accent1"/>
-          </a:effectRef>
-          <a:fontRef idx="minor">
-            <a:schemeClr val="lt1"/>
-          </a:fontRef>
-        </p:style>
-        <p:txBody>
-          <a:bodyPr rtlCol="0" anchor="ctr"/>
-          <a:lstStyle/>
-          <a:p>
-            <a:pPr algn="ctr"/>
-            <a:endParaRPr/>
-          </a:p>
-        </p:txBody>
-      </p:sp>
-      <p:sp>
-        <p:nvSpPr>
-          <p:cNvPr id="21" name="TextBox 20"/>
-          <p:cNvSpPr txBox="1"/>
-          <p:nvPr/>
-        </p:nvSpPr>
-        <p:spPr>
-          <a:xfrm>
-            <a:off x="6675120" y="3310128"/>
-            <a:ext cx="5303520" cy="384048"/>
-          </a:xfrm>
-          <a:prstGeom prst="rect">
-            <a:avLst/>
-          </a:prstGeom>
-          <a:noFill/>
-        </p:spPr>
-        <p:txBody>
-          <a:bodyPr wrap="square"/>
-          <a:lstStyle/>
-          <a:p>
-            <a:pPr algn="l"/>
-            <a:r>
-              <a:rPr sz="1700" b="1">
-                <a:solidFill>
-                  <a:srgbClr val="1C3557"/>
-                </a:solidFill>
-              </a:rPr>
-              <a:t>Bonus Fix</a:t>
-            </a:r>
-          </a:p>
-        </p:txBody>
-      </p:sp>
-      <p:sp>
-        <p:nvSpPr>
-          <p:cNvPr id="22" name="TextBox 21"/>
-          <p:cNvSpPr txBox="1"/>
-          <p:nvPr/>
-        </p:nvSpPr>
-        <p:spPr>
-          <a:xfrm>
-            <a:off x="6675120" y="3730752"/>
-            <a:ext cx="5303520" cy="457200"/>
-          </a:xfrm>
-          <a:prstGeom prst="rect">
-            <a:avLst/>
-          </a:prstGeom>
-          <a:noFill/>
-        </p:spPr>
-        <p:txBody>
-          <a:bodyPr wrap="square"/>
-          <a:lstStyle/>
-          <a:p>
-            <a:pPr algn="l"/>
-            <a:r>
-              <a:rPr sz="1500" b="0">
-                <a:solidFill>
-                  <a:srgbClr val="993322"/>
-                </a:solidFill>
-              </a:rPr>
-              <a:t>Unit label added to temperature output</a:t>
-            </a:r>
-          </a:p>
-        </p:txBody>
-      </p:sp>
-      <p:sp>
-        <p:nvSpPr>
-          <p:cNvPr id="23" name="TextBox 22"/>
-          <p:cNvSpPr txBox="1"/>
-          <p:nvPr/>
-        </p:nvSpPr>
-        <p:spPr>
-          <a:xfrm>
-            <a:off x="6675120" y="4224528"/>
-            <a:ext cx="5303520" cy="777240"/>
-          </a:xfrm>
-          <a:prstGeom prst="rect">
-            <a:avLst/>
-          </a:prstGeom>
-          <a:noFill/>
-        </p:spPr>
-        <p:txBody>
-          <a:bodyPr wrap="square"/>
-          <a:lstStyle/>
-          <a:p>
-            <a:pPr algn="l"/>
-            <a:r>
-              <a:rPr sz="1300" b="0">
+              <a:t>  Claude produced clean, idiomatic Kotlin</a:t>
+            </a:r>
+          </a:p>
+          <a:p>
+            <a:pPr>
+              <a:spcBef>
+                <a:spcPts val="1800"/>
+              </a:spcBef>
+            </a:pPr>
+            <a:r>
+              <a:rPr sz="2000">
                 <a:solidFill>
                   <a:srgbClr val="222233"/>
                 </a:solidFill>
               </a:rPr>
-              <a:t>formatTemp() previously returned "22°" with no C or F suffix, making it impossible to confirm which unit was active. Now returns "22°C" or "72°F" so the toggle is visually verifiable.</a:t>
+              <a:t>  Workflow: AI drafts  --  Human reviews  --  AI fixes</a:t>
             </a:r>
           </a:p>
         </p:txBody>

--- a/docs/WeatheryApp_Presentation.pptx
+++ b/docs/WeatheryApp_Presentation.pptx
@@ -15,10 +15,9 @@
     <p:sldId id="263" r:id="rId9"/>
     <p:sldId id="264" r:id="rId10"/>
     <p:sldId id="269" r:id="rId11"/>
-    <p:sldId id="266" r:id="rId12"/>
-    <p:sldId id="265" r:id="rId13"/>
-    <p:sldId id="267" r:id="rId14"/>
-    <p:sldId id="268" r:id="rId15"/>
+    <p:sldId id="265" r:id="rId12"/>
+    <p:sldId id="267" r:id="rId13"/>
+    <p:sldId id="268" r:id="rId14"/>
   </p:sldIdLst>
   <p:sldSz cx="12188825" cy="6858000"/>
   <p:notesSz cx="6858000" cy="9144000"/>
@@ -4215,12 +4214,12 @@
 </file>
 
 <file path=ppt/slides/slide11.xml><?xml version="1.0" encoding="utf-8"?>
-<p:sld xmlns:a="http://schemas.openxmlformats.org/drawingml/2006/main" xmlns:r="http://schemas.openxmlformats.org/officeDocument/2006/relationships" xmlns:p="http://schemas.openxmlformats.org/presentationml/2006/main" show="0">
+<p:sld xmlns:a="http://schemas.openxmlformats.org/drawingml/2006/main" xmlns:r="http://schemas.openxmlformats.org/officeDocument/2006/relationships" xmlns:p="http://schemas.openxmlformats.org/presentationml/2006/main">
   <p:cSld>
     <p:bg>
       <p:bgPr>
         <a:solidFill>
-          <a:srgbClr val="0E1E38"/>
+          <a:srgbClr val="FFFFFF"/>
         </a:solidFill>
         <a:effectLst/>
       </p:bgPr>
@@ -4254,7 +4253,7 @@
             <a:avLst/>
           </a:prstGeom>
           <a:solidFill>
-            <a:srgbClr val="0E1E38"/>
+            <a:srgbClr val="1C3557"/>
           </a:solidFill>
           <a:ln>
             <a:noFill/>
@@ -4312,21 +4311,109 @@
                   <a:srgbClr val="FFFFFF"/>
                 </a:solidFill>
               </a:rPr>
-              <a:t>Token Usage  --  Across All Sessions</a:t>
-            </a:r>
-          </a:p>
-        </p:txBody>
-      </p:sp>
-      <p:sp>
-        <p:nvSpPr>
-          <p:cNvPr id="4" name="TextBox 3"/>
+              <a:t>Key Challenges</a:t>
+            </a:r>
+          </a:p>
+        </p:txBody>
+      </p:sp>
+      <p:sp>
+        <p:nvSpPr>
+          <p:cNvPr id="4" name="Rectangle 3"/>
+          <p:cNvSpPr/>
+          <p:nvPr/>
+        </p:nvSpPr>
+        <p:spPr>
+          <a:xfrm>
+            <a:off x="274320" y="1170432"/>
+            <a:ext cx="5669280" cy="1920240"/>
+          </a:xfrm>
+          <a:prstGeom prst="rect">
+            <a:avLst/>
+          </a:prstGeom>
+          <a:solidFill>
+            <a:srgbClr val="F4F6F9"/>
+          </a:solidFill>
+          <a:ln>
+            <a:noFill/>
+          </a:ln>
+        </p:spPr>
+        <p:style>
+          <a:lnRef idx="1">
+            <a:schemeClr val="accent1"/>
+          </a:lnRef>
+          <a:fillRef idx="3">
+            <a:schemeClr val="accent1"/>
+          </a:fillRef>
+          <a:effectRef idx="2">
+            <a:schemeClr val="accent1"/>
+          </a:effectRef>
+          <a:fontRef idx="minor">
+            <a:schemeClr val="lt1"/>
+          </a:fontRef>
+        </p:style>
+        <p:txBody>
+          <a:bodyPr rtlCol="0" anchor="ctr"/>
+          <a:lstStyle/>
+          <a:p>
+            <a:pPr algn="ctr"/>
+            <a:endParaRPr/>
+          </a:p>
+        </p:txBody>
+      </p:sp>
+      <p:sp>
+        <p:nvSpPr>
+          <p:cNvPr id="5" name="Rectangle 4"/>
+          <p:cNvSpPr/>
+          <p:nvPr/>
+        </p:nvSpPr>
+        <p:spPr>
+          <a:xfrm>
+            <a:off x="274320" y="1170432"/>
+            <a:ext cx="182880" cy="1920240"/>
+          </a:xfrm>
+          <a:prstGeom prst="rect">
+            <a:avLst/>
+          </a:prstGeom>
+          <a:solidFill>
+            <a:srgbClr val="E86A2C"/>
+          </a:solidFill>
+          <a:ln>
+            <a:noFill/>
+          </a:ln>
+        </p:spPr>
+        <p:style>
+          <a:lnRef idx="1">
+            <a:schemeClr val="accent1"/>
+          </a:lnRef>
+          <a:fillRef idx="3">
+            <a:schemeClr val="accent1"/>
+          </a:fillRef>
+          <a:effectRef idx="2">
+            <a:schemeClr val="accent1"/>
+          </a:effectRef>
+          <a:fontRef idx="minor">
+            <a:schemeClr val="lt1"/>
+          </a:fontRef>
+        </p:style>
+        <p:txBody>
+          <a:bodyPr rtlCol="0" anchor="ctr"/>
+          <a:lstStyle/>
+          <a:p>
+            <a:pPr algn="ctr"/>
+            <a:endParaRPr/>
+          </a:p>
+        </p:txBody>
+      </p:sp>
+      <p:sp>
+        <p:nvSpPr>
+          <p:cNvPr id="6" name="TextBox 5"/>
           <p:cNvSpPr txBox="1"/>
           <p:nvPr/>
         </p:nvSpPr>
         <p:spPr>
           <a:xfrm>
-            <a:off x="411480" y="1115568"/>
-            <a:ext cx="11338560" cy="365760"/>
+            <a:off x="566928" y="1280160"/>
+            <a:ext cx="5303520" cy="384048"/>
           </a:xfrm>
           <a:prstGeom prst="rect">
             <a:avLst/>
@@ -4341,26 +4428,138 @@
           <a:p>
             <a:pPr algn="l"/>
             <a:r>
-              <a:rPr sz="1500" b="0" i="1">
-                <a:solidFill>
-                  <a:srgbClr val="9999AA"/>
-                </a:solidFill>
-              </a:rPr>
-              <a:t>Real data from 4 Claude Code sessions  |  Measured from session logs</a:t>
-            </a:r>
-          </a:p>
-        </p:txBody>
-      </p:sp>
-      <p:sp>
-        <p:nvSpPr>
-          <p:cNvPr id="5" name="Rectangle 4"/>
+              <a:rPr sz="1700" b="1" i="0">
+                <a:solidFill>
+                  <a:srgbClr val="1C3557"/>
+                </a:solidFill>
+              </a:rPr>
+              <a:t>WeatherKit not on Android</a:t>
+            </a:r>
+          </a:p>
+        </p:txBody>
+      </p:sp>
+      <p:sp>
+        <p:nvSpPr>
+          <p:cNvPr id="7" name="TextBox 6"/>
+          <p:cNvSpPr txBox="1"/>
+          <p:nvPr/>
+        </p:nvSpPr>
+        <p:spPr>
+          <a:xfrm>
+            <a:off x="566928" y="1700784"/>
+            <a:ext cx="5303520" cy="457200"/>
+          </a:xfrm>
+          <a:prstGeom prst="rect">
+            <a:avLst/>
+          </a:prstGeom>
+          <a:noFill/>
+        </p:spPr>
+        <p:txBody>
+          <a:bodyPr wrap="square">
+            <a:spAutoFit/>
+          </a:bodyPr>
+          <a:lstStyle/>
+          <a:p>
+            <a:pPr algn="l"/>
+            <a:r>
+              <a:rPr sz="1600" b="0" i="1">
+                <a:solidFill>
+                  <a:srgbClr val="993322"/>
+                </a:solidFill>
+              </a:rPr>
+              <a:t>Apple-exclusive API</a:t>
+            </a:r>
+          </a:p>
+        </p:txBody>
+      </p:sp>
+      <p:sp>
+        <p:nvSpPr>
+          <p:cNvPr id="8" name="TextBox 7"/>
+          <p:cNvSpPr txBox="1"/>
+          <p:nvPr/>
+        </p:nvSpPr>
+        <p:spPr>
+          <a:xfrm>
+            <a:off x="566928" y="2194560"/>
+            <a:ext cx="5303520" cy="777240"/>
+          </a:xfrm>
+          <a:prstGeom prst="rect">
+            <a:avLst/>
+          </a:prstGeom>
+          <a:noFill/>
+        </p:spPr>
+        <p:txBody>
+          <a:bodyPr wrap="square">
+            <a:spAutoFit/>
+          </a:bodyPr>
+          <a:lstStyle/>
+          <a:p>
+            <a:pPr algn="l"/>
+            <a:r>
+              <a:rPr sz="1600" b="0" i="0">
+                <a:solidFill>
+                  <a:srgbClr val="222233"/>
+                </a:solidFill>
+              </a:rPr>
+              <a:t>Used OpenWeatherMap REST API instead</a:t>
+            </a:r>
+          </a:p>
+        </p:txBody>
+      </p:sp>
+      <p:sp>
+        <p:nvSpPr>
+          <p:cNvPr id="9" name="Rectangle 8"/>
           <p:cNvSpPr/>
           <p:nvPr/>
         </p:nvSpPr>
         <p:spPr>
           <a:xfrm>
-            <a:off x="320040" y="1572768"/>
-            <a:ext cx="5029200" cy="3017520"/>
+            <a:off x="6382512" y="1170432"/>
+            <a:ext cx="5669280" cy="1920240"/>
+          </a:xfrm>
+          <a:prstGeom prst="rect">
+            <a:avLst/>
+          </a:prstGeom>
+          <a:solidFill>
+            <a:srgbClr val="F4F6F9"/>
+          </a:solidFill>
+          <a:ln>
+            <a:noFill/>
+          </a:ln>
+        </p:spPr>
+        <p:style>
+          <a:lnRef idx="1">
+            <a:schemeClr val="accent1"/>
+          </a:lnRef>
+          <a:fillRef idx="3">
+            <a:schemeClr val="accent1"/>
+          </a:fillRef>
+          <a:effectRef idx="2">
+            <a:schemeClr val="accent1"/>
+          </a:effectRef>
+          <a:fontRef idx="minor">
+            <a:schemeClr val="lt1"/>
+          </a:fontRef>
+        </p:style>
+        <p:txBody>
+          <a:bodyPr rtlCol="0" anchor="ctr"/>
+          <a:lstStyle/>
+          <a:p>
+            <a:pPr algn="ctr"/>
+            <a:endParaRPr/>
+          </a:p>
+        </p:txBody>
+      </p:sp>
+      <p:sp>
+        <p:nvSpPr>
+          <p:cNvPr id="10" name="Rectangle 9"/>
+          <p:cNvSpPr/>
+          <p:nvPr/>
+        </p:nvSpPr>
+        <p:spPr>
+          <a:xfrm>
+            <a:off x="6382512" y="1170432"/>
+            <a:ext cx="182880" cy="1920240"/>
           </a:xfrm>
           <a:prstGeom prst="rect">
             <a:avLst/>
@@ -4397,14 +4596,14 @@
       </p:sp>
       <p:sp>
         <p:nvSpPr>
-          <p:cNvPr id="6" name="TextBox 5"/>
+          <p:cNvPr id="11" name="TextBox 10"/>
           <p:cNvSpPr txBox="1"/>
           <p:nvPr/>
         </p:nvSpPr>
         <p:spPr>
           <a:xfrm>
-            <a:off x="320040" y="1664208"/>
-            <a:ext cx="5029200" cy="1280160"/>
+            <a:off x="6675120" y="1280160"/>
+            <a:ext cx="5303520" cy="384048"/>
           </a:xfrm>
           <a:prstGeom prst="rect">
             <a:avLst/>
@@ -4417,28 +4616,28 @@
           </a:bodyPr>
           <a:lstStyle/>
           <a:p>
-            <a:pPr algn="ctr"/>
-            <a:r>
-              <a:rPr sz="5200" b="1" i="0">
-                <a:solidFill>
-                  <a:srgbClr val="FFFFFF"/>
-                </a:solidFill>
-              </a:rPr>
-              <a:t>10,022,333</a:t>
-            </a:r>
-          </a:p>
-        </p:txBody>
-      </p:sp>
-      <p:sp>
-        <p:nvSpPr>
-          <p:cNvPr id="7" name="TextBox 6"/>
+            <a:pPr algn="l"/>
+            <a:r>
+              <a:rPr sz="1700" b="1" i="0">
+                <a:solidFill>
+                  <a:srgbClr val="1C3557"/>
+                </a:solidFill>
+              </a:rPr>
+              <a:t>Sidebar navigation</a:t>
+            </a:r>
+          </a:p>
+        </p:txBody>
+      </p:sp>
+      <p:sp>
+        <p:nvSpPr>
+          <p:cNvPr id="12" name="TextBox 11"/>
           <p:cNvSpPr txBox="1"/>
           <p:nvPr/>
         </p:nvSpPr>
         <p:spPr>
           <a:xfrm>
-            <a:off x="320040" y="2834640"/>
-            <a:ext cx="5029200" cy="457200"/>
+            <a:off x="6675120" y="1700784"/>
+            <a:ext cx="5303520" cy="457200"/>
           </a:xfrm>
           <a:prstGeom prst="rect">
             <a:avLst/>
@@ -4451,28 +4650,28 @@
           </a:bodyPr>
           <a:lstStyle/>
           <a:p>
-            <a:pPr algn="ctr"/>
-            <a:r>
-              <a:rPr sz="1800" b="0" i="0">
-                <a:solidFill>
-                  <a:srgbClr val="CCE5FF"/>
-                </a:solidFill>
-              </a:rPr>
-              <a:t>Total Tokens Processed</a:t>
-            </a:r>
-          </a:p>
-        </p:txBody>
-      </p:sp>
-      <p:sp>
-        <p:nvSpPr>
-          <p:cNvPr id="8" name="TextBox 7"/>
+            <a:pPr algn="l"/>
+            <a:r>
+              <a:rPr sz="1600" b="0" i="1">
+                <a:solidFill>
+                  <a:srgbClr val="993322"/>
+                </a:solidFill>
+              </a:rPr>
+              <a:t>No native drawer equivalent on Android</a:t>
+            </a:r>
+          </a:p>
+        </p:txBody>
+      </p:sp>
+      <p:sp>
+        <p:nvSpPr>
+          <p:cNvPr id="13" name="TextBox 12"/>
           <p:cNvSpPr txBox="1"/>
           <p:nvPr/>
         </p:nvSpPr>
         <p:spPr>
           <a:xfrm>
-            <a:off x="320040" y="3273552"/>
-            <a:ext cx="5029200" cy="329184"/>
+            <a:off x="6675120" y="2194560"/>
+            <a:ext cx="5303520" cy="777240"/>
           </a:xfrm>
           <a:prstGeom prst="rect">
             <a:avLst/>
@@ -4485,34 +4684,34 @@
           </a:bodyPr>
           <a:lstStyle/>
           <a:p>
-            <a:pPr algn="ctr"/>
-            <a:r>
-              <a:rPr sz="1400" b="0" i="1">
-                <a:solidFill>
-                  <a:srgbClr val="AACCFF"/>
-                </a:solidFill>
-              </a:rPr>
-              <a:t>(including cache)</a:t>
-            </a:r>
-          </a:p>
-        </p:txBody>
-      </p:sp>
-      <p:sp>
-        <p:nvSpPr>
-          <p:cNvPr id="9" name="Rectangle 8"/>
+            <a:pPr algn="l"/>
+            <a:r>
+              <a:rPr sz="1600" b="0" i="0">
+                <a:solidFill>
+                  <a:srgbClr val="222233"/>
+                </a:solidFill>
+              </a:rPr>
+              <a:t>Left sidebar --&gt; search dialog   /   Right --&gt; BottomSheet</a:t>
+            </a:r>
+          </a:p>
+        </p:txBody>
+      </p:sp>
+      <p:sp>
+        <p:nvSpPr>
+          <p:cNvPr id="14" name="Rectangle 13"/>
           <p:cNvSpPr/>
           <p:nvPr/>
         </p:nvSpPr>
         <p:spPr>
           <a:xfrm>
-            <a:off x="5577840" y="1572768"/>
-            <a:ext cx="3246120" cy="1298448"/>
+            <a:off x="274320" y="3200400"/>
+            <a:ext cx="5669280" cy="1920240"/>
           </a:xfrm>
           <a:prstGeom prst="rect">
             <a:avLst/>
           </a:prstGeom>
           <a:solidFill>
-            <a:srgbClr val="1A6B3C"/>
+            <a:srgbClr val="F4F6F9"/>
           </a:solidFill>
           <a:ln>
             <a:noFill/>
@@ -4543,88 +4742,20 @@
       </p:sp>
       <p:sp>
         <p:nvSpPr>
-          <p:cNvPr id="10" name="TextBox 9"/>
-          <p:cNvSpPr txBox="1"/>
-          <p:nvPr/>
-        </p:nvSpPr>
-        <p:spPr>
-          <a:xfrm>
-            <a:off x="5577840" y="1682496"/>
-            <a:ext cx="3246120" cy="685800"/>
-          </a:xfrm>
-          <a:prstGeom prst="rect">
-            <a:avLst/>
-          </a:prstGeom>
-          <a:noFill/>
-        </p:spPr>
-        <p:txBody>
-          <a:bodyPr wrap="square">
-            <a:spAutoFit/>
-          </a:bodyPr>
-          <a:lstStyle/>
-          <a:p>
-            <a:pPr algn="ctr"/>
-            <a:r>
-              <a:rPr sz="3000" b="1" i="0">
-                <a:solidFill>
-                  <a:srgbClr val="A8FFC8"/>
-                </a:solidFill>
-              </a:rPr>
-              <a:t>9,094,592</a:t>
-            </a:r>
-          </a:p>
-        </p:txBody>
-      </p:sp>
-      <p:sp>
-        <p:nvSpPr>
-          <p:cNvPr id="11" name="TextBox 10"/>
-          <p:cNvSpPr txBox="1"/>
-          <p:nvPr/>
-        </p:nvSpPr>
-        <p:spPr>
-          <a:xfrm>
-            <a:off x="5577840" y="2377440"/>
-            <a:ext cx="3246120" cy="420624"/>
-          </a:xfrm>
-          <a:prstGeom prst="rect">
-            <a:avLst/>
-          </a:prstGeom>
-          <a:noFill/>
-        </p:spPr>
-        <p:txBody>
-          <a:bodyPr wrap="square">
-            <a:spAutoFit/>
-          </a:bodyPr>
-          <a:lstStyle/>
-          <a:p>
-            <a:pPr algn="ctr"/>
-            <a:r>
-              <a:rPr sz="1400" b="0" i="0">
-                <a:solidFill>
-                  <a:srgbClr val="FFFFFF"/>
-                </a:solidFill>
-              </a:rPr>
-              <a:t>Cache Read Tokens</a:t>
-            </a:r>
-          </a:p>
-        </p:txBody>
-      </p:sp>
-      <p:sp>
-        <p:nvSpPr>
-          <p:cNvPr id="12" name="Rectangle 11"/>
+          <p:cNvPr id="15" name="Rectangle 14"/>
           <p:cNvSpPr/>
           <p:nvPr/>
         </p:nvSpPr>
         <p:spPr>
           <a:xfrm>
-            <a:off x="9025128" y="1572768"/>
-            <a:ext cx="3246120" cy="1298448"/>
+            <a:off x="274320" y="3200400"/>
+            <a:ext cx="182880" cy="1920240"/>
           </a:xfrm>
           <a:prstGeom prst="rect">
             <a:avLst/>
           </a:prstGeom>
           <a:solidFill>
-            <a:srgbClr val="5B2D8E"/>
+            <a:srgbClr val="8E44AD"/>
           </a:solidFill>
           <a:ln>
             <a:noFill/>
@@ -4655,14 +4786,14 @@
       </p:sp>
       <p:sp>
         <p:nvSpPr>
-          <p:cNvPr id="13" name="TextBox 12"/>
+          <p:cNvPr id="16" name="TextBox 15"/>
           <p:cNvSpPr txBox="1"/>
           <p:nvPr/>
         </p:nvSpPr>
         <p:spPr>
           <a:xfrm>
-            <a:off x="9025128" y="1682496"/>
-            <a:ext cx="3246120" cy="685800"/>
+            <a:off x="566928" y="3310128"/>
+            <a:ext cx="5303520" cy="384048"/>
           </a:xfrm>
           <a:prstGeom prst="rect">
             <a:avLst/>
@@ -4675,28 +4806,28 @@
           </a:bodyPr>
           <a:lstStyle/>
           <a:p>
-            <a:pPr algn="ctr"/>
-            <a:r>
-              <a:rPr sz="3000" b="1" i="0">
-                <a:solidFill>
-                  <a:srgbClr val="DDBBFF"/>
-                </a:solidFill>
-              </a:rPr>
-              <a:t>584,219</a:t>
-            </a:r>
-          </a:p>
-        </p:txBody>
-      </p:sp>
-      <p:sp>
-        <p:nvSpPr>
-          <p:cNvPr id="14" name="TextBox 13"/>
+            <a:pPr algn="l"/>
+            <a:r>
+              <a:rPr sz="1700" b="1" i="0">
+                <a:solidFill>
+                  <a:srgbClr val="1C3557"/>
+                </a:solidFill>
+              </a:rPr>
+              <a:t>Missing Version Catalog</a:t>
+            </a:r>
+          </a:p>
+        </p:txBody>
+      </p:sp>
+      <p:sp>
+        <p:nvSpPr>
+          <p:cNvPr id="17" name="TextBox 16"/>
           <p:cNvSpPr txBox="1"/>
           <p:nvPr/>
         </p:nvSpPr>
         <p:spPr>
           <a:xfrm>
-            <a:off x="9025128" y="2377440"/>
-            <a:ext cx="3246120" cy="420624"/>
+            <a:off x="566928" y="3730752"/>
+            <a:ext cx="5303520" cy="457200"/>
           </a:xfrm>
           <a:prstGeom prst="rect">
             <a:avLst/>
@@ -4709,34 +4840,68 @@
           </a:bodyPr>
           <a:lstStyle/>
           <a:p>
-            <a:pPr algn="ctr"/>
-            <a:r>
-              <a:rPr sz="1400" b="0" i="0">
-                <a:solidFill>
-                  <a:srgbClr val="FFFFFF"/>
-                </a:solidFill>
-              </a:rPr>
-              <a:t>Cache Write Tokens</a:t>
-            </a:r>
-          </a:p>
-        </p:txBody>
-      </p:sp>
-      <p:sp>
-        <p:nvSpPr>
-          <p:cNvPr id="15" name="Rectangle 14"/>
+            <a:pPr algn="l"/>
+            <a:r>
+              <a:rPr sz="1600" b="0" i="1">
+                <a:solidFill>
+                  <a:srgbClr val="993322"/>
+                </a:solidFill>
+              </a:rPr>
+              <a:t>gradle/ was gitignored -- build broken</a:t>
+            </a:r>
+          </a:p>
+        </p:txBody>
+      </p:sp>
+      <p:sp>
+        <p:nvSpPr>
+          <p:cNvPr id="18" name="TextBox 17"/>
+          <p:cNvSpPr txBox="1"/>
+          <p:nvPr/>
+        </p:nvSpPr>
+        <p:spPr>
+          <a:xfrm>
+            <a:off x="566928" y="4224528"/>
+            <a:ext cx="5303520" cy="777240"/>
+          </a:xfrm>
+          <a:prstGeom prst="rect">
+            <a:avLst/>
+          </a:prstGeom>
+          <a:noFill/>
+        </p:spPr>
+        <p:txBody>
+          <a:bodyPr wrap="square">
+            <a:spAutoFit/>
+          </a:bodyPr>
+          <a:lstStyle/>
+          <a:p>
+            <a:pPr algn="l"/>
+            <a:r>
+              <a:rPr sz="1600" b="0" i="0">
+                <a:solidFill>
+                  <a:srgbClr val="222233"/>
+                </a:solidFill>
+              </a:rPr>
+              <a:t>Fixed .gitignore, recreated libs.versions.toml</a:t>
+            </a:r>
+          </a:p>
+        </p:txBody>
+      </p:sp>
+      <p:sp>
+        <p:nvSpPr>
+          <p:cNvPr id="19" name="Rectangle 18"/>
           <p:cNvSpPr/>
           <p:nvPr/>
         </p:nvSpPr>
         <p:spPr>
           <a:xfrm>
-            <a:off x="5577840" y="3017520"/>
-            <a:ext cx="3246120" cy="1298448"/>
+            <a:off x="6382512" y="3200400"/>
+            <a:ext cx="5669280" cy="1920240"/>
           </a:xfrm>
           <a:prstGeom prst="rect">
             <a:avLst/>
           </a:prstGeom>
           <a:solidFill>
-            <a:srgbClr val="B84600"/>
+            <a:srgbClr val="F4F6F9"/>
           </a:solidFill>
           <a:ln>
             <a:noFill/>
@@ -4767,89 +4932,20 @@
       </p:sp>
       <p:sp>
         <p:nvSpPr>
-          <p:cNvPr id="16" name="TextBox 15"/>
-          <p:cNvSpPr txBox="1"/>
-          <p:nvPr/>
-        </p:nvSpPr>
-        <p:spPr>
-          <a:xfrm>
-            <a:off x="5577840" y="3127248"/>
-            <a:ext cx="3246120" cy="685800"/>
-          </a:xfrm>
-          <a:prstGeom prst="rect">
-            <a:avLst/>
-          </a:prstGeom>
-          <a:noFill/>
-        </p:spPr>
-        <p:txBody>
-          <a:bodyPr wrap="square">
-            <a:spAutoFit/>
-          </a:bodyPr>
-          <a:lstStyle/>
-          <a:p>
-            <a:pPr algn="ctr"/>
-            <a:r>
-              <a:rPr sz="3000" b="1" i="0">
-                <a:solidFill>
-                  <a:srgbClr val="FFCC88"/>
-                </a:solidFill>
-              </a:rPr>
-              <a:t>343,087</a:t>
-            </a:r>
-          </a:p>
-        </p:txBody>
-      </p:sp>
-      <p:sp>
-        <p:nvSpPr>
-          <p:cNvPr id="17" name="TextBox 16"/>
-          <p:cNvSpPr txBox="1"/>
-          <p:nvPr/>
-        </p:nvSpPr>
-        <p:spPr>
-          <a:xfrm>
-            <a:off x="5577840" y="3822192"/>
-            <a:ext cx="3246120" cy="420624"/>
-          </a:xfrm>
-          <a:prstGeom prst="rect">
-            <a:avLst/>
-          </a:prstGeom>
-          <a:noFill/>
-        </p:spPr>
-        <p:txBody>
-          <a:bodyPr wrap="square">
-            <a:spAutoFit/>
-          </a:bodyPr>
-          <a:lstStyle/>
-          <a:p>
-            <a:pPr algn="ctr"/>
-            <a:r>
-              <a:rPr sz="1400" b="0" i="0">
-                <a:solidFill>
-                  <a:srgbClr val="FFFFFF"/>
-                </a:solidFill>
-              </a:rPr>
-              <a:t>Output Tokens
-(Claude responses)</a:t>
-            </a:r>
-          </a:p>
-        </p:txBody>
-      </p:sp>
-      <p:sp>
-        <p:nvSpPr>
-          <p:cNvPr id="18" name="Rectangle 17"/>
+          <p:cNvPr id="20" name="Rectangle 19"/>
           <p:cNvSpPr/>
           <p:nvPr/>
         </p:nvSpPr>
         <p:spPr>
           <a:xfrm>
-            <a:off x="9025128" y="3017520"/>
-            <a:ext cx="3246120" cy="1298448"/>
+            <a:off x="6382512" y="3200400"/>
+            <a:ext cx="182880" cy="1920240"/>
           </a:xfrm>
           <a:prstGeom prst="rect">
             <a:avLst/>
           </a:prstGeom>
           <a:solidFill>
-            <a:srgbClr val="1C3557"/>
+            <a:srgbClr val="3DDC84"/>
           </a:solidFill>
           <a:ln>
             <a:noFill/>
@@ -4880,14 +4976,14 @@
       </p:sp>
       <p:sp>
         <p:nvSpPr>
-          <p:cNvPr id="19" name="TextBox 18"/>
+          <p:cNvPr id="21" name="TextBox 20"/>
           <p:cNvSpPr txBox="1"/>
           <p:nvPr/>
         </p:nvSpPr>
         <p:spPr>
           <a:xfrm>
-            <a:off x="9025128" y="3127248"/>
-            <a:ext cx="3246120" cy="685800"/>
+            <a:off x="6675120" y="3310128"/>
+            <a:ext cx="5303520" cy="384048"/>
           </a:xfrm>
           <a:prstGeom prst="rect">
             <a:avLst/>
@@ -4900,28 +4996,28 @@
           </a:bodyPr>
           <a:lstStyle/>
           <a:p>
-            <a:pPr algn="ctr"/>
-            <a:r>
-              <a:rPr sz="3000" b="1" i="0">
-                <a:solidFill>
-                  <a:srgbClr val="AACCFF"/>
-                </a:solidFill>
-              </a:rPr>
-              <a:t>435</a:t>
-            </a:r>
-          </a:p>
-        </p:txBody>
-      </p:sp>
-      <p:sp>
-        <p:nvSpPr>
-          <p:cNvPr id="20" name="TextBox 19"/>
+            <a:pPr algn="l"/>
+            <a:r>
+              <a:rPr sz="1700" b="1" i="0">
+                <a:solidFill>
+                  <a:srgbClr val="1C3557"/>
+                </a:solidFill>
+              </a:rPr>
+              <a:t>State management</a:t>
+            </a:r>
+          </a:p>
+        </p:txBody>
+      </p:sp>
+      <p:sp>
+        <p:nvSpPr>
+          <p:cNvPr id="22" name="TextBox 21"/>
           <p:cNvSpPr txBox="1"/>
           <p:nvPr/>
         </p:nvSpPr>
         <p:spPr>
           <a:xfrm>
-            <a:off x="9025128" y="3822192"/>
-            <a:ext cx="3246120" cy="420624"/>
+            <a:off x="6675120" y="3730752"/>
+            <a:ext cx="5303520" cy="457200"/>
           </a:xfrm>
           <a:prstGeom prst="rect">
             <a:avLst/>
@@ -4934,14 +5030,48 @@
           </a:bodyPr>
           <a:lstStyle/>
           <a:p>
-            <a:pPr algn="ctr"/>
-            <a:r>
-              <a:rPr sz="1400" b="0" i="0">
-                <a:solidFill>
-                  <a:srgbClr val="FFFFFF"/>
-                </a:solidFill>
-              </a:rPr>
-              <a:t>Fresh Input Tokens</a:t>
+            <a:pPr algn="l"/>
+            <a:r>
+              <a:rPr sz="1600" b="0" i="1">
+                <a:solidFill>
+                  <a:srgbClr val="993322"/>
+                </a:solidFill>
+              </a:rPr>
+              <a:t>No @EnvironmentObject in Compose</a:t>
+            </a:r>
+          </a:p>
+        </p:txBody>
+      </p:sp>
+      <p:sp>
+        <p:nvSpPr>
+          <p:cNvPr id="23" name="TextBox 22"/>
+          <p:cNvSpPr txBox="1"/>
+          <p:nvPr/>
+        </p:nvSpPr>
+        <p:spPr>
+          <a:xfrm>
+            <a:off x="6675120" y="4224528"/>
+            <a:ext cx="5303520" cy="777240"/>
+          </a:xfrm>
+          <a:prstGeom prst="rect">
+            <a:avLst/>
+          </a:prstGeom>
+          <a:noFill/>
+        </p:spPr>
+        <p:txBody>
+          <a:bodyPr wrap="square">
+            <a:spAutoFit/>
+          </a:bodyPr>
+          <a:lstStyle/>
+          <a:p>
+            <a:pPr algn="l"/>
+            <a:r>
+              <a:rPr sz="1600" b="0" i="0">
+                <a:solidFill>
+                  <a:srgbClr val="222233"/>
+                </a:solidFill>
+              </a:rPr>
+              <a:t>ViewModel + StateFlow + collectAsState()</a:t>
             </a:r>
           </a:p>
         </p:txBody>
@@ -5052,7 +5182,7 @@
                   <a:srgbClr val="FFFFFF"/>
                 </a:solidFill>
               </a:rPr>
-              <a:t>Key Challenges</a:t>
+              <a:t>Results &amp; Conclusion</a:t>
             </a:r>
           </a:p>
         </p:txBody>
@@ -5065,8 +5195,584 @@
         </p:nvSpPr>
         <p:spPr>
           <a:xfrm>
-            <a:off x="274320" y="1170432"/>
-            <a:ext cx="5669280" cy="1920240"/>
+            <a:off x="347472" y="1170432"/>
+            <a:ext cx="2103120" cy="1554480"/>
+          </a:xfrm>
+          <a:prstGeom prst="rect">
+            <a:avLst/>
+          </a:prstGeom>
+          <a:solidFill>
+            <a:srgbClr val="1C3557"/>
+          </a:solidFill>
+          <a:ln>
+            <a:noFill/>
+          </a:ln>
+        </p:spPr>
+        <p:style>
+          <a:lnRef idx="1">
+            <a:schemeClr val="accent1"/>
+          </a:lnRef>
+          <a:fillRef idx="3">
+            <a:schemeClr val="accent1"/>
+          </a:fillRef>
+          <a:effectRef idx="2">
+            <a:schemeClr val="accent1"/>
+          </a:effectRef>
+          <a:fontRef idx="minor">
+            <a:schemeClr val="lt1"/>
+          </a:fontRef>
+        </p:style>
+        <p:txBody>
+          <a:bodyPr rtlCol="0" anchor="ctr"/>
+          <a:lstStyle/>
+          <a:p>
+            <a:pPr algn="ctr"/>
+            <a:endParaRPr/>
+          </a:p>
+        </p:txBody>
+      </p:sp>
+      <p:sp>
+        <p:nvSpPr>
+          <p:cNvPr id="5" name="TextBox 4"/>
+          <p:cNvSpPr txBox="1"/>
+          <p:nvPr/>
+        </p:nvSpPr>
+        <p:spPr>
+          <a:xfrm>
+            <a:off x="347472" y="1216152"/>
+            <a:ext cx="2103120" cy="804672"/>
+          </a:xfrm>
+          <a:prstGeom prst="rect">
+            <a:avLst/>
+          </a:prstGeom>
+          <a:noFill/>
+        </p:spPr>
+        <p:txBody>
+          <a:bodyPr wrap="square">
+            <a:spAutoFit/>
+          </a:bodyPr>
+          <a:lstStyle/>
+          <a:p>
+            <a:pPr algn="ctr"/>
+            <a:r>
+              <a:rPr sz="4000" b="1" i="0">
+                <a:solidFill>
+                  <a:srgbClr val="4A90E2"/>
+                </a:solidFill>
+              </a:rPr>
+              <a:t>10+</a:t>
+            </a:r>
+          </a:p>
+        </p:txBody>
+      </p:sp>
+      <p:sp>
+        <p:nvSpPr>
+          <p:cNvPr id="6" name="TextBox 5"/>
+          <p:cNvSpPr txBox="1"/>
+          <p:nvPr/>
+        </p:nvSpPr>
+        <p:spPr>
+          <a:xfrm>
+            <a:off x="347472" y="1993392"/>
+            <a:ext cx="2103120" cy="658368"/>
+          </a:xfrm>
+          <a:prstGeom prst="rect">
+            <a:avLst/>
+          </a:prstGeom>
+          <a:noFill/>
+        </p:spPr>
+        <p:txBody>
+          <a:bodyPr wrap="square">
+            <a:spAutoFit/>
+          </a:bodyPr>
+          <a:lstStyle/>
+          <a:p>
+            <a:pPr algn="ctr"/>
+            <a:r>
+              <a:rPr sz="1400" b="0" i="0">
+                <a:solidFill>
+                  <a:srgbClr val="FFFFFF"/>
+                </a:solidFill>
+              </a:rPr>
+              <a:t>Swift files
+analysed</a:t>
+            </a:r>
+          </a:p>
+        </p:txBody>
+      </p:sp>
+      <p:sp>
+        <p:nvSpPr>
+          <p:cNvPr id="7" name="Rectangle 6"/>
+          <p:cNvSpPr/>
+          <p:nvPr/>
+        </p:nvSpPr>
+        <p:spPr>
+          <a:xfrm>
+            <a:off x="2615184" y="1170432"/>
+            <a:ext cx="2103120" cy="1554480"/>
+          </a:xfrm>
+          <a:prstGeom prst="rect">
+            <a:avLst/>
+          </a:prstGeom>
+          <a:solidFill>
+            <a:srgbClr val="1C3557"/>
+          </a:solidFill>
+          <a:ln>
+            <a:noFill/>
+          </a:ln>
+        </p:spPr>
+        <p:style>
+          <a:lnRef idx="1">
+            <a:schemeClr val="accent1"/>
+          </a:lnRef>
+          <a:fillRef idx="3">
+            <a:schemeClr val="accent1"/>
+          </a:fillRef>
+          <a:effectRef idx="2">
+            <a:schemeClr val="accent1"/>
+          </a:effectRef>
+          <a:fontRef idx="minor">
+            <a:schemeClr val="lt1"/>
+          </a:fontRef>
+        </p:style>
+        <p:txBody>
+          <a:bodyPr rtlCol="0" anchor="ctr"/>
+          <a:lstStyle/>
+          <a:p>
+            <a:pPr algn="ctr"/>
+            <a:endParaRPr/>
+          </a:p>
+        </p:txBody>
+      </p:sp>
+      <p:sp>
+        <p:nvSpPr>
+          <p:cNvPr id="8" name="TextBox 7"/>
+          <p:cNvSpPr txBox="1"/>
+          <p:nvPr/>
+        </p:nvSpPr>
+        <p:spPr>
+          <a:xfrm>
+            <a:off x="2615184" y="1216152"/>
+            <a:ext cx="2103120" cy="804672"/>
+          </a:xfrm>
+          <a:prstGeom prst="rect">
+            <a:avLst/>
+          </a:prstGeom>
+          <a:noFill/>
+        </p:spPr>
+        <p:txBody>
+          <a:bodyPr wrap="square">
+            <a:spAutoFit/>
+          </a:bodyPr>
+          <a:lstStyle/>
+          <a:p>
+            <a:pPr algn="ctr"/>
+            <a:r>
+              <a:rPr sz="4000" b="1" i="0">
+                <a:solidFill>
+                  <a:srgbClr val="4A90E2"/>
+                </a:solidFill>
+              </a:rPr>
+              <a:t>13</a:t>
+            </a:r>
+          </a:p>
+        </p:txBody>
+      </p:sp>
+      <p:sp>
+        <p:nvSpPr>
+          <p:cNvPr id="9" name="TextBox 8"/>
+          <p:cNvSpPr txBox="1"/>
+          <p:nvPr/>
+        </p:nvSpPr>
+        <p:spPr>
+          <a:xfrm>
+            <a:off x="2615184" y="1993392"/>
+            <a:ext cx="2103120" cy="658368"/>
+          </a:xfrm>
+          <a:prstGeom prst="rect">
+            <a:avLst/>
+          </a:prstGeom>
+          <a:noFill/>
+        </p:spPr>
+        <p:txBody>
+          <a:bodyPr wrap="square">
+            <a:spAutoFit/>
+          </a:bodyPr>
+          <a:lstStyle/>
+          <a:p>
+            <a:pPr algn="ctr"/>
+            <a:r>
+              <a:rPr sz="1400" b="0" i="0">
+                <a:solidFill>
+                  <a:srgbClr val="FFFFFF"/>
+                </a:solidFill>
+              </a:rPr>
+              <a:t>Kotlin files
+created</a:t>
+            </a:r>
+          </a:p>
+        </p:txBody>
+      </p:sp>
+      <p:sp>
+        <p:nvSpPr>
+          <p:cNvPr id="10" name="Rectangle 9"/>
+          <p:cNvSpPr/>
+          <p:nvPr/>
+        </p:nvSpPr>
+        <p:spPr>
+          <a:xfrm>
+            <a:off x="4882896" y="1170432"/>
+            <a:ext cx="2103120" cy="1554480"/>
+          </a:xfrm>
+          <a:prstGeom prst="rect">
+            <a:avLst/>
+          </a:prstGeom>
+          <a:solidFill>
+            <a:srgbClr val="1C3557"/>
+          </a:solidFill>
+          <a:ln>
+            <a:noFill/>
+          </a:ln>
+        </p:spPr>
+        <p:style>
+          <a:lnRef idx="1">
+            <a:schemeClr val="accent1"/>
+          </a:lnRef>
+          <a:fillRef idx="3">
+            <a:schemeClr val="accent1"/>
+          </a:fillRef>
+          <a:effectRef idx="2">
+            <a:schemeClr val="accent1"/>
+          </a:effectRef>
+          <a:fontRef idx="minor">
+            <a:schemeClr val="lt1"/>
+          </a:fontRef>
+        </p:style>
+        <p:txBody>
+          <a:bodyPr rtlCol="0" anchor="ctr"/>
+          <a:lstStyle/>
+          <a:p>
+            <a:pPr algn="ctr"/>
+            <a:endParaRPr/>
+          </a:p>
+        </p:txBody>
+      </p:sp>
+      <p:sp>
+        <p:nvSpPr>
+          <p:cNvPr id="11" name="TextBox 10"/>
+          <p:cNvSpPr txBox="1"/>
+          <p:nvPr/>
+        </p:nvSpPr>
+        <p:spPr>
+          <a:xfrm>
+            <a:off x="4882896" y="1216152"/>
+            <a:ext cx="2103120" cy="804672"/>
+          </a:xfrm>
+          <a:prstGeom prst="rect">
+            <a:avLst/>
+          </a:prstGeom>
+          <a:noFill/>
+        </p:spPr>
+        <p:txBody>
+          <a:bodyPr wrap="square">
+            <a:spAutoFit/>
+          </a:bodyPr>
+          <a:lstStyle/>
+          <a:p>
+            <a:pPr algn="ctr"/>
+            <a:r>
+              <a:rPr sz="4000" b="1" i="0">
+                <a:solidFill>
+                  <a:srgbClr val="4A90E2"/>
+                </a:solidFill>
+              </a:rPr>
+              <a:t>~95%</a:t>
+            </a:r>
+          </a:p>
+        </p:txBody>
+      </p:sp>
+      <p:sp>
+        <p:nvSpPr>
+          <p:cNvPr id="12" name="TextBox 11"/>
+          <p:cNvSpPr txBox="1"/>
+          <p:nvPr/>
+        </p:nvSpPr>
+        <p:spPr>
+          <a:xfrm>
+            <a:off x="4882896" y="1993392"/>
+            <a:ext cx="2103120" cy="658368"/>
+          </a:xfrm>
+          <a:prstGeom prst="rect">
+            <a:avLst/>
+          </a:prstGeom>
+          <a:noFill/>
+        </p:spPr>
+        <p:txBody>
+          <a:bodyPr wrap="square">
+            <a:spAutoFit/>
+          </a:bodyPr>
+          <a:lstStyle/>
+          <a:p>
+            <a:pPr algn="ctr"/>
+            <a:r>
+              <a:rPr sz="1400" b="0" i="0">
+                <a:solidFill>
+                  <a:srgbClr val="FFFFFF"/>
+                </a:solidFill>
+              </a:rPr>
+              <a:t>Feature parity</a:t>
+            </a:r>
+          </a:p>
+        </p:txBody>
+      </p:sp>
+      <p:sp>
+        <p:nvSpPr>
+          <p:cNvPr id="13" name="Rectangle 12"/>
+          <p:cNvSpPr/>
+          <p:nvPr/>
+        </p:nvSpPr>
+        <p:spPr>
+          <a:xfrm>
+            <a:off x="7150608" y="1170432"/>
+            <a:ext cx="2103120" cy="1554480"/>
+          </a:xfrm>
+          <a:prstGeom prst="rect">
+            <a:avLst/>
+          </a:prstGeom>
+          <a:solidFill>
+            <a:srgbClr val="1C3557"/>
+          </a:solidFill>
+          <a:ln>
+            <a:noFill/>
+          </a:ln>
+        </p:spPr>
+        <p:style>
+          <a:lnRef idx="1">
+            <a:schemeClr val="accent1"/>
+          </a:lnRef>
+          <a:fillRef idx="3">
+            <a:schemeClr val="accent1"/>
+          </a:fillRef>
+          <a:effectRef idx="2">
+            <a:schemeClr val="accent1"/>
+          </a:effectRef>
+          <a:fontRef idx="minor">
+            <a:schemeClr val="lt1"/>
+          </a:fontRef>
+        </p:style>
+        <p:txBody>
+          <a:bodyPr rtlCol="0" anchor="ctr"/>
+          <a:lstStyle/>
+          <a:p>
+            <a:pPr algn="ctr"/>
+            <a:endParaRPr/>
+          </a:p>
+        </p:txBody>
+      </p:sp>
+      <p:sp>
+        <p:nvSpPr>
+          <p:cNvPr id="14" name="TextBox 13"/>
+          <p:cNvSpPr txBox="1"/>
+          <p:nvPr/>
+        </p:nvSpPr>
+        <p:spPr>
+          <a:xfrm>
+            <a:off x="7150608" y="1216152"/>
+            <a:ext cx="2103120" cy="707886"/>
+          </a:xfrm>
+          <a:prstGeom prst="rect">
+            <a:avLst/>
+          </a:prstGeom>
+          <a:noFill/>
+        </p:spPr>
+        <p:txBody>
+          <a:bodyPr wrap="square">
+            <a:spAutoFit/>
+          </a:bodyPr>
+          <a:lstStyle/>
+          <a:p>
+            <a:pPr algn="ctr"/>
+            <a:r>
+              <a:rPr lang="de-DE" sz="4000" b="1" dirty="0">
+                <a:solidFill>
+                  <a:srgbClr val="4A90E2"/>
+                </a:solidFill>
+              </a:rPr>
+              <a:t>&gt;400k</a:t>
+            </a:r>
+            <a:endParaRPr sz="4000" b="1" i="0" dirty="0">
+              <a:solidFill>
+                <a:srgbClr val="4A90E2"/>
+              </a:solidFill>
+            </a:endParaRPr>
+          </a:p>
+        </p:txBody>
+      </p:sp>
+      <p:sp>
+        <p:nvSpPr>
+          <p:cNvPr id="15" name="TextBox 14"/>
+          <p:cNvSpPr txBox="1"/>
+          <p:nvPr/>
+        </p:nvSpPr>
+        <p:spPr>
+          <a:xfrm>
+            <a:off x="7150608" y="1993392"/>
+            <a:ext cx="2103120" cy="523220"/>
+          </a:xfrm>
+          <a:prstGeom prst="rect">
+            <a:avLst/>
+          </a:prstGeom>
+          <a:noFill/>
+        </p:spPr>
+        <p:txBody>
+          <a:bodyPr wrap="square">
+            <a:spAutoFit/>
+          </a:bodyPr>
+          <a:lstStyle/>
+          <a:p>
+            <a:pPr algn="ctr"/>
+            <a:r>
+              <a:rPr lang="de-DE" sz="1400" b="0" i="0" dirty="0" err="1">
+                <a:solidFill>
+                  <a:srgbClr val="FFFFFF"/>
+                </a:solidFill>
+              </a:rPr>
+              <a:t>tokens</a:t>
+            </a:r>
+            <a:r>
+              <a:rPr sz="1400" b="0" i="0" dirty="0">
+                <a:solidFill>
+                  <a:srgbClr val="FFFFFF"/>
+                </a:solidFill>
+              </a:rPr>
+              <a:t>
+used</a:t>
+            </a:r>
+          </a:p>
+        </p:txBody>
+      </p:sp>
+      <p:sp>
+        <p:nvSpPr>
+          <p:cNvPr id="16" name="Rectangle 15"/>
+          <p:cNvSpPr/>
+          <p:nvPr/>
+        </p:nvSpPr>
+        <p:spPr>
+          <a:xfrm>
+            <a:off x="9418320" y="1170432"/>
+            <a:ext cx="2103120" cy="1554480"/>
+          </a:xfrm>
+          <a:prstGeom prst="rect">
+            <a:avLst/>
+          </a:prstGeom>
+          <a:solidFill>
+            <a:srgbClr val="1C3557"/>
+          </a:solidFill>
+          <a:ln>
+            <a:noFill/>
+          </a:ln>
+        </p:spPr>
+        <p:style>
+          <a:lnRef idx="1">
+            <a:schemeClr val="accent1"/>
+          </a:lnRef>
+          <a:fillRef idx="3">
+            <a:schemeClr val="accent1"/>
+          </a:fillRef>
+          <a:effectRef idx="2">
+            <a:schemeClr val="accent1"/>
+          </a:effectRef>
+          <a:fontRef idx="minor">
+            <a:schemeClr val="lt1"/>
+          </a:fontRef>
+        </p:style>
+        <p:txBody>
+          <a:bodyPr rtlCol="0" anchor="ctr"/>
+          <a:lstStyle/>
+          <a:p>
+            <a:pPr algn="ctr"/>
+            <a:endParaRPr/>
+          </a:p>
+        </p:txBody>
+      </p:sp>
+      <p:sp>
+        <p:nvSpPr>
+          <p:cNvPr id="17" name="TextBox 16"/>
+          <p:cNvSpPr txBox="1"/>
+          <p:nvPr/>
+        </p:nvSpPr>
+        <p:spPr>
+          <a:xfrm>
+            <a:off x="9418320" y="1216152"/>
+            <a:ext cx="2103120" cy="804672"/>
+          </a:xfrm>
+          <a:prstGeom prst="rect">
+            <a:avLst/>
+          </a:prstGeom>
+          <a:noFill/>
+        </p:spPr>
+        <p:txBody>
+          <a:bodyPr wrap="square">
+            <a:spAutoFit/>
+          </a:bodyPr>
+          <a:lstStyle/>
+          <a:p>
+            <a:pPr algn="ctr"/>
+            <a:r>
+              <a:rPr sz="4000" b="1" i="0" dirty="0">
+                <a:solidFill>
+                  <a:srgbClr val="4A90E2"/>
+                </a:solidFill>
+              </a:rPr>
+              <a:t>&lt;1 week</a:t>
+            </a:r>
+          </a:p>
+        </p:txBody>
+      </p:sp>
+      <p:sp>
+        <p:nvSpPr>
+          <p:cNvPr id="18" name="TextBox 17"/>
+          <p:cNvSpPr txBox="1"/>
+          <p:nvPr/>
+        </p:nvSpPr>
+        <p:spPr>
+          <a:xfrm>
+            <a:off x="9418320" y="1993392"/>
+            <a:ext cx="2103120" cy="658368"/>
+          </a:xfrm>
+          <a:prstGeom prst="rect">
+            <a:avLst/>
+          </a:prstGeom>
+          <a:noFill/>
+        </p:spPr>
+        <p:txBody>
+          <a:bodyPr wrap="square">
+            <a:spAutoFit/>
+          </a:bodyPr>
+          <a:lstStyle/>
+          <a:p>
+            <a:pPr algn="ctr"/>
+            <a:r>
+              <a:rPr sz="1400" b="0" i="0">
+                <a:solidFill>
+                  <a:srgbClr val="FFFFFF"/>
+                </a:solidFill>
+              </a:rPr>
+              <a:t>Migration time</a:t>
+            </a:r>
+          </a:p>
+        </p:txBody>
+      </p:sp>
+      <p:sp>
+        <p:nvSpPr>
+          <p:cNvPr id="19" name="Rectangle 18"/>
+          <p:cNvSpPr/>
+          <p:nvPr/>
+        </p:nvSpPr>
+        <p:spPr>
+          <a:xfrm>
+            <a:off x="320040" y="2907792"/>
+            <a:ext cx="5669280" cy="3703320"/>
           </a:xfrm>
           <a:prstGeom prst="rect">
             <a:avLst/>
@@ -5103,20 +5809,20 @@
       </p:sp>
       <p:sp>
         <p:nvSpPr>
-          <p:cNvPr id="5" name="Rectangle 4"/>
+          <p:cNvPr id="20" name="Rectangle 19"/>
           <p:cNvSpPr/>
           <p:nvPr/>
         </p:nvSpPr>
         <p:spPr>
           <a:xfrm>
-            <a:off x="274320" y="1170432"/>
-            <a:ext cx="182880" cy="1920240"/>
+            <a:off x="320040" y="2907792"/>
+            <a:ext cx="5669280" cy="502920"/>
           </a:xfrm>
           <a:prstGeom prst="rect">
             <a:avLst/>
           </a:prstGeom>
           <a:solidFill>
-            <a:srgbClr val="E86A2C"/>
+            <a:srgbClr val="1C3557"/>
           </a:solidFill>
           <a:ln>
             <a:noFill/>
@@ -5147,14 +5853,14 @@
       </p:sp>
       <p:sp>
         <p:nvSpPr>
-          <p:cNvPr id="6" name="TextBox 5"/>
+          <p:cNvPr id="21" name="TextBox 20"/>
           <p:cNvSpPr txBox="1"/>
           <p:nvPr/>
         </p:nvSpPr>
         <p:spPr>
           <a:xfrm>
-            <a:off x="566928" y="1280160"/>
-            <a:ext cx="5303520" cy="384048"/>
+            <a:off x="320040" y="2935224"/>
+            <a:ext cx="5669280" cy="457200"/>
           </a:xfrm>
           <a:prstGeom prst="rect">
             <a:avLst/>
@@ -5167,28 +5873,28 @@
           </a:bodyPr>
           <a:lstStyle/>
           <a:p>
-            <a:pPr algn="l"/>
-            <a:r>
-              <a:rPr sz="1700" b="1" i="0">
-                <a:solidFill>
-                  <a:srgbClr val="1C3557"/>
-                </a:solidFill>
-              </a:rPr>
-              <a:t>WeatherKit not on Android</a:t>
-            </a:r>
-          </a:p>
-        </p:txBody>
-      </p:sp>
-      <p:sp>
-        <p:nvSpPr>
-          <p:cNvPr id="7" name="TextBox 6"/>
+            <a:pPr algn="ctr"/>
+            <a:r>
+              <a:rPr sz="1900" b="1" i="0">
+                <a:solidFill>
+                  <a:srgbClr val="FFFFFF"/>
+                </a:solidFill>
+              </a:rPr>
+              <a:t>What We Learned</a:t>
+            </a:r>
+          </a:p>
+        </p:txBody>
+      </p:sp>
+      <p:sp>
+        <p:nvSpPr>
+          <p:cNvPr id="22" name="TextBox 21"/>
           <p:cNvSpPr txBox="1"/>
           <p:nvPr/>
         </p:nvSpPr>
         <p:spPr>
           <a:xfrm>
-            <a:off x="566928" y="1700784"/>
-            <a:ext cx="5303520" cy="457200"/>
+            <a:off x="457200" y="3502152"/>
+            <a:ext cx="5394960" cy="2971800"/>
           </a:xfrm>
           <a:prstGeom prst="rect">
             <a:avLst/>
@@ -5201,62 +5907,62 @@
           </a:bodyPr>
           <a:lstStyle/>
           <a:p>
-            <a:pPr algn="l"/>
-            <a:r>
-              <a:rPr sz="1600" b="0" i="1">
-                <a:solidFill>
-                  <a:srgbClr val="993322"/>
-                </a:solidFill>
-              </a:rPr>
-              <a:t>Apple-exclusive API</a:t>
-            </a:r>
-          </a:p>
-        </p:txBody>
-      </p:sp>
-      <p:sp>
-        <p:nvSpPr>
-          <p:cNvPr id="8" name="TextBox 7"/>
-          <p:cNvSpPr txBox="1"/>
-          <p:nvPr/>
-        </p:nvSpPr>
-        <p:spPr>
-          <a:xfrm>
-            <a:off x="566928" y="2194560"/>
-            <a:ext cx="5303520" cy="777240"/>
-          </a:xfrm>
-          <a:prstGeom prst="rect">
-            <a:avLst/>
-          </a:prstGeom>
-          <a:noFill/>
-        </p:spPr>
-        <p:txBody>
-          <a:bodyPr wrap="square">
-            <a:spAutoFit/>
-          </a:bodyPr>
-          <a:lstStyle/>
-          <a:p>
-            <a:pPr algn="l"/>
-            <a:r>
-              <a:rPr sz="1600" b="0" i="0">
+            <a:pPr>
+              <a:spcBef>
+                <a:spcPts val="1800"/>
+              </a:spcBef>
+            </a:pPr>
+            <a:r>
+              <a:rPr sz="2000" dirty="0">
                 <a:solidFill>
                   <a:srgbClr val="222233"/>
                 </a:solidFill>
               </a:rPr>
-              <a:t>Used OpenWeatherMap REST API instead</a:t>
-            </a:r>
-          </a:p>
-        </p:txBody>
-      </p:sp>
-      <p:sp>
-        <p:nvSpPr>
-          <p:cNvPr id="9" name="Rectangle 8"/>
+              <a:t>  AI excels at translating between similar frameworks</a:t>
+            </a:r>
+          </a:p>
+          <a:p>
+            <a:pPr>
+              <a:spcBef>
+                <a:spcPts val="1800"/>
+              </a:spcBef>
+            </a:pPr>
+            <a:r>
+              <a:rPr sz="2000" dirty="0">
+                <a:solidFill>
+                  <a:srgbClr val="222233"/>
+                </a:solidFill>
+              </a:rPr>
+              <a:t>  Iterative prompting beats one-shot generation</a:t>
+            </a:r>
+          </a:p>
+          <a:p>
+            <a:pPr>
+              <a:spcBef>
+                <a:spcPts val="1800"/>
+              </a:spcBef>
+            </a:pPr>
+            <a:r>
+              <a:rPr sz="2000" dirty="0">
+                <a:solidFill>
+                  <a:srgbClr val="222233"/>
+                </a:solidFill>
+              </a:rPr>
+              <a:t>  Human oversight is still essential for config &amp; APIs</a:t>
+            </a:r>
+          </a:p>
+        </p:txBody>
+      </p:sp>
+      <p:sp>
+        <p:nvSpPr>
+          <p:cNvPr id="23" name="Rectangle 22"/>
           <p:cNvSpPr/>
           <p:nvPr/>
         </p:nvSpPr>
         <p:spPr>
           <a:xfrm>
-            <a:off x="6382512" y="1170432"/>
-            <a:ext cx="5669280" cy="1920240"/>
+            <a:off x="6281928" y="2907792"/>
+            <a:ext cx="5669280" cy="3703320"/>
           </a:xfrm>
           <a:prstGeom prst="rect">
             <a:avLst/>
@@ -5293,20 +5999,20 @@
       </p:sp>
       <p:sp>
         <p:nvSpPr>
-          <p:cNvPr id="10" name="Rectangle 9"/>
+          <p:cNvPr id="24" name="Rectangle 23"/>
           <p:cNvSpPr/>
           <p:nvPr/>
         </p:nvSpPr>
         <p:spPr>
           <a:xfrm>
-            <a:off x="6382512" y="1170432"/>
-            <a:ext cx="182880" cy="1920240"/>
+            <a:off x="6281928" y="2907792"/>
+            <a:ext cx="5669280" cy="502920"/>
           </a:xfrm>
           <a:prstGeom prst="rect">
             <a:avLst/>
           </a:prstGeom>
           <a:solidFill>
-            <a:srgbClr val="4A90E2"/>
+            <a:srgbClr val="147A3A"/>
           </a:solidFill>
           <a:ln>
             <a:noFill/>
@@ -5337,14 +6043,14 @@
       </p:sp>
       <p:sp>
         <p:nvSpPr>
-          <p:cNvPr id="11" name="TextBox 10"/>
+          <p:cNvPr id="25" name="TextBox 24"/>
           <p:cNvSpPr txBox="1"/>
           <p:nvPr/>
         </p:nvSpPr>
         <p:spPr>
           <a:xfrm>
-            <a:off x="6675120" y="1280160"/>
-            <a:ext cx="5303520" cy="384048"/>
+            <a:off x="6281928" y="2935224"/>
+            <a:ext cx="5669280" cy="457200"/>
           </a:xfrm>
           <a:prstGeom prst="rect">
             <a:avLst/>
@@ -5357,28 +6063,28 @@
           </a:bodyPr>
           <a:lstStyle/>
           <a:p>
-            <a:pPr algn="l"/>
-            <a:r>
-              <a:rPr sz="1700" b="1" i="0">
-                <a:solidFill>
-                  <a:srgbClr val="1C3557"/>
-                </a:solidFill>
-              </a:rPr>
-              <a:t>Sidebar navigation</a:t>
-            </a:r>
-          </a:p>
-        </p:txBody>
-      </p:sp>
-      <p:sp>
-        <p:nvSpPr>
-          <p:cNvPr id="12" name="TextBox 11"/>
+            <a:pPr algn="ctr"/>
+            <a:r>
+              <a:rPr sz="1900" b="1" i="0">
+                <a:solidFill>
+                  <a:srgbClr val="FFFFFF"/>
+                </a:solidFill>
+              </a:rPr>
+              <a:t>Verdict</a:t>
+            </a:r>
+          </a:p>
+        </p:txBody>
+      </p:sp>
+      <p:sp>
+        <p:nvSpPr>
+          <p:cNvPr id="26" name="TextBox 25"/>
           <p:cNvSpPr txBox="1"/>
           <p:nvPr/>
         </p:nvSpPr>
         <p:spPr>
           <a:xfrm>
-            <a:off x="6675120" y="1700784"/>
-            <a:ext cx="5303520" cy="457200"/>
+            <a:off x="6419088" y="3502152"/>
+            <a:ext cx="5394960" cy="2971800"/>
           </a:xfrm>
           <a:prstGeom prst="rect">
             <a:avLst/>
@@ -5391,428 +6097,48 @@
           </a:bodyPr>
           <a:lstStyle/>
           <a:p>
-            <a:pPr algn="l"/>
-            <a:r>
-              <a:rPr sz="1600" b="0" i="1">
-                <a:solidFill>
-                  <a:srgbClr val="993322"/>
-                </a:solidFill>
-              </a:rPr>
-              <a:t>No native drawer equivalent on Android</a:t>
-            </a:r>
-          </a:p>
-        </p:txBody>
-      </p:sp>
-      <p:sp>
-        <p:nvSpPr>
-          <p:cNvPr id="13" name="TextBox 12"/>
-          <p:cNvSpPr txBox="1"/>
-          <p:nvPr/>
-        </p:nvSpPr>
-        <p:spPr>
-          <a:xfrm>
-            <a:off x="6675120" y="2194560"/>
-            <a:ext cx="5303520" cy="777240"/>
-          </a:xfrm>
-          <a:prstGeom prst="rect">
-            <a:avLst/>
-          </a:prstGeom>
-          <a:noFill/>
-        </p:spPr>
-        <p:txBody>
-          <a:bodyPr wrap="square">
-            <a:spAutoFit/>
-          </a:bodyPr>
-          <a:lstStyle/>
-          <a:p>
-            <a:pPr algn="l"/>
-            <a:r>
-              <a:rPr sz="1600" b="0" i="0">
+            <a:pPr>
+              <a:spcBef>
+                <a:spcPts val="1800"/>
+              </a:spcBef>
+            </a:pPr>
+            <a:r>
+              <a:rPr sz="2000">
                 <a:solidFill>
                   <a:srgbClr val="222233"/>
                 </a:solidFill>
               </a:rPr>
-              <a:t>Left sidebar --&gt; search dialog   /   Right --&gt; BottomSheet</a:t>
-            </a:r>
-          </a:p>
-        </p:txBody>
-      </p:sp>
-      <p:sp>
-        <p:nvSpPr>
-          <p:cNvPr id="14" name="Rectangle 13"/>
-          <p:cNvSpPr/>
-          <p:nvPr/>
-        </p:nvSpPr>
-        <p:spPr>
-          <a:xfrm>
-            <a:off x="274320" y="3200400"/>
-            <a:ext cx="5669280" cy="1920240"/>
-          </a:xfrm>
-          <a:prstGeom prst="rect">
-            <a:avLst/>
-          </a:prstGeom>
-          <a:solidFill>
-            <a:srgbClr val="F4F6F9"/>
-          </a:solidFill>
-          <a:ln>
-            <a:noFill/>
-          </a:ln>
-        </p:spPr>
-        <p:style>
-          <a:lnRef idx="1">
-            <a:schemeClr val="accent1"/>
-          </a:lnRef>
-          <a:fillRef idx="3">
-            <a:schemeClr val="accent1"/>
-          </a:fillRef>
-          <a:effectRef idx="2">
-            <a:schemeClr val="accent1"/>
-          </a:effectRef>
-          <a:fontRef idx="minor">
-            <a:schemeClr val="lt1"/>
-          </a:fontRef>
-        </p:style>
-        <p:txBody>
-          <a:bodyPr rtlCol="0" anchor="ctr"/>
-          <a:lstStyle/>
-          <a:p>
-            <a:pPr algn="ctr"/>
-            <a:endParaRPr/>
-          </a:p>
-        </p:txBody>
-      </p:sp>
-      <p:sp>
-        <p:nvSpPr>
-          <p:cNvPr id="15" name="Rectangle 14"/>
-          <p:cNvSpPr/>
-          <p:nvPr/>
-        </p:nvSpPr>
-        <p:spPr>
-          <a:xfrm>
-            <a:off x="274320" y="3200400"/>
-            <a:ext cx="182880" cy="1920240"/>
-          </a:xfrm>
-          <a:prstGeom prst="rect">
-            <a:avLst/>
-          </a:prstGeom>
-          <a:solidFill>
-            <a:srgbClr val="8E44AD"/>
-          </a:solidFill>
-          <a:ln>
-            <a:noFill/>
-          </a:ln>
-        </p:spPr>
-        <p:style>
-          <a:lnRef idx="1">
-            <a:schemeClr val="accent1"/>
-          </a:lnRef>
-          <a:fillRef idx="3">
-            <a:schemeClr val="accent1"/>
-          </a:fillRef>
-          <a:effectRef idx="2">
-            <a:schemeClr val="accent1"/>
-          </a:effectRef>
-          <a:fontRef idx="minor">
-            <a:schemeClr val="lt1"/>
-          </a:fontRef>
-        </p:style>
-        <p:txBody>
-          <a:bodyPr rtlCol="0" anchor="ctr"/>
-          <a:lstStyle/>
-          <a:p>
-            <a:pPr algn="ctr"/>
-            <a:endParaRPr/>
-          </a:p>
-        </p:txBody>
-      </p:sp>
-      <p:sp>
-        <p:nvSpPr>
-          <p:cNvPr id="16" name="TextBox 15"/>
-          <p:cNvSpPr txBox="1"/>
-          <p:nvPr/>
-        </p:nvSpPr>
-        <p:spPr>
-          <a:xfrm>
-            <a:off x="566928" y="3310128"/>
-            <a:ext cx="5303520" cy="384048"/>
-          </a:xfrm>
-          <a:prstGeom prst="rect">
-            <a:avLst/>
-          </a:prstGeom>
-          <a:noFill/>
-        </p:spPr>
-        <p:txBody>
-          <a:bodyPr wrap="square">
-            <a:spAutoFit/>
-          </a:bodyPr>
-          <a:lstStyle/>
-          <a:p>
-            <a:pPr algn="l"/>
-            <a:r>
-              <a:rPr sz="1700" b="1" i="0">
-                <a:solidFill>
-                  <a:srgbClr val="1C3557"/>
-                </a:solidFill>
-              </a:rPr>
-              <a:t>Missing Version Catalog</a:t>
-            </a:r>
-          </a:p>
-        </p:txBody>
-      </p:sp>
-      <p:sp>
-        <p:nvSpPr>
-          <p:cNvPr id="17" name="TextBox 16"/>
-          <p:cNvSpPr txBox="1"/>
-          <p:nvPr/>
-        </p:nvSpPr>
-        <p:spPr>
-          <a:xfrm>
-            <a:off x="566928" y="3730752"/>
-            <a:ext cx="5303520" cy="457200"/>
-          </a:xfrm>
-          <a:prstGeom prst="rect">
-            <a:avLst/>
-          </a:prstGeom>
-          <a:noFill/>
-        </p:spPr>
-        <p:txBody>
-          <a:bodyPr wrap="square">
-            <a:spAutoFit/>
-          </a:bodyPr>
-          <a:lstStyle/>
-          <a:p>
-            <a:pPr algn="l"/>
-            <a:r>
-              <a:rPr sz="1600" b="0" i="1">
-                <a:solidFill>
-                  <a:srgbClr val="993322"/>
-                </a:solidFill>
-              </a:rPr>
-              <a:t>gradle/ was gitignored -- build broken</a:t>
-            </a:r>
-          </a:p>
-        </p:txBody>
-      </p:sp>
-      <p:sp>
-        <p:nvSpPr>
-          <p:cNvPr id="18" name="TextBox 17"/>
-          <p:cNvSpPr txBox="1"/>
-          <p:nvPr/>
-        </p:nvSpPr>
-        <p:spPr>
-          <a:xfrm>
-            <a:off x="566928" y="4224528"/>
-            <a:ext cx="5303520" cy="777240"/>
-          </a:xfrm>
-          <a:prstGeom prst="rect">
-            <a:avLst/>
-          </a:prstGeom>
-          <a:noFill/>
-        </p:spPr>
-        <p:txBody>
-          <a:bodyPr wrap="square">
-            <a:spAutoFit/>
-          </a:bodyPr>
-          <a:lstStyle/>
-          <a:p>
-            <a:pPr algn="l"/>
-            <a:r>
-              <a:rPr sz="1600" b="0" i="0">
+              <a:t>  AI made this migration feasible in under a week</a:t>
+            </a:r>
+          </a:p>
+          <a:p>
+            <a:pPr>
+              <a:spcBef>
+                <a:spcPts val="1800"/>
+              </a:spcBef>
+            </a:pPr>
+            <a:r>
+              <a:rPr sz="2000">
                 <a:solidFill>
                   <a:srgbClr val="222233"/>
                 </a:solidFill>
               </a:rPr>
-              <a:t>Fixed .gitignore, recreated libs.versions.toml</a:t>
-            </a:r>
-          </a:p>
-        </p:txBody>
-      </p:sp>
-      <p:sp>
-        <p:nvSpPr>
-          <p:cNvPr id="19" name="Rectangle 18"/>
-          <p:cNvSpPr/>
-          <p:nvPr/>
-        </p:nvSpPr>
-        <p:spPr>
-          <a:xfrm>
-            <a:off x="6382512" y="3200400"/>
-            <a:ext cx="5669280" cy="1920240"/>
-          </a:xfrm>
-          <a:prstGeom prst="rect">
-            <a:avLst/>
-          </a:prstGeom>
-          <a:solidFill>
-            <a:srgbClr val="F4F6F9"/>
-          </a:solidFill>
-          <a:ln>
-            <a:noFill/>
-          </a:ln>
-        </p:spPr>
-        <p:style>
-          <a:lnRef idx="1">
-            <a:schemeClr val="accent1"/>
-          </a:lnRef>
-          <a:fillRef idx="3">
-            <a:schemeClr val="accent1"/>
-          </a:fillRef>
-          <a:effectRef idx="2">
-            <a:schemeClr val="accent1"/>
-          </a:effectRef>
-          <a:fontRef idx="minor">
-            <a:schemeClr val="lt1"/>
-          </a:fontRef>
-        </p:style>
-        <p:txBody>
-          <a:bodyPr rtlCol="0" anchor="ctr"/>
-          <a:lstStyle/>
-          <a:p>
-            <a:pPr algn="ctr"/>
-            <a:endParaRPr/>
-          </a:p>
-        </p:txBody>
-      </p:sp>
-      <p:sp>
-        <p:nvSpPr>
-          <p:cNvPr id="20" name="Rectangle 19"/>
-          <p:cNvSpPr/>
-          <p:nvPr/>
-        </p:nvSpPr>
-        <p:spPr>
-          <a:xfrm>
-            <a:off x="6382512" y="3200400"/>
-            <a:ext cx="182880" cy="1920240"/>
-          </a:xfrm>
-          <a:prstGeom prst="rect">
-            <a:avLst/>
-          </a:prstGeom>
-          <a:solidFill>
-            <a:srgbClr val="3DDC84"/>
-          </a:solidFill>
-          <a:ln>
-            <a:noFill/>
-          </a:ln>
-        </p:spPr>
-        <p:style>
-          <a:lnRef idx="1">
-            <a:schemeClr val="accent1"/>
-          </a:lnRef>
-          <a:fillRef idx="3">
-            <a:schemeClr val="accent1"/>
-          </a:fillRef>
-          <a:effectRef idx="2">
-            <a:schemeClr val="accent1"/>
-          </a:effectRef>
-          <a:fontRef idx="minor">
-            <a:schemeClr val="lt1"/>
-          </a:fontRef>
-        </p:style>
-        <p:txBody>
-          <a:bodyPr rtlCol="0" anchor="ctr"/>
-          <a:lstStyle/>
-          <a:p>
-            <a:pPr algn="ctr"/>
-            <a:endParaRPr/>
-          </a:p>
-        </p:txBody>
-      </p:sp>
-      <p:sp>
-        <p:nvSpPr>
-          <p:cNvPr id="21" name="TextBox 20"/>
-          <p:cNvSpPr txBox="1"/>
-          <p:nvPr/>
-        </p:nvSpPr>
-        <p:spPr>
-          <a:xfrm>
-            <a:off x="6675120" y="3310128"/>
-            <a:ext cx="5303520" cy="384048"/>
-          </a:xfrm>
-          <a:prstGeom prst="rect">
-            <a:avLst/>
-          </a:prstGeom>
-          <a:noFill/>
-        </p:spPr>
-        <p:txBody>
-          <a:bodyPr wrap="square">
-            <a:spAutoFit/>
-          </a:bodyPr>
-          <a:lstStyle/>
-          <a:p>
-            <a:pPr algn="l"/>
-            <a:r>
-              <a:rPr sz="1700" b="1" i="0">
-                <a:solidFill>
-                  <a:srgbClr val="1C3557"/>
-                </a:solidFill>
-              </a:rPr>
-              <a:t>State management</a:t>
-            </a:r>
-          </a:p>
-        </p:txBody>
-      </p:sp>
-      <p:sp>
-        <p:nvSpPr>
-          <p:cNvPr id="22" name="TextBox 21"/>
-          <p:cNvSpPr txBox="1"/>
-          <p:nvPr/>
-        </p:nvSpPr>
-        <p:spPr>
-          <a:xfrm>
-            <a:off x="6675120" y="3730752"/>
-            <a:ext cx="5303520" cy="457200"/>
-          </a:xfrm>
-          <a:prstGeom prst="rect">
-            <a:avLst/>
-          </a:prstGeom>
-          <a:noFill/>
-        </p:spPr>
-        <p:txBody>
-          <a:bodyPr wrap="square">
-            <a:spAutoFit/>
-          </a:bodyPr>
-          <a:lstStyle/>
-          <a:p>
-            <a:pPr algn="l"/>
-            <a:r>
-              <a:rPr sz="1600" b="0" i="1">
-                <a:solidFill>
-                  <a:srgbClr val="993322"/>
-                </a:solidFill>
-              </a:rPr>
-              <a:t>No @EnvironmentObject in Compose</a:t>
-            </a:r>
-          </a:p>
-        </p:txBody>
-      </p:sp>
-      <p:sp>
-        <p:nvSpPr>
-          <p:cNvPr id="23" name="TextBox 22"/>
-          <p:cNvSpPr txBox="1"/>
-          <p:nvPr/>
-        </p:nvSpPr>
-        <p:spPr>
-          <a:xfrm>
-            <a:off x="6675120" y="4224528"/>
-            <a:ext cx="5303520" cy="777240"/>
-          </a:xfrm>
-          <a:prstGeom prst="rect">
-            <a:avLst/>
-          </a:prstGeom>
-          <a:noFill/>
-        </p:spPr>
-        <p:txBody>
-          <a:bodyPr wrap="square">
-            <a:spAutoFit/>
-          </a:bodyPr>
-          <a:lstStyle/>
-          <a:p>
-            <a:pPr algn="l"/>
-            <a:r>
-              <a:rPr sz="1600" b="0" i="0">
+              <a:t>  Claude produced clean, idiomatic Kotlin</a:t>
+            </a:r>
+          </a:p>
+          <a:p>
+            <a:pPr>
+              <a:spcBef>
+                <a:spcPts val="1800"/>
+              </a:spcBef>
+            </a:pPr>
+            <a:r>
+              <a:rPr sz="2000">
                 <a:solidFill>
                   <a:srgbClr val="222233"/>
                 </a:solidFill>
               </a:rPr>
-              <a:t>ViewModel + StateFlow + collectAsState()</a:t>
+              <a:t>  Workflow: AI drafts  --  Human reviews  --  AI fixes</a:t>
             </a:r>
           </a:p>
         </p:txBody>
@@ -5826,1073 +6152,6 @@
 </file>
 
 <file path=ppt/slides/slide13.xml><?xml version="1.0" encoding="utf-8"?>
-<p:sld xmlns:a="http://schemas.openxmlformats.org/drawingml/2006/main" xmlns:r="http://schemas.openxmlformats.org/officeDocument/2006/relationships" xmlns:p="http://schemas.openxmlformats.org/presentationml/2006/main">
-  <p:cSld>
-    <p:bg>
-      <p:bgPr>
-        <a:solidFill>
-          <a:srgbClr val="FFFFFF"/>
-        </a:solidFill>
-        <a:effectLst/>
-      </p:bgPr>
-    </p:bg>
-    <p:spTree>
-      <p:nvGrpSpPr>
-        <p:cNvPr id="1" name=""/>
-        <p:cNvGrpSpPr/>
-        <p:nvPr/>
-      </p:nvGrpSpPr>
-      <p:grpSpPr>
-        <a:xfrm>
-          <a:off x="0" y="0"/>
-          <a:ext cx="0" cy="0"/>
-          <a:chOff x="0" y="0"/>
-          <a:chExt cx="0" cy="0"/>
-        </a:xfrm>
-      </p:grpSpPr>
-      <p:sp>
-        <p:nvSpPr>
-          <p:cNvPr id="2" name="Rectangle 1"/>
-          <p:cNvSpPr/>
-          <p:nvPr/>
-        </p:nvSpPr>
-        <p:spPr>
-          <a:xfrm>
-            <a:off x="0" y="0"/>
-            <a:ext cx="12188952" cy="1097280"/>
-          </a:xfrm>
-          <a:prstGeom prst="rect">
-            <a:avLst/>
-          </a:prstGeom>
-          <a:solidFill>
-            <a:srgbClr val="1C3557"/>
-          </a:solidFill>
-          <a:ln>
-            <a:noFill/>
-          </a:ln>
-        </p:spPr>
-        <p:style>
-          <a:lnRef idx="1">
-            <a:schemeClr val="accent1"/>
-          </a:lnRef>
-          <a:fillRef idx="3">
-            <a:schemeClr val="accent1"/>
-          </a:fillRef>
-          <a:effectRef idx="2">
-            <a:schemeClr val="accent1"/>
-          </a:effectRef>
-          <a:fontRef idx="minor">
-            <a:schemeClr val="lt1"/>
-          </a:fontRef>
-        </p:style>
-        <p:txBody>
-          <a:bodyPr rtlCol="0" anchor="ctr"/>
-          <a:lstStyle/>
-          <a:p>
-            <a:pPr algn="ctr"/>
-            <a:endParaRPr/>
-          </a:p>
-        </p:txBody>
-      </p:sp>
-      <p:sp>
-        <p:nvSpPr>
-          <p:cNvPr id="3" name="TextBox 2"/>
-          <p:cNvSpPr txBox="1"/>
-          <p:nvPr/>
-        </p:nvSpPr>
-        <p:spPr>
-          <a:xfrm>
-            <a:off x="411480" y="201168"/>
-            <a:ext cx="11430000" cy="777240"/>
-          </a:xfrm>
-          <a:prstGeom prst="rect">
-            <a:avLst/>
-          </a:prstGeom>
-          <a:noFill/>
-        </p:spPr>
-        <p:txBody>
-          <a:bodyPr wrap="square">
-            <a:spAutoFit/>
-          </a:bodyPr>
-          <a:lstStyle/>
-          <a:p>
-            <a:pPr algn="l"/>
-            <a:r>
-              <a:rPr sz="3200" b="1" i="0">
-                <a:solidFill>
-                  <a:srgbClr val="FFFFFF"/>
-                </a:solidFill>
-              </a:rPr>
-              <a:t>Results &amp; Conclusion</a:t>
-            </a:r>
-          </a:p>
-        </p:txBody>
-      </p:sp>
-      <p:sp>
-        <p:nvSpPr>
-          <p:cNvPr id="4" name="Rectangle 3"/>
-          <p:cNvSpPr/>
-          <p:nvPr/>
-        </p:nvSpPr>
-        <p:spPr>
-          <a:xfrm>
-            <a:off x="347472" y="1170432"/>
-            <a:ext cx="2103120" cy="1554480"/>
-          </a:xfrm>
-          <a:prstGeom prst="rect">
-            <a:avLst/>
-          </a:prstGeom>
-          <a:solidFill>
-            <a:srgbClr val="1C3557"/>
-          </a:solidFill>
-          <a:ln>
-            <a:noFill/>
-          </a:ln>
-        </p:spPr>
-        <p:style>
-          <a:lnRef idx="1">
-            <a:schemeClr val="accent1"/>
-          </a:lnRef>
-          <a:fillRef idx="3">
-            <a:schemeClr val="accent1"/>
-          </a:fillRef>
-          <a:effectRef idx="2">
-            <a:schemeClr val="accent1"/>
-          </a:effectRef>
-          <a:fontRef idx="minor">
-            <a:schemeClr val="lt1"/>
-          </a:fontRef>
-        </p:style>
-        <p:txBody>
-          <a:bodyPr rtlCol="0" anchor="ctr"/>
-          <a:lstStyle/>
-          <a:p>
-            <a:pPr algn="ctr"/>
-            <a:endParaRPr/>
-          </a:p>
-        </p:txBody>
-      </p:sp>
-      <p:sp>
-        <p:nvSpPr>
-          <p:cNvPr id="5" name="TextBox 4"/>
-          <p:cNvSpPr txBox="1"/>
-          <p:nvPr/>
-        </p:nvSpPr>
-        <p:spPr>
-          <a:xfrm>
-            <a:off x="347472" y="1216152"/>
-            <a:ext cx="2103120" cy="804672"/>
-          </a:xfrm>
-          <a:prstGeom prst="rect">
-            <a:avLst/>
-          </a:prstGeom>
-          <a:noFill/>
-        </p:spPr>
-        <p:txBody>
-          <a:bodyPr wrap="square">
-            <a:spAutoFit/>
-          </a:bodyPr>
-          <a:lstStyle/>
-          <a:p>
-            <a:pPr algn="ctr"/>
-            <a:r>
-              <a:rPr sz="4000" b="1" i="0">
-                <a:solidFill>
-                  <a:srgbClr val="4A90E2"/>
-                </a:solidFill>
-              </a:rPr>
-              <a:t>10+</a:t>
-            </a:r>
-          </a:p>
-        </p:txBody>
-      </p:sp>
-      <p:sp>
-        <p:nvSpPr>
-          <p:cNvPr id="6" name="TextBox 5"/>
-          <p:cNvSpPr txBox="1"/>
-          <p:nvPr/>
-        </p:nvSpPr>
-        <p:spPr>
-          <a:xfrm>
-            <a:off x="347472" y="1993392"/>
-            <a:ext cx="2103120" cy="658368"/>
-          </a:xfrm>
-          <a:prstGeom prst="rect">
-            <a:avLst/>
-          </a:prstGeom>
-          <a:noFill/>
-        </p:spPr>
-        <p:txBody>
-          <a:bodyPr wrap="square">
-            <a:spAutoFit/>
-          </a:bodyPr>
-          <a:lstStyle/>
-          <a:p>
-            <a:pPr algn="ctr"/>
-            <a:r>
-              <a:rPr sz="1400" b="0" i="0">
-                <a:solidFill>
-                  <a:srgbClr val="FFFFFF"/>
-                </a:solidFill>
-              </a:rPr>
-              <a:t>Swift files
-analysed</a:t>
-            </a:r>
-          </a:p>
-        </p:txBody>
-      </p:sp>
-      <p:sp>
-        <p:nvSpPr>
-          <p:cNvPr id="7" name="Rectangle 6"/>
-          <p:cNvSpPr/>
-          <p:nvPr/>
-        </p:nvSpPr>
-        <p:spPr>
-          <a:xfrm>
-            <a:off x="2615184" y="1170432"/>
-            <a:ext cx="2103120" cy="1554480"/>
-          </a:xfrm>
-          <a:prstGeom prst="rect">
-            <a:avLst/>
-          </a:prstGeom>
-          <a:solidFill>
-            <a:srgbClr val="1C3557"/>
-          </a:solidFill>
-          <a:ln>
-            <a:noFill/>
-          </a:ln>
-        </p:spPr>
-        <p:style>
-          <a:lnRef idx="1">
-            <a:schemeClr val="accent1"/>
-          </a:lnRef>
-          <a:fillRef idx="3">
-            <a:schemeClr val="accent1"/>
-          </a:fillRef>
-          <a:effectRef idx="2">
-            <a:schemeClr val="accent1"/>
-          </a:effectRef>
-          <a:fontRef idx="minor">
-            <a:schemeClr val="lt1"/>
-          </a:fontRef>
-        </p:style>
-        <p:txBody>
-          <a:bodyPr rtlCol="0" anchor="ctr"/>
-          <a:lstStyle/>
-          <a:p>
-            <a:pPr algn="ctr"/>
-            <a:endParaRPr/>
-          </a:p>
-        </p:txBody>
-      </p:sp>
-      <p:sp>
-        <p:nvSpPr>
-          <p:cNvPr id="8" name="TextBox 7"/>
-          <p:cNvSpPr txBox="1"/>
-          <p:nvPr/>
-        </p:nvSpPr>
-        <p:spPr>
-          <a:xfrm>
-            <a:off x="2615184" y="1216152"/>
-            <a:ext cx="2103120" cy="804672"/>
-          </a:xfrm>
-          <a:prstGeom prst="rect">
-            <a:avLst/>
-          </a:prstGeom>
-          <a:noFill/>
-        </p:spPr>
-        <p:txBody>
-          <a:bodyPr wrap="square">
-            <a:spAutoFit/>
-          </a:bodyPr>
-          <a:lstStyle/>
-          <a:p>
-            <a:pPr algn="ctr"/>
-            <a:r>
-              <a:rPr sz="4000" b="1" i="0">
-                <a:solidFill>
-                  <a:srgbClr val="4A90E2"/>
-                </a:solidFill>
-              </a:rPr>
-              <a:t>13</a:t>
-            </a:r>
-          </a:p>
-        </p:txBody>
-      </p:sp>
-      <p:sp>
-        <p:nvSpPr>
-          <p:cNvPr id="9" name="TextBox 8"/>
-          <p:cNvSpPr txBox="1"/>
-          <p:nvPr/>
-        </p:nvSpPr>
-        <p:spPr>
-          <a:xfrm>
-            <a:off x="2615184" y="1993392"/>
-            <a:ext cx="2103120" cy="658368"/>
-          </a:xfrm>
-          <a:prstGeom prst="rect">
-            <a:avLst/>
-          </a:prstGeom>
-          <a:noFill/>
-        </p:spPr>
-        <p:txBody>
-          <a:bodyPr wrap="square">
-            <a:spAutoFit/>
-          </a:bodyPr>
-          <a:lstStyle/>
-          <a:p>
-            <a:pPr algn="ctr"/>
-            <a:r>
-              <a:rPr sz="1400" b="0" i="0">
-                <a:solidFill>
-                  <a:srgbClr val="FFFFFF"/>
-                </a:solidFill>
-              </a:rPr>
-              <a:t>Kotlin files
-created</a:t>
-            </a:r>
-          </a:p>
-        </p:txBody>
-      </p:sp>
-      <p:sp>
-        <p:nvSpPr>
-          <p:cNvPr id="10" name="Rectangle 9"/>
-          <p:cNvSpPr/>
-          <p:nvPr/>
-        </p:nvSpPr>
-        <p:spPr>
-          <a:xfrm>
-            <a:off x="4882896" y="1170432"/>
-            <a:ext cx="2103120" cy="1554480"/>
-          </a:xfrm>
-          <a:prstGeom prst="rect">
-            <a:avLst/>
-          </a:prstGeom>
-          <a:solidFill>
-            <a:srgbClr val="1C3557"/>
-          </a:solidFill>
-          <a:ln>
-            <a:noFill/>
-          </a:ln>
-        </p:spPr>
-        <p:style>
-          <a:lnRef idx="1">
-            <a:schemeClr val="accent1"/>
-          </a:lnRef>
-          <a:fillRef idx="3">
-            <a:schemeClr val="accent1"/>
-          </a:fillRef>
-          <a:effectRef idx="2">
-            <a:schemeClr val="accent1"/>
-          </a:effectRef>
-          <a:fontRef idx="minor">
-            <a:schemeClr val="lt1"/>
-          </a:fontRef>
-        </p:style>
-        <p:txBody>
-          <a:bodyPr rtlCol="0" anchor="ctr"/>
-          <a:lstStyle/>
-          <a:p>
-            <a:pPr algn="ctr"/>
-            <a:endParaRPr/>
-          </a:p>
-        </p:txBody>
-      </p:sp>
-      <p:sp>
-        <p:nvSpPr>
-          <p:cNvPr id="11" name="TextBox 10"/>
-          <p:cNvSpPr txBox="1"/>
-          <p:nvPr/>
-        </p:nvSpPr>
-        <p:spPr>
-          <a:xfrm>
-            <a:off x="4882896" y="1216152"/>
-            <a:ext cx="2103120" cy="804672"/>
-          </a:xfrm>
-          <a:prstGeom prst="rect">
-            <a:avLst/>
-          </a:prstGeom>
-          <a:noFill/>
-        </p:spPr>
-        <p:txBody>
-          <a:bodyPr wrap="square">
-            <a:spAutoFit/>
-          </a:bodyPr>
-          <a:lstStyle/>
-          <a:p>
-            <a:pPr algn="ctr"/>
-            <a:r>
-              <a:rPr sz="4000" b="1" i="0">
-                <a:solidFill>
-                  <a:srgbClr val="4A90E2"/>
-                </a:solidFill>
-              </a:rPr>
-              <a:t>~95%</a:t>
-            </a:r>
-          </a:p>
-        </p:txBody>
-      </p:sp>
-      <p:sp>
-        <p:nvSpPr>
-          <p:cNvPr id="12" name="TextBox 11"/>
-          <p:cNvSpPr txBox="1"/>
-          <p:nvPr/>
-        </p:nvSpPr>
-        <p:spPr>
-          <a:xfrm>
-            <a:off x="4882896" y="1993392"/>
-            <a:ext cx="2103120" cy="658368"/>
-          </a:xfrm>
-          <a:prstGeom prst="rect">
-            <a:avLst/>
-          </a:prstGeom>
-          <a:noFill/>
-        </p:spPr>
-        <p:txBody>
-          <a:bodyPr wrap="square">
-            <a:spAutoFit/>
-          </a:bodyPr>
-          <a:lstStyle/>
-          <a:p>
-            <a:pPr algn="ctr"/>
-            <a:r>
-              <a:rPr sz="1400" b="0" i="0">
-                <a:solidFill>
-                  <a:srgbClr val="FFFFFF"/>
-                </a:solidFill>
-              </a:rPr>
-              <a:t>Feature parity</a:t>
-            </a:r>
-          </a:p>
-        </p:txBody>
-      </p:sp>
-      <p:sp>
-        <p:nvSpPr>
-          <p:cNvPr id="13" name="Rectangle 12"/>
-          <p:cNvSpPr/>
-          <p:nvPr/>
-        </p:nvSpPr>
-        <p:spPr>
-          <a:xfrm>
-            <a:off x="7150608" y="1170432"/>
-            <a:ext cx="2103120" cy="1554480"/>
-          </a:xfrm>
-          <a:prstGeom prst="rect">
-            <a:avLst/>
-          </a:prstGeom>
-          <a:solidFill>
-            <a:srgbClr val="1C3557"/>
-          </a:solidFill>
-          <a:ln>
-            <a:noFill/>
-          </a:ln>
-        </p:spPr>
-        <p:style>
-          <a:lnRef idx="1">
-            <a:schemeClr val="accent1"/>
-          </a:lnRef>
-          <a:fillRef idx="3">
-            <a:schemeClr val="accent1"/>
-          </a:fillRef>
-          <a:effectRef idx="2">
-            <a:schemeClr val="accent1"/>
-          </a:effectRef>
-          <a:fontRef idx="minor">
-            <a:schemeClr val="lt1"/>
-          </a:fontRef>
-        </p:style>
-        <p:txBody>
-          <a:bodyPr rtlCol="0" anchor="ctr"/>
-          <a:lstStyle/>
-          <a:p>
-            <a:pPr algn="ctr"/>
-            <a:endParaRPr/>
-          </a:p>
-        </p:txBody>
-      </p:sp>
-      <p:sp>
-        <p:nvSpPr>
-          <p:cNvPr id="14" name="TextBox 13"/>
-          <p:cNvSpPr txBox="1"/>
-          <p:nvPr/>
-        </p:nvSpPr>
-        <p:spPr>
-          <a:xfrm>
-            <a:off x="7150608" y="1216152"/>
-            <a:ext cx="2103120" cy="707886"/>
-          </a:xfrm>
-          <a:prstGeom prst="rect">
-            <a:avLst/>
-          </a:prstGeom>
-          <a:noFill/>
-        </p:spPr>
-        <p:txBody>
-          <a:bodyPr wrap="square">
-            <a:spAutoFit/>
-          </a:bodyPr>
-          <a:lstStyle/>
-          <a:p>
-            <a:pPr algn="ctr"/>
-            <a:r>
-              <a:rPr lang="de-DE" sz="4000" b="1" dirty="0">
-                <a:solidFill>
-                  <a:srgbClr val="4A90E2"/>
-                </a:solidFill>
-              </a:rPr>
-              <a:t>&gt;400k</a:t>
-            </a:r>
-            <a:endParaRPr sz="4000" b="1" i="0" dirty="0">
-              <a:solidFill>
-                <a:srgbClr val="4A90E2"/>
-              </a:solidFill>
-            </a:endParaRPr>
-          </a:p>
-        </p:txBody>
-      </p:sp>
-      <p:sp>
-        <p:nvSpPr>
-          <p:cNvPr id="15" name="TextBox 14"/>
-          <p:cNvSpPr txBox="1"/>
-          <p:nvPr/>
-        </p:nvSpPr>
-        <p:spPr>
-          <a:xfrm>
-            <a:off x="7150608" y="1993392"/>
-            <a:ext cx="2103120" cy="523220"/>
-          </a:xfrm>
-          <a:prstGeom prst="rect">
-            <a:avLst/>
-          </a:prstGeom>
-          <a:noFill/>
-        </p:spPr>
-        <p:txBody>
-          <a:bodyPr wrap="square">
-            <a:spAutoFit/>
-          </a:bodyPr>
-          <a:lstStyle/>
-          <a:p>
-            <a:pPr algn="ctr"/>
-            <a:r>
-              <a:rPr lang="de-DE" sz="1400" b="0" i="0" dirty="0" err="1">
-                <a:solidFill>
-                  <a:srgbClr val="FFFFFF"/>
-                </a:solidFill>
-              </a:rPr>
-              <a:t>tokens</a:t>
-            </a:r>
-            <a:r>
-              <a:rPr sz="1400" b="0" i="0" dirty="0">
-                <a:solidFill>
-                  <a:srgbClr val="FFFFFF"/>
-                </a:solidFill>
-              </a:rPr>
-              <a:t>
-used</a:t>
-            </a:r>
-          </a:p>
-        </p:txBody>
-      </p:sp>
-      <p:sp>
-        <p:nvSpPr>
-          <p:cNvPr id="16" name="Rectangle 15"/>
-          <p:cNvSpPr/>
-          <p:nvPr/>
-        </p:nvSpPr>
-        <p:spPr>
-          <a:xfrm>
-            <a:off x="9418320" y="1170432"/>
-            <a:ext cx="2103120" cy="1554480"/>
-          </a:xfrm>
-          <a:prstGeom prst="rect">
-            <a:avLst/>
-          </a:prstGeom>
-          <a:solidFill>
-            <a:srgbClr val="1C3557"/>
-          </a:solidFill>
-          <a:ln>
-            <a:noFill/>
-          </a:ln>
-        </p:spPr>
-        <p:style>
-          <a:lnRef idx="1">
-            <a:schemeClr val="accent1"/>
-          </a:lnRef>
-          <a:fillRef idx="3">
-            <a:schemeClr val="accent1"/>
-          </a:fillRef>
-          <a:effectRef idx="2">
-            <a:schemeClr val="accent1"/>
-          </a:effectRef>
-          <a:fontRef idx="minor">
-            <a:schemeClr val="lt1"/>
-          </a:fontRef>
-        </p:style>
-        <p:txBody>
-          <a:bodyPr rtlCol="0" anchor="ctr"/>
-          <a:lstStyle/>
-          <a:p>
-            <a:pPr algn="ctr"/>
-            <a:endParaRPr/>
-          </a:p>
-        </p:txBody>
-      </p:sp>
-      <p:sp>
-        <p:nvSpPr>
-          <p:cNvPr id="17" name="TextBox 16"/>
-          <p:cNvSpPr txBox="1"/>
-          <p:nvPr/>
-        </p:nvSpPr>
-        <p:spPr>
-          <a:xfrm>
-            <a:off x="9418320" y="1216152"/>
-            <a:ext cx="2103120" cy="804672"/>
-          </a:xfrm>
-          <a:prstGeom prst="rect">
-            <a:avLst/>
-          </a:prstGeom>
-          <a:noFill/>
-        </p:spPr>
-        <p:txBody>
-          <a:bodyPr wrap="square">
-            <a:spAutoFit/>
-          </a:bodyPr>
-          <a:lstStyle/>
-          <a:p>
-            <a:pPr algn="ctr"/>
-            <a:r>
-              <a:rPr sz="4000" b="1" i="0" dirty="0">
-                <a:solidFill>
-                  <a:srgbClr val="4A90E2"/>
-                </a:solidFill>
-              </a:rPr>
-              <a:t>&lt;1 week</a:t>
-            </a:r>
-          </a:p>
-        </p:txBody>
-      </p:sp>
-      <p:sp>
-        <p:nvSpPr>
-          <p:cNvPr id="18" name="TextBox 17"/>
-          <p:cNvSpPr txBox="1"/>
-          <p:nvPr/>
-        </p:nvSpPr>
-        <p:spPr>
-          <a:xfrm>
-            <a:off x="9418320" y="1993392"/>
-            <a:ext cx="2103120" cy="658368"/>
-          </a:xfrm>
-          <a:prstGeom prst="rect">
-            <a:avLst/>
-          </a:prstGeom>
-          <a:noFill/>
-        </p:spPr>
-        <p:txBody>
-          <a:bodyPr wrap="square">
-            <a:spAutoFit/>
-          </a:bodyPr>
-          <a:lstStyle/>
-          <a:p>
-            <a:pPr algn="ctr"/>
-            <a:r>
-              <a:rPr sz="1400" b="0" i="0">
-                <a:solidFill>
-                  <a:srgbClr val="FFFFFF"/>
-                </a:solidFill>
-              </a:rPr>
-              <a:t>Migration time</a:t>
-            </a:r>
-          </a:p>
-        </p:txBody>
-      </p:sp>
-      <p:sp>
-        <p:nvSpPr>
-          <p:cNvPr id="19" name="Rectangle 18"/>
-          <p:cNvSpPr/>
-          <p:nvPr/>
-        </p:nvSpPr>
-        <p:spPr>
-          <a:xfrm>
-            <a:off x="320040" y="2907792"/>
-            <a:ext cx="5669280" cy="3703320"/>
-          </a:xfrm>
-          <a:prstGeom prst="rect">
-            <a:avLst/>
-          </a:prstGeom>
-          <a:solidFill>
-            <a:srgbClr val="F4F6F9"/>
-          </a:solidFill>
-          <a:ln>
-            <a:noFill/>
-          </a:ln>
-        </p:spPr>
-        <p:style>
-          <a:lnRef idx="1">
-            <a:schemeClr val="accent1"/>
-          </a:lnRef>
-          <a:fillRef idx="3">
-            <a:schemeClr val="accent1"/>
-          </a:fillRef>
-          <a:effectRef idx="2">
-            <a:schemeClr val="accent1"/>
-          </a:effectRef>
-          <a:fontRef idx="minor">
-            <a:schemeClr val="lt1"/>
-          </a:fontRef>
-        </p:style>
-        <p:txBody>
-          <a:bodyPr rtlCol="0" anchor="ctr"/>
-          <a:lstStyle/>
-          <a:p>
-            <a:pPr algn="ctr"/>
-            <a:endParaRPr/>
-          </a:p>
-        </p:txBody>
-      </p:sp>
-      <p:sp>
-        <p:nvSpPr>
-          <p:cNvPr id="20" name="Rectangle 19"/>
-          <p:cNvSpPr/>
-          <p:nvPr/>
-        </p:nvSpPr>
-        <p:spPr>
-          <a:xfrm>
-            <a:off x="320040" y="2907792"/>
-            <a:ext cx="5669280" cy="502920"/>
-          </a:xfrm>
-          <a:prstGeom prst="rect">
-            <a:avLst/>
-          </a:prstGeom>
-          <a:solidFill>
-            <a:srgbClr val="1C3557"/>
-          </a:solidFill>
-          <a:ln>
-            <a:noFill/>
-          </a:ln>
-        </p:spPr>
-        <p:style>
-          <a:lnRef idx="1">
-            <a:schemeClr val="accent1"/>
-          </a:lnRef>
-          <a:fillRef idx="3">
-            <a:schemeClr val="accent1"/>
-          </a:fillRef>
-          <a:effectRef idx="2">
-            <a:schemeClr val="accent1"/>
-          </a:effectRef>
-          <a:fontRef idx="minor">
-            <a:schemeClr val="lt1"/>
-          </a:fontRef>
-        </p:style>
-        <p:txBody>
-          <a:bodyPr rtlCol="0" anchor="ctr"/>
-          <a:lstStyle/>
-          <a:p>
-            <a:pPr algn="ctr"/>
-            <a:endParaRPr/>
-          </a:p>
-        </p:txBody>
-      </p:sp>
-      <p:sp>
-        <p:nvSpPr>
-          <p:cNvPr id="21" name="TextBox 20"/>
-          <p:cNvSpPr txBox="1"/>
-          <p:nvPr/>
-        </p:nvSpPr>
-        <p:spPr>
-          <a:xfrm>
-            <a:off x="320040" y="2935224"/>
-            <a:ext cx="5669280" cy="457200"/>
-          </a:xfrm>
-          <a:prstGeom prst="rect">
-            <a:avLst/>
-          </a:prstGeom>
-          <a:noFill/>
-        </p:spPr>
-        <p:txBody>
-          <a:bodyPr wrap="square">
-            <a:spAutoFit/>
-          </a:bodyPr>
-          <a:lstStyle/>
-          <a:p>
-            <a:pPr algn="ctr"/>
-            <a:r>
-              <a:rPr sz="1900" b="1" i="0">
-                <a:solidFill>
-                  <a:srgbClr val="FFFFFF"/>
-                </a:solidFill>
-              </a:rPr>
-              <a:t>What We Learned</a:t>
-            </a:r>
-          </a:p>
-        </p:txBody>
-      </p:sp>
-      <p:sp>
-        <p:nvSpPr>
-          <p:cNvPr id="22" name="TextBox 21"/>
-          <p:cNvSpPr txBox="1"/>
-          <p:nvPr/>
-        </p:nvSpPr>
-        <p:spPr>
-          <a:xfrm>
-            <a:off x="457200" y="3502152"/>
-            <a:ext cx="5394960" cy="2971800"/>
-          </a:xfrm>
-          <a:prstGeom prst="rect">
-            <a:avLst/>
-          </a:prstGeom>
-          <a:noFill/>
-        </p:spPr>
-        <p:txBody>
-          <a:bodyPr wrap="square">
-            <a:spAutoFit/>
-          </a:bodyPr>
-          <a:lstStyle/>
-          <a:p>
-            <a:pPr>
-              <a:spcBef>
-                <a:spcPts val="1800"/>
-              </a:spcBef>
-            </a:pPr>
-            <a:r>
-              <a:rPr sz="2000">
-                <a:solidFill>
-                  <a:srgbClr val="222233"/>
-                </a:solidFill>
-              </a:rPr>
-              <a:t>  AI excels at translating between similar frameworks</a:t>
-            </a:r>
-          </a:p>
-          <a:p>
-            <a:pPr>
-              <a:spcBef>
-                <a:spcPts val="1800"/>
-              </a:spcBef>
-            </a:pPr>
-            <a:r>
-              <a:rPr sz="2000">
-                <a:solidFill>
-                  <a:srgbClr val="222233"/>
-                </a:solidFill>
-              </a:rPr>
-              <a:t>  Iterative prompting beats one-shot generation</a:t>
-            </a:r>
-          </a:p>
-          <a:p>
-            <a:pPr>
-              <a:spcBef>
-                <a:spcPts val="1800"/>
-              </a:spcBef>
-            </a:pPr>
-            <a:r>
-              <a:rPr sz="2000">
-                <a:solidFill>
-                  <a:srgbClr val="222233"/>
-                </a:solidFill>
-              </a:rPr>
-              <a:t>  Human oversight is still essential for config &amp; APIs</a:t>
-            </a:r>
-          </a:p>
-        </p:txBody>
-      </p:sp>
-      <p:sp>
-        <p:nvSpPr>
-          <p:cNvPr id="23" name="Rectangle 22"/>
-          <p:cNvSpPr/>
-          <p:nvPr/>
-        </p:nvSpPr>
-        <p:spPr>
-          <a:xfrm>
-            <a:off x="6281928" y="2907792"/>
-            <a:ext cx="5669280" cy="3703320"/>
-          </a:xfrm>
-          <a:prstGeom prst="rect">
-            <a:avLst/>
-          </a:prstGeom>
-          <a:solidFill>
-            <a:srgbClr val="F4F6F9"/>
-          </a:solidFill>
-          <a:ln>
-            <a:noFill/>
-          </a:ln>
-        </p:spPr>
-        <p:style>
-          <a:lnRef idx="1">
-            <a:schemeClr val="accent1"/>
-          </a:lnRef>
-          <a:fillRef idx="3">
-            <a:schemeClr val="accent1"/>
-          </a:fillRef>
-          <a:effectRef idx="2">
-            <a:schemeClr val="accent1"/>
-          </a:effectRef>
-          <a:fontRef idx="minor">
-            <a:schemeClr val="lt1"/>
-          </a:fontRef>
-        </p:style>
-        <p:txBody>
-          <a:bodyPr rtlCol="0" anchor="ctr"/>
-          <a:lstStyle/>
-          <a:p>
-            <a:pPr algn="ctr"/>
-            <a:endParaRPr/>
-          </a:p>
-        </p:txBody>
-      </p:sp>
-      <p:sp>
-        <p:nvSpPr>
-          <p:cNvPr id="24" name="Rectangle 23"/>
-          <p:cNvSpPr/>
-          <p:nvPr/>
-        </p:nvSpPr>
-        <p:spPr>
-          <a:xfrm>
-            <a:off x="6281928" y="2907792"/>
-            <a:ext cx="5669280" cy="502920"/>
-          </a:xfrm>
-          <a:prstGeom prst="rect">
-            <a:avLst/>
-          </a:prstGeom>
-          <a:solidFill>
-            <a:srgbClr val="147A3A"/>
-          </a:solidFill>
-          <a:ln>
-            <a:noFill/>
-          </a:ln>
-        </p:spPr>
-        <p:style>
-          <a:lnRef idx="1">
-            <a:schemeClr val="accent1"/>
-          </a:lnRef>
-          <a:fillRef idx="3">
-            <a:schemeClr val="accent1"/>
-          </a:fillRef>
-          <a:effectRef idx="2">
-            <a:schemeClr val="accent1"/>
-          </a:effectRef>
-          <a:fontRef idx="minor">
-            <a:schemeClr val="lt1"/>
-          </a:fontRef>
-        </p:style>
-        <p:txBody>
-          <a:bodyPr rtlCol="0" anchor="ctr"/>
-          <a:lstStyle/>
-          <a:p>
-            <a:pPr algn="ctr"/>
-            <a:endParaRPr/>
-          </a:p>
-        </p:txBody>
-      </p:sp>
-      <p:sp>
-        <p:nvSpPr>
-          <p:cNvPr id="25" name="TextBox 24"/>
-          <p:cNvSpPr txBox="1"/>
-          <p:nvPr/>
-        </p:nvSpPr>
-        <p:spPr>
-          <a:xfrm>
-            <a:off x="6281928" y="2935224"/>
-            <a:ext cx="5669280" cy="457200"/>
-          </a:xfrm>
-          <a:prstGeom prst="rect">
-            <a:avLst/>
-          </a:prstGeom>
-          <a:noFill/>
-        </p:spPr>
-        <p:txBody>
-          <a:bodyPr wrap="square">
-            <a:spAutoFit/>
-          </a:bodyPr>
-          <a:lstStyle/>
-          <a:p>
-            <a:pPr algn="ctr"/>
-            <a:r>
-              <a:rPr sz="1900" b="1" i="0">
-                <a:solidFill>
-                  <a:srgbClr val="FFFFFF"/>
-                </a:solidFill>
-              </a:rPr>
-              <a:t>Verdict</a:t>
-            </a:r>
-          </a:p>
-        </p:txBody>
-      </p:sp>
-      <p:sp>
-        <p:nvSpPr>
-          <p:cNvPr id="26" name="TextBox 25"/>
-          <p:cNvSpPr txBox="1"/>
-          <p:nvPr/>
-        </p:nvSpPr>
-        <p:spPr>
-          <a:xfrm>
-            <a:off x="6419088" y="3502152"/>
-            <a:ext cx="5394960" cy="2971800"/>
-          </a:xfrm>
-          <a:prstGeom prst="rect">
-            <a:avLst/>
-          </a:prstGeom>
-          <a:noFill/>
-        </p:spPr>
-        <p:txBody>
-          <a:bodyPr wrap="square">
-            <a:spAutoFit/>
-          </a:bodyPr>
-          <a:lstStyle/>
-          <a:p>
-            <a:pPr>
-              <a:spcBef>
-                <a:spcPts val="1800"/>
-              </a:spcBef>
-            </a:pPr>
-            <a:r>
-              <a:rPr sz="2000">
-                <a:solidFill>
-                  <a:srgbClr val="222233"/>
-                </a:solidFill>
-              </a:rPr>
-              <a:t>  AI made this migration feasible in under a week</a:t>
-            </a:r>
-          </a:p>
-          <a:p>
-            <a:pPr>
-              <a:spcBef>
-                <a:spcPts val="1800"/>
-              </a:spcBef>
-            </a:pPr>
-            <a:r>
-              <a:rPr sz="2000">
-                <a:solidFill>
-                  <a:srgbClr val="222233"/>
-                </a:solidFill>
-              </a:rPr>
-              <a:t>  Claude produced clean, idiomatic Kotlin</a:t>
-            </a:r>
-          </a:p>
-          <a:p>
-            <a:pPr>
-              <a:spcBef>
-                <a:spcPts val="1800"/>
-              </a:spcBef>
-            </a:pPr>
-            <a:r>
-              <a:rPr sz="2000">
-                <a:solidFill>
-                  <a:srgbClr val="222233"/>
-                </a:solidFill>
-              </a:rPr>
-              <a:t>  Workflow: AI drafts  --  Human reviews  --  AI fixes</a:t>
-            </a:r>
-          </a:p>
-        </p:txBody>
-      </p:sp>
-    </p:spTree>
-  </p:cSld>
-  <p:clrMapOvr>
-    <a:masterClrMapping/>
-  </p:clrMapOvr>
-</p:sld>
-</file>
-
-<file path=ppt/slides/slide14.xml><?xml version="1.0" encoding="utf-8"?>
 <p:sld xmlns:a="http://schemas.openxmlformats.org/drawingml/2006/main" xmlns:r="http://schemas.openxmlformats.org/officeDocument/2006/relationships" xmlns:p="http://schemas.openxmlformats.org/presentationml/2006/main">
   <p:cSld>
     <p:bg>
@@ -10376,7 +9635,7 @@
         <p:spPr>
           <a:xfrm>
             <a:off x="502920" y="1920240"/>
-            <a:ext cx="5120640" cy="4480560"/>
+            <a:ext cx="5120640" cy="2139047"/>
           </a:xfrm>
           <a:prstGeom prst="rect">
             <a:avLst/>
@@ -10395,7 +9654,7 @@
               </a:spcBef>
             </a:pPr>
             <a:r>
-              <a:rPr sz="2200">
+              <a:rPr sz="2200" dirty="0">
                 <a:solidFill>
                   <a:srgbClr val="222233"/>
                 </a:solidFill>
@@ -10410,7 +9669,7 @@
               </a:spcBef>
             </a:pPr>
             <a:r>
-              <a:rPr sz="2200">
+              <a:rPr sz="2200" dirty="0">
                 <a:solidFill>
                   <a:srgbClr val="222233"/>
                 </a:solidFill>
@@ -10425,12 +9684,44 @@
               </a:spcBef>
             </a:pPr>
             <a:r>
-              <a:rPr sz="2200">
+              <a:rPr sz="2200" dirty="0">
                 <a:solidFill>
                   <a:srgbClr val="222233"/>
                 </a:solidFill>
               </a:rPr>
-              <a:t>  City search  +  oC / oF toggle</a:t>
+              <a:t>  City search  +  C</a:t>
+            </a:r>
+            <a:r>
+              <a:rPr lang="de-AT" sz="2200" dirty="0">
+                <a:solidFill>
+                  <a:srgbClr val="222233"/>
+                </a:solidFill>
+              </a:rPr>
+              <a:t>°</a:t>
+            </a:r>
+            <a:r>
+              <a:rPr sz="2200" dirty="0">
+                <a:solidFill>
+                  <a:srgbClr val="222233"/>
+                </a:solidFill>
+              </a:rPr>
+              <a:t> / F</a:t>
+            </a:r>
+            <a:r>
+              <a:rPr lang="de-AT" sz="2200" dirty="0">
+                <a:solidFill>
+                  <a:srgbClr val="222233"/>
+                </a:solidFill>
+              </a:rPr>
+              <a:t>°</a:t>
+            </a:r>
+            <a:r>
+              <a:rPr sz="2200" dirty="0">
+                <a:solidFill>
+                  <a:srgbClr val="222233"/>
+                </a:solidFill>
+              </a:rPr>
+              <a:t> toggle</a:t>
             </a:r>
           </a:p>
           <a:p>
@@ -10440,7 +9731,7 @@
               </a:spcBef>
             </a:pPr>
             <a:r>
-              <a:rPr sz="2200">
+              <a:rPr sz="2200" dirty="0">
                 <a:solidFill>
                   <a:srgbClr val="222233"/>
                 </a:solidFill>
@@ -12305,13 +11596,18 @@
           <a:p>
             <a:pPr algn="l"/>
             <a:r>
-              <a:rPr sz="1600" b="0" i="0">
+              <a:rPr sz="1600" b="0" i="0" dirty="0" err="1">
                 <a:solidFill>
                   <a:srgbClr val="222233"/>
                 </a:solidFill>
               </a:rPr>
               <a:t>AddLocationView</a:t>
             </a:r>
+            <a:endParaRPr sz="1600" b="0" i="0" dirty="0">
+              <a:solidFill>
+                <a:srgbClr val="222233"/>
+              </a:solidFill>
+            </a:endParaRPr>
           </a:p>
         </p:txBody>
       </p:sp>
@@ -12383,13 +11679,18 @@
           <a:p>
             <a:pPr algn="l"/>
             <a:r>
-              <a:rPr sz="1600" b="0" i="0">
+              <a:rPr sz="1600" b="0" i="0" dirty="0" err="1">
                 <a:solidFill>
                   <a:srgbClr val="222233"/>
                 </a:solidFill>
               </a:rPr>
               <a:t>AlertDialog</a:t>
             </a:r>
+            <a:endParaRPr sz="1600" b="0" i="0" dirty="0">
+              <a:solidFill>
+                <a:srgbClr val="222233"/>
+              </a:solidFill>
+            </a:endParaRPr>
           </a:p>
         </p:txBody>
       </p:sp>
@@ -13085,7 +12386,7 @@
           <a:p>
             <a:pPr algn="l"/>
             <a:r>
-              <a:rPr sz="1600" b="0" i="0">
+              <a:rPr sz="1600" b="0" i="0" dirty="0">
                 <a:solidFill>
                   <a:srgbClr val="222233"/>
                 </a:solidFill>
@@ -13319,13 +12620,18 @@
           <a:p>
             <a:pPr algn="l"/>
             <a:r>
-              <a:rPr sz="1600" b="0" i="0">
+              <a:rPr sz="1600" b="0" i="0" dirty="0" err="1">
                 <a:solidFill>
                   <a:srgbClr val="222233"/>
                 </a:solidFill>
               </a:rPr>
               <a:t>DataStore</a:t>
             </a:r>
+            <a:endParaRPr sz="1600" b="0" i="0" dirty="0">
+              <a:solidFill>
+                <a:srgbClr val="222233"/>
+              </a:solidFill>
+            </a:endParaRPr>
           </a:p>
         </p:txBody>
       </p:sp>

--- a/docs/WeatheryApp_Presentation.pptx
+++ b/docs/WeatheryApp_Presentation.pptx
@@ -7578,7 +7578,7 @@
         <p:spPr>
           <a:xfrm>
             <a:off x="6080760" y="1920240"/>
-            <a:ext cx="5577840" cy="4572000"/>
+            <a:ext cx="5577840" cy="2139047"/>
           </a:xfrm>
           <a:prstGeom prst="rect">
             <a:avLst/>
@@ -7597,13 +7597,26 @@
               </a:spcBef>
             </a:pPr>
             <a:r>
-              <a:rPr sz="2200">
+              <a:rPr sz="2200" dirty="0">
                 <a:solidFill>
                   <a:srgbClr val="222233"/>
                 </a:solidFill>
               </a:rPr>
-              <a:t>  Swift 5  +  SwiftUI</a:t>
-            </a:r>
+              <a:t>  Swift 5  +  </a:t>
+            </a:r>
+            <a:r>
+              <a:rPr sz="2200" dirty="0" err="1">
+                <a:solidFill>
+                  <a:srgbClr val="222233"/>
+                </a:solidFill>
+              </a:rPr>
+              <a:t>SwiftUI</a:t>
+            </a:r>
+            <a:endParaRPr sz="2200" dirty="0">
+              <a:solidFill>
+                <a:srgbClr val="222233"/>
+              </a:solidFill>
+            </a:endParaRPr>
           </a:p>
           <a:p>
             <a:pPr>
@@ -7612,13 +7625,26 @@
               </a:spcBef>
             </a:pPr>
             <a:r>
-              <a:rPr sz="2200">
+              <a:rPr lang="de-DE" sz="2200" dirty="0">
                 <a:solidFill>
                   <a:srgbClr val="222233"/>
                 </a:solidFill>
               </a:rPr>
-              <a:t>  URLSession  +  CoreLocation</a:t>
-            </a:r>
+              <a:t>  </a:t>
+            </a:r>
+            <a:r>
+              <a:rPr sz="2200" dirty="0" err="1">
+                <a:solidFill>
+                  <a:srgbClr val="222233"/>
+                </a:solidFill>
+              </a:rPr>
+              <a:t>CoreLocation</a:t>
+            </a:r>
+            <a:endParaRPr sz="2200" dirty="0">
+              <a:solidFill>
+                <a:srgbClr val="222233"/>
+              </a:solidFill>
+            </a:endParaRPr>
           </a:p>
           <a:p>
             <a:pPr>
@@ -7627,7 +7653,7 @@
               </a:spcBef>
             </a:pPr>
             <a:r>
-              <a:rPr sz="2200">
+              <a:rPr sz="2200" dirty="0">
                 <a:solidFill>
                   <a:srgbClr val="222233"/>
                 </a:solidFill>
@@ -7642,13 +7668,34 @@
               </a:spcBef>
             </a:pPr>
             <a:r>
-              <a:rPr sz="2200">
+              <a:rPr sz="2200" dirty="0">
                 <a:solidFill>
                   <a:srgbClr val="222233"/>
                 </a:solidFill>
               </a:rPr>
-              <a:t>  UserDefaults  +  async/await</a:t>
-            </a:r>
+              <a:t>  </a:t>
+            </a:r>
+            <a:r>
+              <a:rPr sz="2200" dirty="0" err="1">
+                <a:solidFill>
+                  <a:srgbClr val="222233"/>
+                </a:solidFill>
+              </a:rPr>
+              <a:t>UserDefault</a:t>
+            </a:r>
+            <a:r>
+              <a:rPr lang="de-DE" sz="2200" dirty="0">
+                <a:solidFill>
+                  <a:srgbClr val="222233"/>
+                </a:solidFill>
+              </a:rPr>
+              <a:t>s</a:t>
+            </a:r>
+            <a:endParaRPr sz="2200" dirty="0">
+              <a:solidFill>
+                <a:srgbClr val="222233"/>
+              </a:solidFill>
+            </a:endParaRPr>
           </a:p>
         </p:txBody>
       </p:sp>
@@ -12877,7 +12924,7 @@
         <p:spPr>
           <a:xfrm>
             <a:off x="475488" y="1810512"/>
-            <a:ext cx="5321808" cy="4663440"/>
+            <a:ext cx="5321808" cy="2708434"/>
           </a:xfrm>
           <a:prstGeom prst="rect">
             <a:avLst/>
@@ -12896,12 +12943,12 @@
               </a:spcBef>
             </a:pPr>
             <a:r>
-              <a:rPr sz="2000">
+              <a:rPr sz="2000" dirty="0">
                 <a:solidFill>
                   <a:srgbClr val="222233"/>
                 </a:solidFill>
               </a:rPr>
-              <a:t>  Swift to Kotlin translation: perfect first attempt</a:t>
+              <a:t>  Swift to Kotlin translation</a:t>
             </a:r>
           </a:p>
           <a:p>
@@ -12911,12 +12958,28 @@
               </a:spcBef>
             </a:pPr>
             <a:r>
-              <a:rPr sz="2000">
+              <a:rPr sz="2000" dirty="0">
                 <a:solidFill>
                   <a:srgbClr val="222233"/>
                 </a:solidFill>
               </a:rPr>
-              <a:t>  SwiftUI to Compose: clean mapping, same mental model</a:t>
+              <a:t>  </a:t>
+            </a:r>
+            <a:r>
+              <a:rPr sz="2000" dirty="0" err="1">
+                <a:solidFill>
+                  <a:srgbClr val="222233"/>
+                </a:solidFill>
+              </a:rPr>
+              <a:t>SwiftUI</a:t>
+            </a:r>
+            <a:r>
+              <a:rPr sz="2000" dirty="0">
+                <a:solidFill>
+                  <a:srgbClr val="222233"/>
+                </a:solidFill>
+              </a:rPr>
+              <a:t> to Compose: clean mapping, same mental model</a:t>
             </a:r>
           </a:p>
           <a:p>
@@ -12926,12 +12989,52 @@
               </a:spcBef>
             </a:pPr>
             <a:r>
-              <a:rPr sz="2000">
+              <a:rPr sz="2000" dirty="0">
                 <a:solidFill>
                   <a:srgbClr val="222233"/>
                 </a:solidFill>
               </a:rPr>
-              <a:t>  Architecture (MVVM + StateFlow) applied correctly</a:t>
+              <a:t>  Architecture (MVVM + </a:t>
+            </a:r>
+            <a:r>
+              <a:rPr sz="2000" dirty="0" err="1">
+                <a:solidFill>
+                  <a:srgbClr val="222233"/>
+                </a:solidFill>
+              </a:rPr>
+              <a:t>StateFlow</a:t>
+            </a:r>
+            <a:r>
+              <a:rPr sz="2000" dirty="0">
+                <a:solidFill>
+                  <a:srgbClr val="222233"/>
+                </a:solidFill>
+              </a:rPr>
+              <a:t>) </a:t>
+            </a:r>
+            <a:r>
+              <a:rPr sz="2000" dirty="0" err="1">
+                <a:solidFill>
+                  <a:srgbClr val="222233"/>
+                </a:solidFill>
+              </a:rPr>
+              <a:t>applie</a:t>
+            </a:r>
+            <a:r>
+              <a:rPr lang="de-DE" sz="2000" dirty="0">
+                <a:solidFill>
+                  <a:srgbClr val="222233"/>
+                </a:solidFill>
+              </a:rPr>
+              <a:t>d  </a:t>
+            </a:r>
+            <a:r>
+              <a:rPr sz="2000" dirty="0">
+                <a:solidFill>
+                  <a:srgbClr val="222233"/>
+                </a:solidFill>
+              </a:rPr>
+              <a:t>correctly</a:t>
             </a:r>
           </a:p>
           <a:p>
@@ -12941,12 +13044,12 @@
               </a:spcBef>
             </a:pPr>
             <a:r>
-              <a:rPr sz="2000">
+              <a:rPr sz="2000" dirty="0">
                 <a:solidFill>
                   <a:srgbClr val="222233"/>
                 </a:solidFill>
               </a:rPr>
-              <a:t>  Build errors fixed quickly by re-prompting</a:t>
+              <a:t>errors fixed quickly by re-prompting</a:t>
             </a:r>
           </a:p>
         </p:txBody>
@@ -13082,7 +13185,7 @@
         <p:spPr>
           <a:xfrm>
             <a:off x="6163056" y="1810512"/>
-            <a:ext cx="5577840" cy="4663440"/>
+            <a:ext cx="5577840" cy="3221395"/>
           </a:xfrm>
           <a:prstGeom prst="rect">
             <a:avLst/>
@@ -13101,12 +13204,12 @@
               </a:spcBef>
             </a:pPr>
             <a:r>
-              <a:rPr sz="2000">
+              <a:rPr sz="2000" dirty="0">
                 <a:solidFill>
                   <a:srgbClr val="222233"/>
                 </a:solidFill>
               </a:rPr>
-              <a:t>  Wrong API URL  (paid vs. free endpoint)</a:t>
+              <a:t>  Wrong API</a:t>
             </a:r>
           </a:p>
           <a:p>
@@ -13116,12 +13219,28 @@
               </a:spcBef>
             </a:pPr>
             <a:r>
-              <a:rPr sz="2000">
+              <a:rPr sz="2000" dirty="0">
                 <a:solidFill>
                   <a:srgbClr val="222233"/>
                 </a:solidFill>
               </a:rPr>
-              <a:t>  Gitignore accidentally excluded version catalog</a:t>
+              <a:t>  </a:t>
+            </a:r>
+            <a:r>
+              <a:rPr sz="2000" dirty="0" err="1">
+                <a:solidFill>
+                  <a:srgbClr val="222233"/>
+                </a:solidFill>
+              </a:rPr>
+              <a:t>WeatherKit</a:t>
+            </a:r>
+            <a:r>
+              <a:rPr sz="2000" dirty="0">
+                <a:solidFill>
+                  <a:srgbClr val="222233"/>
+                </a:solidFill>
+              </a:rPr>
+              <a:t> is Apple-only -- had to redirect AI</a:t>
             </a:r>
           </a:p>
           <a:p>
@@ -13131,13 +13250,18 @@
               </a:spcBef>
             </a:pPr>
             <a:r>
-              <a:rPr sz="2000">
+              <a:rPr sz="2000" dirty="0">
                 <a:solidFill>
                   <a:srgbClr val="222233"/>
                 </a:solidFill>
               </a:rPr>
-              <a:t>  WeatherKit is Apple-only -- had to redirect AI</a:t>
-            </a:r>
+              <a:t>  API key &amp; SDK path always set up manually</a:t>
+            </a:r>
+            <a:endParaRPr lang="de-DE" sz="2000" dirty="0">
+              <a:solidFill>
+                <a:srgbClr val="222233"/>
+              </a:solidFill>
+            </a:endParaRPr>
           </a:p>
           <a:p>
             <a:pPr>
@@ -13146,13 +13270,240 @@
               </a:spcBef>
             </a:pPr>
             <a:r>
-              <a:rPr sz="2000">
+              <a:rPr lang="de-DE" sz="2000" dirty="0">
                 <a:solidFill>
                   <a:srgbClr val="222233"/>
                 </a:solidFill>
               </a:rPr>
-              <a:t>  API key &amp; SDK path always set up manually</a:t>
-            </a:r>
+              <a:t> </a:t>
+            </a:r>
+            <a:r>
+              <a:rPr lang="de-DE" sz="2000" dirty="0" err="1">
+                <a:solidFill>
+                  <a:srgbClr val="222233"/>
+                </a:solidFill>
+              </a:rPr>
+              <a:t>Calculation</a:t>
+            </a:r>
+            <a:r>
+              <a:rPr lang="de-DE" sz="2000" dirty="0">
+                <a:solidFill>
+                  <a:srgbClr val="222233"/>
+                </a:solidFill>
+              </a:rPr>
+              <a:t> </a:t>
+            </a:r>
+            <a:r>
+              <a:rPr lang="de-DE" sz="2000" dirty="0" err="1">
+                <a:solidFill>
+                  <a:srgbClr val="222233"/>
+                </a:solidFill>
+              </a:rPr>
+              <a:t>of</a:t>
+            </a:r>
+            <a:r>
+              <a:rPr lang="de-DE" sz="2000" dirty="0">
+                <a:solidFill>
+                  <a:srgbClr val="222233"/>
+                </a:solidFill>
+              </a:rPr>
+              <a:t> C/F and </a:t>
+            </a:r>
+            <a:r>
+              <a:rPr lang="de-DE" sz="2000" dirty="0" err="1">
+                <a:solidFill>
+                  <a:srgbClr val="222233"/>
+                </a:solidFill>
+              </a:rPr>
+              <a:t>rerendering</a:t>
+            </a:r>
+            <a:r>
+              <a:rPr lang="de-DE" sz="2000" dirty="0">
+                <a:solidFill>
+                  <a:srgbClr val="222233"/>
+                </a:solidFill>
+              </a:rPr>
+              <a:t> UI</a:t>
+            </a:r>
+          </a:p>
+          <a:p>
+            <a:pPr>
+              <a:spcBef>
+                <a:spcPts val="2000"/>
+              </a:spcBef>
+            </a:pPr>
+            <a:r>
+              <a:rPr lang="de-DE" sz="2000" dirty="0">
+                <a:solidFill>
+                  <a:srgbClr val="222233"/>
+                </a:solidFill>
+              </a:rPr>
+              <a:t> (</a:t>
+            </a:r>
+            <a:r>
+              <a:rPr lang="de-DE" sz="2000" dirty="0" err="1">
+                <a:solidFill>
+                  <a:srgbClr val="222233"/>
+                </a:solidFill>
+              </a:rPr>
+              <a:t>generation</a:t>
+            </a:r>
+            <a:r>
+              <a:rPr lang="de-DE" sz="2000" dirty="0">
+                <a:solidFill>
+                  <a:srgbClr val="222233"/>
+                </a:solidFill>
+              </a:rPr>
+              <a:t> </a:t>
+            </a:r>
+            <a:r>
+              <a:rPr lang="de-DE" sz="2000" dirty="0" err="1">
+                <a:solidFill>
+                  <a:srgbClr val="222233"/>
+                </a:solidFill>
+              </a:rPr>
+              <a:t>of</a:t>
+            </a:r>
+            <a:r>
+              <a:rPr lang="de-DE" sz="2000" dirty="0">
+                <a:solidFill>
+                  <a:srgbClr val="222233"/>
+                </a:solidFill>
+              </a:rPr>
+              <a:t> </a:t>
+            </a:r>
+            <a:r>
+              <a:rPr lang="de-DE" sz="2000" dirty="0" err="1">
+                <a:solidFill>
+                  <a:srgbClr val="222233"/>
+                </a:solidFill>
+              </a:rPr>
+              <a:t>things</a:t>
+            </a:r>
+            <a:r>
+              <a:rPr lang="de-DE" sz="2000" dirty="0">
+                <a:solidFill>
+                  <a:srgbClr val="222233"/>
+                </a:solidFill>
+              </a:rPr>
+              <a:t> </a:t>
+            </a:r>
+            <a:r>
+              <a:rPr lang="de-DE" sz="2000" dirty="0" err="1">
+                <a:solidFill>
+                  <a:srgbClr val="222233"/>
+                </a:solidFill>
+              </a:rPr>
+              <a:t>that</a:t>
+            </a:r>
+            <a:r>
+              <a:rPr lang="de-DE" sz="2000" dirty="0">
+                <a:solidFill>
+                  <a:srgbClr val="222233"/>
+                </a:solidFill>
+              </a:rPr>
+              <a:t> </a:t>
+            </a:r>
+            <a:r>
+              <a:rPr lang="de-DE" sz="2000" dirty="0" err="1">
+                <a:solidFill>
+                  <a:srgbClr val="222233"/>
+                </a:solidFill>
+              </a:rPr>
+              <a:t>are</a:t>
+            </a:r>
+            <a:r>
+              <a:rPr lang="de-DE" sz="2000" dirty="0">
+                <a:solidFill>
+                  <a:srgbClr val="222233"/>
+                </a:solidFill>
+              </a:rPr>
+              <a:t> </a:t>
+            </a:r>
+            <a:r>
+              <a:rPr lang="de-DE" sz="2000" dirty="0" err="1">
+                <a:solidFill>
+                  <a:srgbClr val="222233"/>
+                </a:solidFill>
+              </a:rPr>
+              <a:t>never</a:t>
+            </a:r>
+            <a:r>
+              <a:rPr lang="de-DE" sz="2000" dirty="0">
+                <a:solidFill>
+                  <a:srgbClr val="222233"/>
+                </a:solidFill>
+              </a:rPr>
+              <a:t> </a:t>
+            </a:r>
+            <a:r>
+              <a:rPr lang="de-DE" sz="2000" dirty="0" err="1">
+                <a:solidFill>
+                  <a:srgbClr val="222233"/>
+                </a:solidFill>
+              </a:rPr>
+              <a:t>used</a:t>
+            </a:r>
+            <a:r>
+              <a:rPr lang="de-DE" sz="2000" dirty="0">
+                <a:solidFill>
+                  <a:srgbClr val="222233"/>
+                </a:solidFill>
+              </a:rPr>
+              <a:t>)</a:t>
+            </a:r>
+          </a:p>
+          <a:p>
+            <a:pPr>
+              <a:spcBef>
+                <a:spcPts val="2000"/>
+              </a:spcBef>
+            </a:pPr>
+            <a:r>
+              <a:rPr lang="de-DE" sz="2000" dirty="0">
+                <a:solidFill>
+                  <a:srgbClr val="222233"/>
+                </a:solidFill>
+              </a:rPr>
+              <a:t> (</a:t>
+            </a:r>
+            <a:r>
+              <a:rPr lang="de-DE" sz="2000" dirty="0" err="1">
+                <a:solidFill>
+                  <a:srgbClr val="222233"/>
+                </a:solidFill>
+              </a:rPr>
+              <a:t>supressing</a:t>
+            </a:r>
+            <a:r>
+              <a:rPr lang="de-DE" sz="2000" dirty="0">
+                <a:solidFill>
+                  <a:srgbClr val="222233"/>
+                </a:solidFill>
+              </a:rPr>
+              <a:t> </a:t>
+            </a:r>
+            <a:r>
+              <a:rPr lang="de-DE" sz="2000" dirty="0" err="1">
+                <a:solidFill>
+                  <a:srgbClr val="222233"/>
+                </a:solidFill>
+              </a:rPr>
+              <a:t>linter</a:t>
+            </a:r>
+            <a:r>
+              <a:rPr lang="de-DE" sz="2000" dirty="0">
+                <a:solidFill>
+                  <a:srgbClr val="222233"/>
+                </a:solidFill>
+              </a:rPr>
+              <a:t>)</a:t>
+            </a:r>
+            <a:endParaRPr sz="2000" dirty="0">
+              <a:solidFill>
+                <a:srgbClr val="222233"/>
+              </a:solidFill>
+            </a:endParaRPr>
           </a:p>
         </p:txBody>
       </p:sp>
